--- a/report-client-decks/06. GGMI_LATAM_June_2026_Performance_Review.pptx
+++ b/report-client-decks/06. GGMI_LATAM_June_2026_Performance_Review.pptx
@@ -8656,7 +8656,7 @@
                           </a:solidFill>
                           <a:latin typeface="Arial"/>
                         </a:rPr>
-                        <a:t>$34,556</a:t>
+                        <a:t>$35,026</a:t>
                       </a:r>
                     </a:p>
                   </a:txBody>
@@ -8748,7 +8748,7 @@
                           </a:solidFill>
                           <a:latin typeface="Arial"/>
                         </a:rPr>
-                        <a:t>$823</a:t>
+                        <a:t>$834</a:t>
                       </a:r>
                     </a:p>
                   </a:txBody>
@@ -8934,7 +8934,7 @@
                           </a:solidFill>
                           <a:latin typeface="Arial"/>
                         </a:rPr>
-                        <a:t>$119,922</a:t>
+                        <a:t>$120,393</a:t>
                       </a:r>
                     </a:p>
                   </a:txBody>
@@ -9229,7 +9229,7 @@
                 </a:solidFill>
                 <a:latin typeface="Arial"/>
               </a:rPr>
-              <a:t>June was the biggest GGMI media month of 2026: $119,922 across four channels, up 56% from May. Search produced 50 submitted applications at a $513 CPA, up from 33 in May, and Azerion held efficiency with 42 applications through a 27% budget increase.</a:t>
+              <a:t>June was the biggest GGMI media month of 2026: $120,393 across four channels, up 53% from May. Search produced 50 submitted applications at a $513 CPA, up from 33 in May, and Azerion held efficiency with 42 applications through a 20% budget increase.</a:t>
             </a:r>
           </a:p>
         </p:txBody>
@@ -16106,7 +16106,7 @@
                 </a:solidFill>
                 <a:latin typeface="Arial"/>
               </a:rPr>
-              <a:t>$34,556</a:t>
+              <a:t>$35,026</a:t>
             </a:r>
           </a:p>
         </p:txBody>
@@ -16141,7 +16141,7 @@
                 </a:solidFill>
                 <a:latin typeface="Arial"/>
               </a:rPr>
-              <a:t>+27% MoM</a:t>
+              <a:t>+20% MoM</a:t>
             </a:r>
           </a:p>
         </p:txBody>
@@ -16913,7 +16913,7 @@
                 </a:solidFill>
                 <a:latin typeface="Arial"/>
               </a:rPr>
-              <a:t>$823 CPA</a:t>
+              <a:t>$834 CPA</a:t>
             </a:r>
           </a:p>
         </p:txBody>
@@ -17299,7 +17299,7 @@
                           </a:solidFill>
                           <a:latin typeface="Arial"/>
                         </a:rPr>
-                        <a:t>$8,996</a:t>
+                        <a:t>$9,118</a:t>
                       </a:r>
                     </a:p>
                   </a:txBody>
@@ -17345,7 +17345,7 @@
                           </a:solidFill>
                           <a:latin typeface="Arial"/>
                         </a:rPr>
-                        <a:t>$818</a:t>
+                        <a:t>$829</a:t>
                       </a:r>
                     </a:p>
                   </a:txBody>
@@ -17392,7 +17392,7 @@
                           </a:solidFill>
                           <a:latin typeface="Arial"/>
                         </a:rPr>
-                        <a:t>$4,069</a:t>
+                        <a:t>$4,124</a:t>
                       </a:r>
                     </a:p>
                   </a:txBody>
@@ -17438,7 +17438,7 @@
                           </a:solidFill>
                           <a:latin typeface="Arial"/>
                         </a:rPr>
-                        <a:t>$407</a:t>
+                        <a:t>$412</a:t>
                       </a:r>
                     </a:p>
                   </a:txBody>
@@ -17485,7 +17485,7 @@
                           </a:solidFill>
                           <a:latin typeface="Arial"/>
                         </a:rPr>
-                        <a:t>$4,164</a:t>
+                        <a:t>$4,221</a:t>
                       </a:r>
                     </a:p>
                   </a:txBody>
@@ -17531,7 +17531,7 @@
                           </a:solidFill>
                           <a:latin typeface="Arial"/>
                         </a:rPr>
-                        <a:t>$595</a:t>
+                        <a:t>$603</a:t>
                       </a:r>
                     </a:p>
                   </a:txBody>
@@ -17578,7 +17578,7 @@
                           </a:solidFill>
                           <a:latin typeface="Arial"/>
                         </a:rPr>
-                        <a:t>$4,927</a:t>
+                        <a:t>$4,994</a:t>
                       </a:r>
                     </a:p>
                   </a:txBody>
@@ -17624,7 +17624,7 @@
                           </a:solidFill>
                           <a:latin typeface="Arial"/>
                         </a:rPr>
-                        <a:t>$704</a:t>
+                        <a:t>$713</a:t>
                       </a:r>
                     </a:p>
                   </a:txBody>
@@ -17671,7 +17671,7 @@
                           </a:solidFill>
                           <a:latin typeface="Arial"/>
                         </a:rPr>
-                        <a:t>$4,154</a:t>
+                        <a:t>$4,211</a:t>
                       </a:r>
                     </a:p>
                   </a:txBody>
@@ -17717,7 +17717,7 @@
                           </a:solidFill>
                           <a:latin typeface="Arial"/>
                         </a:rPr>
-                        <a:t>$1,039</a:t>
+                        <a:t>$1,053</a:t>
                       </a:r>
                     </a:p>
                   </a:txBody>
@@ -17764,7 +17764,7 @@
                           </a:solidFill>
                           <a:latin typeface="Arial"/>
                         </a:rPr>
-                        <a:t>$4,173</a:t>
+                        <a:t>$4,229</a:t>
                       </a:r>
                     </a:p>
                   </a:txBody>
@@ -17810,7 +17810,7 @@
                           </a:solidFill>
                           <a:latin typeface="Arial"/>
                         </a:rPr>
-                        <a:t>$1,391</a:t>
+                        <a:t>$1,410</a:t>
                       </a:r>
                     </a:p>
                   </a:txBody>
@@ -17857,7 +17857,7 @@
                           </a:solidFill>
                           <a:latin typeface="Arial"/>
                         </a:rPr>
-                        <a:t>$4,072</a:t>
+                        <a:t>$4,128</a:t>
                       </a:r>
                     </a:p>
                   </a:txBody>
@@ -18071,7 +18071,7 @@
                 </a:solidFill>
                 <a:latin typeface="Arial"/>
               </a:rPr>
-              <a:t>Applications rose 14% (37 to 42) on a 27% budget increase. The CPA moved $737 to $823, so efficiency roughly held at higher volume.</a:t>
+              <a:t>Applications rose 14% (37 to 42) on a 20% budget increase. The CPA moved $792 to $834, so efficiency roughly held at higher volume.</a:t>
             </a:r>
           </a:p>
           <a:p>
@@ -18103,7 +18103,7 @@
                 </a:solidFill>
                 <a:latin typeface="Arial"/>
               </a:rPr>
-              <a:t>Global Market converted at $407 and Experience carried the most volume. Conversion_Commodities spent $4,072 with no applications and is the first reallocation candidate.</a:t>
+              <a:t>Global Market converted at $412 and Experience carried the most volume. Conversion_Commodities spent $4,128 with no applications and is the first reallocation candidate.</a:t>
             </a:r>
           </a:p>
         </p:txBody>
@@ -18566,7 +18566,7 @@
                 </a:solidFill>
                 <a:latin typeface="Arial"/>
               </a:rPr>
-              <a:t>Second consecutive month of scaled application volume, with efficiency holding within 12% while budget grew 27%.</a:t>
+              <a:t>Second consecutive month of scaled application volume, with efficiency holding within 6% while budget grew 20%.</a:t>
             </a:r>
           </a:p>
           <a:p>
@@ -18772,7 +18772,7 @@
                 </a:solidFill>
                 <a:latin typeface="Arial"/>
               </a:rPr>
-              <a:t>Concentrate budget on the converting ad sets, led by Global Market ($407) and Experience, and reallocate away from Conversion_Commodities ($4,072, zero applications).</a:t>
+              <a:t>Concentrate budget on the converting ad sets, led by Global Market ($412) and Experience, and reallocate away from Conversion_Commodities ($4,128, zero applications).</a:t>
             </a:r>
           </a:p>
           <a:p>

--- a/report-client-decks/06. GGMI_LATAM_June_2026_Performance_Review.pptx
+++ b/report-client-decks/06. GGMI_LATAM_June_2026_Performance_Review.pptx
@@ -17,6 +17,10 @@
     <p:sldId id="265" r:id="rId16"/>
     <p:sldId id="266" r:id="rId17"/>
     <p:sldId id="267" r:id="rId18"/>
+    <p:sldId id="268" r:id="rId19"/>
+    <p:sldId id="269" r:id="rId20"/>
+    <p:sldId id="270" r:id="rId21"/>
+    <p:sldId id="271" r:id="rId22"/>
   </p:sldIdLst>
   <p:sldSz cx="12191695" cy="6858000" type="screen4x3"/>
   <p:notesSz cx="6858000" cy="9144000"/>
@@ -3355,7 +3359,7 @@
                 </a:solidFill>
                 <a:latin typeface="Arial"/>
               </a:rPr>
-              <a:t>June 2026 Performance Review</a:t>
+              <a:t>June 2026 Performance Review  ·  Q3 FY2026 in Review</a:t>
             </a:r>
           </a:p>
         </p:txBody>
@@ -3730,7 +3734,7 @@
                 </a:solidFill>
                 <a:latin typeface="Arial"/>
               </a:rPr>
-              <a:t>10 / 12</a:t>
+              <a:t>10 / 16</a:t>
             </a:r>
           </a:p>
         </p:txBody>
@@ -5855,7 +5859,7 @@
                 </a:solidFill>
                 <a:latin typeface="Arial"/>
               </a:rPr>
-              <a:t>SITE TRAFFIC  ·  GA4 (MEXICO)</a:t>
+              <a:t>Q3 FY2026 IN REVIEW  ·  SPEND</a:t>
             </a:r>
           </a:p>
         </p:txBody>
@@ -5890,7 +5894,7 @@
                 </a:solidFill>
                 <a:latin typeface="Arial"/>
               </a:rPr>
-              <a:t>Traffic recovered in June. Media bought the recovery.</a:t>
+              <a:t>The program scaled every month of the quarter.</a:t>
             </a:r>
           </a:p>
         </p:txBody>
@@ -6004,7 +6008,3842 @@
                 </a:solidFill>
                 <a:latin typeface="Arial"/>
               </a:rPr>
-              <a:t>11 / 12</a:t>
+              <a:t>11 / 16</a:t>
+            </a:r>
+          </a:p>
+        </p:txBody>
+      </p:sp>
+      <p:graphicFrame>
+        <p:nvGraphicFramePr>
+          <p:cNvPr id="10" name="Table 9"/>
+          <p:cNvGraphicFramePr>
+            <a:graphicFrameLocks noGrp="1"/>
+          </p:cNvGraphicFramePr>
+          <p:nvPr/>
+        </p:nvGraphicFramePr>
+        <p:xfrm>
+          <a:off x="457200" y="1737360"/>
+          <a:ext cx="6035040" cy="2194560"/>
+        </p:xfrm>
+        <a:graphic>
+          <a:graphicData uri="http://schemas.openxmlformats.org/drawingml/2006/table">
+            <a:tbl>
+              <a:tblPr>
+                <a:tableStyleId>{5C22544A-7EE6-4342-B048-85BDC9FD1C3A}</a:tableStyleId>
+              </a:tblPr>
+              <a:tblGrid>
+                <a:gridCol w="1737360"/>
+                <a:gridCol w="1051560"/>
+                <a:gridCol w="1051560"/>
+                <a:gridCol w="1097280"/>
+                <a:gridCol w="1097280"/>
+              </a:tblGrid>
+              <a:tr h="365760">
+                <a:tc>
+                  <a:txBody>
+                    <a:bodyPr/>
+                    <a:lstStyle/>
+                    <a:p>
+                      <a:r>
+                        <a:rPr sz="850" b="1">
+                          <a:solidFill>
+                            <a:srgbClr val="FFFFFF"/>
+                          </a:solidFill>
+                          <a:latin typeface="Arial"/>
+                        </a:rPr>
+                        <a:t>Channel</a:t>
+                      </a:r>
+                    </a:p>
+                  </a:txBody>
+                  <a:tcPr marL="54864" marR="54864" marT="27432" marB="27432">
+                    <a:solidFill>
+                      <a:srgbClr val="3B5998"/>
+                    </a:solidFill>
+                  </a:tcPr>
+                </a:tc>
+                <a:tc>
+                  <a:txBody>
+                    <a:bodyPr/>
+                    <a:lstStyle/>
+                    <a:p>
+                      <a:pPr algn="r"/>
+                      <a:r>
+                        <a:rPr sz="850" b="1">
+                          <a:solidFill>
+                            <a:srgbClr val="FFFFFF"/>
+                          </a:solidFill>
+                          <a:latin typeface="Arial"/>
+                        </a:rPr>
+                        <a:t>Apr</a:t>
+                      </a:r>
+                    </a:p>
+                  </a:txBody>
+                  <a:tcPr marL="54864" marR="54864" marT="27432" marB="27432">
+                    <a:solidFill>
+                      <a:srgbClr val="3B5998"/>
+                    </a:solidFill>
+                  </a:tcPr>
+                </a:tc>
+                <a:tc>
+                  <a:txBody>
+                    <a:bodyPr/>
+                    <a:lstStyle/>
+                    <a:p>
+                      <a:pPr algn="r"/>
+                      <a:r>
+                        <a:rPr sz="850" b="1">
+                          <a:solidFill>
+                            <a:srgbClr val="FFFFFF"/>
+                          </a:solidFill>
+                          <a:latin typeface="Arial"/>
+                        </a:rPr>
+                        <a:t>May</a:t>
+                      </a:r>
+                    </a:p>
+                  </a:txBody>
+                  <a:tcPr marL="54864" marR="54864" marT="27432" marB="27432">
+                    <a:solidFill>
+                      <a:srgbClr val="3B5998"/>
+                    </a:solidFill>
+                  </a:tcPr>
+                </a:tc>
+                <a:tc>
+                  <a:txBody>
+                    <a:bodyPr/>
+                    <a:lstStyle/>
+                    <a:p>
+                      <a:pPr algn="r"/>
+                      <a:r>
+                        <a:rPr sz="850" b="1">
+                          <a:solidFill>
+                            <a:srgbClr val="FFFFFF"/>
+                          </a:solidFill>
+                          <a:latin typeface="Arial"/>
+                        </a:rPr>
+                        <a:t>Jun</a:t>
+                      </a:r>
+                    </a:p>
+                  </a:txBody>
+                  <a:tcPr marL="54864" marR="54864" marT="27432" marB="27432">
+                    <a:solidFill>
+                      <a:srgbClr val="3B5998"/>
+                    </a:solidFill>
+                  </a:tcPr>
+                </a:tc>
+                <a:tc>
+                  <a:txBody>
+                    <a:bodyPr/>
+                    <a:lstStyle/>
+                    <a:p>
+                      <a:pPr algn="r"/>
+                      <a:r>
+                        <a:rPr sz="850" b="1">
+                          <a:solidFill>
+                            <a:srgbClr val="FFFFFF"/>
+                          </a:solidFill>
+                          <a:latin typeface="Arial"/>
+                        </a:rPr>
+                        <a:t>Q3</a:t>
+                      </a:r>
+                    </a:p>
+                  </a:txBody>
+                  <a:tcPr marL="54864" marR="54864" marT="27432" marB="27432">
+                    <a:solidFill>
+                      <a:srgbClr val="3B5998"/>
+                    </a:solidFill>
+                  </a:tcPr>
+                </a:tc>
+              </a:tr>
+              <a:tr h="365760">
+                <a:tc>
+                  <a:txBody>
+                    <a:bodyPr/>
+                    <a:lstStyle/>
+                    <a:p>
+                      <a:r>
+                        <a:rPr sz="850" b="1">
+                          <a:solidFill>
+                            <a:srgbClr val="32373E"/>
+                          </a:solidFill>
+                          <a:latin typeface="Arial"/>
+                        </a:rPr>
+                        <a:t>Bing Ads</a:t>
+                      </a:r>
+                    </a:p>
+                  </a:txBody>
+                  <a:tcPr marL="54864" marR="54864" marT="27432" marB="27432">
+                    <a:solidFill>
+                      <a:srgbClr val="FFFFFF"/>
+                    </a:solidFill>
+                  </a:tcPr>
+                </a:tc>
+                <a:tc>
+                  <a:txBody>
+                    <a:bodyPr/>
+                    <a:lstStyle/>
+                    <a:p>
+                      <a:pPr algn="r"/>
+                      <a:r>
+                        <a:rPr sz="850" b="0">
+                          <a:solidFill>
+                            <a:srgbClr val="32373E"/>
+                          </a:solidFill>
+                          <a:latin typeface="Arial"/>
+                        </a:rPr>
+                        <a:t>$15,289</a:t>
+                      </a:r>
+                    </a:p>
+                  </a:txBody>
+                  <a:tcPr marL="54864" marR="54864" marT="27432" marB="27432">
+                    <a:solidFill>
+                      <a:srgbClr val="FFFFFF"/>
+                    </a:solidFill>
+                  </a:tcPr>
+                </a:tc>
+                <a:tc>
+                  <a:txBody>
+                    <a:bodyPr/>
+                    <a:lstStyle/>
+                    <a:p>
+                      <a:pPr algn="r"/>
+                      <a:r>
+                        <a:rPr sz="850" b="0">
+                          <a:solidFill>
+                            <a:srgbClr val="32373E"/>
+                          </a:solidFill>
+                          <a:latin typeface="Arial"/>
+                        </a:rPr>
+                        <a:t>$15,972</a:t>
+                      </a:r>
+                    </a:p>
+                  </a:txBody>
+                  <a:tcPr marL="54864" marR="54864" marT="27432" marB="27432">
+                    <a:solidFill>
+                      <a:srgbClr val="FFFFFF"/>
+                    </a:solidFill>
+                  </a:tcPr>
+                </a:tc>
+                <a:tc>
+                  <a:txBody>
+                    <a:bodyPr/>
+                    <a:lstStyle/>
+                    <a:p>
+                      <a:pPr algn="r"/>
+                      <a:r>
+                        <a:rPr sz="850" b="0">
+                          <a:solidFill>
+                            <a:srgbClr val="32373E"/>
+                          </a:solidFill>
+                          <a:latin typeface="Arial"/>
+                        </a:rPr>
+                        <a:t>$25,659</a:t>
+                      </a:r>
+                    </a:p>
+                  </a:txBody>
+                  <a:tcPr marL="54864" marR="54864" marT="27432" marB="27432">
+                    <a:solidFill>
+                      <a:srgbClr val="FFFFFF"/>
+                    </a:solidFill>
+                  </a:tcPr>
+                </a:tc>
+                <a:tc>
+                  <a:txBody>
+                    <a:bodyPr/>
+                    <a:lstStyle/>
+                    <a:p>
+                      <a:pPr algn="r"/>
+                      <a:r>
+                        <a:rPr sz="850" b="0">
+                          <a:solidFill>
+                            <a:srgbClr val="32373E"/>
+                          </a:solidFill>
+                          <a:latin typeface="Arial"/>
+                        </a:rPr>
+                        <a:t>$56,920</a:t>
+                      </a:r>
+                    </a:p>
+                  </a:txBody>
+                  <a:tcPr marL="54864" marR="54864" marT="27432" marB="27432">
+                    <a:solidFill>
+                      <a:srgbClr val="FFFFFF"/>
+                    </a:solidFill>
+                  </a:tcPr>
+                </a:tc>
+              </a:tr>
+              <a:tr h="365760">
+                <a:tc>
+                  <a:txBody>
+                    <a:bodyPr/>
+                    <a:lstStyle/>
+                    <a:p>
+                      <a:r>
+                        <a:rPr sz="850" b="1">
+                          <a:solidFill>
+                            <a:srgbClr val="32373E"/>
+                          </a:solidFill>
+                          <a:latin typeface="Arial"/>
+                        </a:rPr>
+                        <a:t>Meta</a:t>
+                      </a:r>
+                    </a:p>
+                  </a:txBody>
+                  <a:tcPr marL="54864" marR="54864" marT="27432" marB="27432">
+                    <a:solidFill>
+                      <a:srgbClr val="F3F3F3"/>
+                    </a:solidFill>
+                  </a:tcPr>
+                </a:tc>
+                <a:tc>
+                  <a:txBody>
+                    <a:bodyPr/>
+                    <a:lstStyle/>
+                    <a:p>
+                      <a:pPr algn="r"/>
+                      <a:r>
+                        <a:rPr sz="850" b="0">
+                          <a:solidFill>
+                            <a:srgbClr val="32373E"/>
+                          </a:solidFill>
+                          <a:latin typeface="Arial"/>
+                        </a:rPr>
+                        <a:t>$5,224</a:t>
+                      </a:r>
+                    </a:p>
+                  </a:txBody>
+                  <a:tcPr marL="54864" marR="54864" marT="27432" marB="27432">
+                    <a:solidFill>
+                      <a:srgbClr val="F3F3F3"/>
+                    </a:solidFill>
+                  </a:tcPr>
+                </a:tc>
+                <a:tc>
+                  <a:txBody>
+                    <a:bodyPr/>
+                    <a:lstStyle/>
+                    <a:p>
+                      <a:pPr algn="r"/>
+                      <a:r>
+                        <a:rPr sz="850" b="0">
+                          <a:solidFill>
+                            <a:srgbClr val="32373E"/>
+                          </a:solidFill>
+                          <a:latin typeface="Arial"/>
+                        </a:rPr>
+                        <a:t>$6,626</a:t>
+                      </a:r>
+                    </a:p>
+                  </a:txBody>
+                  <a:tcPr marL="54864" marR="54864" marT="27432" marB="27432">
+                    <a:solidFill>
+                      <a:srgbClr val="F3F3F3"/>
+                    </a:solidFill>
+                  </a:tcPr>
+                </a:tc>
+                <a:tc>
+                  <a:txBody>
+                    <a:bodyPr/>
+                    <a:lstStyle/>
+                    <a:p>
+                      <a:pPr algn="r"/>
+                      <a:r>
+                        <a:rPr sz="850" b="0">
+                          <a:solidFill>
+                            <a:srgbClr val="32373E"/>
+                          </a:solidFill>
+                          <a:latin typeface="Arial"/>
+                        </a:rPr>
+                        <a:t>$25,924</a:t>
+                      </a:r>
+                    </a:p>
+                  </a:txBody>
+                  <a:tcPr marL="54864" marR="54864" marT="27432" marB="27432">
+                    <a:solidFill>
+                      <a:srgbClr val="F3F3F3"/>
+                    </a:solidFill>
+                  </a:tcPr>
+                </a:tc>
+                <a:tc>
+                  <a:txBody>
+                    <a:bodyPr/>
+                    <a:lstStyle/>
+                    <a:p>
+                      <a:pPr algn="r"/>
+                      <a:r>
+                        <a:rPr sz="850" b="0">
+                          <a:solidFill>
+                            <a:srgbClr val="32373E"/>
+                          </a:solidFill>
+                          <a:latin typeface="Arial"/>
+                        </a:rPr>
+                        <a:t>$37,774</a:t>
+                      </a:r>
+                    </a:p>
+                  </a:txBody>
+                  <a:tcPr marL="54864" marR="54864" marT="27432" marB="27432">
+                    <a:solidFill>
+                      <a:srgbClr val="F3F3F3"/>
+                    </a:solidFill>
+                  </a:tcPr>
+                </a:tc>
+              </a:tr>
+              <a:tr h="365760">
+                <a:tc>
+                  <a:txBody>
+                    <a:bodyPr/>
+                    <a:lstStyle/>
+                    <a:p>
+                      <a:r>
+                        <a:rPr sz="850" b="1">
+                          <a:solidFill>
+                            <a:srgbClr val="32373E"/>
+                          </a:solidFill>
+                          <a:latin typeface="Arial"/>
+                        </a:rPr>
+                        <a:t>Quantcast</a:t>
+                      </a:r>
+                    </a:p>
+                  </a:txBody>
+                  <a:tcPr marL="54864" marR="54864" marT="27432" marB="27432">
+                    <a:solidFill>
+                      <a:srgbClr val="FFFFFF"/>
+                    </a:solidFill>
+                  </a:tcPr>
+                </a:tc>
+                <a:tc>
+                  <a:txBody>
+                    <a:bodyPr/>
+                    <a:lstStyle/>
+                    <a:p>
+                      <a:pPr algn="r"/>
+                      <a:r>
+                        <a:rPr sz="850" b="0">
+                          <a:solidFill>
+                            <a:srgbClr val="32373E"/>
+                          </a:solidFill>
+                          <a:latin typeface="Arial"/>
+                        </a:rPr>
+                        <a:t>$15,005</a:t>
+                      </a:r>
+                    </a:p>
+                  </a:txBody>
+                  <a:tcPr marL="54864" marR="54864" marT="27432" marB="27432">
+                    <a:solidFill>
+                      <a:srgbClr val="FFFFFF"/>
+                    </a:solidFill>
+                  </a:tcPr>
+                </a:tc>
+                <a:tc>
+                  <a:txBody>
+                    <a:bodyPr/>
+                    <a:lstStyle/>
+                    <a:p>
+                      <a:pPr algn="r"/>
+                      <a:r>
+                        <a:rPr sz="850" b="0">
+                          <a:solidFill>
+                            <a:srgbClr val="32373E"/>
+                          </a:solidFill>
+                          <a:latin typeface="Arial"/>
+                        </a:rPr>
+                        <a:t>$26,890</a:t>
+                      </a:r>
+                    </a:p>
+                  </a:txBody>
+                  <a:tcPr marL="54864" marR="54864" marT="27432" marB="27432">
+                    <a:solidFill>
+                      <a:srgbClr val="FFFFFF"/>
+                    </a:solidFill>
+                  </a:tcPr>
+                </a:tc>
+                <a:tc>
+                  <a:txBody>
+                    <a:bodyPr/>
+                    <a:lstStyle/>
+                    <a:p>
+                      <a:pPr algn="r"/>
+                      <a:r>
+                        <a:rPr sz="850" b="0">
+                          <a:solidFill>
+                            <a:srgbClr val="32373E"/>
+                          </a:solidFill>
+                          <a:latin typeface="Arial"/>
+                        </a:rPr>
+                        <a:t>$33,784</a:t>
+                      </a:r>
+                    </a:p>
+                  </a:txBody>
+                  <a:tcPr marL="54864" marR="54864" marT="27432" marB="27432">
+                    <a:solidFill>
+                      <a:srgbClr val="FFFFFF"/>
+                    </a:solidFill>
+                  </a:tcPr>
+                </a:tc>
+                <a:tc>
+                  <a:txBody>
+                    <a:bodyPr/>
+                    <a:lstStyle/>
+                    <a:p>
+                      <a:pPr algn="r"/>
+                      <a:r>
+                        <a:rPr sz="850" b="0">
+                          <a:solidFill>
+                            <a:srgbClr val="32373E"/>
+                          </a:solidFill>
+                          <a:latin typeface="Arial"/>
+                        </a:rPr>
+                        <a:t>$75,678</a:t>
+                      </a:r>
+                    </a:p>
+                  </a:txBody>
+                  <a:tcPr marL="54864" marR="54864" marT="27432" marB="27432">
+                    <a:solidFill>
+                      <a:srgbClr val="FFFFFF"/>
+                    </a:solidFill>
+                  </a:tcPr>
+                </a:tc>
+              </a:tr>
+              <a:tr h="365760">
+                <a:tc>
+                  <a:txBody>
+                    <a:bodyPr/>
+                    <a:lstStyle/>
+                    <a:p>
+                      <a:r>
+                        <a:rPr sz="850" b="1">
+                          <a:solidFill>
+                            <a:srgbClr val="32373E"/>
+                          </a:solidFill>
+                          <a:latin typeface="Arial"/>
+                        </a:rPr>
+                        <a:t>Azerion</a:t>
+                      </a:r>
+                    </a:p>
+                  </a:txBody>
+                  <a:tcPr marL="54864" marR="54864" marT="27432" marB="27432">
+                    <a:solidFill>
+                      <a:srgbClr val="F3F3F3"/>
+                    </a:solidFill>
+                  </a:tcPr>
+                </a:tc>
+                <a:tc>
+                  <a:txBody>
+                    <a:bodyPr/>
+                    <a:lstStyle/>
+                    <a:p>
+                      <a:pPr algn="r"/>
+                      <a:r>
+                        <a:rPr sz="850" b="0">
+                          <a:solidFill>
+                            <a:srgbClr val="32373E"/>
+                          </a:solidFill>
+                          <a:latin typeface="Arial"/>
+                        </a:rPr>
+                        <a:t>$10,777</a:t>
+                      </a:r>
+                    </a:p>
+                  </a:txBody>
+                  <a:tcPr marL="54864" marR="54864" marT="27432" marB="27432">
+                    <a:solidFill>
+                      <a:srgbClr val="F3F3F3"/>
+                    </a:solidFill>
+                  </a:tcPr>
+                </a:tc>
+                <a:tc>
+                  <a:txBody>
+                    <a:bodyPr/>
+                    <a:lstStyle/>
+                    <a:p>
+                      <a:pPr algn="r"/>
+                      <a:r>
+                        <a:rPr sz="850" b="0">
+                          <a:solidFill>
+                            <a:srgbClr val="32373E"/>
+                          </a:solidFill>
+                          <a:latin typeface="Arial"/>
+                        </a:rPr>
+                        <a:t>$29,302</a:t>
+                      </a:r>
+                    </a:p>
+                  </a:txBody>
+                  <a:tcPr marL="54864" marR="54864" marT="27432" marB="27432">
+                    <a:solidFill>
+                      <a:srgbClr val="F3F3F3"/>
+                    </a:solidFill>
+                  </a:tcPr>
+                </a:tc>
+                <a:tc>
+                  <a:txBody>
+                    <a:bodyPr/>
+                    <a:lstStyle/>
+                    <a:p>
+                      <a:pPr algn="r"/>
+                      <a:r>
+                        <a:rPr sz="850" b="0">
+                          <a:solidFill>
+                            <a:srgbClr val="32373E"/>
+                          </a:solidFill>
+                          <a:latin typeface="Arial"/>
+                        </a:rPr>
+                        <a:t>$35,026</a:t>
+                      </a:r>
+                    </a:p>
+                  </a:txBody>
+                  <a:tcPr marL="54864" marR="54864" marT="27432" marB="27432">
+                    <a:solidFill>
+                      <a:srgbClr val="F3F3F3"/>
+                    </a:solidFill>
+                  </a:tcPr>
+                </a:tc>
+                <a:tc>
+                  <a:txBody>
+                    <a:bodyPr/>
+                    <a:lstStyle/>
+                    <a:p>
+                      <a:pPr algn="r"/>
+                      <a:r>
+                        <a:rPr sz="850" b="0">
+                          <a:solidFill>
+                            <a:srgbClr val="32373E"/>
+                          </a:solidFill>
+                          <a:latin typeface="Arial"/>
+                        </a:rPr>
+                        <a:t>$75,105</a:t>
+                      </a:r>
+                    </a:p>
+                  </a:txBody>
+                  <a:tcPr marL="54864" marR="54864" marT="27432" marB="27432">
+                    <a:solidFill>
+                      <a:srgbClr val="F3F3F3"/>
+                    </a:solidFill>
+                  </a:tcPr>
+                </a:tc>
+              </a:tr>
+              <a:tr h="365760">
+                <a:tc>
+                  <a:txBody>
+                    <a:bodyPr/>
+                    <a:lstStyle/>
+                    <a:p>
+                      <a:r>
+                        <a:rPr sz="850" b="1">
+                          <a:solidFill>
+                            <a:srgbClr val="32373E"/>
+                          </a:solidFill>
+                          <a:latin typeface="Arial"/>
+                        </a:rPr>
+                        <a:t>Total</a:t>
+                      </a:r>
+                    </a:p>
+                  </a:txBody>
+                  <a:tcPr marL="54864" marR="54864" marT="27432" marB="27432">
+                    <a:solidFill>
+                      <a:srgbClr val="F3F3F3"/>
+                    </a:solidFill>
+                  </a:tcPr>
+                </a:tc>
+                <a:tc>
+                  <a:txBody>
+                    <a:bodyPr/>
+                    <a:lstStyle/>
+                    <a:p>
+                      <a:pPr algn="r"/>
+                      <a:r>
+                        <a:rPr sz="850" b="1">
+                          <a:solidFill>
+                            <a:srgbClr val="32373E"/>
+                          </a:solidFill>
+                          <a:latin typeface="Arial"/>
+                        </a:rPr>
+                        <a:t>$46,294</a:t>
+                      </a:r>
+                    </a:p>
+                  </a:txBody>
+                  <a:tcPr marL="54864" marR="54864" marT="27432" marB="27432">
+                    <a:solidFill>
+                      <a:srgbClr val="F3F3F3"/>
+                    </a:solidFill>
+                  </a:tcPr>
+                </a:tc>
+                <a:tc>
+                  <a:txBody>
+                    <a:bodyPr/>
+                    <a:lstStyle/>
+                    <a:p>
+                      <a:pPr algn="r"/>
+                      <a:r>
+                        <a:rPr sz="850" b="1">
+                          <a:solidFill>
+                            <a:srgbClr val="32373E"/>
+                          </a:solidFill>
+                          <a:latin typeface="Arial"/>
+                        </a:rPr>
+                        <a:t>$78,790</a:t>
+                      </a:r>
+                    </a:p>
+                  </a:txBody>
+                  <a:tcPr marL="54864" marR="54864" marT="27432" marB="27432">
+                    <a:solidFill>
+                      <a:srgbClr val="F3F3F3"/>
+                    </a:solidFill>
+                  </a:tcPr>
+                </a:tc>
+                <a:tc>
+                  <a:txBody>
+                    <a:bodyPr/>
+                    <a:lstStyle/>
+                    <a:p>
+                      <a:pPr algn="r"/>
+                      <a:r>
+                        <a:rPr sz="850" b="1">
+                          <a:solidFill>
+                            <a:srgbClr val="32373E"/>
+                          </a:solidFill>
+                          <a:latin typeface="Arial"/>
+                        </a:rPr>
+                        <a:t>$120,393</a:t>
+                      </a:r>
+                    </a:p>
+                  </a:txBody>
+                  <a:tcPr marL="54864" marR="54864" marT="27432" marB="27432">
+                    <a:solidFill>
+                      <a:srgbClr val="F3F3F3"/>
+                    </a:solidFill>
+                  </a:tcPr>
+                </a:tc>
+                <a:tc>
+                  <a:txBody>
+                    <a:bodyPr/>
+                    <a:lstStyle/>
+                    <a:p>
+                      <a:pPr algn="r"/>
+                      <a:r>
+                        <a:rPr sz="850" b="1">
+                          <a:solidFill>
+                            <a:srgbClr val="32373E"/>
+                          </a:solidFill>
+                          <a:latin typeface="Arial"/>
+                        </a:rPr>
+                        <a:t>$245,477</a:t>
+                      </a:r>
+                    </a:p>
+                  </a:txBody>
+                  <a:tcPr marL="54864" marR="54864" marT="27432" marB="27432">
+                    <a:solidFill>
+                      <a:srgbClr val="F3F3F3"/>
+                    </a:solidFill>
+                  </a:tcPr>
+                </a:tc>
+              </a:tr>
+            </a:tbl>
+          </a:graphicData>
+        </a:graphic>
+      </p:graphicFrame>
+      <p:sp>
+        <p:nvSpPr>
+          <p:cNvPr id="11" name="TextBox 10"/>
+          <p:cNvSpPr txBox="1"/>
+          <p:nvPr/>
+        </p:nvSpPr>
+        <p:spPr>
+          <a:xfrm>
+            <a:off x="457200" y="4114800"/>
+            <a:ext cx="6035040" cy="822960"/>
+          </a:xfrm>
+          <a:prstGeom prst="rect">
+            <a:avLst/>
+          </a:prstGeom>
+          <a:noFill/>
+        </p:spPr>
+        <p:txBody>
+          <a:bodyPr wrap="square" anchor="t" lIns="0" rIns="0" tIns="0" bIns="0">
+            <a:spAutoFit/>
+          </a:bodyPr>
+          <a:lstStyle/>
+          <a:p>
+            <a:pPr algn="l"/>
+            <a:r>
+              <a:rPr sz="950" b="0">
+                <a:solidFill>
+                  <a:srgbClr val="32373E"/>
+                </a:solidFill>
+                <a:latin typeface="Arial"/>
+              </a:rPr>
+              <a:t>Month-over-month growth: +70% into May, +53% into June. June ran at 2.6x the April level.</a:t>
+            </a:r>
+          </a:p>
+        </p:txBody>
+      </p:sp>
+      <p:sp>
+        <p:nvSpPr>
+          <p:cNvPr id="12" name="Rectangle 11"/>
+          <p:cNvSpPr/>
+          <p:nvPr/>
+        </p:nvSpPr>
+        <p:spPr>
+          <a:xfrm>
+            <a:off x="6858000" y="1737360"/>
+            <a:ext cx="4846320" cy="4572000"/>
+          </a:xfrm>
+          <a:prstGeom prst="rect">
+            <a:avLst/>
+          </a:prstGeom>
+          <a:solidFill>
+            <a:srgbClr val="F3F3F3"/>
+          </a:solidFill>
+          <a:ln>
+            <a:noFill/>
+          </a:ln>
+          <a:effectLst/>
+        </p:spPr>
+        <p:style>
+          <a:lnRef idx="1">
+            <a:schemeClr val="accent1"/>
+          </a:lnRef>
+          <a:fillRef idx="3">
+            <a:schemeClr val="accent1"/>
+          </a:fillRef>
+          <a:effectRef idx="2">
+            <a:schemeClr val="accent1"/>
+          </a:effectRef>
+          <a:fontRef idx="minor">
+            <a:schemeClr val="lt1"/>
+          </a:fontRef>
+        </p:style>
+        <p:txBody>
+          <a:bodyPr rtlCol="0" anchor="ctr"/>
+          <a:lstStyle/>
+          <a:p>
+            <a:pPr algn="ctr"/>
+          </a:p>
+        </p:txBody>
+      </p:sp>
+      <p:sp>
+        <p:nvSpPr>
+          <p:cNvPr id="13" name="Rectangle 12"/>
+          <p:cNvSpPr/>
+          <p:nvPr/>
+        </p:nvSpPr>
+        <p:spPr>
+          <a:xfrm>
+            <a:off x="6858000" y="1737360"/>
+            <a:ext cx="4846320" cy="91440"/>
+          </a:xfrm>
+          <a:prstGeom prst="rect">
+            <a:avLst/>
+          </a:prstGeom>
+          <a:solidFill>
+            <a:srgbClr val="3B5998"/>
+          </a:solidFill>
+          <a:ln>
+            <a:noFill/>
+          </a:ln>
+          <a:effectLst/>
+        </p:spPr>
+        <p:style>
+          <a:lnRef idx="1">
+            <a:schemeClr val="accent1"/>
+          </a:lnRef>
+          <a:fillRef idx="3">
+            <a:schemeClr val="accent1"/>
+          </a:fillRef>
+          <a:effectRef idx="2">
+            <a:schemeClr val="accent1"/>
+          </a:effectRef>
+          <a:fontRef idx="minor">
+            <a:schemeClr val="lt1"/>
+          </a:fontRef>
+        </p:style>
+        <p:txBody>
+          <a:bodyPr rtlCol="0" anchor="ctr"/>
+          <a:lstStyle/>
+          <a:p>
+            <a:pPr algn="ctr"/>
+          </a:p>
+        </p:txBody>
+      </p:sp>
+      <p:sp>
+        <p:nvSpPr>
+          <p:cNvPr id="14" name="TextBox 13"/>
+          <p:cNvSpPr txBox="1"/>
+          <p:nvPr/>
+        </p:nvSpPr>
+        <p:spPr>
+          <a:xfrm>
+            <a:off x="7040880" y="1920240"/>
+            <a:ext cx="4480559" cy="274320"/>
+          </a:xfrm>
+          <a:prstGeom prst="rect">
+            <a:avLst/>
+          </a:prstGeom>
+          <a:noFill/>
+        </p:spPr>
+        <p:txBody>
+          <a:bodyPr wrap="square" anchor="t" lIns="0" rIns="0" tIns="0" bIns="0">
+            <a:spAutoFit/>
+          </a:bodyPr>
+          <a:lstStyle/>
+          <a:p>
+            <a:pPr algn="l"/>
+            <a:r>
+              <a:rPr sz="1000" b="1">
+                <a:solidFill>
+                  <a:srgbClr val="3B5998"/>
+                </a:solidFill>
+                <a:latin typeface="Arial"/>
+              </a:rPr>
+              <a:t>READ</a:t>
+            </a:r>
+          </a:p>
+        </p:txBody>
+      </p:sp>
+      <p:sp>
+        <p:nvSpPr>
+          <p:cNvPr id="15" name="TextBox 14"/>
+          <p:cNvSpPr txBox="1"/>
+          <p:nvPr/>
+        </p:nvSpPr>
+        <p:spPr>
+          <a:xfrm>
+            <a:off x="7040880" y="2240280"/>
+            <a:ext cx="4480559" cy="3886200"/>
+          </a:xfrm>
+          <a:prstGeom prst="rect">
+            <a:avLst/>
+          </a:prstGeom>
+          <a:noFill/>
+        </p:spPr>
+        <p:txBody>
+          <a:bodyPr wrap="square" anchor="t" lIns="0" rIns="0" tIns="0" bIns="0">
+            <a:spAutoFit/>
+          </a:bodyPr>
+          <a:lstStyle/>
+          <a:p>
+            <a:pPr algn="l"/>
+            <a:r>
+              <a:rPr sz="950" b="0">
+                <a:solidFill>
+                  <a:srgbClr val="32373E"/>
+                </a:solidFill>
+                <a:latin typeface="Arial"/>
+              </a:rPr>
+              <a:t>Q3 closed at $245,477 in working media, approximately 24% of the FY2026 budget.</a:t>
+            </a:r>
+          </a:p>
+          <a:p>
+            <a:pPr algn="l">
+              <a:spcBef>
+                <a:spcPts val="600"/>
+              </a:spcBef>
+            </a:pPr>
+            <a:r>
+              <a:rPr sz="950" b="0">
+                <a:solidFill>
+                  <a:srgbClr val="32373E"/>
+                </a:solidFill>
+                <a:latin typeface="Arial"/>
+              </a:rPr>
+              <a:t>The mix rebalanced as the program scaled. April leaned on search and display; June is a balanced four-channel program with no channel above 29% of spend.</a:t>
+            </a:r>
+          </a:p>
+          <a:p>
+            <a:pPr algn="l">
+              <a:spcBef>
+                <a:spcPts val="600"/>
+              </a:spcBef>
+            </a:pPr>
+            <a:r>
+              <a:rPr sz="950" b="0">
+                <a:solidFill>
+                  <a:srgbClr val="32373E"/>
+                </a:solidFill>
+                <a:latin typeface="Arial"/>
+              </a:rPr>
+              <a:t>Every channel grew while holding or improving its efficiency where we can measure it, which is what earns the next stage of scale.</a:t>
+            </a:r>
+          </a:p>
+        </p:txBody>
+      </p:sp>
+    </p:spTree>
+  </p:cSld>
+  <p:clrMapOvr>
+    <a:masterClrMapping/>
+  </p:clrMapOvr>
+</p:sld>
+</file>
+
+<file path=ppt/slides/slide12.xml><?xml version="1.0" encoding="utf-8"?>
+<p:sld xmlns:a="http://schemas.openxmlformats.org/drawingml/2006/main" xmlns:p="http://schemas.openxmlformats.org/presentationml/2006/main" xmlns:r="http://schemas.openxmlformats.org/officeDocument/2006/relationships">
+  <p:cSld>
+    <p:spTree>
+      <p:nvGrpSpPr>
+        <p:cNvPr id="1" name=""/>
+        <p:cNvGrpSpPr/>
+        <p:nvPr/>
+      </p:nvGrpSpPr>
+      <p:grpSpPr/>
+      <p:sp>
+        <p:nvSpPr>
+          <p:cNvPr id="2" name="Rectangle 1"/>
+          <p:cNvSpPr/>
+          <p:nvPr/>
+        </p:nvSpPr>
+        <p:spPr>
+          <a:xfrm>
+            <a:off x="0" y="0"/>
+            <a:ext cx="12191695" cy="457200"/>
+          </a:xfrm>
+          <a:prstGeom prst="rect">
+            <a:avLst/>
+          </a:prstGeom>
+          <a:solidFill>
+            <a:srgbClr val="1A2A3A"/>
+          </a:solidFill>
+          <a:ln>
+            <a:noFill/>
+          </a:ln>
+          <a:effectLst/>
+        </p:spPr>
+        <p:style>
+          <a:lnRef idx="1">
+            <a:schemeClr val="accent1"/>
+          </a:lnRef>
+          <a:fillRef idx="3">
+            <a:schemeClr val="accent1"/>
+          </a:fillRef>
+          <a:effectRef idx="2">
+            <a:schemeClr val="accent1"/>
+          </a:effectRef>
+          <a:fontRef idx="minor">
+            <a:schemeClr val="lt1"/>
+          </a:fontRef>
+        </p:style>
+        <p:txBody>
+          <a:bodyPr rtlCol="0" anchor="ctr"/>
+          <a:lstStyle/>
+          <a:p>
+            <a:pPr algn="ctr"/>
+          </a:p>
+        </p:txBody>
+      </p:sp>
+      <p:sp>
+        <p:nvSpPr>
+          <p:cNvPr id="3" name="TextBox 2"/>
+          <p:cNvSpPr txBox="1"/>
+          <p:nvPr/>
+        </p:nvSpPr>
+        <p:spPr>
+          <a:xfrm>
+            <a:off x="457200" y="91440"/>
+            <a:ext cx="8229600" cy="274320"/>
+          </a:xfrm>
+          <a:prstGeom prst="rect">
+            <a:avLst/>
+          </a:prstGeom>
+          <a:noFill/>
+        </p:spPr>
+        <p:txBody>
+          <a:bodyPr wrap="square" anchor="t" lIns="0" rIns="0" tIns="0" bIns="0">
+            <a:spAutoFit/>
+          </a:bodyPr>
+          <a:lstStyle/>
+          <a:p>
+            <a:pPr algn="l"/>
+            <a:r>
+              <a:rPr sz="900" b="1">
+                <a:solidFill>
+                  <a:srgbClr val="FFFFFF"/>
+                </a:solidFill>
+                <a:latin typeface="Arial"/>
+              </a:rPr>
+              <a:t>FOREX.com  |  GGMI (LATAM)  ·  June 2026</a:t>
+            </a:r>
+          </a:p>
+        </p:txBody>
+      </p:sp>
+      <p:pic>
+        <p:nvPicPr>
+          <p:cNvPr id="4" name="Picture 3" descr="logo_1_fd6b9b.png"/>
+          <p:cNvPicPr>
+            <a:picLocks noChangeAspect="1"/>
+          </p:cNvPicPr>
+          <p:nvPr/>
+        </p:nvPicPr>
+        <p:blipFill>
+          <a:blip r:embed="rId2"/>
+          <a:stretch>
+            <a:fillRect/>
+          </a:stretch>
+        </p:blipFill>
+        <p:spPr>
+          <a:xfrm>
+            <a:off x="11155680" y="100584"/>
+            <a:ext cx="896112" cy="256032"/>
+          </a:xfrm>
+          <a:prstGeom prst="rect">
+            <a:avLst/>
+          </a:prstGeom>
+        </p:spPr>
+      </p:pic>
+      <p:sp>
+        <p:nvSpPr>
+          <p:cNvPr id="5" name="TextBox 4"/>
+          <p:cNvSpPr txBox="1"/>
+          <p:nvPr/>
+        </p:nvSpPr>
+        <p:spPr>
+          <a:xfrm>
+            <a:off x="457200" y="566928"/>
+            <a:ext cx="10972800" cy="274320"/>
+          </a:xfrm>
+          <a:prstGeom prst="rect">
+            <a:avLst/>
+          </a:prstGeom>
+          <a:noFill/>
+        </p:spPr>
+        <p:txBody>
+          <a:bodyPr wrap="square" anchor="t" lIns="0" rIns="0" tIns="0" bIns="0">
+            <a:spAutoFit/>
+          </a:bodyPr>
+          <a:lstStyle/>
+          <a:p>
+            <a:pPr algn="l"/>
+            <a:r>
+              <a:rPr sz="1100" b="1">
+                <a:solidFill>
+                  <a:srgbClr val="3B5998"/>
+                </a:solidFill>
+                <a:latin typeface="Arial"/>
+              </a:rPr>
+              <a:t>Q3 FY2026 IN REVIEW  ·  APPLICATIONS</a:t>
+            </a:r>
+          </a:p>
+        </p:txBody>
+      </p:sp>
+      <p:sp>
+        <p:nvSpPr>
+          <p:cNvPr id="6" name="TextBox 5"/>
+          <p:cNvSpPr txBox="1"/>
+          <p:nvPr/>
+        </p:nvSpPr>
+        <p:spPr>
+          <a:xfrm>
+            <a:off x="457200" y="868680"/>
+            <a:ext cx="11247120" cy="685800"/>
+          </a:xfrm>
+          <a:prstGeom prst="rect">
+            <a:avLst/>
+          </a:prstGeom>
+          <a:noFill/>
+        </p:spPr>
+        <p:txBody>
+          <a:bodyPr wrap="square" anchor="t" lIns="0" rIns="0" tIns="0" bIns="0">
+            <a:spAutoFit/>
+          </a:bodyPr>
+          <a:lstStyle/>
+          <a:p>
+            <a:pPr algn="l"/>
+            <a:r>
+              <a:rPr sz="2000" b="1">
+                <a:solidFill>
+                  <a:srgbClr val="1A2A3A"/>
+                </a:solidFill>
+                <a:latin typeface="Arial"/>
+              </a:rPr>
+              <a:t>Application volume scaled with spend. Blended cost per application halved.</a:t>
+            </a:r>
+          </a:p>
+        </p:txBody>
+      </p:sp>
+      <p:sp>
+        <p:nvSpPr>
+          <p:cNvPr id="7" name="Rectangle 6"/>
+          <p:cNvSpPr/>
+          <p:nvPr/>
+        </p:nvSpPr>
+        <p:spPr>
+          <a:xfrm>
+            <a:off x="0" y="6583680"/>
+            <a:ext cx="12191695" cy="274320"/>
+          </a:xfrm>
+          <a:prstGeom prst="rect">
+            <a:avLst/>
+          </a:prstGeom>
+          <a:solidFill>
+            <a:srgbClr val="F3F3F3"/>
+          </a:solidFill>
+          <a:ln>
+            <a:noFill/>
+          </a:ln>
+          <a:effectLst/>
+        </p:spPr>
+        <p:style>
+          <a:lnRef idx="1">
+            <a:schemeClr val="accent1"/>
+          </a:lnRef>
+          <a:fillRef idx="3">
+            <a:schemeClr val="accent1"/>
+          </a:fillRef>
+          <a:effectRef idx="2">
+            <a:schemeClr val="accent1"/>
+          </a:effectRef>
+          <a:fontRef idx="minor">
+            <a:schemeClr val="lt1"/>
+          </a:fontRef>
+        </p:style>
+        <p:txBody>
+          <a:bodyPr rtlCol="0" anchor="ctr"/>
+          <a:lstStyle/>
+          <a:p>
+            <a:pPr algn="ctr"/>
+          </a:p>
+        </p:txBody>
+      </p:sp>
+      <p:sp>
+        <p:nvSpPr>
+          <p:cNvPr id="8" name="TextBox 7"/>
+          <p:cNvSpPr txBox="1"/>
+          <p:nvPr/>
+        </p:nvSpPr>
+        <p:spPr>
+          <a:xfrm>
+            <a:off x="457200" y="6611112"/>
+            <a:ext cx="5486400" cy="201168"/>
+          </a:xfrm>
+          <a:prstGeom prst="rect">
+            <a:avLst/>
+          </a:prstGeom>
+          <a:noFill/>
+        </p:spPr>
+        <p:txBody>
+          <a:bodyPr wrap="square" anchor="t" lIns="0" rIns="0" tIns="0" bIns="0">
+            <a:spAutoFit/>
+          </a:bodyPr>
+          <a:lstStyle/>
+          <a:p>
+            <a:pPr algn="l"/>
+            <a:r>
+              <a:rPr sz="800" b="0">
+                <a:solidFill>
+                  <a:srgbClr val="78828C"/>
+                </a:solidFill>
+                <a:latin typeface="Arial"/>
+              </a:rPr>
+              <a:t>Monthly Performance Review</a:t>
+            </a:r>
+          </a:p>
+        </p:txBody>
+      </p:sp>
+      <p:sp>
+        <p:nvSpPr>
+          <p:cNvPr id="9" name="TextBox 8"/>
+          <p:cNvSpPr txBox="1"/>
+          <p:nvPr/>
+        </p:nvSpPr>
+        <p:spPr>
+          <a:xfrm>
+            <a:off x="11064240" y="6611112"/>
+            <a:ext cx="822960" cy="201168"/>
+          </a:xfrm>
+          <a:prstGeom prst="rect">
+            <a:avLst/>
+          </a:prstGeom>
+          <a:noFill/>
+        </p:spPr>
+        <p:txBody>
+          <a:bodyPr wrap="square" anchor="t" lIns="0" rIns="0" tIns="0" bIns="0">
+            <a:spAutoFit/>
+          </a:bodyPr>
+          <a:lstStyle/>
+          <a:p>
+            <a:pPr algn="r"/>
+            <a:r>
+              <a:rPr sz="800" b="0">
+                <a:solidFill>
+                  <a:srgbClr val="78828C"/>
+                </a:solidFill>
+                <a:latin typeface="Arial"/>
+              </a:rPr>
+              <a:t>12 / 16</a:t>
+            </a:r>
+          </a:p>
+        </p:txBody>
+      </p:sp>
+      <p:graphicFrame>
+        <p:nvGraphicFramePr>
+          <p:cNvPr id="10" name="Table 9"/>
+          <p:cNvGraphicFramePr>
+            <a:graphicFrameLocks noGrp="1"/>
+          </p:cNvGraphicFramePr>
+          <p:nvPr/>
+        </p:nvGraphicFramePr>
+        <p:xfrm>
+          <a:off x="457200" y="1737360"/>
+          <a:ext cx="6035040" cy="2468880"/>
+        </p:xfrm>
+        <a:graphic>
+          <a:graphicData uri="http://schemas.openxmlformats.org/drawingml/2006/table">
+            <a:tbl>
+              <a:tblPr>
+                <a:tableStyleId>{5C22544A-7EE6-4342-B048-85BDC9FD1C3A}</a:tableStyleId>
+              </a:tblPr>
+              <a:tblGrid>
+                <a:gridCol w="2377440"/>
+                <a:gridCol w="868680"/>
+                <a:gridCol w="868680"/>
+                <a:gridCol w="914400"/>
+                <a:gridCol w="1005840"/>
+              </a:tblGrid>
+              <a:tr h="352697">
+                <a:tc>
+                  <a:txBody>
+                    <a:bodyPr/>
+                    <a:lstStyle/>
+                    <a:p>
+                      <a:r>
+                        <a:rPr sz="850" b="1">
+                          <a:solidFill>
+                            <a:srgbClr val="FFFFFF"/>
+                          </a:solidFill>
+                          <a:latin typeface="Arial"/>
+                        </a:rPr>
+                        <a:t>Channel</a:t>
+                      </a:r>
+                    </a:p>
+                  </a:txBody>
+                  <a:tcPr marL="54864" marR="54864" marT="27432" marB="27432">
+                    <a:solidFill>
+                      <a:srgbClr val="3B5998"/>
+                    </a:solidFill>
+                  </a:tcPr>
+                </a:tc>
+                <a:tc>
+                  <a:txBody>
+                    <a:bodyPr/>
+                    <a:lstStyle/>
+                    <a:p>
+                      <a:pPr algn="r"/>
+                      <a:r>
+                        <a:rPr sz="850" b="1">
+                          <a:solidFill>
+                            <a:srgbClr val="FFFFFF"/>
+                          </a:solidFill>
+                          <a:latin typeface="Arial"/>
+                        </a:rPr>
+                        <a:t>Apr</a:t>
+                      </a:r>
+                    </a:p>
+                  </a:txBody>
+                  <a:tcPr marL="54864" marR="54864" marT="27432" marB="27432">
+                    <a:solidFill>
+                      <a:srgbClr val="3B5998"/>
+                    </a:solidFill>
+                  </a:tcPr>
+                </a:tc>
+                <a:tc>
+                  <a:txBody>
+                    <a:bodyPr/>
+                    <a:lstStyle/>
+                    <a:p>
+                      <a:pPr algn="r"/>
+                      <a:r>
+                        <a:rPr sz="850" b="1">
+                          <a:solidFill>
+                            <a:srgbClr val="FFFFFF"/>
+                          </a:solidFill>
+                          <a:latin typeface="Arial"/>
+                        </a:rPr>
+                        <a:t>May</a:t>
+                      </a:r>
+                    </a:p>
+                  </a:txBody>
+                  <a:tcPr marL="54864" marR="54864" marT="27432" marB="27432">
+                    <a:solidFill>
+                      <a:srgbClr val="3B5998"/>
+                    </a:solidFill>
+                  </a:tcPr>
+                </a:tc>
+                <a:tc>
+                  <a:txBody>
+                    <a:bodyPr/>
+                    <a:lstStyle/>
+                    <a:p>
+                      <a:pPr algn="r"/>
+                      <a:r>
+                        <a:rPr sz="850" b="1">
+                          <a:solidFill>
+                            <a:srgbClr val="FFFFFF"/>
+                          </a:solidFill>
+                          <a:latin typeface="Arial"/>
+                        </a:rPr>
+                        <a:t>Jun</a:t>
+                      </a:r>
+                    </a:p>
+                  </a:txBody>
+                  <a:tcPr marL="54864" marR="54864" marT="27432" marB="27432">
+                    <a:solidFill>
+                      <a:srgbClr val="3B5998"/>
+                    </a:solidFill>
+                  </a:tcPr>
+                </a:tc>
+                <a:tc>
+                  <a:txBody>
+                    <a:bodyPr/>
+                    <a:lstStyle/>
+                    <a:p>
+                      <a:pPr algn="r"/>
+                      <a:r>
+                        <a:rPr sz="850" b="1">
+                          <a:solidFill>
+                            <a:srgbClr val="FFFFFF"/>
+                          </a:solidFill>
+                          <a:latin typeface="Arial"/>
+                        </a:rPr>
+                        <a:t>Q3</a:t>
+                      </a:r>
+                    </a:p>
+                  </a:txBody>
+                  <a:tcPr marL="54864" marR="54864" marT="27432" marB="27432">
+                    <a:solidFill>
+                      <a:srgbClr val="3B5998"/>
+                    </a:solidFill>
+                  </a:tcPr>
+                </a:tc>
+              </a:tr>
+              <a:tr h="352697">
+                <a:tc>
+                  <a:txBody>
+                    <a:bodyPr/>
+                    <a:lstStyle/>
+                    <a:p>
+                      <a:r>
+                        <a:rPr sz="850" b="1">
+                          <a:solidFill>
+                            <a:srgbClr val="32373E"/>
+                          </a:solidFill>
+                          <a:latin typeface="Arial"/>
+                        </a:rPr>
+                        <a:t>Bing Ads</a:t>
+                      </a:r>
+                    </a:p>
+                  </a:txBody>
+                  <a:tcPr marL="54864" marR="54864" marT="27432" marB="27432">
+                    <a:solidFill>
+                      <a:srgbClr val="FFFFFF"/>
+                    </a:solidFill>
+                  </a:tcPr>
+                </a:tc>
+                <a:tc>
+                  <a:txBody>
+                    <a:bodyPr/>
+                    <a:lstStyle/>
+                    <a:p>
+                      <a:pPr algn="r"/>
+                      <a:r>
+                        <a:rPr sz="850" b="0">
+                          <a:solidFill>
+                            <a:srgbClr val="32373E"/>
+                          </a:solidFill>
+                          <a:latin typeface="Arial"/>
+                        </a:rPr>
+                        <a:t>—</a:t>
+                      </a:r>
+                    </a:p>
+                  </a:txBody>
+                  <a:tcPr marL="54864" marR="54864" marT="27432" marB="27432">
+                    <a:solidFill>
+                      <a:srgbClr val="FFFFFF"/>
+                    </a:solidFill>
+                  </a:tcPr>
+                </a:tc>
+                <a:tc>
+                  <a:txBody>
+                    <a:bodyPr/>
+                    <a:lstStyle/>
+                    <a:p>
+                      <a:pPr algn="r"/>
+                      <a:r>
+                        <a:rPr sz="850" b="0">
+                          <a:solidFill>
+                            <a:srgbClr val="32373E"/>
+                          </a:solidFill>
+                          <a:latin typeface="Arial"/>
+                        </a:rPr>
+                        <a:t>33</a:t>
+                      </a:r>
+                    </a:p>
+                  </a:txBody>
+                  <a:tcPr marL="54864" marR="54864" marT="27432" marB="27432">
+                    <a:solidFill>
+                      <a:srgbClr val="FFFFFF"/>
+                    </a:solidFill>
+                  </a:tcPr>
+                </a:tc>
+                <a:tc>
+                  <a:txBody>
+                    <a:bodyPr/>
+                    <a:lstStyle/>
+                    <a:p>
+                      <a:pPr algn="r"/>
+                      <a:r>
+                        <a:rPr sz="850" b="0">
+                          <a:solidFill>
+                            <a:srgbClr val="32373E"/>
+                          </a:solidFill>
+                          <a:latin typeface="Arial"/>
+                        </a:rPr>
+                        <a:t>50</a:t>
+                      </a:r>
+                    </a:p>
+                  </a:txBody>
+                  <a:tcPr marL="54864" marR="54864" marT="27432" marB="27432">
+                    <a:solidFill>
+                      <a:srgbClr val="FFFFFF"/>
+                    </a:solidFill>
+                  </a:tcPr>
+                </a:tc>
+                <a:tc>
+                  <a:txBody>
+                    <a:bodyPr/>
+                    <a:lstStyle/>
+                    <a:p>
+                      <a:pPr algn="r"/>
+                      <a:r>
+                        <a:rPr sz="850" b="0">
+                          <a:solidFill>
+                            <a:srgbClr val="32373E"/>
+                          </a:solidFill>
+                          <a:latin typeface="Arial"/>
+                        </a:rPr>
+                        <a:t>83</a:t>
+                      </a:r>
+                    </a:p>
+                  </a:txBody>
+                  <a:tcPr marL="54864" marR="54864" marT="27432" marB="27432">
+                    <a:solidFill>
+                      <a:srgbClr val="FFFFFF"/>
+                    </a:solidFill>
+                  </a:tcPr>
+                </a:tc>
+              </a:tr>
+              <a:tr h="352697">
+                <a:tc>
+                  <a:txBody>
+                    <a:bodyPr/>
+                    <a:lstStyle/>
+                    <a:p>
+                      <a:r>
+                        <a:rPr sz="850" b="1">
+                          <a:solidFill>
+                            <a:srgbClr val="32373E"/>
+                          </a:solidFill>
+                          <a:latin typeface="Arial"/>
+                        </a:rPr>
+                        <a:t>Azerion</a:t>
+                      </a:r>
+                    </a:p>
+                  </a:txBody>
+                  <a:tcPr marL="54864" marR="54864" marT="27432" marB="27432">
+                    <a:solidFill>
+                      <a:srgbClr val="F3F3F3"/>
+                    </a:solidFill>
+                  </a:tcPr>
+                </a:tc>
+                <a:tc>
+                  <a:txBody>
+                    <a:bodyPr/>
+                    <a:lstStyle/>
+                    <a:p>
+                      <a:pPr algn="r"/>
+                      <a:r>
+                        <a:rPr sz="850" b="0">
+                          <a:solidFill>
+                            <a:srgbClr val="32373E"/>
+                          </a:solidFill>
+                          <a:latin typeface="Arial"/>
+                        </a:rPr>
+                        <a:t>19</a:t>
+                      </a:r>
+                    </a:p>
+                  </a:txBody>
+                  <a:tcPr marL="54864" marR="54864" marT="27432" marB="27432">
+                    <a:solidFill>
+                      <a:srgbClr val="F3F3F3"/>
+                    </a:solidFill>
+                  </a:tcPr>
+                </a:tc>
+                <a:tc>
+                  <a:txBody>
+                    <a:bodyPr/>
+                    <a:lstStyle/>
+                    <a:p>
+                      <a:pPr algn="r"/>
+                      <a:r>
+                        <a:rPr sz="850" b="0">
+                          <a:solidFill>
+                            <a:srgbClr val="32373E"/>
+                          </a:solidFill>
+                          <a:latin typeface="Arial"/>
+                        </a:rPr>
+                        <a:t>37</a:t>
+                      </a:r>
+                    </a:p>
+                  </a:txBody>
+                  <a:tcPr marL="54864" marR="54864" marT="27432" marB="27432">
+                    <a:solidFill>
+                      <a:srgbClr val="F3F3F3"/>
+                    </a:solidFill>
+                  </a:tcPr>
+                </a:tc>
+                <a:tc>
+                  <a:txBody>
+                    <a:bodyPr/>
+                    <a:lstStyle/>
+                    <a:p>
+                      <a:pPr algn="r"/>
+                      <a:r>
+                        <a:rPr sz="850" b="0">
+                          <a:solidFill>
+                            <a:srgbClr val="32373E"/>
+                          </a:solidFill>
+                          <a:latin typeface="Arial"/>
+                        </a:rPr>
+                        <a:t>42</a:t>
+                      </a:r>
+                    </a:p>
+                  </a:txBody>
+                  <a:tcPr marL="54864" marR="54864" marT="27432" marB="27432">
+                    <a:solidFill>
+                      <a:srgbClr val="F3F3F3"/>
+                    </a:solidFill>
+                  </a:tcPr>
+                </a:tc>
+                <a:tc>
+                  <a:txBody>
+                    <a:bodyPr/>
+                    <a:lstStyle/>
+                    <a:p>
+                      <a:pPr algn="r"/>
+                      <a:r>
+                        <a:rPr sz="850" b="0">
+                          <a:solidFill>
+                            <a:srgbClr val="32373E"/>
+                          </a:solidFill>
+                          <a:latin typeface="Arial"/>
+                        </a:rPr>
+                        <a:t>98</a:t>
+                      </a:r>
+                    </a:p>
+                  </a:txBody>
+                  <a:tcPr marL="54864" marR="54864" marT="27432" marB="27432">
+                    <a:solidFill>
+                      <a:srgbClr val="F3F3F3"/>
+                    </a:solidFill>
+                  </a:tcPr>
+                </a:tc>
+              </a:tr>
+              <a:tr h="352697">
+                <a:tc>
+                  <a:txBody>
+                    <a:bodyPr/>
+                    <a:lstStyle/>
+                    <a:p>
+                      <a:r>
+                        <a:rPr sz="850" b="1">
+                          <a:solidFill>
+                            <a:srgbClr val="32373E"/>
+                          </a:solidFill>
+                          <a:latin typeface="Arial"/>
+                        </a:rPr>
+                        <a:t>Quantcast</a:t>
+                      </a:r>
+                    </a:p>
+                  </a:txBody>
+                  <a:tcPr marL="54864" marR="54864" marT="27432" marB="27432">
+                    <a:solidFill>
+                      <a:srgbClr val="FFFFFF"/>
+                    </a:solidFill>
+                  </a:tcPr>
+                </a:tc>
+                <a:tc>
+                  <a:txBody>
+                    <a:bodyPr/>
+                    <a:lstStyle/>
+                    <a:p>
+                      <a:pPr algn="r"/>
+                      <a:r>
+                        <a:rPr sz="850" b="0">
+                          <a:solidFill>
+                            <a:srgbClr val="32373E"/>
+                          </a:solidFill>
+                          <a:latin typeface="Arial"/>
+                        </a:rPr>
+                        <a:t>0</a:t>
+                      </a:r>
+                    </a:p>
+                  </a:txBody>
+                  <a:tcPr marL="54864" marR="54864" marT="27432" marB="27432">
+                    <a:solidFill>
+                      <a:srgbClr val="FFFFFF"/>
+                    </a:solidFill>
+                  </a:tcPr>
+                </a:tc>
+                <a:tc>
+                  <a:txBody>
+                    <a:bodyPr/>
+                    <a:lstStyle/>
+                    <a:p>
+                      <a:pPr algn="r"/>
+                      <a:r>
+                        <a:rPr sz="850" b="0">
+                          <a:solidFill>
+                            <a:srgbClr val="32373E"/>
+                          </a:solidFill>
+                          <a:latin typeface="Arial"/>
+                        </a:rPr>
+                        <a:t>1</a:t>
+                      </a:r>
+                    </a:p>
+                  </a:txBody>
+                  <a:tcPr marL="54864" marR="54864" marT="27432" marB="27432">
+                    <a:solidFill>
+                      <a:srgbClr val="FFFFFF"/>
+                    </a:solidFill>
+                  </a:tcPr>
+                </a:tc>
+                <a:tc>
+                  <a:txBody>
+                    <a:bodyPr/>
+                    <a:lstStyle/>
+                    <a:p>
+                      <a:pPr algn="r"/>
+                      <a:r>
+                        <a:rPr sz="850" b="0">
+                          <a:solidFill>
+                            <a:srgbClr val="32373E"/>
+                          </a:solidFill>
+                          <a:latin typeface="Arial"/>
+                        </a:rPr>
+                        <a:t>11</a:t>
+                      </a:r>
+                    </a:p>
+                  </a:txBody>
+                  <a:tcPr marL="54864" marR="54864" marT="27432" marB="27432">
+                    <a:solidFill>
+                      <a:srgbClr val="FFFFFF"/>
+                    </a:solidFill>
+                  </a:tcPr>
+                </a:tc>
+                <a:tc>
+                  <a:txBody>
+                    <a:bodyPr/>
+                    <a:lstStyle/>
+                    <a:p>
+                      <a:pPr algn="r"/>
+                      <a:r>
+                        <a:rPr sz="850" b="0">
+                          <a:solidFill>
+                            <a:srgbClr val="32373E"/>
+                          </a:solidFill>
+                          <a:latin typeface="Arial"/>
+                        </a:rPr>
+                        <a:t>12</a:t>
+                      </a:r>
+                    </a:p>
+                  </a:txBody>
+                  <a:tcPr marL="54864" marR="54864" marT="27432" marB="27432">
+                    <a:solidFill>
+                      <a:srgbClr val="FFFFFF"/>
+                    </a:solidFill>
+                  </a:tcPr>
+                </a:tc>
+              </a:tr>
+              <a:tr h="352697">
+                <a:tc>
+                  <a:txBody>
+                    <a:bodyPr/>
+                    <a:lstStyle/>
+                    <a:p>
+                      <a:r>
+                        <a:rPr sz="850" b="1">
+                          <a:solidFill>
+                            <a:srgbClr val="32373E"/>
+                          </a:solidFill>
+                          <a:latin typeface="Arial"/>
+                        </a:rPr>
+                        <a:t>Meta</a:t>
+                      </a:r>
+                    </a:p>
+                  </a:txBody>
+                  <a:tcPr marL="54864" marR="54864" marT="27432" marB="27432">
+                    <a:solidFill>
+                      <a:srgbClr val="F3F3F3"/>
+                    </a:solidFill>
+                  </a:tcPr>
+                </a:tc>
+                <a:tc>
+                  <a:txBody>
+                    <a:bodyPr/>
+                    <a:lstStyle/>
+                    <a:p>
+                      <a:pPr algn="r"/>
+                      <a:r>
+                        <a:rPr sz="850" b="0">
+                          <a:solidFill>
+                            <a:srgbClr val="32373E"/>
+                          </a:solidFill>
+                          <a:latin typeface="Arial"/>
+                        </a:rPr>
+                        <a:t>1</a:t>
+                      </a:r>
+                    </a:p>
+                  </a:txBody>
+                  <a:tcPr marL="54864" marR="54864" marT="27432" marB="27432">
+                    <a:solidFill>
+                      <a:srgbClr val="F3F3F3"/>
+                    </a:solidFill>
+                  </a:tcPr>
+                </a:tc>
+                <a:tc>
+                  <a:txBody>
+                    <a:bodyPr/>
+                    <a:lstStyle/>
+                    <a:p>
+                      <a:pPr algn="r"/>
+                      <a:r>
+                        <a:rPr sz="850" b="0">
+                          <a:solidFill>
+                            <a:srgbClr val="32373E"/>
+                          </a:solidFill>
+                          <a:latin typeface="Arial"/>
+                        </a:rPr>
+                        <a:t>0</a:t>
+                      </a:r>
+                    </a:p>
+                  </a:txBody>
+                  <a:tcPr marL="54864" marR="54864" marT="27432" marB="27432">
+                    <a:solidFill>
+                      <a:srgbClr val="F3F3F3"/>
+                    </a:solidFill>
+                  </a:tcPr>
+                </a:tc>
+                <a:tc>
+                  <a:txBody>
+                    <a:bodyPr/>
+                    <a:lstStyle/>
+                    <a:p>
+                      <a:pPr algn="r"/>
+                      <a:r>
+                        <a:rPr sz="850" b="0">
+                          <a:solidFill>
+                            <a:srgbClr val="32373E"/>
+                          </a:solidFill>
+                          <a:latin typeface="Arial"/>
+                        </a:rPr>
+                        <a:t>Held</a:t>
+                      </a:r>
+                    </a:p>
+                  </a:txBody>
+                  <a:tcPr marL="54864" marR="54864" marT="27432" marB="27432">
+                    <a:solidFill>
+                      <a:srgbClr val="F3F3F3"/>
+                    </a:solidFill>
+                  </a:tcPr>
+                </a:tc>
+                <a:tc>
+                  <a:txBody>
+                    <a:bodyPr/>
+                    <a:lstStyle/>
+                    <a:p>
+                      <a:pPr algn="r"/>
+                      <a:r>
+                        <a:rPr sz="850" b="0">
+                          <a:solidFill>
+                            <a:srgbClr val="32373E"/>
+                          </a:solidFill>
+                          <a:latin typeface="Arial"/>
+                        </a:rPr>
+                        <a:t>1</a:t>
+                      </a:r>
+                    </a:p>
+                  </a:txBody>
+                  <a:tcPr marL="54864" marR="54864" marT="27432" marB="27432">
+                    <a:solidFill>
+                      <a:srgbClr val="F3F3F3"/>
+                    </a:solidFill>
+                  </a:tcPr>
+                </a:tc>
+              </a:tr>
+              <a:tr h="352697">
+                <a:tc>
+                  <a:txBody>
+                    <a:bodyPr/>
+                    <a:lstStyle/>
+                    <a:p>
+                      <a:r>
+                        <a:rPr sz="850" b="1">
+                          <a:solidFill>
+                            <a:srgbClr val="32373E"/>
+                          </a:solidFill>
+                          <a:latin typeface="Arial"/>
+                        </a:rPr>
+                        <a:t>Blended applications</a:t>
+                      </a:r>
+                    </a:p>
+                  </a:txBody>
+                  <a:tcPr marL="54864" marR="54864" marT="27432" marB="27432">
+                    <a:solidFill>
+                      <a:srgbClr val="FFFFFF"/>
+                    </a:solidFill>
+                  </a:tcPr>
+                </a:tc>
+                <a:tc>
+                  <a:txBody>
+                    <a:bodyPr/>
+                    <a:lstStyle/>
+                    <a:p>
+                      <a:pPr algn="r"/>
+                      <a:r>
+                        <a:rPr sz="850" b="0">
+                          <a:solidFill>
+                            <a:srgbClr val="32373E"/>
+                          </a:solidFill>
+                          <a:latin typeface="Arial"/>
+                        </a:rPr>
+                        <a:t>20</a:t>
+                      </a:r>
+                    </a:p>
+                  </a:txBody>
+                  <a:tcPr marL="54864" marR="54864" marT="27432" marB="27432">
+                    <a:solidFill>
+                      <a:srgbClr val="FFFFFF"/>
+                    </a:solidFill>
+                  </a:tcPr>
+                </a:tc>
+                <a:tc>
+                  <a:txBody>
+                    <a:bodyPr/>
+                    <a:lstStyle/>
+                    <a:p>
+                      <a:pPr algn="r"/>
+                      <a:r>
+                        <a:rPr sz="850" b="0">
+                          <a:solidFill>
+                            <a:srgbClr val="32373E"/>
+                          </a:solidFill>
+                          <a:latin typeface="Arial"/>
+                        </a:rPr>
+                        <a:t>71</a:t>
+                      </a:r>
+                    </a:p>
+                  </a:txBody>
+                  <a:tcPr marL="54864" marR="54864" marT="27432" marB="27432">
+                    <a:solidFill>
+                      <a:srgbClr val="FFFFFF"/>
+                    </a:solidFill>
+                  </a:tcPr>
+                </a:tc>
+                <a:tc>
+                  <a:txBody>
+                    <a:bodyPr/>
+                    <a:lstStyle/>
+                    <a:p>
+                      <a:pPr algn="r"/>
+                      <a:r>
+                        <a:rPr sz="850" b="0">
+                          <a:solidFill>
+                            <a:srgbClr val="32373E"/>
+                          </a:solidFill>
+                          <a:latin typeface="Arial"/>
+                        </a:rPr>
+                        <a:t>103</a:t>
+                      </a:r>
+                    </a:p>
+                  </a:txBody>
+                  <a:tcPr marL="54864" marR="54864" marT="27432" marB="27432">
+                    <a:solidFill>
+                      <a:srgbClr val="FFFFFF"/>
+                    </a:solidFill>
+                  </a:tcPr>
+                </a:tc>
+                <a:tc>
+                  <a:txBody>
+                    <a:bodyPr/>
+                    <a:lstStyle/>
+                    <a:p>
+                      <a:pPr algn="r"/>
+                      <a:r>
+                        <a:rPr sz="850" b="0">
+                          <a:solidFill>
+                            <a:srgbClr val="32373E"/>
+                          </a:solidFill>
+                          <a:latin typeface="Arial"/>
+                        </a:rPr>
+                        <a:t>194</a:t>
+                      </a:r>
+                    </a:p>
+                  </a:txBody>
+                  <a:tcPr marL="54864" marR="54864" marT="27432" marB="27432">
+                    <a:solidFill>
+                      <a:srgbClr val="FFFFFF"/>
+                    </a:solidFill>
+                  </a:tcPr>
+                </a:tc>
+              </a:tr>
+              <a:tr h="352698">
+                <a:tc>
+                  <a:txBody>
+                    <a:bodyPr/>
+                    <a:lstStyle/>
+                    <a:p>
+                      <a:r>
+                        <a:rPr sz="850" b="1">
+                          <a:solidFill>
+                            <a:srgbClr val="32373E"/>
+                          </a:solidFill>
+                          <a:latin typeface="Arial"/>
+                        </a:rPr>
+                        <a:t>Blended cost / application</a:t>
+                      </a:r>
+                    </a:p>
+                  </a:txBody>
+                  <a:tcPr marL="54864" marR="54864" marT="27432" marB="27432">
+                    <a:solidFill>
+                      <a:srgbClr val="F3F3F3"/>
+                    </a:solidFill>
+                  </a:tcPr>
+                </a:tc>
+                <a:tc>
+                  <a:txBody>
+                    <a:bodyPr/>
+                    <a:lstStyle/>
+                    <a:p>
+                      <a:pPr algn="r"/>
+                      <a:r>
+                        <a:rPr sz="850" b="1">
+                          <a:solidFill>
+                            <a:srgbClr val="32373E"/>
+                          </a:solidFill>
+                          <a:latin typeface="Arial"/>
+                        </a:rPr>
+                        <a:t>$2,315</a:t>
+                      </a:r>
+                    </a:p>
+                  </a:txBody>
+                  <a:tcPr marL="54864" marR="54864" marT="27432" marB="27432">
+                    <a:solidFill>
+                      <a:srgbClr val="F3F3F3"/>
+                    </a:solidFill>
+                  </a:tcPr>
+                </a:tc>
+                <a:tc>
+                  <a:txBody>
+                    <a:bodyPr/>
+                    <a:lstStyle/>
+                    <a:p>
+                      <a:pPr algn="r"/>
+                      <a:r>
+                        <a:rPr sz="850" b="1">
+                          <a:solidFill>
+                            <a:srgbClr val="32373E"/>
+                          </a:solidFill>
+                          <a:latin typeface="Arial"/>
+                        </a:rPr>
+                        <a:t>$1,110</a:t>
+                      </a:r>
+                    </a:p>
+                  </a:txBody>
+                  <a:tcPr marL="54864" marR="54864" marT="27432" marB="27432">
+                    <a:solidFill>
+                      <a:srgbClr val="F3F3F3"/>
+                    </a:solidFill>
+                  </a:tcPr>
+                </a:tc>
+                <a:tc>
+                  <a:txBody>
+                    <a:bodyPr/>
+                    <a:lstStyle/>
+                    <a:p>
+                      <a:pPr algn="r"/>
+                      <a:r>
+                        <a:rPr sz="850" b="1">
+                          <a:solidFill>
+                            <a:srgbClr val="32373E"/>
+                          </a:solidFill>
+                          <a:latin typeface="Arial"/>
+                        </a:rPr>
+                        <a:t>$1,169</a:t>
+                      </a:r>
+                    </a:p>
+                  </a:txBody>
+                  <a:tcPr marL="54864" marR="54864" marT="27432" marB="27432">
+                    <a:solidFill>
+                      <a:srgbClr val="F3F3F3"/>
+                    </a:solidFill>
+                  </a:tcPr>
+                </a:tc>
+                <a:tc>
+                  <a:txBody>
+                    <a:bodyPr/>
+                    <a:lstStyle/>
+                    <a:p>
+                      <a:pPr algn="r"/>
+                      <a:r>
+                        <a:rPr sz="850" b="1">
+                          <a:solidFill>
+                            <a:srgbClr val="32373E"/>
+                          </a:solidFill>
+                          <a:latin typeface="Arial"/>
+                        </a:rPr>
+                        <a:t>$1,265</a:t>
+                      </a:r>
+                    </a:p>
+                  </a:txBody>
+                  <a:tcPr marL="54864" marR="54864" marT="27432" marB="27432">
+                    <a:solidFill>
+                      <a:srgbClr val="F3F3F3"/>
+                    </a:solidFill>
+                  </a:tcPr>
+                </a:tc>
+              </a:tr>
+            </a:tbl>
+          </a:graphicData>
+        </a:graphic>
+      </p:graphicFrame>
+      <p:sp>
+        <p:nvSpPr>
+          <p:cNvPr id="11" name="TextBox 10"/>
+          <p:cNvSpPr txBox="1"/>
+          <p:nvPr/>
+        </p:nvSpPr>
+        <p:spPr>
+          <a:xfrm>
+            <a:off x="457200" y="4434840"/>
+            <a:ext cx="6035040" cy="640080"/>
+          </a:xfrm>
+          <a:prstGeom prst="rect">
+            <a:avLst/>
+          </a:prstGeom>
+          <a:noFill/>
+        </p:spPr>
+        <p:txBody>
+          <a:bodyPr wrap="square" anchor="t" lIns="0" rIns="0" tIns="0" bIns="0">
+            <a:spAutoFit/>
+          </a:bodyPr>
+          <a:lstStyle/>
+          <a:p>
+            <a:pPr algn="l"/>
+            <a:r>
+              <a:rPr sz="750" b="0">
+                <a:solidFill>
+                  <a:srgbClr val="5A5A5A"/>
+                </a:solidFill>
+                <a:latin typeface="Arial"/>
+              </a:rPr>
+              <a:t>Search tracking went live in May; display lines count submitted applications, the reach line counts view-through, and paid-social conversions are under validation.</a:t>
+            </a:r>
+          </a:p>
+        </p:txBody>
+      </p:sp>
+      <p:sp>
+        <p:nvSpPr>
+          <p:cNvPr id="12" name="Rectangle 11"/>
+          <p:cNvSpPr/>
+          <p:nvPr/>
+        </p:nvSpPr>
+        <p:spPr>
+          <a:xfrm>
+            <a:off x="6858000" y="1737360"/>
+            <a:ext cx="4846320" cy="4572000"/>
+          </a:xfrm>
+          <a:prstGeom prst="rect">
+            <a:avLst/>
+          </a:prstGeom>
+          <a:solidFill>
+            <a:srgbClr val="F3F3F3"/>
+          </a:solidFill>
+          <a:ln>
+            <a:noFill/>
+          </a:ln>
+          <a:effectLst/>
+        </p:spPr>
+        <p:style>
+          <a:lnRef idx="1">
+            <a:schemeClr val="accent1"/>
+          </a:lnRef>
+          <a:fillRef idx="3">
+            <a:schemeClr val="accent1"/>
+          </a:fillRef>
+          <a:effectRef idx="2">
+            <a:schemeClr val="accent1"/>
+          </a:effectRef>
+          <a:fontRef idx="minor">
+            <a:schemeClr val="lt1"/>
+          </a:fontRef>
+        </p:style>
+        <p:txBody>
+          <a:bodyPr rtlCol="0" anchor="ctr"/>
+          <a:lstStyle/>
+          <a:p>
+            <a:pPr algn="ctr"/>
+          </a:p>
+        </p:txBody>
+      </p:sp>
+      <p:sp>
+        <p:nvSpPr>
+          <p:cNvPr id="13" name="Rectangle 12"/>
+          <p:cNvSpPr/>
+          <p:nvPr/>
+        </p:nvSpPr>
+        <p:spPr>
+          <a:xfrm>
+            <a:off x="6858000" y="1737360"/>
+            <a:ext cx="4846320" cy="91440"/>
+          </a:xfrm>
+          <a:prstGeom prst="rect">
+            <a:avLst/>
+          </a:prstGeom>
+          <a:solidFill>
+            <a:srgbClr val="27AE60"/>
+          </a:solidFill>
+          <a:ln>
+            <a:noFill/>
+          </a:ln>
+          <a:effectLst/>
+        </p:spPr>
+        <p:style>
+          <a:lnRef idx="1">
+            <a:schemeClr val="accent1"/>
+          </a:lnRef>
+          <a:fillRef idx="3">
+            <a:schemeClr val="accent1"/>
+          </a:fillRef>
+          <a:effectRef idx="2">
+            <a:schemeClr val="accent1"/>
+          </a:effectRef>
+          <a:fontRef idx="minor">
+            <a:schemeClr val="lt1"/>
+          </a:fontRef>
+        </p:style>
+        <p:txBody>
+          <a:bodyPr rtlCol="0" anchor="ctr"/>
+          <a:lstStyle/>
+          <a:p>
+            <a:pPr algn="ctr"/>
+          </a:p>
+        </p:txBody>
+      </p:sp>
+      <p:sp>
+        <p:nvSpPr>
+          <p:cNvPr id="14" name="TextBox 13"/>
+          <p:cNvSpPr txBox="1"/>
+          <p:nvPr/>
+        </p:nvSpPr>
+        <p:spPr>
+          <a:xfrm>
+            <a:off x="7040880" y="1920240"/>
+            <a:ext cx="4480559" cy="274320"/>
+          </a:xfrm>
+          <a:prstGeom prst="rect">
+            <a:avLst/>
+          </a:prstGeom>
+          <a:noFill/>
+        </p:spPr>
+        <p:txBody>
+          <a:bodyPr wrap="square" anchor="t" lIns="0" rIns="0" tIns="0" bIns="0">
+            <a:spAutoFit/>
+          </a:bodyPr>
+          <a:lstStyle/>
+          <a:p>
+            <a:pPr algn="l"/>
+            <a:r>
+              <a:rPr sz="1000" b="1">
+                <a:solidFill>
+                  <a:srgbClr val="27AE60"/>
+                </a:solidFill>
+                <a:latin typeface="Arial"/>
+              </a:rPr>
+              <a:t>READ</a:t>
+            </a:r>
+          </a:p>
+        </p:txBody>
+      </p:sp>
+      <p:sp>
+        <p:nvSpPr>
+          <p:cNvPr id="15" name="TextBox 14"/>
+          <p:cNvSpPr txBox="1"/>
+          <p:nvPr/>
+        </p:nvSpPr>
+        <p:spPr>
+          <a:xfrm>
+            <a:off x="7040880" y="2240280"/>
+            <a:ext cx="4480559" cy="3886200"/>
+          </a:xfrm>
+          <a:prstGeom prst="rect">
+            <a:avLst/>
+          </a:prstGeom>
+          <a:noFill/>
+        </p:spPr>
+        <p:txBody>
+          <a:bodyPr wrap="square" anchor="t" lIns="0" rIns="0" tIns="0" bIns="0">
+            <a:spAutoFit/>
+          </a:bodyPr>
+          <a:lstStyle/>
+          <a:p>
+            <a:pPr algn="l"/>
+            <a:r>
+              <a:rPr sz="950" b="0">
+                <a:solidFill>
+                  <a:srgbClr val="32373E"/>
+                </a:solidFill>
+                <a:latin typeface="Arial"/>
+              </a:rPr>
+              <a:t>June delivered 5x the application volume of April on 2.6x the spend.</a:t>
+            </a:r>
+          </a:p>
+          <a:p>
+            <a:pPr algn="l">
+              <a:spcBef>
+                <a:spcPts val="600"/>
+              </a:spcBef>
+            </a:pPr>
+            <a:r>
+              <a:rPr sz="950" b="0">
+                <a:solidFill>
+                  <a:srgbClr val="32373E"/>
+                </a:solidFill>
+                <a:latin typeface="Arial"/>
+              </a:rPr>
+              <a:t>Blended cost per application fell from $2,315 in April to $1,169 in June and held near that level through a 53% spend increase, so the growth was bought at improving efficiency, not rising cost.</a:t>
+            </a:r>
+          </a:p>
+          <a:p>
+            <a:pPr algn="l">
+              <a:spcBef>
+                <a:spcPts val="600"/>
+              </a:spcBef>
+            </a:pPr>
+            <a:r>
+              <a:rPr sz="950" b="0">
+                <a:solidFill>
+                  <a:srgbClr val="32373E"/>
+                </a:solidFill>
+                <a:latin typeface="Arial"/>
+              </a:rPr>
+              <a:t>Search and programmatic carried the measured volume (181 submitted applications). Paid social contributed reach and site traffic while its conversion validation completes.</a:t>
+            </a:r>
+          </a:p>
+        </p:txBody>
+      </p:sp>
+    </p:spTree>
+  </p:cSld>
+  <p:clrMapOvr>
+    <a:masterClrMapping/>
+  </p:clrMapOvr>
+</p:sld>
+</file>
+
+<file path=ppt/slides/slide13.xml><?xml version="1.0" encoding="utf-8"?>
+<p:sld xmlns:a="http://schemas.openxmlformats.org/drawingml/2006/main" xmlns:p="http://schemas.openxmlformats.org/presentationml/2006/main" xmlns:r="http://schemas.openxmlformats.org/officeDocument/2006/relationships">
+  <p:cSld>
+    <p:spTree>
+      <p:nvGrpSpPr>
+        <p:cNvPr id="1" name=""/>
+        <p:cNvGrpSpPr/>
+        <p:nvPr/>
+      </p:nvGrpSpPr>
+      <p:grpSpPr/>
+      <p:sp>
+        <p:nvSpPr>
+          <p:cNvPr id="2" name="Rectangle 1"/>
+          <p:cNvSpPr/>
+          <p:nvPr/>
+        </p:nvSpPr>
+        <p:spPr>
+          <a:xfrm>
+            <a:off x="0" y="0"/>
+            <a:ext cx="12191695" cy="457200"/>
+          </a:xfrm>
+          <a:prstGeom prst="rect">
+            <a:avLst/>
+          </a:prstGeom>
+          <a:solidFill>
+            <a:srgbClr val="1A2A3A"/>
+          </a:solidFill>
+          <a:ln>
+            <a:noFill/>
+          </a:ln>
+          <a:effectLst/>
+        </p:spPr>
+        <p:style>
+          <a:lnRef idx="1">
+            <a:schemeClr val="accent1"/>
+          </a:lnRef>
+          <a:fillRef idx="3">
+            <a:schemeClr val="accent1"/>
+          </a:fillRef>
+          <a:effectRef idx="2">
+            <a:schemeClr val="accent1"/>
+          </a:effectRef>
+          <a:fontRef idx="minor">
+            <a:schemeClr val="lt1"/>
+          </a:fontRef>
+        </p:style>
+        <p:txBody>
+          <a:bodyPr rtlCol="0" anchor="ctr"/>
+          <a:lstStyle/>
+          <a:p>
+            <a:pPr algn="ctr"/>
+          </a:p>
+        </p:txBody>
+      </p:sp>
+      <p:sp>
+        <p:nvSpPr>
+          <p:cNvPr id="3" name="TextBox 2"/>
+          <p:cNvSpPr txBox="1"/>
+          <p:nvPr/>
+        </p:nvSpPr>
+        <p:spPr>
+          <a:xfrm>
+            <a:off x="457200" y="91440"/>
+            <a:ext cx="8229600" cy="274320"/>
+          </a:xfrm>
+          <a:prstGeom prst="rect">
+            <a:avLst/>
+          </a:prstGeom>
+          <a:noFill/>
+        </p:spPr>
+        <p:txBody>
+          <a:bodyPr wrap="square" anchor="t" lIns="0" rIns="0" tIns="0" bIns="0">
+            <a:spAutoFit/>
+          </a:bodyPr>
+          <a:lstStyle/>
+          <a:p>
+            <a:pPr algn="l"/>
+            <a:r>
+              <a:rPr sz="900" b="1">
+                <a:solidFill>
+                  <a:srgbClr val="FFFFFF"/>
+                </a:solidFill>
+                <a:latin typeface="Arial"/>
+              </a:rPr>
+              <a:t>FOREX.com  |  GGMI (LATAM)  ·  June 2026</a:t>
+            </a:r>
+          </a:p>
+        </p:txBody>
+      </p:sp>
+      <p:pic>
+        <p:nvPicPr>
+          <p:cNvPr id="4" name="Picture 3" descr="logo_1_fd6b9b.png"/>
+          <p:cNvPicPr>
+            <a:picLocks noChangeAspect="1"/>
+          </p:cNvPicPr>
+          <p:nvPr/>
+        </p:nvPicPr>
+        <p:blipFill>
+          <a:blip r:embed="rId2"/>
+          <a:stretch>
+            <a:fillRect/>
+          </a:stretch>
+        </p:blipFill>
+        <p:spPr>
+          <a:xfrm>
+            <a:off x="11155680" y="100584"/>
+            <a:ext cx="896112" cy="256032"/>
+          </a:xfrm>
+          <a:prstGeom prst="rect">
+            <a:avLst/>
+          </a:prstGeom>
+        </p:spPr>
+      </p:pic>
+      <p:sp>
+        <p:nvSpPr>
+          <p:cNvPr id="5" name="TextBox 4"/>
+          <p:cNvSpPr txBox="1"/>
+          <p:nvPr/>
+        </p:nvSpPr>
+        <p:spPr>
+          <a:xfrm>
+            <a:off x="457200" y="566928"/>
+            <a:ext cx="10972800" cy="274320"/>
+          </a:xfrm>
+          <a:prstGeom prst="rect">
+            <a:avLst/>
+          </a:prstGeom>
+          <a:noFill/>
+        </p:spPr>
+        <p:txBody>
+          <a:bodyPr wrap="square" anchor="t" lIns="0" rIns="0" tIns="0" bIns="0">
+            <a:spAutoFit/>
+          </a:bodyPr>
+          <a:lstStyle/>
+          <a:p>
+            <a:pPr algn="l"/>
+            <a:r>
+              <a:rPr sz="1100" b="1">
+                <a:solidFill>
+                  <a:srgbClr val="3B5998"/>
+                </a:solidFill>
+                <a:latin typeface="Arial"/>
+              </a:rPr>
+              <a:t>Q3 FY2026 IN REVIEW  ·  BLENDED OUTCOMES VS PLAN</a:t>
+            </a:r>
+          </a:p>
+        </p:txBody>
+      </p:sp>
+      <p:sp>
+        <p:nvSpPr>
+          <p:cNvPr id="6" name="TextBox 5"/>
+          <p:cNvSpPr txBox="1"/>
+          <p:nvPr/>
+        </p:nvSpPr>
+        <p:spPr>
+          <a:xfrm>
+            <a:off x="457200" y="868680"/>
+            <a:ext cx="11247120" cy="685800"/>
+          </a:xfrm>
+          <a:prstGeom prst="rect">
+            <a:avLst/>
+          </a:prstGeom>
+          <a:noFill/>
+        </p:spPr>
+        <p:txBody>
+          <a:bodyPr wrap="square" anchor="t" lIns="0" rIns="0" tIns="0" bIns="0">
+            <a:spAutoFit/>
+          </a:bodyPr>
+          <a:lstStyle/>
+          <a:p>
+            <a:pPr algn="l"/>
+            <a:r>
+              <a:rPr sz="2000" b="1">
+                <a:solidFill>
+                  <a:srgbClr val="1A2A3A"/>
+                </a:solidFill>
+                <a:latin typeface="Arial"/>
+              </a:rPr>
+              <a:t>The gap to plan sits in the organic base, not paid delivery.</a:t>
+            </a:r>
+          </a:p>
+        </p:txBody>
+      </p:sp>
+      <p:sp>
+        <p:nvSpPr>
+          <p:cNvPr id="7" name="Rectangle 6"/>
+          <p:cNvSpPr/>
+          <p:nvPr/>
+        </p:nvSpPr>
+        <p:spPr>
+          <a:xfrm>
+            <a:off x="0" y="6583680"/>
+            <a:ext cx="12191695" cy="274320"/>
+          </a:xfrm>
+          <a:prstGeom prst="rect">
+            <a:avLst/>
+          </a:prstGeom>
+          <a:solidFill>
+            <a:srgbClr val="F3F3F3"/>
+          </a:solidFill>
+          <a:ln>
+            <a:noFill/>
+          </a:ln>
+          <a:effectLst/>
+        </p:spPr>
+        <p:style>
+          <a:lnRef idx="1">
+            <a:schemeClr val="accent1"/>
+          </a:lnRef>
+          <a:fillRef idx="3">
+            <a:schemeClr val="accent1"/>
+          </a:fillRef>
+          <a:effectRef idx="2">
+            <a:schemeClr val="accent1"/>
+          </a:effectRef>
+          <a:fontRef idx="minor">
+            <a:schemeClr val="lt1"/>
+          </a:fontRef>
+        </p:style>
+        <p:txBody>
+          <a:bodyPr rtlCol="0" anchor="ctr"/>
+          <a:lstStyle/>
+          <a:p>
+            <a:pPr algn="ctr"/>
+          </a:p>
+        </p:txBody>
+      </p:sp>
+      <p:sp>
+        <p:nvSpPr>
+          <p:cNvPr id="8" name="TextBox 7"/>
+          <p:cNvSpPr txBox="1"/>
+          <p:nvPr/>
+        </p:nvSpPr>
+        <p:spPr>
+          <a:xfrm>
+            <a:off x="457200" y="6611112"/>
+            <a:ext cx="5486400" cy="201168"/>
+          </a:xfrm>
+          <a:prstGeom prst="rect">
+            <a:avLst/>
+          </a:prstGeom>
+          <a:noFill/>
+        </p:spPr>
+        <p:txBody>
+          <a:bodyPr wrap="square" anchor="t" lIns="0" rIns="0" tIns="0" bIns="0">
+            <a:spAutoFit/>
+          </a:bodyPr>
+          <a:lstStyle/>
+          <a:p>
+            <a:pPr algn="l"/>
+            <a:r>
+              <a:rPr sz="800" b="0">
+                <a:solidFill>
+                  <a:srgbClr val="78828C"/>
+                </a:solidFill>
+                <a:latin typeface="Arial"/>
+              </a:rPr>
+              <a:t>Monthly Performance Review</a:t>
+            </a:r>
+          </a:p>
+        </p:txBody>
+      </p:sp>
+      <p:sp>
+        <p:nvSpPr>
+          <p:cNvPr id="9" name="TextBox 8"/>
+          <p:cNvSpPr txBox="1"/>
+          <p:nvPr/>
+        </p:nvSpPr>
+        <p:spPr>
+          <a:xfrm>
+            <a:off x="11064240" y="6611112"/>
+            <a:ext cx="822960" cy="201168"/>
+          </a:xfrm>
+          <a:prstGeom prst="rect">
+            <a:avLst/>
+          </a:prstGeom>
+          <a:noFill/>
+        </p:spPr>
+        <p:txBody>
+          <a:bodyPr wrap="square" anchor="t" lIns="0" rIns="0" tIns="0" bIns="0">
+            <a:spAutoFit/>
+          </a:bodyPr>
+          <a:lstStyle/>
+          <a:p>
+            <a:pPr algn="r"/>
+            <a:r>
+              <a:rPr sz="800" b="0">
+                <a:solidFill>
+                  <a:srgbClr val="78828C"/>
+                </a:solidFill>
+                <a:latin typeface="Arial"/>
+              </a:rPr>
+              <a:t>13 / 16</a:t>
+            </a:r>
+          </a:p>
+        </p:txBody>
+      </p:sp>
+      <p:graphicFrame>
+        <p:nvGraphicFramePr>
+          <p:cNvPr id="10" name="Table 9"/>
+          <p:cNvGraphicFramePr>
+            <a:graphicFrameLocks noGrp="1"/>
+          </p:cNvGraphicFramePr>
+          <p:nvPr/>
+        </p:nvGraphicFramePr>
+        <p:xfrm>
+          <a:off x="457200" y="1737360"/>
+          <a:ext cx="6035040" cy="2468880"/>
+        </p:xfrm>
+        <a:graphic>
+          <a:graphicData uri="http://schemas.openxmlformats.org/drawingml/2006/table">
+            <a:tbl>
+              <a:tblPr>
+                <a:tableStyleId>{5C22544A-7EE6-4342-B048-85BDC9FD1C3A}</a:tableStyleId>
+              </a:tblPr>
+              <a:tblGrid>
+                <a:gridCol w="2560320"/>
+                <a:gridCol w="1188720"/>
+                <a:gridCol w="1188720"/>
+                <a:gridCol w="1097280"/>
+              </a:tblGrid>
+              <a:tr h="352697">
+                <a:tc>
+                  <a:txBody>
+                    <a:bodyPr/>
+                    <a:lstStyle/>
+                    <a:p>
+                      <a:r>
+                        <a:rPr sz="850" b="1">
+                          <a:solidFill>
+                            <a:srgbClr val="FFFFFF"/>
+                          </a:solidFill>
+                          <a:latin typeface="Arial"/>
+                        </a:rPr>
+                        <a:t>Metric (organic + paid)</a:t>
+                      </a:r>
+                    </a:p>
+                  </a:txBody>
+                  <a:tcPr marL="54864" marR="54864" marT="27432" marB="27432">
+                    <a:solidFill>
+                      <a:srgbClr val="3B5998"/>
+                    </a:solidFill>
+                  </a:tcPr>
+                </a:tc>
+                <a:tc>
+                  <a:txBody>
+                    <a:bodyPr/>
+                    <a:lstStyle/>
+                    <a:p>
+                      <a:pPr algn="r"/>
+                      <a:r>
+                        <a:rPr sz="850" b="1">
+                          <a:solidFill>
+                            <a:srgbClr val="FFFFFF"/>
+                          </a:solidFill>
+                          <a:latin typeface="Arial"/>
+                        </a:rPr>
+                        <a:t>Q3 Actual</a:t>
+                      </a:r>
+                    </a:p>
+                  </a:txBody>
+                  <a:tcPr marL="54864" marR="54864" marT="27432" marB="27432">
+                    <a:solidFill>
+                      <a:srgbClr val="3B5998"/>
+                    </a:solidFill>
+                  </a:tcPr>
+                </a:tc>
+                <a:tc>
+                  <a:txBody>
+                    <a:bodyPr/>
+                    <a:lstStyle/>
+                    <a:p>
+                      <a:pPr algn="r"/>
+                      <a:r>
+                        <a:rPr sz="850" b="1">
+                          <a:solidFill>
+                            <a:srgbClr val="FFFFFF"/>
+                          </a:solidFill>
+                          <a:latin typeface="Arial"/>
+                        </a:rPr>
+                        <a:t>Q3 Budget</a:t>
+                      </a:r>
+                    </a:p>
+                  </a:txBody>
+                  <a:tcPr marL="54864" marR="54864" marT="27432" marB="27432">
+                    <a:solidFill>
+                      <a:srgbClr val="3B5998"/>
+                    </a:solidFill>
+                  </a:tcPr>
+                </a:tc>
+                <a:tc>
+                  <a:txBody>
+                    <a:bodyPr/>
+                    <a:lstStyle/>
+                    <a:p>
+                      <a:pPr algn="r"/>
+                      <a:r>
+                        <a:rPr sz="850" b="1">
+                          <a:solidFill>
+                            <a:srgbClr val="FFFFFF"/>
+                          </a:solidFill>
+                          <a:latin typeface="Arial"/>
+                        </a:rPr>
+                        <a:t>vs Plan</a:t>
+                      </a:r>
+                    </a:p>
+                  </a:txBody>
+                  <a:tcPr marL="54864" marR="54864" marT="27432" marB="27432">
+                    <a:solidFill>
+                      <a:srgbClr val="3B5998"/>
+                    </a:solidFill>
+                  </a:tcPr>
+                </a:tc>
+              </a:tr>
+              <a:tr h="352697">
+                <a:tc>
+                  <a:txBody>
+                    <a:bodyPr/>
+                    <a:lstStyle/>
+                    <a:p>
+                      <a:r>
+                        <a:rPr sz="850" b="1">
+                          <a:solidFill>
+                            <a:srgbClr val="32373E"/>
+                          </a:solidFill>
+                          <a:latin typeface="Arial"/>
+                        </a:rPr>
+                        <a:t>Live Apps Submitted</a:t>
+                      </a:r>
+                    </a:p>
+                  </a:txBody>
+                  <a:tcPr marL="54864" marR="54864" marT="27432" marB="27432">
+                    <a:solidFill>
+                      <a:srgbClr val="FFFFFF"/>
+                    </a:solidFill>
+                  </a:tcPr>
+                </a:tc>
+                <a:tc>
+                  <a:txBody>
+                    <a:bodyPr/>
+                    <a:lstStyle/>
+                    <a:p>
+                      <a:pPr algn="r"/>
+                      <a:r>
+                        <a:rPr sz="850" b="0">
+                          <a:solidFill>
+                            <a:srgbClr val="32373E"/>
+                          </a:solidFill>
+                          <a:latin typeface="Arial"/>
+                        </a:rPr>
+                        <a:t>2,167</a:t>
+                      </a:r>
+                    </a:p>
+                  </a:txBody>
+                  <a:tcPr marL="54864" marR="54864" marT="27432" marB="27432">
+                    <a:solidFill>
+                      <a:srgbClr val="FFFFFF"/>
+                    </a:solidFill>
+                  </a:tcPr>
+                </a:tc>
+                <a:tc>
+                  <a:txBody>
+                    <a:bodyPr/>
+                    <a:lstStyle/>
+                    <a:p>
+                      <a:pPr algn="r"/>
+                      <a:r>
+                        <a:rPr sz="850" b="0">
+                          <a:solidFill>
+                            <a:srgbClr val="32373E"/>
+                          </a:solidFill>
+                          <a:latin typeface="Arial"/>
+                        </a:rPr>
+                        <a:t>3,984</a:t>
+                      </a:r>
+                    </a:p>
+                  </a:txBody>
+                  <a:tcPr marL="54864" marR="54864" marT="27432" marB="27432">
+                    <a:solidFill>
+                      <a:srgbClr val="FFFFFF"/>
+                    </a:solidFill>
+                  </a:tcPr>
+                </a:tc>
+                <a:tc>
+                  <a:txBody>
+                    <a:bodyPr/>
+                    <a:lstStyle/>
+                    <a:p>
+                      <a:pPr algn="r"/>
+                      <a:r>
+                        <a:rPr sz="850" b="0">
+                          <a:solidFill>
+                            <a:srgbClr val="32373E"/>
+                          </a:solidFill>
+                          <a:latin typeface="Arial"/>
+                        </a:rPr>
+                        <a:t>-46%</a:t>
+                      </a:r>
+                    </a:p>
+                  </a:txBody>
+                  <a:tcPr marL="54864" marR="54864" marT="27432" marB="27432">
+                    <a:solidFill>
+                      <a:srgbClr val="FFFFFF"/>
+                    </a:solidFill>
+                  </a:tcPr>
+                </a:tc>
+              </a:tr>
+              <a:tr h="352697">
+                <a:tc>
+                  <a:txBody>
+                    <a:bodyPr/>
+                    <a:lstStyle/>
+                    <a:p>
+                      <a:r>
+                        <a:rPr sz="850" b="1">
+                          <a:solidFill>
+                            <a:srgbClr val="32373E"/>
+                          </a:solidFill>
+                          <a:latin typeface="Arial"/>
+                        </a:rPr>
+                        <a:t>New Approved</a:t>
+                      </a:r>
+                    </a:p>
+                  </a:txBody>
+                  <a:tcPr marL="54864" marR="54864" marT="27432" marB="27432">
+                    <a:solidFill>
+                      <a:srgbClr val="F3F3F3"/>
+                    </a:solidFill>
+                  </a:tcPr>
+                </a:tc>
+                <a:tc>
+                  <a:txBody>
+                    <a:bodyPr/>
+                    <a:lstStyle/>
+                    <a:p>
+                      <a:pPr algn="r"/>
+                      <a:r>
+                        <a:rPr sz="850" b="0">
+                          <a:solidFill>
+                            <a:srgbClr val="32373E"/>
+                          </a:solidFill>
+                          <a:latin typeface="Arial"/>
+                        </a:rPr>
+                        <a:t>606</a:t>
+                      </a:r>
+                    </a:p>
+                  </a:txBody>
+                  <a:tcPr marL="54864" marR="54864" marT="27432" marB="27432">
+                    <a:solidFill>
+                      <a:srgbClr val="F3F3F3"/>
+                    </a:solidFill>
+                  </a:tcPr>
+                </a:tc>
+                <a:tc>
+                  <a:txBody>
+                    <a:bodyPr/>
+                    <a:lstStyle/>
+                    <a:p>
+                      <a:pPr algn="r"/>
+                      <a:r>
+                        <a:rPr sz="850" b="0">
+                          <a:solidFill>
+                            <a:srgbClr val="32373E"/>
+                          </a:solidFill>
+                          <a:latin typeface="Arial"/>
+                        </a:rPr>
+                        <a:t>957</a:t>
+                      </a:r>
+                    </a:p>
+                  </a:txBody>
+                  <a:tcPr marL="54864" marR="54864" marT="27432" marB="27432">
+                    <a:solidFill>
+                      <a:srgbClr val="F3F3F3"/>
+                    </a:solidFill>
+                  </a:tcPr>
+                </a:tc>
+                <a:tc>
+                  <a:txBody>
+                    <a:bodyPr/>
+                    <a:lstStyle/>
+                    <a:p>
+                      <a:pPr algn="r"/>
+                      <a:r>
+                        <a:rPr sz="850" b="0">
+                          <a:solidFill>
+                            <a:srgbClr val="32373E"/>
+                          </a:solidFill>
+                          <a:latin typeface="Arial"/>
+                        </a:rPr>
+                        <a:t>-37%</a:t>
+                      </a:r>
+                    </a:p>
+                  </a:txBody>
+                  <a:tcPr marL="54864" marR="54864" marT="27432" marB="27432">
+                    <a:solidFill>
+                      <a:srgbClr val="F3F3F3"/>
+                    </a:solidFill>
+                  </a:tcPr>
+                </a:tc>
+              </a:tr>
+              <a:tr h="352697">
+                <a:tc>
+                  <a:txBody>
+                    <a:bodyPr/>
+                    <a:lstStyle/>
+                    <a:p>
+                      <a:r>
+                        <a:rPr sz="850" b="1">
+                          <a:solidFill>
+                            <a:srgbClr val="32373E"/>
+                          </a:solidFill>
+                          <a:latin typeface="Arial"/>
+                        </a:rPr>
+                        <a:t>New Funded</a:t>
+                      </a:r>
+                    </a:p>
+                  </a:txBody>
+                  <a:tcPr marL="54864" marR="54864" marT="27432" marB="27432">
+                    <a:solidFill>
+                      <a:srgbClr val="FFFFFF"/>
+                    </a:solidFill>
+                  </a:tcPr>
+                </a:tc>
+                <a:tc>
+                  <a:txBody>
+                    <a:bodyPr/>
+                    <a:lstStyle/>
+                    <a:p>
+                      <a:pPr algn="r"/>
+                      <a:r>
+                        <a:rPr sz="850" b="0">
+                          <a:solidFill>
+                            <a:srgbClr val="32373E"/>
+                          </a:solidFill>
+                          <a:latin typeface="Arial"/>
+                        </a:rPr>
+                        <a:t>106</a:t>
+                      </a:r>
+                    </a:p>
+                  </a:txBody>
+                  <a:tcPr marL="54864" marR="54864" marT="27432" marB="27432">
+                    <a:solidFill>
+                      <a:srgbClr val="FFFFFF"/>
+                    </a:solidFill>
+                  </a:tcPr>
+                </a:tc>
+                <a:tc>
+                  <a:txBody>
+                    <a:bodyPr/>
+                    <a:lstStyle/>
+                    <a:p>
+                      <a:pPr algn="r"/>
+                      <a:r>
+                        <a:rPr sz="850" b="0">
+                          <a:solidFill>
+                            <a:srgbClr val="32373E"/>
+                          </a:solidFill>
+                          <a:latin typeface="Arial"/>
+                        </a:rPr>
+                        <a:t>240</a:t>
+                      </a:r>
+                    </a:p>
+                  </a:txBody>
+                  <a:tcPr marL="54864" marR="54864" marT="27432" marB="27432">
+                    <a:solidFill>
+                      <a:srgbClr val="FFFFFF"/>
+                    </a:solidFill>
+                  </a:tcPr>
+                </a:tc>
+                <a:tc>
+                  <a:txBody>
+                    <a:bodyPr/>
+                    <a:lstStyle/>
+                    <a:p>
+                      <a:pPr algn="r"/>
+                      <a:r>
+                        <a:rPr sz="850" b="0">
+                          <a:solidFill>
+                            <a:srgbClr val="32373E"/>
+                          </a:solidFill>
+                          <a:latin typeface="Arial"/>
+                        </a:rPr>
+                        <a:t>-56%</a:t>
+                      </a:r>
+                    </a:p>
+                  </a:txBody>
+                  <a:tcPr marL="54864" marR="54864" marT="27432" marB="27432">
+                    <a:solidFill>
+                      <a:srgbClr val="FFFFFF"/>
+                    </a:solidFill>
+                  </a:tcPr>
+                </a:tc>
+              </a:tr>
+              <a:tr h="352697">
+                <a:tc>
+                  <a:txBody>
+                    <a:bodyPr/>
+                    <a:lstStyle/>
+                    <a:p>
+                      <a:r>
+                        <a:rPr sz="850" b="1">
+                          <a:solidFill>
+                            <a:srgbClr val="32373E"/>
+                          </a:solidFill>
+                          <a:latin typeface="Arial"/>
+                        </a:rPr>
+                        <a:t>New Traded</a:t>
+                      </a:r>
+                    </a:p>
+                  </a:txBody>
+                  <a:tcPr marL="54864" marR="54864" marT="27432" marB="27432">
+                    <a:solidFill>
+                      <a:srgbClr val="F3F3F3"/>
+                    </a:solidFill>
+                  </a:tcPr>
+                </a:tc>
+                <a:tc>
+                  <a:txBody>
+                    <a:bodyPr/>
+                    <a:lstStyle/>
+                    <a:p>
+                      <a:pPr algn="r"/>
+                      <a:r>
+                        <a:rPr sz="850" b="0">
+                          <a:solidFill>
+                            <a:srgbClr val="32373E"/>
+                          </a:solidFill>
+                          <a:latin typeface="Arial"/>
+                        </a:rPr>
+                        <a:t>100</a:t>
+                      </a:r>
+                    </a:p>
+                  </a:txBody>
+                  <a:tcPr marL="54864" marR="54864" marT="27432" marB="27432">
+                    <a:solidFill>
+                      <a:srgbClr val="F3F3F3"/>
+                    </a:solidFill>
+                  </a:tcPr>
+                </a:tc>
+                <a:tc>
+                  <a:txBody>
+                    <a:bodyPr/>
+                    <a:lstStyle/>
+                    <a:p>
+                      <a:pPr algn="r"/>
+                      <a:r>
+                        <a:rPr sz="850" b="0">
+                          <a:solidFill>
+                            <a:srgbClr val="32373E"/>
+                          </a:solidFill>
+                          <a:latin typeface="Arial"/>
+                        </a:rPr>
+                        <a:t>180</a:t>
+                      </a:r>
+                    </a:p>
+                  </a:txBody>
+                  <a:tcPr marL="54864" marR="54864" marT="27432" marB="27432">
+                    <a:solidFill>
+                      <a:srgbClr val="F3F3F3"/>
+                    </a:solidFill>
+                  </a:tcPr>
+                </a:tc>
+                <a:tc>
+                  <a:txBody>
+                    <a:bodyPr/>
+                    <a:lstStyle/>
+                    <a:p>
+                      <a:pPr algn="r"/>
+                      <a:r>
+                        <a:rPr sz="850" b="0">
+                          <a:solidFill>
+                            <a:srgbClr val="32373E"/>
+                          </a:solidFill>
+                          <a:latin typeface="Arial"/>
+                        </a:rPr>
+                        <a:t>-44%</a:t>
+                      </a:r>
+                    </a:p>
+                  </a:txBody>
+                  <a:tcPr marL="54864" marR="54864" marT="27432" marB="27432">
+                    <a:solidFill>
+                      <a:srgbClr val="F3F3F3"/>
+                    </a:solidFill>
+                  </a:tcPr>
+                </a:tc>
+              </a:tr>
+              <a:tr h="352697">
+                <a:tc>
+                  <a:txBody>
+                    <a:bodyPr/>
+                    <a:lstStyle/>
+                    <a:p>
+                      <a:r>
+                        <a:rPr sz="850" b="1">
+                          <a:solidFill>
+                            <a:srgbClr val="32373E"/>
+                          </a:solidFill>
+                          <a:latin typeface="Arial"/>
+                        </a:rPr>
+                        <a:t>Actives (monthly avg)</a:t>
+                      </a:r>
+                    </a:p>
+                  </a:txBody>
+                  <a:tcPr marL="54864" marR="54864" marT="27432" marB="27432">
+                    <a:solidFill>
+                      <a:srgbClr val="FFFFFF"/>
+                    </a:solidFill>
+                  </a:tcPr>
+                </a:tc>
+                <a:tc>
+                  <a:txBody>
+                    <a:bodyPr/>
+                    <a:lstStyle/>
+                    <a:p>
+                      <a:pPr algn="r"/>
+                      <a:r>
+                        <a:rPr sz="850" b="0">
+                          <a:solidFill>
+                            <a:srgbClr val="32373E"/>
+                          </a:solidFill>
+                          <a:latin typeface="Arial"/>
+                        </a:rPr>
+                        <a:t>399</a:t>
+                      </a:r>
+                    </a:p>
+                  </a:txBody>
+                  <a:tcPr marL="54864" marR="54864" marT="27432" marB="27432">
+                    <a:solidFill>
+                      <a:srgbClr val="FFFFFF"/>
+                    </a:solidFill>
+                  </a:tcPr>
+                </a:tc>
+                <a:tc>
+                  <a:txBody>
+                    <a:bodyPr/>
+                    <a:lstStyle/>
+                    <a:p>
+                      <a:pPr algn="r"/>
+                      <a:r>
+                        <a:rPr sz="850" b="0">
+                          <a:solidFill>
+                            <a:srgbClr val="32373E"/>
+                          </a:solidFill>
+                          <a:latin typeface="Arial"/>
+                        </a:rPr>
+                        <a:t>485</a:t>
+                      </a:r>
+                    </a:p>
+                  </a:txBody>
+                  <a:tcPr marL="54864" marR="54864" marT="27432" marB="27432">
+                    <a:solidFill>
+                      <a:srgbClr val="FFFFFF"/>
+                    </a:solidFill>
+                  </a:tcPr>
+                </a:tc>
+                <a:tc>
+                  <a:txBody>
+                    <a:bodyPr/>
+                    <a:lstStyle/>
+                    <a:p>
+                      <a:pPr algn="r"/>
+                      <a:r>
+                        <a:rPr sz="850" b="0">
+                          <a:solidFill>
+                            <a:srgbClr val="32373E"/>
+                          </a:solidFill>
+                          <a:latin typeface="Arial"/>
+                        </a:rPr>
+                        <a:t>-18%</a:t>
+                      </a:r>
+                    </a:p>
+                  </a:txBody>
+                  <a:tcPr marL="54864" marR="54864" marT="27432" marB="27432">
+                    <a:solidFill>
+                      <a:srgbClr val="FFFFFF"/>
+                    </a:solidFill>
+                  </a:tcPr>
+                </a:tc>
+              </a:tr>
+              <a:tr h="352698">
+                <a:tc>
+                  <a:txBody>
+                    <a:bodyPr/>
+                    <a:lstStyle/>
+                    <a:p>
+                      <a:r>
+                        <a:rPr sz="850" b="1">
+                          <a:solidFill>
+                            <a:srgbClr val="32373E"/>
+                          </a:solidFill>
+                          <a:latin typeface="Arial"/>
+                        </a:rPr>
+                        <a:t>Trading Volume</a:t>
+                      </a:r>
+                    </a:p>
+                  </a:txBody>
+                  <a:tcPr marL="54864" marR="54864" marT="27432" marB="27432">
+                    <a:solidFill>
+                      <a:srgbClr val="F3F3F3"/>
+                    </a:solidFill>
+                  </a:tcPr>
+                </a:tc>
+                <a:tc>
+                  <a:txBody>
+                    <a:bodyPr/>
+                    <a:lstStyle/>
+                    <a:p>
+                      <a:pPr algn="r"/>
+                      <a:r>
+                        <a:rPr sz="850" b="0">
+                          <a:solidFill>
+                            <a:srgbClr val="32373E"/>
+                          </a:solidFill>
+                          <a:latin typeface="Arial"/>
+                        </a:rPr>
+                        <a:t>$4.3B</a:t>
+                      </a:r>
+                    </a:p>
+                  </a:txBody>
+                  <a:tcPr marL="54864" marR="54864" marT="27432" marB="27432">
+                    <a:solidFill>
+                      <a:srgbClr val="F3F3F3"/>
+                    </a:solidFill>
+                  </a:tcPr>
+                </a:tc>
+                <a:tc>
+                  <a:txBody>
+                    <a:bodyPr/>
+                    <a:lstStyle/>
+                    <a:p>
+                      <a:pPr algn="r"/>
+                      <a:r>
+                        <a:rPr sz="850" b="0">
+                          <a:solidFill>
+                            <a:srgbClr val="32373E"/>
+                          </a:solidFill>
+                          <a:latin typeface="Arial"/>
+                        </a:rPr>
+                        <a:t>$6.7B</a:t>
+                      </a:r>
+                    </a:p>
+                  </a:txBody>
+                  <a:tcPr marL="54864" marR="54864" marT="27432" marB="27432">
+                    <a:solidFill>
+                      <a:srgbClr val="F3F3F3"/>
+                    </a:solidFill>
+                  </a:tcPr>
+                </a:tc>
+                <a:tc>
+                  <a:txBody>
+                    <a:bodyPr/>
+                    <a:lstStyle/>
+                    <a:p>
+                      <a:pPr algn="r"/>
+                      <a:r>
+                        <a:rPr sz="850" b="0">
+                          <a:solidFill>
+                            <a:srgbClr val="32373E"/>
+                          </a:solidFill>
+                          <a:latin typeface="Arial"/>
+                        </a:rPr>
+                        <a:t>-36%</a:t>
+                      </a:r>
+                    </a:p>
+                  </a:txBody>
+                  <a:tcPr marL="54864" marR="54864" marT="27432" marB="27432">
+                    <a:solidFill>
+                      <a:srgbClr val="F3F3F3"/>
+                    </a:solidFill>
+                  </a:tcPr>
+                </a:tc>
+              </a:tr>
+            </a:tbl>
+          </a:graphicData>
+        </a:graphic>
+      </p:graphicFrame>
+      <p:sp>
+        <p:nvSpPr>
+          <p:cNvPr id="11" name="TextBox 10"/>
+          <p:cNvSpPr txBox="1"/>
+          <p:nvPr/>
+        </p:nvSpPr>
+        <p:spPr>
+          <a:xfrm>
+            <a:off x="457200" y="4434840"/>
+            <a:ext cx="6035040" cy="457200"/>
+          </a:xfrm>
+          <a:prstGeom prst="rect">
+            <a:avLst/>
+          </a:prstGeom>
+          <a:noFill/>
+        </p:spPr>
+        <p:txBody>
+          <a:bodyPr wrap="square" anchor="t" lIns="0" rIns="0" tIns="0" bIns="0">
+            <a:spAutoFit/>
+          </a:bodyPr>
+          <a:lstStyle/>
+          <a:p>
+            <a:pPr algn="l"/>
+            <a:r>
+              <a:rPr sz="750" b="0">
+                <a:solidFill>
+                  <a:srgbClr val="5A5A5A"/>
+                </a:solidFill>
+                <a:latin typeface="Arial"/>
+              </a:rPr>
+              <a:t>Source: Budget vs Actual dashboard (non-cohort reforecast), GGMI, organic and paid blended. July excluded (full-month forecast).</a:t>
+            </a:r>
+          </a:p>
+        </p:txBody>
+      </p:sp>
+      <p:sp>
+        <p:nvSpPr>
+          <p:cNvPr id="12" name="Rectangle 11"/>
+          <p:cNvSpPr/>
+          <p:nvPr/>
+        </p:nvSpPr>
+        <p:spPr>
+          <a:xfrm>
+            <a:off x="6858000" y="1737360"/>
+            <a:ext cx="4846320" cy="4572000"/>
+          </a:xfrm>
+          <a:prstGeom prst="rect">
+            <a:avLst/>
+          </a:prstGeom>
+          <a:solidFill>
+            <a:srgbClr val="F3F3F3"/>
+          </a:solidFill>
+          <a:ln>
+            <a:noFill/>
+          </a:ln>
+          <a:effectLst/>
+        </p:spPr>
+        <p:style>
+          <a:lnRef idx="1">
+            <a:schemeClr val="accent1"/>
+          </a:lnRef>
+          <a:fillRef idx="3">
+            <a:schemeClr val="accent1"/>
+          </a:fillRef>
+          <a:effectRef idx="2">
+            <a:schemeClr val="accent1"/>
+          </a:effectRef>
+          <a:fontRef idx="minor">
+            <a:schemeClr val="lt1"/>
+          </a:fontRef>
+        </p:style>
+        <p:txBody>
+          <a:bodyPr rtlCol="0" anchor="ctr"/>
+          <a:lstStyle/>
+          <a:p>
+            <a:pPr algn="ctr"/>
+          </a:p>
+        </p:txBody>
+      </p:sp>
+      <p:sp>
+        <p:nvSpPr>
+          <p:cNvPr id="13" name="Rectangle 12"/>
+          <p:cNvSpPr/>
+          <p:nvPr/>
+        </p:nvSpPr>
+        <p:spPr>
+          <a:xfrm>
+            <a:off x="6858000" y="1737360"/>
+            <a:ext cx="4846320" cy="91440"/>
+          </a:xfrm>
+          <a:prstGeom prst="rect">
+            <a:avLst/>
+          </a:prstGeom>
+          <a:solidFill>
+            <a:srgbClr val="3B5998"/>
+          </a:solidFill>
+          <a:ln>
+            <a:noFill/>
+          </a:ln>
+          <a:effectLst/>
+        </p:spPr>
+        <p:style>
+          <a:lnRef idx="1">
+            <a:schemeClr val="accent1"/>
+          </a:lnRef>
+          <a:fillRef idx="3">
+            <a:schemeClr val="accent1"/>
+          </a:fillRef>
+          <a:effectRef idx="2">
+            <a:schemeClr val="accent1"/>
+          </a:effectRef>
+          <a:fontRef idx="minor">
+            <a:schemeClr val="lt1"/>
+          </a:fontRef>
+        </p:style>
+        <p:txBody>
+          <a:bodyPr rtlCol="0" anchor="ctr"/>
+          <a:lstStyle/>
+          <a:p>
+            <a:pPr algn="ctr"/>
+          </a:p>
+        </p:txBody>
+      </p:sp>
+      <p:sp>
+        <p:nvSpPr>
+          <p:cNvPr id="14" name="TextBox 13"/>
+          <p:cNvSpPr txBox="1"/>
+          <p:nvPr/>
+        </p:nvSpPr>
+        <p:spPr>
+          <a:xfrm>
+            <a:off x="7040880" y="1920240"/>
+            <a:ext cx="4480559" cy="274320"/>
+          </a:xfrm>
+          <a:prstGeom prst="rect">
+            <a:avLst/>
+          </a:prstGeom>
+          <a:noFill/>
+        </p:spPr>
+        <p:txBody>
+          <a:bodyPr wrap="square" anchor="t" lIns="0" rIns="0" tIns="0" bIns="0">
+            <a:spAutoFit/>
+          </a:bodyPr>
+          <a:lstStyle/>
+          <a:p>
+            <a:pPr algn="l"/>
+            <a:r>
+              <a:rPr sz="1000" b="1">
+                <a:solidFill>
+                  <a:srgbClr val="3B5998"/>
+                </a:solidFill>
+                <a:latin typeface="Arial"/>
+              </a:rPr>
+              <a:t>READ</a:t>
+            </a:r>
+          </a:p>
+        </p:txBody>
+      </p:sp>
+      <p:sp>
+        <p:nvSpPr>
+          <p:cNvPr id="15" name="TextBox 14"/>
+          <p:cNvSpPr txBox="1"/>
+          <p:nvPr/>
+        </p:nvSpPr>
+        <p:spPr>
+          <a:xfrm>
+            <a:off x="7040880" y="2240280"/>
+            <a:ext cx="4480559" cy="3886200"/>
+          </a:xfrm>
+          <a:prstGeom prst="rect">
+            <a:avLst/>
+          </a:prstGeom>
+          <a:noFill/>
+        </p:spPr>
+        <p:txBody>
+          <a:bodyPr wrap="square" anchor="t" lIns="0" rIns="0" tIns="0" bIns="0">
+            <a:spAutoFit/>
+          </a:bodyPr>
+          <a:lstStyle/>
+          <a:p>
+            <a:pPr algn="l"/>
+            <a:r>
+              <a:rPr sz="950" b="0">
+                <a:solidFill>
+                  <a:srgbClr val="32373E"/>
+                </a:solidFill>
+                <a:latin typeface="Arial"/>
+              </a:rPr>
+              <a:t>Blended submissions ran about 45% under plan and declined through the half-year (1,029 in January to 684 in June) while paid-driven applications grew every month of Q3. The shortfall sits in the non-paid base, which the next two slides trace to organic search.</a:t>
+            </a:r>
+          </a:p>
+          <a:p>
+            <a:pPr algn="l">
+              <a:spcBef>
+                <a:spcPts val="600"/>
+              </a:spcBef>
+            </a:pPr>
+            <a:r>
+              <a:rPr sz="950" b="0">
+                <a:solidFill>
+                  <a:srgbClr val="32373E"/>
+                </a:solidFill>
+                <a:latin typeface="Arial"/>
+              </a:rPr>
+              <a:t>The funded stage shows the second constraint: -56% to plan, the application-to-funded step the onboarding roadmap is built to fix.</a:t>
+            </a:r>
+          </a:p>
+          <a:p>
+            <a:pPr algn="l">
+              <a:spcBef>
+                <a:spcPts val="600"/>
+              </a:spcBef>
+            </a:pPr>
+            <a:r>
+              <a:rPr sz="950" b="0">
+                <a:solidFill>
+                  <a:srgbClr val="32373E"/>
+                </a:solidFill>
+                <a:latin typeface="Arial"/>
+              </a:rPr>
+              <a:t>Trading volume tracked the softer funnel at $4.3B against a $6.7B plan.</a:t>
+            </a:r>
+          </a:p>
+        </p:txBody>
+      </p:sp>
+    </p:spTree>
+  </p:cSld>
+  <p:clrMapOvr>
+    <a:masterClrMapping/>
+  </p:clrMapOvr>
+</p:sld>
+</file>
+
+<file path=ppt/slides/slide14.xml><?xml version="1.0" encoding="utf-8"?>
+<p:sld xmlns:a="http://schemas.openxmlformats.org/drawingml/2006/main" xmlns:p="http://schemas.openxmlformats.org/presentationml/2006/main" xmlns:r="http://schemas.openxmlformats.org/officeDocument/2006/relationships">
+  <p:cSld>
+    <p:spTree>
+      <p:nvGrpSpPr>
+        <p:cNvPr id="1" name=""/>
+        <p:cNvGrpSpPr/>
+        <p:nvPr/>
+      </p:nvGrpSpPr>
+      <p:grpSpPr/>
+      <p:sp>
+        <p:nvSpPr>
+          <p:cNvPr id="2" name="Rectangle 1"/>
+          <p:cNvSpPr/>
+          <p:nvPr/>
+        </p:nvSpPr>
+        <p:spPr>
+          <a:xfrm>
+            <a:off x="0" y="0"/>
+            <a:ext cx="12191695" cy="457200"/>
+          </a:xfrm>
+          <a:prstGeom prst="rect">
+            <a:avLst/>
+          </a:prstGeom>
+          <a:solidFill>
+            <a:srgbClr val="1A2A3A"/>
+          </a:solidFill>
+          <a:ln>
+            <a:noFill/>
+          </a:ln>
+          <a:effectLst/>
+        </p:spPr>
+        <p:style>
+          <a:lnRef idx="1">
+            <a:schemeClr val="accent1"/>
+          </a:lnRef>
+          <a:fillRef idx="3">
+            <a:schemeClr val="accent1"/>
+          </a:fillRef>
+          <a:effectRef idx="2">
+            <a:schemeClr val="accent1"/>
+          </a:effectRef>
+          <a:fontRef idx="minor">
+            <a:schemeClr val="lt1"/>
+          </a:fontRef>
+        </p:style>
+        <p:txBody>
+          <a:bodyPr rtlCol="0" anchor="ctr"/>
+          <a:lstStyle/>
+          <a:p>
+            <a:pPr algn="ctr"/>
+          </a:p>
+        </p:txBody>
+      </p:sp>
+      <p:sp>
+        <p:nvSpPr>
+          <p:cNvPr id="3" name="TextBox 2"/>
+          <p:cNvSpPr txBox="1"/>
+          <p:nvPr/>
+        </p:nvSpPr>
+        <p:spPr>
+          <a:xfrm>
+            <a:off x="457200" y="91440"/>
+            <a:ext cx="8229600" cy="274320"/>
+          </a:xfrm>
+          <a:prstGeom prst="rect">
+            <a:avLst/>
+          </a:prstGeom>
+          <a:noFill/>
+        </p:spPr>
+        <p:txBody>
+          <a:bodyPr wrap="square" anchor="t" lIns="0" rIns="0" tIns="0" bIns="0">
+            <a:spAutoFit/>
+          </a:bodyPr>
+          <a:lstStyle/>
+          <a:p>
+            <a:pPr algn="l"/>
+            <a:r>
+              <a:rPr sz="900" b="1">
+                <a:solidFill>
+                  <a:srgbClr val="FFFFFF"/>
+                </a:solidFill>
+                <a:latin typeface="Arial"/>
+              </a:rPr>
+              <a:t>FOREX.com  |  GGMI (LATAM)  ·  June 2026</a:t>
+            </a:r>
+          </a:p>
+        </p:txBody>
+      </p:sp>
+      <p:pic>
+        <p:nvPicPr>
+          <p:cNvPr id="4" name="Picture 3" descr="logo_1_fd6b9b.png"/>
+          <p:cNvPicPr>
+            <a:picLocks noChangeAspect="1"/>
+          </p:cNvPicPr>
+          <p:nvPr/>
+        </p:nvPicPr>
+        <p:blipFill>
+          <a:blip r:embed="rId2"/>
+          <a:stretch>
+            <a:fillRect/>
+          </a:stretch>
+        </p:blipFill>
+        <p:spPr>
+          <a:xfrm>
+            <a:off x="11155680" y="100584"/>
+            <a:ext cx="896112" cy="256032"/>
+          </a:xfrm>
+          <a:prstGeom prst="rect">
+            <a:avLst/>
+          </a:prstGeom>
+        </p:spPr>
+      </p:pic>
+      <p:sp>
+        <p:nvSpPr>
+          <p:cNvPr id="5" name="TextBox 4"/>
+          <p:cNvSpPr txBox="1"/>
+          <p:nvPr/>
+        </p:nvSpPr>
+        <p:spPr>
+          <a:xfrm>
+            <a:off x="457200" y="566928"/>
+            <a:ext cx="10972800" cy="274320"/>
+          </a:xfrm>
+          <a:prstGeom prst="rect">
+            <a:avLst/>
+          </a:prstGeom>
+          <a:noFill/>
+        </p:spPr>
+        <p:txBody>
+          <a:bodyPr wrap="square" anchor="t" lIns="0" rIns="0" tIns="0" bIns="0">
+            <a:spAutoFit/>
+          </a:bodyPr>
+          <a:lstStyle/>
+          <a:p>
+            <a:pPr algn="l"/>
+            <a:r>
+              <a:rPr sz="1100" b="1">
+                <a:solidFill>
+                  <a:srgbClr val="3B5998"/>
+                </a:solidFill>
+                <a:latin typeface="Arial"/>
+              </a:rPr>
+              <a:t>SITE TRAFFIC  ·  SIX-MONTH VIEW (GA4, MEXICO)</a:t>
+            </a:r>
+          </a:p>
+        </p:txBody>
+      </p:sp>
+      <p:sp>
+        <p:nvSpPr>
+          <p:cNvPr id="6" name="TextBox 5"/>
+          <p:cNvSpPr txBox="1"/>
+          <p:nvPr/>
+        </p:nvSpPr>
+        <p:spPr>
+          <a:xfrm>
+            <a:off x="457200" y="868680"/>
+            <a:ext cx="11247120" cy="685800"/>
+          </a:xfrm>
+          <a:prstGeom prst="rect">
+            <a:avLst/>
+          </a:prstGeom>
+          <a:noFill/>
+        </p:spPr>
+        <p:txBody>
+          <a:bodyPr wrap="square" anchor="t" lIns="0" rIns="0" tIns="0" bIns="0">
+            <a:spAutoFit/>
+          </a:bodyPr>
+          <a:lstStyle/>
+          <a:p>
+            <a:pPr algn="l"/>
+            <a:r>
+              <a:rPr sz="2000" b="1">
+                <a:solidFill>
+                  <a:srgbClr val="1A2A3A"/>
+                </a:solidFill>
+                <a:latin typeface="Arial"/>
+              </a:rPr>
+              <a:t>Traffic recovered in June. Media bought the recovery.</a:t>
+            </a:r>
+          </a:p>
+        </p:txBody>
+      </p:sp>
+      <p:sp>
+        <p:nvSpPr>
+          <p:cNvPr id="7" name="Rectangle 6"/>
+          <p:cNvSpPr/>
+          <p:nvPr/>
+        </p:nvSpPr>
+        <p:spPr>
+          <a:xfrm>
+            <a:off x="0" y="6583680"/>
+            <a:ext cx="12191695" cy="274320"/>
+          </a:xfrm>
+          <a:prstGeom prst="rect">
+            <a:avLst/>
+          </a:prstGeom>
+          <a:solidFill>
+            <a:srgbClr val="F3F3F3"/>
+          </a:solidFill>
+          <a:ln>
+            <a:noFill/>
+          </a:ln>
+          <a:effectLst/>
+        </p:spPr>
+        <p:style>
+          <a:lnRef idx="1">
+            <a:schemeClr val="accent1"/>
+          </a:lnRef>
+          <a:fillRef idx="3">
+            <a:schemeClr val="accent1"/>
+          </a:fillRef>
+          <a:effectRef idx="2">
+            <a:schemeClr val="accent1"/>
+          </a:effectRef>
+          <a:fontRef idx="minor">
+            <a:schemeClr val="lt1"/>
+          </a:fontRef>
+        </p:style>
+        <p:txBody>
+          <a:bodyPr rtlCol="0" anchor="ctr"/>
+          <a:lstStyle/>
+          <a:p>
+            <a:pPr algn="ctr"/>
+          </a:p>
+        </p:txBody>
+      </p:sp>
+      <p:sp>
+        <p:nvSpPr>
+          <p:cNvPr id="8" name="TextBox 7"/>
+          <p:cNvSpPr txBox="1"/>
+          <p:nvPr/>
+        </p:nvSpPr>
+        <p:spPr>
+          <a:xfrm>
+            <a:off x="457200" y="6611112"/>
+            <a:ext cx="5486400" cy="201168"/>
+          </a:xfrm>
+          <a:prstGeom prst="rect">
+            <a:avLst/>
+          </a:prstGeom>
+          <a:noFill/>
+        </p:spPr>
+        <p:txBody>
+          <a:bodyPr wrap="square" anchor="t" lIns="0" rIns="0" tIns="0" bIns="0">
+            <a:spAutoFit/>
+          </a:bodyPr>
+          <a:lstStyle/>
+          <a:p>
+            <a:pPr algn="l"/>
+            <a:r>
+              <a:rPr sz="800" b="0">
+                <a:solidFill>
+                  <a:srgbClr val="78828C"/>
+                </a:solidFill>
+                <a:latin typeface="Arial"/>
+              </a:rPr>
+              <a:t>Monthly Performance Review</a:t>
+            </a:r>
+          </a:p>
+        </p:txBody>
+      </p:sp>
+      <p:sp>
+        <p:nvSpPr>
+          <p:cNvPr id="9" name="TextBox 8"/>
+          <p:cNvSpPr txBox="1"/>
+          <p:nvPr/>
+        </p:nvSpPr>
+        <p:spPr>
+          <a:xfrm>
+            <a:off x="11064240" y="6611112"/>
+            <a:ext cx="822960" cy="201168"/>
+          </a:xfrm>
+          <a:prstGeom prst="rect">
+            <a:avLst/>
+          </a:prstGeom>
+          <a:noFill/>
+        </p:spPr>
+        <p:txBody>
+          <a:bodyPr wrap="square" anchor="t" lIns="0" rIns="0" tIns="0" bIns="0">
+            <a:spAutoFit/>
+          </a:bodyPr>
+          <a:lstStyle/>
+          <a:p>
+            <a:pPr algn="r"/>
+            <a:r>
+              <a:rPr sz="800" b="0">
+                <a:solidFill>
+                  <a:srgbClr val="78828C"/>
+                </a:solidFill>
+                <a:latin typeface="Arial"/>
+              </a:rPr>
+              <a:t>14 / 16</a:t>
             </a:r>
           </a:p>
         </p:txBody>
@@ -6914,7 +10753,7 @@
 </p:sld>
 </file>
 
-<file path=ppt/slides/slide12.xml><?xml version="1.0" encoding="utf-8"?>
+<file path=ppt/slides/slide15.xml><?xml version="1.0" encoding="utf-8"?>
 <p:sld xmlns:a="http://schemas.openxmlformats.org/drawingml/2006/main" xmlns:p="http://schemas.openxmlformats.org/presentationml/2006/main" xmlns:r="http://schemas.openxmlformats.org/officeDocument/2006/relationships">
   <p:cSld>
     <p:spTree>
@@ -7057,7 +10896,7 @@
                 </a:solidFill>
                 <a:latin typeface="Arial"/>
               </a:rPr>
-              <a:t>CROSS-CHANNEL PRIORITIES + NEXT STEPS</a:t>
+              <a:t>ORGANIC SEARCH  ·  THE STRUCTURAL ISSUE</a:t>
             </a:r>
           </a:p>
         </p:txBody>
@@ -7092,7 +10931,7 @@
                 </a:solidFill>
                 <a:latin typeface="Arial"/>
               </a:rPr>
-              <a:t>Concentrate in-market. Finish the measurement. Start the SEO workstream.</a:t>
+              <a:t>Organic search fell 75% in six months. Media cannot buy it back.</a:t>
             </a:r>
           </a:p>
         </p:txBody>
@@ -7206,7 +11045,1185 @@
                 </a:solidFill>
                 <a:latin typeface="Arial"/>
               </a:rPr>
-              <a:t>12 / 12</a:t>
+              <a:t>15 / 16</a:t>
+            </a:r>
+          </a:p>
+        </p:txBody>
+      </p:sp>
+      <p:graphicFrame>
+        <p:nvGraphicFramePr>
+          <p:cNvPr id="10" name="Table 9"/>
+          <p:cNvGraphicFramePr>
+            <a:graphicFrameLocks noGrp="1"/>
+          </p:cNvGraphicFramePr>
+          <p:nvPr/>
+        </p:nvGraphicFramePr>
+        <p:xfrm>
+          <a:off x="457200" y="1737360"/>
+          <a:ext cx="6035040" cy="1737360"/>
+        </p:xfrm>
+        <a:graphic>
+          <a:graphicData uri="http://schemas.openxmlformats.org/drawingml/2006/table">
+            <a:tbl>
+              <a:tblPr>
+                <a:tableStyleId>{5C22544A-7EE6-4342-B048-85BDC9FD1C3A}</a:tableStyleId>
+              </a:tblPr>
+              <a:tblGrid>
+                <a:gridCol w="2743200"/>
+                <a:gridCol w="1097280"/>
+                <a:gridCol w="1097280"/>
+                <a:gridCol w="1097280"/>
+              </a:tblGrid>
+              <a:tr h="347472">
+                <a:tc>
+                  <a:txBody>
+                    <a:bodyPr/>
+                    <a:lstStyle/>
+                    <a:p>
+                      <a:r>
+                        <a:rPr sz="850" b="1">
+                          <a:solidFill>
+                            <a:srgbClr val="FFFFFF"/>
+                          </a:solidFill>
+                          <a:latin typeface="Arial"/>
+                        </a:rPr>
+                        <a:t>Search Console (Mexico)</a:t>
+                      </a:r>
+                    </a:p>
+                  </a:txBody>
+                  <a:tcPr marL="54864" marR="54864" marT="27432" marB="27432">
+                    <a:solidFill>
+                      <a:srgbClr val="3B5998"/>
+                    </a:solidFill>
+                  </a:tcPr>
+                </a:tc>
+                <a:tc>
+                  <a:txBody>
+                    <a:bodyPr/>
+                    <a:lstStyle/>
+                    <a:p>
+                      <a:pPr algn="r"/>
+                      <a:r>
+                        <a:rPr sz="850" b="1">
+                          <a:solidFill>
+                            <a:srgbClr val="FFFFFF"/>
+                          </a:solidFill>
+                          <a:latin typeface="Arial"/>
+                        </a:rPr>
+                        <a:t>January</a:t>
+                      </a:r>
+                    </a:p>
+                  </a:txBody>
+                  <a:tcPr marL="54864" marR="54864" marT="27432" marB="27432">
+                    <a:solidFill>
+                      <a:srgbClr val="3B5998"/>
+                    </a:solidFill>
+                  </a:tcPr>
+                </a:tc>
+                <a:tc>
+                  <a:txBody>
+                    <a:bodyPr/>
+                    <a:lstStyle/>
+                    <a:p>
+                      <a:pPr algn="r"/>
+                      <a:r>
+                        <a:rPr sz="850" b="1">
+                          <a:solidFill>
+                            <a:srgbClr val="FFFFFF"/>
+                          </a:solidFill>
+                          <a:latin typeface="Arial"/>
+                        </a:rPr>
+                        <a:t>June</a:t>
+                      </a:r>
+                    </a:p>
+                  </a:txBody>
+                  <a:tcPr marL="54864" marR="54864" marT="27432" marB="27432">
+                    <a:solidFill>
+                      <a:srgbClr val="3B5998"/>
+                    </a:solidFill>
+                  </a:tcPr>
+                </a:tc>
+                <a:tc>
+                  <a:txBody>
+                    <a:bodyPr/>
+                    <a:lstStyle/>
+                    <a:p>
+                      <a:pPr algn="r"/>
+                      <a:r>
+                        <a:rPr sz="850" b="1">
+                          <a:solidFill>
+                            <a:srgbClr val="FFFFFF"/>
+                          </a:solidFill>
+                          <a:latin typeface="Arial"/>
+                        </a:rPr>
+                        <a:t>Change</a:t>
+                      </a:r>
+                    </a:p>
+                  </a:txBody>
+                  <a:tcPr marL="54864" marR="54864" marT="27432" marB="27432">
+                    <a:solidFill>
+                      <a:srgbClr val="3B5998"/>
+                    </a:solidFill>
+                  </a:tcPr>
+                </a:tc>
+              </a:tr>
+              <a:tr h="347472">
+                <a:tc>
+                  <a:txBody>
+                    <a:bodyPr/>
+                    <a:lstStyle/>
+                    <a:p>
+                      <a:r>
+                        <a:rPr sz="850" b="1">
+                          <a:solidFill>
+                            <a:srgbClr val="32373E"/>
+                          </a:solidFill>
+                          <a:latin typeface="Arial"/>
+                        </a:rPr>
+                        <a:t>Organic clicks</a:t>
+                      </a:r>
+                    </a:p>
+                  </a:txBody>
+                  <a:tcPr marL="54864" marR="54864" marT="27432" marB="27432">
+                    <a:solidFill>
+                      <a:srgbClr val="FFFFFF"/>
+                    </a:solidFill>
+                  </a:tcPr>
+                </a:tc>
+                <a:tc>
+                  <a:txBody>
+                    <a:bodyPr/>
+                    <a:lstStyle/>
+                    <a:p>
+                      <a:pPr algn="r"/>
+                      <a:r>
+                        <a:rPr sz="850" b="0">
+                          <a:solidFill>
+                            <a:srgbClr val="32373E"/>
+                          </a:solidFill>
+                          <a:latin typeface="Arial"/>
+                        </a:rPr>
+                        <a:t>4,811</a:t>
+                      </a:r>
+                    </a:p>
+                  </a:txBody>
+                  <a:tcPr marL="54864" marR="54864" marT="27432" marB="27432">
+                    <a:solidFill>
+                      <a:srgbClr val="FFFFFF"/>
+                    </a:solidFill>
+                  </a:tcPr>
+                </a:tc>
+                <a:tc>
+                  <a:txBody>
+                    <a:bodyPr/>
+                    <a:lstStyle/>
+                    <a:p>
+                      <a:pPr algn="r"/>
+                      <a:r>
+                        <a:rPr sz="850" b="0">
+                          <a:solidFill>
+                            <a:srgbClr val="32373E"/>
+                          </a:solidFill>
+                          <a:latin typeface="Arial"/>
+                        </a:rPr>
+                        <a:t>1,210</a:t>
+                      </a:r>
+                    </a:p>
+                  </a:txBody>
+                  <a:tcPr marL="54864" marR="54864" marT="27432" marB="27432">
+                    <a:solidFill>
+                      <a:srgbClr val="FFFFFF"/>
+                    </a:solidFill>
+                  </a:tcPr>
+                </a:tc>
+                <a:tc>
+                  <a:txBody>
+                    <a:bodyPr/>
+                    <a:lstStyle/>
+                    <a:p>
+                      <a:pPr algn="r"/>
+                      <a:r>
+                        <a:rPr sz="850" b="0">
+                          <a:solidFill>
+                            <a:srgbClr val="32373E"/>
+                          </a:solidFill>
+                          <a:latin typeface="Arial"/>
+                        </a:rPr>
+                        <a:t>-75%</a:t>
+                      </a:r>
+                    </a:p>
+                  </a:txBody>
+                  <a:tcPr marL="54864" marR="54864" marT="27432" marB="27432">
+                    <a:solidFill>
+                      <a:srgbClr val="FFFFFF"/>
+                    </a:solidFill>
+                  </a:tcPr>
+                </a:tc>
+              </a:tr>
+              <a:tr h="347472">
+                <a:tc>
+                  <a:txBody>
+                    <a:bodyPr/>
+                    <a:lstStyle/>
+                    <a:p>
+                      <a:r>
+                        <a:rPr sz="850" b="1">
+                          <a:solidFill>
+                            <a:srgbClr val="32373E"/>
+                          </a:solidFill>
+                          <a:latin typeface="Arial"/>
+                        </a:rPr>
+                        <a:t>Demo account page (position)</a:t>
+                      </a:r>
+                    </a:p>
+                  </a:txBody>
+                  <a:tcPr marL="54864" marR="54864" marT="27432" marB="27432">
+                    <a:solidFill>
+                      <a:srgbClr val="F3F3F3"/>
+                    </a:solidFill>
+                  </a:tcPr>
+                </a:tc>
+                <a:tc>
+                  <a:txBody>
+                    <a:bodyPr/>
+                    <a:lstStyle/>
+                    <a:p>
+                      <a:pPr algn="r"/>
+                      <a:r>
+                        <a:rPr sz="850" b="0">
+                          <a:solidFill>
+                            <a:srgbClr val="32373E"/>
+                          </a:solidFill>
+                          <a:latin typeface="Arial"/>
+                        </a:rPr>
+                        <a:t>12</a:t>
+                      </a:r>
+                    </a:p>
+                  </a:txBody>
+                  <a:tcPr marL="54864" marR="54864" marT="27432" marB="27432">
+                    <a:solidFill>
+                      <a:srgbClr val="F3F3F3"/>
+                    </a:solidFill>
+                  </a:tcPr>
+                </a:tc>
+                <a:tc>
+                  <a:txBody>
+                    <a:bodyPr/>
+                    <a:lstStyle/>
+                    <a:p>
+                      <a:pPr algn="r"/>
+                      <a:r>
+                        <a:rPr sz="850" b="0">
+                          <a:solidFill>
+                            <a:srgbClr val="32373E"/>
+                          </a:solidFill>
+                          <a:latin typeface="Arial"/>
+                        </a:rPr>
+                        <a:t>23</a:t>
+                      </a:r>
+                    </a:p>
+                  </a:txBody>
+                  <a:tcPr marL="54864" marR="54864" marT="27432" marB="27432">
+                    <a:solidFill>
+                      <a:srgbClr val="F3F3F3"/>
+                    </a:solidFill>
+                  </a:tcPr>
+                </a:tc>
+                <a:tc>
+                  <a:txBody>
+                    <a:bodyPr/>
+                    <a:lstStyle/>
+                    <a:p>
+                      <a:pPr algn="r"/>
+                      <a:r>
+                        <a:rPr sz="850" b="0">
+                          <a:solidFill>
+                            <a:srgbClr val="32373E"/>
+                          </a:solidFill>
+                          <a:latin typeface="Arial"/>
+                        </a:rPr>
+                        <a:t>slid</a:t>
+                      </a:r>
+                    </a:p>
+                  </a:txBody>
+                  <a:tcPr marL="54864" marR="54864" marT="27432" marB="27432">
+                    <a:solidFill>
+                      <a:srgbClr val="F3F3F3"/>
+                    </a:solidFill>
+                  </a:tcPr>
+                </a:tc>
+              </a:tr>
+              <a:tr h="347472">
+                <a:tc>
+                  <a:txBody>
+                    <a:bodyPr/>
+                    <a:lstStyle/>
+                    <a:p>
+                      <a:r>
+                        <a:rPr sz="850" b="1">
+                          <a:solidFill>
+                            <a:srgbClr val="32373E"/>
+                          </a:solidFill>
+                          <a:latin typeface="Arial"/>
+                        </a:rPr>
+                        <a:t>Trading academy page (position)</a:t>
+                      </a:r>
+                    </a:p>
+                  </a:txBody>
+                  <a:tcPr marL="54864" marR="54864" marT="27432" marB="27432">
+                    <a:solidFill>
+                      <a:srgbClr val="FFFFFF"/>
+                    </a:solidFill>
+                  </a:tcPr>
+                </a:tc>
+                <a:tc>
+                  <a:txBody>
+                    <a:bodyPr/>
+                    <a:lstStyle/>
+                    <a:p>
+                      <a:pPr algn="r"/>
+                      <a:r>
+                        <a:rPr sz="850" b="0">
+                          <a:solidFill>
+                            <a:srgbClr val="32373E"/>
+                          </a:solidFill>
+                          <a:latin typeface="Arial"/>
+                        </a:rPr>
+                        <a:t>14</a:t>
+                      </a:r>
+                    </a:p>
+                  </a:txBody>
+                  <a:tcPr marL="54864" marR="54864" marT="27432" marB="27432">
+                    <a:solidFill>
+                      <a:srgbClr val="FFFFFF"/>
+                    </a:solidFill>
+                  </a:tcPr>
+                </a:tc>
+                <a:tc>
+                  <a:txBody>
+                    <a:bodyPr/>
+                    <a:lstStyle/>
+                    <a:p>
+                      <a:pPr algn="r"/>
+                      <a:r>
+                        <a:rPr sz="850" b="0">
+                          <a:solidFill>
+                            <a:srgbClr val="32373E"/>
+                          </a:solidFill>
+                          <a:latin typeface="Arial"/>
+                        </a:rPr>
+                        <a:t>24</a:t>
+                      </a:r>
+                    </a:p>
+                  </a:txBody>
+                  <a:tcPr marL="54864" marR="54864" marT="27432" marB="27432">
+                    <a:solidFill>
+                      <a:srgbClr val="FFFFFF"/>
+                    </a:solidFill>
+                  </a:tcPr>
+                </a:tc>
+                <a:tc>
+                  <a:txBody>
+                    <a:bodyPr/>
+                    <a:lstStyle/>
+                    <a:p>
+                      <a:pPr algn="r"/>
+                      <a:r>
+                        <a:rPr sz="850" b="0">
+                          <a:solidFill>
+                            <a:srgbClr val="32373E"/>
+                          </a:solidFill>
+                          <a:latin typeface="Arial"/>
+                        </a:rPr>
+                        <a:t>slid</a:t>
+                      </a:r>
+                    </a:p>
+                  </a:txBody>
+                  <a:tcPr marL="54864" marR="54864" marT="27432" marB="27432">
+                    <a:solidFill>
+                      <a:srgbClr val="FFFFFF"/>
+                    </a:solidFill>
+                  </a:tcPr>
+                </a:tc>
+              </a:tr>
+              <a:tr h="347472">
+                <a:tc>
+                  <a:txBody>
+                    <a:bodyPr/>
+                    <a:lstStyle/>
+                    <a:p>
+                      <a:r>
+                        <a:rPr sz="850" b="1">
+                          <a:solidFill>
+                            <a:srgbClr val="32373E"/>
+                          </a:solidFill>
+                          <a:latin typeface="Arial"/>
+                        </a:rPr>
+                        <a:t>Homepage, brand (position)</a:t>
+                      </a:r>
+                    </a:p>
+                  </a:txBody>
+                  <a:tcPr marL="54864" marR="54864" marT="27432" marB="27432">
+                    <a:solidFill>
+                      <a:srgbClr val="F3F3F3"/>
+                    </a:solidFill>
+                  </a:tcPr>
+                </a:tc>
+                <a:tc>
+                  <a:txBody>
+                    <a:bodyPr/>
+                    <a:lstStyle/>
+                    <a:p>
+                      <a:pPr algn="r"/>
+                      <a:r>
+                        <a:rPr sz="850" b="0">
+                          <a:solidFill>
+                            <a:srgbClr val="32373E"/>
+                          </a:solidFill>
+                          <a:latin typeface="Arial"/>
+                        </a:rPr>
+                        <a:t>—</a:t>
+                      </a:r>
+                    </a:p>
+                  </a:txBody>
+                  <a:tcPr marL="54864" marR="54864" marT="27432" marB="27432">
+                    <a:solidFill>
+                      <a:srgbClr val="F3F3F3"/>
+                    </a:solidFill>
+                  </a:tcPr>
+                </a:tc>
+                <a:tc>
+                  <a:txBody>
+                    <a:bodyPr/>
+                    <a:lstStyle/>
+                    <a:p>
+                      <a:pPr algn="r"/>
+                      <a:r>
+                        <a:rPr sz="850" b="0">
+                          <a:solidFill>
+                            <a:srgbClr val="32373E"/>
+                          </a:solidFill>
+                          <a:latin typeface="Arial"/>
+                        </a:rPr>
+                        <a:t>2.5</a:t>
+                      </a:r>
+                    </a:p>
+                  </a:txBody>
+                  <a:tcPr marL="54864" marR="54864" marT="27432" marB="27432">
+                    <a:solidFill>
+                      <a:srgbClr val="F3F3F3"/>
+                    </a:solidFill>
+                  </a:tcPr>
+                </a:tc>
+                <a:tc>
+                  <a:txBody>
+                    <a:bodyPr/>
+                    <a:lstStyle/>
+                    <a:p>
+                      <a:pPr algn="r"/>
+                      <a:r>
+                        <a:rPr sz="850" b="0">
+                          <a:solidFill>
+                            <a:srgbClr val="32373E"/>
+                          </a:solidFill>
+                          <a:latin typeface="Arial"/>
+                        </a:rPr>
+                        <a:t>improved</a:t>
+                      </a:r>
+                    </a:p>
+                  </a:txBody>
+                  <a:tcPr marL="54864" marR="54864" marT="27432" marB="27432">
+                    <a:solidFill>
+                      <a:srgbClr val="F3F3F3"/>
+                    </a:solidFill>
+                  </a:tcPr>
+                </a:tc>
+              </a:tr>
+            </a:tbl>
+          </a:graphicData>
+        </a:graphic>
+      </p:graphicFrame>
+      <p:sp>
+        <p:nvSpPr>
+          <p:cNvPr id="11" name="Rectangle 10"/>
+          <p:cNvSpPr/>
+          <p:nvPr/>
+        </p:nvSpPr>
+        <p:spPr>
+          <a:xfrm>
+            <a:off x="457200" y="3749039"/>
+            <a:ext cx="6035040" cy="2560320"/>
+          </a:xfrm>
+          <a:prstGeom prst="rect">
+            <a:avLst/>
+          </a:prstGeom>
+          <a:solidFill>
+            <a:srgbClr val="F3F3F3"/>
+          </a:solidFill>
+          <a:ln>
+            <a:noFill/>
+          </a:ln>
+          <a:effectLst/>
+        </p:spPr>
+        <p:style>
+          <a:lnRef idx="1">
+            <a:schemeClr val="accent1"/>
+          </a:lnRef>
+          <a:fillRef idx="3">
+            <a:schemeClr val="accent1"/>
+          </a:fillRef>
+          <a:effectRef idx="2">
+            <a:schemeClr val="accent1"/>
+          </a:effectRef>
+          <a:fontRef idx="minor">
+            <a:schemeClr val="lt1"/>
+          </a:fontRef>
+        </p:style>
+        <p:txBody>
+          <a:bodyPr rtlCol="0" anchor="ctr"/>
+          <a:lstStyle/>
+          <a:p>
+            <a:pPr algn="ctr"/>
+          </a:p>
+        </p:txBody>
+      </p:sp>
+      <p:sp>
+        <p:nvSpPr>
+          <p:cNvPr id="12" name="Rectangle 11"/>
+          <p:cNvSpPr/>
+          <p:nvPr/>
+        </p:nvSpPr>
+        <p:spPr>
+          <a:xfrm>
+            <a:off x="457200" y="3749039"/>
+            <a:ext cx="6035040" cy="91440"/>
+          </a:xfrm>
+          <a:prstGeom prst="rect">
+            <a:avLst/>
+          </a:prstGeom>
+          <a:solidFill>
+            <a:srgbClr val="E74C3C"/>
+          </a:solidFill>
+          <a:ln>
+            <a:noFill/>
+          </a:ln>
+          <a:effectLst/>
+        </p:spPr>
+        <p:style>
+          <a:lnRef idx="1">
+            <a:schemeClr val="accent1"/>
+          </a:lnRef>
+          <a:fillRef idx="3">
+            <a:schemeClr val="accent1"/>
+          </a:fillRef>
+          <a:effectRef idx="2">
+            <a:schemeClr val="accent1"/>
+          </a:effectRef>
+          <a:fontRef idx="minor">
+            <a:schemeClr val="lt1"/>
+          </a:fontRef>
+        </p:style>
+        <p:txBody>
+          <a:bodyPr rtlCol="0" anchor="ctr"/>
+          <a:lstStyle/>
+          <a:p>
+            <a:pPr algn="ctr"/>
+          </a:p>
+        </p:txBody>
+      </p:sp>
+      <p:sp>
+        <p:nvSpPr>
+          <p:cNvPr id="13" name="TextBox 12"/>
+          <p:cNvSpPr txBox="1"/>
+          <p:nvPr/>
+        </p:nvSpPr>
+        <p:spPr>
+          <a:xfrm>
+            <a:off x="640080" y="3931920"/>
+            <a:ext cx="5669279" cy="274320"/>
+          </a:xfrm>
+          <a:prstGeom prst="rect">
+            <a:avLst/>
+          </a:prstGeom>
+          <a:noFill/>
+        </p:spPr>
+        <p:txBody>
+          <a:bodyPr wrap="square" anchor="t" lIns="0" rIns="0" tIns="0" bIns="0">
+            <a:spAutoFit/>
+          </a:bodyPr>
+          <a:lstStyle/>
+          <a:p>
+            <a:pPr algn="l"/>
+            <a:r>
+              <a:rPr sz="1000" b="1">
+                <a:solidFill>
+                  <a:srgbClr val="E74C3C"/>
+                </a:solidFill>
+                <a:latin typeface="Arial"/>
+              </a:rPr>
+              <a:t>WHAT IS DRIVING IT</a:t>
+            </a:r>
+          </a:p>
+        </p:txBody>
+      </p:sp>
+      <p:sp>
+        <p:nvSpPr>
+          <p:cNvPr id="14" name="TextBox 13"/>
+          <p:cNvSpPr txBox="1"/>
+          <p:nvPr/>
+        </p:nvSpPr>
+        <p:spPr>
+          <a:xfrm>
+            <a:off x="640080" y="4251959"/>
+            <a:ext cx="5669279" cy="1874519"/>
+          </a:xfrm>
+          <a:prstGeom prst="rect">
+            <a:avLst/>
+          </a:prstGeom>
+          <a:noFill/>
+        </p:spPr>
+        <p:txBody>
+          <a:bodyPr wrap="square" anchor="t" lIns="0" rIns="0" tIns="0" bIns="0">
+            <a:spAutoFit/>
+          </a:bodyPr>
+          <a:lstStyle/>
+          <a:p>
+            <a:pPr algn="l"/>
+            <a:r>
+              <a:rPr sz="950" b="0">
+                <a:solidFill>
+                  <a:srgbClr val="32373E"/>
+                </a:solidFill>
+                <a:latin typeface="Arial"/>
+              </a:rPr>
+              <a:t>Dated news and analysis content lost 87-99% of its clicks as it aged out, with nothing published to replace it.</a:t>
+            </a:r>
+          </a:p>
+          <a:p>
+            <a:pPr algn="l">
+              <a:spcBef>
+                <a:spcPts val="600"/>
+              </a:spcBef>
+            </a:pPr>
+            <a:r>
+              <a:rPr sz="950" b="0">
+                <a:solidFill>
+                  <a:srgbClr val="32373E"/>
+                </a:solidFill>
+                <a:latin typeface="Arial"/>
+              </a:rPr>
+              <a:t>Mid-funnel commercial pages slid in rank while brand rankings improved, and the decline spans every country the Spanish site serves. This is a site-level content issue, not a tracking artifact: site analytics confirm the same decline independently.</a:t>
+            </a:r>
+          </a:p>
+        </p:txBody>
+      </p:sp>
+      <p:sp>
+        <p:nvSpPr>
+          <p:cNvPr id="15" name="Rectangle 14"/>
+          <p:cNvSpPr/>
+          <p:nvPr/>
+        </p:nvSpPr>
+        <p:spPr>
+          <a:xfrm>
+            <a:off x="6858000" y="1737360"/>
+            <a:ext cx="4846320" cy="4572000"/>
+          </a:xfrm>
+          <a:prstGeom prst="rect">
+            <a:avLst/>
+          </a:prstGeom>
+          <a:solidFill>
+            <a:srgbClr val="F3F3F3"/>
+          </a:solidFill>
+          <a:ln>
+            <a:noFill/>
+          </a:ln>
+          <a:effectLst/>
+        </p:spPr>
+        <p:style>
+          <a:lnRef idx="1">
+            <a:schemeClr val="accent1"/>
+          </a:lnRef>
+          <a:fillRef idx="3">
+            <a:schemeClr val="accent1"/>
+          </a:fillRef>
+          <a:effectRef idx="2">
+            <a:schemeClr val="accent1"/>
+          </a:effectRef>
+          <a:fontRef idx="minor">
+            <a:schemeClr val="lt1"/>
+          </a:fontRef>
+        </p:style>
+        <p:txBody>
+          <a:bodyPr rtlCol="0" anchor="ctr"/>
+          <a:lstStyle/>
+          <a:p>
+            <a:pPr algn="ctr"/>
+          </a:p>
+        </p:txBody>
+      </p:sp>
+      <p:sp>
+        <p:nvSpPr>
+          <p:cNvPr id="16" name="Rectangle 15"/>
+          <p:cNvSpPr/>
+          <p:nvPr/>
+        </p:nvSpPr>
+        <p:spPr>
+          <a:xfrm>
+            <a:off x="6858000" y="1737360"/>
+            <a:ext cx="4846320" cy="91440"/>
+          </a:xfrm>
+          <a:prstGeom prst="rect">
+            <a:avLst/>
+          </a:prstGeom>
+          <a:solidFill>
+            <a:srgbClr val="27AE60"/>
+          </a:solidFill>
+          <a:ln>
+            <a:noFill/>
+          </a:ln>
+          <a:effectLst/>
+        </p:spPr>
+        <p:style>
+          <a:lnRef idx="1">
+            <a:schemeClr val="accent1"/>
+          </a:lnRef>
+          <a:fillRef idx="3">
+            <a:schemeClr val="accent1"/>
+          </a:fillRef>
+          <a:effectRef idx="2">
+            <a:schemeClr val="accent1"/>
+          </a:effectRef>
+          <a:fontRef idx="minor">
+            <a:schemeClr val="lt1"/>
+          </a:fontRef>
+        </p:style>
+        <p:txBody>
+          <a:bodyPr rtlCol="0" anchor="ctr"/>
+          <a:lstStyle/>
+          <a:p>
+            <a:pPr algn="ctr"/>
+          </a:p>
+        </p:txBody>
+      </p:sp>
+      <p:sp>
+        <p:nvSpPr>
+          <p:cNvPr id="17" name="TextBox 16"/>
+          <p:cNvSpPr txBox="1"/>
+          <p:nvPr/>
+        </p:nvSpPr>
+        <p:spPr>
+          <a:xfrm>
+            <a:off x="7040880" y="1920240"/>
+            <a:ext cx="4480559" cy="274320"/>
+          </a:xfrm>
+          <a:prstGeom prst="rect">
+            <a:avLst/>
+          </a:prstGeom>
+          <a:noFill/>
+        </p:spPr>
+        <p:txBody>
+          <a:bodyPr wrap="square" anchor="t" lIns="0" rIns="0" tIns="0" bIns="0">
+            <a:spAutoFit/>
+          </a:bodyPr>
+          <a:lstStyle/>
+          <a:p>
+            <a:pPr algn="l"/>
+            <a:r>
+              <a:rPr sz="1000" b="1">
+                <a:solidFill>
+                  <a:srgbClr val="27AE60"/>
+                </a:solidFill>
+                <a:latin typeface="Arial"/>
+              </a:rPr>
+              <a:t>WHAT WE RECOMMEND</a:t>
+            </a:r>
+          </a:p>
+        </p:txBody>
+      </p:sp>
+      <p:sp>
+        <p:nvSpPr>
+          <p:cNvPr id="18" name="TextBox 17"/>
+          <p:cNvSpPr txBox="1"/>
+          <p:nvPr/>
+        </p:nvSpPr>
+        <p:spPr>
+          <a:xfrm>
+            <a:off x="7040880" y="2240280"/>
+            <a:ext cx="4480559" cy="3886200"/>
+          </a:xfrm>
+          <a:prstGeom prst="rect">
+            <a:avLst/>
+          </a:prstGeom>
+          <a:noFill/>
+        </p:spPr>
+        <p:txBody>
+          <a:bodyPr wrap="square" anchor="t" lIns="0" rIns="0" tIns="0" bIns="0">
+            <a:spAutoFit/>
+          </a:bodyPr>
+          <a:lstStyle/>
+          <a:p>
+            <a:pPr algn="l"/>
+            <a:r>
+              <a:rPr sz="950" b="0">
+                <a:solidFill>
+                  <a:srgbClr val="32373E"/>
+                </a:solidFill>
+                <a:latin typeface="Arial"/>
+              </a:rPr>
+              <a:t>Open a dedicated SEO workstream for the Spanish site.</a:t>
+            </a:r>
+          </a:p>
+          <a:p>
+            <a:pPr algn="l">
+              <a:spcBef>
+                <a:spcPts val="600"/>
+              </a:spcBef>
+            </a:pPr>
+            <a:r>
+              <a:rPr sz="950" b="0">
+                <a:solidFill>
+                  <a:srgbClr val="32373E"/>
+                </a:solidFill>
+                <a:latin typeface="Arial"/>
+              </a:rPr>
+              <a:t>Restore the news and analysis publishing cadence and refresh the decayed assets that carried the traffic.</a:t>
+            </a:r>
+          </a:p>
+          <a:p>
+            <a:pPr algn="l">
+              <a:spcBef>
+                <a:spcPts val="600"/>
+              </a:spcBef>
+            </a:pPr>
+            <a:r>
+              <a:rPr sz="950" b="0">
+                <a:solidFill>
+                  <a:srgbClr val="32373E"/>
+                </a:solidFill>
+                <a:latin typeface="Arial"/>
+              </a:rPr>
+              <a:t>Run a mid-funnel rank-recovery plan for the demo, academy, and platform pages, measured on organic clicks and positions.</a:t>
+            </a:r>
+          </a:p>
+          <a:p>
+            <a:pPr algn="l">
+              <a:spcBef>
+                <a:spcPts val="600"/>
+              </a:spcBef>
+            </a:pPr>
+            <a:r>
+              <a:rPr sz="950" b="0">
+                <a:solidFill>
+                  <a:srgbClr val="32373E"/>
+                </a:solidFill>
+                <a:latin typeface="Arial"/>
+              </a:rPr>
+              <a:t>This is the structural fix for blended submissions running under plan: every month the organic base erodes, paid media has to work harder just to hold total traffic flat.</a:t>
+            </a:r>
+          </a:p>
+        </p:txBody>
+      </p:sp>
+    </p:spTree>
+  </p:cSld>
+  <p:clrMapOvr>
+    <a:masterClrMapping/>
+  </p:clrMapOvr>
+</p:sld>
+</file>
+
+<file path=ppt/slides/slide16.xml><?xml version="1.0" encoding="utf-8"?>
+<p:sld xmlns:a="http://schemas.openxmlformats.org/drawingml/2006/main" xmlns:p="http://schemas.openxmlformats.org/presentationml/2006/main" xmlns:r="http://schemas.openxmlformats.org/officeDocument/2006/relationships">
+  <p:cSld>
+    <p:spTree>
+      <p:nvGrpSpPr>
+        <p:cNvPr id="1" name=""/>
+        <p:cNvGrpSpPr/>
+        <p:nvPr/>
+      </p:nvGrpSpPr>
+      <p:grpSpPr/>
+      <p:sp>
+        <p:nvSpPr>
+          <p:cNvPr id="2" name="Rectangle 1"/>
+          <p:cNvSpPr/>
+          <p:nvPr/>
+        </p:nvSpPr>
+        <p:spPr>
+          <a:xfrm>
+            <a:off x="0" y="0"/>
+            <a:ext cx="12191695" cy="457200"/>
+          </a:xfrm>
+          <a:prstGeom prst="rect">
+            <a:avLst/>
+          </a:prstGeom>
+          <a:solidFill>
+            <a:srgbClr val="1A2A3A"/>
+          </a:solidFill>
+          <a:ln>
+            <a:noFill/>
+          </a:ln>
+          <a:effectLst/>
+        </p:spPr>
+        <p:style>
+          <a:lnRef idx="1">
+            <a:schemeClr val="accent1"/>
+          </a:lnRef>
+          <a:fillRef idx="3">
+            <a:schemeClr val="accent1"/>
+          </a:fillRef>
+          <a:effectRef idx="2">
+            <a:schemeClr val="accent1"/>
+          </a:effectRef>
+          <a:fontRef idx="minor">
+            <a:schemeClr val="lt1"/>
+          </a:fontRef>
+        </p:style>
+        <p:txBody>
+          <a:bodyPr rtlCol="0" anchor="ctr"/>
+          <a:lstStyle/>
+          <a:p>
+            <a:pPr algn="ctr"/>
+          </a:p>
+        </p:txBody>
+      </p:sp>
+      <p:sp>
+        <p:nvSpPr>
+          <p:cNvPr id="3" name="TextBox 2"/>
+          <p:cNvSpPr txBox="1"/>
+          <p:nvPr/>
+        </p:nvSpPr>
+        <p:spPr>
+          <a:xfrm>
+            <a:off x="457200" y="91440"/>
+            <a:ext cx="8229600" cy="274320"/>
+          </a:xfrm>
+          <a:prstGeom prst="rect">
+            <a:avLst/>
+          </a:prstGeom>
+          <a:noFill/>
+        </p:spPr>
+        <p:txBody>
+          <a:bodyPr wrap="square" anchor="t" lIns="0" rIns="0" tIns="0" bIns="0">
+            <a:spAutoFit/>
+          </a:bodyPr>
+          <a:lstStyle/>
+          <a:p>
+            <a:pPr algn="l"/>
+            <a:r>
+              <a:rPr sz="900" b="1">
+                <a:solidFill>
+                  <a:srgbClr val="FFFFFF"/>
+                </a:solidFill>
+                <a:latin typeface="Arial"/>
+              </a:rPr>
+              <a:t>FOREX.com  |  GGMI (LATAM)  ·  June 2026</a:t>
+            </a:r>
+          </a:p>
+        </p:txBody>
+      </p:sp>
+      <p:pic>
+        <p:nvPicPr>
+          <p:cNvPr id="4" name="Picture 3" descr="logo_1_fd6b9b.png"/>
+          <p:cNvPicPr>
+            <a:picLocks noChangeAspect="1"/>
+          </p:cNvPicPr>
+          <p:nvPr/>
+        </p:nvPicPr>
+        <p:blipFill>
+          <a:blip r:embed="rId2"/>
+          <a:stretch>
+            <a:fillRect/>
+          </a:stretch>
+        </p:blipFill>
+        <p:spPr>
+          <a:xfrm>
+            <a:off x="11155680" y="100584"/>
+            <a:ext cx="896112" cy="256032"/>
+          </a:xfrm>
+          <a:prstGeom prst="rect">
+            <a:avLst/>
+          </a:prstGeom>
+        </p:spPr>
+      </p:pic>
+      <p:sp>
+        <p:nvSpPr>
+          <p:cNvPr id="5" name="TextBox 4"/>
+          <p:cNvSpPr txBox="1"/>
+          <p:nvPr/>
+        </p:nvSpPr>
+        <p:spPr>
+          <a:xfrm>
+            <a:off x="457200" y="566928"/>
+            <a:ext cx="10972800" cy="274320"/>
+          </a:xfrm>
+          <a:prstGeom prst="rect">
+            <a:avLst/>
+          </a:prstGeom>
+          <a:noFill/>
+        </p:spPr>
+        <p:txBody>
+          <a:bodyPr wrap="square" anchor="t" lIns="0" rIns="0" tIns="0" bIns="0">
+            <a:spAutoFit/>
+          </a:bodyPr>
+          <a:lstStyle/>
+          <a:p>
+            <a:pPr algn="l"/>
+            <a:r>
+              <a:rPr sz="1100" b="1">
+                <a:solidFill>
+                  <a:srgbClr val="3B5998"/>
+                </a:solidFill>
+                <a:latin typeface="Arial"/>
+              </a:rPr>
+              <a:t>CROSS-CHANNEL PRIORITIES + NEXT STEPS</a:t>
+            </a:r>
+          </a:p>
+        </p:txBody>
+      </p:sp>
+      <p:sp>
+        <p:nvSpPr>
+          <p:cNvPr id="6" name="TextBox 5"/>
+          <p:cNvSpPr txBox="1"/>
+          <p:nvPr/>
+        </p:nvSpPr>
+        <p:spPr>
+          <a:xfrm>
+            <a:off x="457200" y="868680"/>
+            <a:ext cx="11247120" cy="685800"/>
+          </a:xfrm>
+          <a:prstGeom prst="rect">
+            <a:avLst/>
+          </a:prstGeom>
+          <a:noFill/>
+        </p:spPr>
+        <p:txBody>
+          <a:bodyPr wrap="square" anchor="t" lIns="0" rIns="0" tIns="0" bIns="0">
+            <a:spAutoFit/>
+          </a:bodyPr>
+          <a:lstStyle/>
+          <a:p>
+            <a:pPr algn="l"/>
+            <a:r>
+              <a:rPr sz="2000" b="1">
+                <a:solidFill>
+                  <a:srgbClr val="1A2A3A"/>
+                </a:solidFill>
+                <a:latin typeface="Arial"/>
+              </a:rPr>
+              <a:t>Concentrate in-market. Finish the measurement. Start the SEO workstream.</a:t>
+            </a:r>
+          </a:p>
+        </p:txBody>
+      </p:sp>
+      <p:sp>
+        <p:nvSpPr>
+          <p:cNvPr id="7" name="Rectangle 6"/>
+          <p:cNvSpPr/>
+          <p:nvPr/>
+        </p:nvSpPr>
+        <p:spPr>
+          <a:xfrm>
+            <a:off x="0" y="6583680"/>
+            <a:ext cx="12191695" cy="274320"/>
+          </a:xfrm>
+          <a:prstGeom prst="rect">
+            <a:avLst/>
+          </a:prstGeom>
+          <a:solidFill>
+            <a:srgbClr val="F3F3F3"/>
+          </a:solidFill>
+          <a:ln>
+            <a:noFill/>
+          </a:ln>
+          <a:effectLst/>
+        </p:spPr>
+        <p:style>
+          <a:lnRef idx="1">
+            <a:schemeClr val="accent1"/>
+          </a:lnRef>
+          <a:fillRef idx="3">
+            <a:schemeClr val="accent1"/>
+          </a:fillRef>
+          <a:effectRef idx="2">
+            <a:schemeClr val="accent1"/>
+          </a:effectRef>
+          <a:fontRef idx="minor">
+            <a:schemeClr val="lt1"/>
+          </a:fontRef>
+        </p:style>
+        <p:txBody>
+          <a:bodyPr rtlCol="0" anchor="ctr"/>
+          <a:lstStyle/>
+          <a:p>
+            <a:pPr algn="ctr"/>
+          </a:p>
+        </p:txBody>
+      </p:sp>
+      <p:sp>
+        <p:nvSpPr>
+          <p:cNvPr id="8" name="TextBox 7"/>
+          <p:cNvSpPr txBox="1"/>
+          <p:nvPr/>
+        </p:nvSpPr>
+        <p:spPr>
+          <a:xfrm>
+            <a:off x="457200" y="6611112"/>
+            <a:ext cx="5486400" cy="201168"/>
+          </a:xfrm>
+          <a:prstGeom prst="rect">
+            <a:avLst/>
+          </a:prstGeom>
+          <a:noFill/>
+        </p:spPr>
+        <p:txBody>
+          <a:bodyPr wrap="square" anchor="t" lIns="0" rIns="0" tIns="0" bIns="0">
+            <a:spAutoFit/>
+          </a:bodyPr>
+          <a:lstStyle/>
+          <a:p>
+            <a:pPr algn="l"/>
+            <a:r>
+              <a:rPr sz="800" b="0">
+                <a:solidFill>
+                  <a:srgbClr val="78828C"/>
+                </a:solidFill>
+                <a:latin typeface="Arial"/>
+              </a:rPr>
+              <a:t>Monthly Performance Review</a:t>
+            </a:r>
+          </a:p>
+        </p:txBody>
+      </p:sp>
+      <p:sp>
+        <p:nvSpPr>
+          <p:cNvPr id="9" name="TextBox 8"/>
+          <p:cNvSpPr txBox="1"/>
+          <p:nvPr/>
+        </p:nvSpPr>
+        <p:spPr>
+          <a:xfrm>
+            <a:off x="11064240" y="6611112"/>
+            <a:ext cx="822960" cy="201168"/>
+          </a:xfrm>
+          <a:prstGeom prst="rect">
+            <a:avLst/>
+          </a:prstGeom>
+          <a:noFill/>
+        </p:spPr>
+        <p:txBody>
+          <a:bodyPr wrap="square" anchor="t" lIns="0" rIns="0" tIns="0" bIns="0">
+            <a:spAutoFit/>
+          </a:bodyPr>
+          <a:lstStyle/>
+          <a:p>
+            <a:pPr algn="r"/>
+            <a:r>
+              <a:rPr sz="800" b="0">
+                <a:solidFill>
+                  <a:srgbClr val="78828C"/>
+                </a:solidFill>
+                <a:latin typeface="Arial"/>
+              </a:rPr>
+              <a:t>16 / 16</a:t>
             </a:r>
           </a:p>
         </p:txBody>
@@ -8172,7 +13189,7 @@
                 </a:solidFill>
                 <a:latin typeface="Arial"/>
               </a:rPr>
-              <a:t>2 / 12</a:t>
+              <a:t>2 / 16</a:t>
             </a:r>
           </a:p>
         </p:txBody>
@@ -9866,7 +14883,7 @@
                 </a:solidFill>
                 <a:latin typeface="Arial"/>
               </a:rPr>
-              <a:t>3 / 12</a:t>
+              <a:t>3 / 16</a:t>
             </a:r>
           </a:p>
         </p:txBody>
@@ -10567,7 +15584,7 @@
                 </a:solidFill>
                 <a:latin typeface="Arial"/>
               </a:rPr>
-              <a:t>4 / 12</a:t>
+              <a:t>4 / 16</a:t>
             </a:r>
           </a:p>
         </p:txBody>
@@ -12783,7 +17800,7 @@
                 </a:solidFill>
                 <a:latin typeface="Arial"/>
               </a:rPr>
-              <a:t>5 / 12</a:t>
+              <a:t>5 / 16</a:t>
             </a:r>
           </a:p>
         </p:txBody>
@@ -13468,7 +18485,7 @@
                 </a:solidFill>
                 <a:latin typeface="Arial"/>
               </a:rPr>
-              <a:t>6 / 12</a:t>
+              <a:t>6 / 16</a:t>
             </a:r>
           </a:p>
         </p:txBody>
@@ -15279,7 +20296,7 @@
                 </a:solidFill>
                 <a:latin typeface="Arial"/>
               </a:rPr>
-              <a:t>7 / 12</a:t>
+              <a:t>7 / 16</a:t>
             </a:r>
           </a:p>
         </p:txBody>
@@ -15948,7 +20965,7 @@
                 </a:solidFill>
                 <a:latin typeface="Arial"/>
               </a:rPr>
-              <a:t>8 / 12</a:t>
+              <a:t>8 / 16</a:t>
             </a:r>
           </a:p>
         </p:txBody>
@@ -18408,7 +23425,7 @@
                 </a:solidFill>
                 <a:latin typeface="Arial"/>
               </a:rPr>
-              <a:t>9 / 12</a:t>
+              <a:t>9 / 16</a:t>
             </a:r>
           </a:p>
         </p:txBody>

--- a/report-client-decks/06. GGMI_LATAM_June_2026_Performance_Review.pptx
+++ b/report-client-decks/06. GGMI_LATAM_June_2026_Performance_Review.pptx
@@ -6,6 +6,12 @@
   </p:sldMasterIdLst>
   <p:sldIdLst>
     <p:sldId id="256" r:id="rId7"/>
+    <p:sldId id="272" r:id="rId23"/>
+    <p:sldId id="266" r:id="rId17"/>
+    <p:sldId id="267" r:id="rId18"/>
+    <p:sldId id="268" r:id="rId19"/>
+    <p:sldId id="269" r:id="rId20"/>
+    <p:sldId id="270" r:id="rId21"/>
     <p:sldId id="257" r:id="rId8"/>
     <p:sldId id="258" r:id="rId9"/>
     <p:sldId id="259" r:id="rId10"/>
@@ -15,11 +21,6 @@
     <p:sldId id="263" r:id="rId14"/>
     <p:sldId id="264" r:id="rId15"/>
     <p:sldId id="265" r:id="rId16"/>
-    <p:sldId id="266" r:id="rId17"/>
-    <p:sldId id="267" r:id="rId18"/>
-    <p:sldId id="268" r:id="rId19"/>
-    <p:sldId id="269" r:id="rId20"/>
-    <p:sldId id="270" r:id="rId21"/>
     <p:sldId id="271" r:id="rId22"/>
   </p:sldIdLst>
   <p:sldSz cx="12191695" cy="6858000" type="screen4x3"/>
@@ -120,6 +121,518 @@
     </a:lvl9pPr>
   </p:defaultTextStyle>
 </p:presentation>
+</file>
+
+<file path=ppt/charts/chart1.xml><?xml version="1.0" encoding="utf-8"?>
+<c:chartSpace xmlns:c="http://schemas.openxmlformats.org/drawingml/2006/chart" xmlns:a="http://schemas.openxmlformats.org/drawingml/2006/main" xmlns:r="http://schemas.openxmlformats.org/officeDocument/2006/relationships">
+  <c:date1904 val="0"/>
+  <c:chart>
+    <c:autoTitleDeleted val="1"/>
+    <c:plotArea>
+      <c:lineChart>
+        <c:grouping val="standard"/>
+        <c:varyColors val="0"/>
+        <c:ser>
+          <c:idx val="0"/>
+          <c:order val="0"/>
+          <c:tx>
+            <c:strRef>
+              <c:f>Sheet1!$B$1</c:f>
+              <c:strCache>
+                <c:ptCount val="1"/>
+                <c:pt idx="0">
+                  <c:v>Sessions</c:v>
+                </c:pt>
+              </c:strCache>
+            </c:strRef>
+          </c:tx>
+          <c:spPr>
+            <a:ln w="28575">
+              <a:solidFill>
+                <a:srgbClr val="3B5998"/>
+              </a:solidFill>
+            </a:ln>
+          </c:spPr>
+          <c:marker>
+            <c:symbol val="circle"/>
+            <c:size val="6"/>
+            <c:spPr>
+              <a:solidFill>
+                <a:srgbClr val="3B5998"/>
+              </a:solidFill>
+              <a:ln>
+                <a:solidFill>
+                  <a:srgbClr val="FFFFFF"/>
+                </a:solidFill>
+              </a:ln>
+            </c:spPr>
+          </c:marker>
+          <c:cat>
+            <c:strRef>
+              <c:f>Sheet1!$A$2:$A$7</c:f>
+              <c:strCache>
+                <c:ptCount val="6"/>
+                <c:pt idx="0">
+                  <c:v>Jan</c:v>
+                </c:pt>
+                <c:pt idx="1">
+                  <c:v>Feb</c:v>
+                </c:pt>
+                <c:pt idx="2">
+                  <c:v>Mar</c:v>
+                </c:pt>
+                <c:pt idx="3">
+                  <c:v>Apr</c:v>
+                </c:pt>
+                <c:pt idx="4">
+                  <c:v>May</c:v>
+                </c:pt>
+                <c:pt idx="5">
+                  <c:v>Jun</c:v>
+                </c:pt>
+              </c:strCache>
+            </c:strRef>
+          </c:cat>
+          <c:val>
+            <c:numRef>
+              <c:f>Sheet1!$B$2:$B$7</c:f>
+              <c:numCache>
+                <c:formatCode>General</c:formatCode>
+                <c:ptCount val="6"/>
+                <c:pt idx="0">
+                  <c:v>9380</c:v>
+                </c:pt>
+                <c:pt idx="1">
+                  <c:v>22229</c:v>
+                </c:pt>
+                <c:pt idx="2">
+                  <c:v>12614</c:v>
+                </c:pt>
+                <c:pt idx="3">
+                  <c:v>7577</c:v>
+                </c:pt>
+                <c:pt idx="4">
+                  <c:v>5751</c:v>
+                </c:pt>
+                <c:pt idx="5">
+                  <c:v>9236</c:v>
+                </c:pt>
+              </c:numCache>
+            </c:numRef>
+          </c:val>
+          <c:smooth val="0"/>
+        </c:ser>
+        <c:ser>
+          <c:idx val="1"/>
+          <c:order val="1"/>
+          <c:tx>
+            <c:strRef>
+              <c:f>Sheet1!$C$1</c:f>
+              <c:strCache>
+                <c:ptCount val="1"/>
+                <c:pt idx="0">
+                  <c:v>Unique visitors</c:v>
+                </c:pt>
+              </c:strCache>
+            </c:strRef>
+          </c:tx>
+          <c:spPr>
+            <a:ln w="28575">
+              <a:solidFill>
+                <a:srgbClr val="27AE60"/>
+              </a:solidFill>
+            </a:ln>
+          </c:spPr>
+          <c:marker>
+            <c:symbol val="circle"/>
+            <c:size val="6"/>
+            <c:spPr>
+              <a:solidFill>
+                <a:srgbClr val="27AE60"/>
+              </a:solidFill>
+              <a:ln>
+                <a:solidFill>
+                  <a:srgbClr val="FFFFFF"/>
+                </a:solidFill>
+              </a:ln>
+            </c:spPr>
+          </c:marker>
+          <c:dLbls>
+            <c:numFmt formatCode="#,##0" sourceLinked="0"/>
+            <c:txPr>
+              <a:bodyPr/>
+              <a:lstStyle/>
+              <a:p>
+                <a:pPr>
+                  <a:defRPr sz="750">
+                    <a:solidFill>
+                      <a:srgbClr val="32373E"/>
+                    </a:solidFill>
+                  </a:defRPr>
+                </a:pPr>
+              </a:p>
+            </c:txPr>
+            <c:dLblPos val="t"/>
+            <c:showLegendKey val="0"/>
+            <c:showVal val="1"/>
+            <c:showCatName val="0"/>
+            <c:showSerName val="0"/>
+            <c:showPercent val="0"/>
+            <c:showBubbleSize val="0"/>
+            <c:showLeaderLines val="1"/>
+          </c:dLbls>
+          <c:cat>
+            <c:strRef>
+              <c:f>Sheet1!$A$2:$A$7</c:f>
+              <c:strCache>
+                <c:ptCount val="6"/>
+                <c:pt idx="0">
+                  <c:v>Jan</c:v>
+                </c:pt>
+                <c:pt idx="1">
+                  <c:v>Feb</c:v>
+                </c:pt>
+                <c:pt idx="2">
+                  <c:v>Mar</c:v>
+                </c:pt>
+                <c:pt idx="3">
+                  <c:v>Apr</c:v>
+                </c:pt>
+                <c:pt idx="4">
+                  <c:v>May</c:v>
+                </c:pt>
+                <c:pt idx="5">
+                  <c:v>Jun</c:v>
+                </c:pt>
+              </c:strCache>
+            </c:strRef>
+          </c:cat>
+          <c:val>
+            <c:numRef>
+              <c:f>Sheet1!$C$2:$C$7</c:f>
+              <c:numCache>
+                <c:formatCode>General</c:formatCode>
+                <c:ptCount val="6"/>
+                <c:pt idx="0">
+                  <c:v>4651</c:v>
+                </c:pt>
+                <c:pt idx="1">
+                  <c:v>14172</c:v>
+                </c:pt>
+                <c:pt idx="2">
+                  <c:v>6554</c:v>
+                </c:pt>
+                <c:pt idx="3">
+                  <c:v>3366</c:v>
+                </c:pt>
+                <c:pt idx="4">
+                  <c:v>2592</c:v>
+                </c:pt>
+                <c:pt idx="5">
+                  <c:v>5838</c:v>
+                </c:pt>
+              </c:numCache>
+            </c:numRef>
+          </c:val>
+          <c:smooth val="0"/>
+        </c:ser>
+        <c:marker val="1"/>
+        <c:smooth val="0"/>
+        <c:axId val="2118791784"/>
+        <c:axId val="2140495176"/>
+      </c:lineChart>
+      <c:catAx>
+        <c:axId val="2118791784"/>
+        <c:scaling>
+          <c:orientation val="minMax"/>
+        </c:scaling>
+        <c:delete val="0"/>
+        <c:axPos val="b"/>
+        <c:majorTickMark val="out"/>
+        <c:minorTickMark val="none"/>
+        <c:tickLblPos val="nextTo"/>
+        <c:spPr>
+          <a:ln>
+            <a:solidFill>
+              <a:srgbClr val="D9D9D9"/>
+            </a:solidFill>
+          </a:ln>
+        </c:spPr>
+        <c:crossAx val="2140495176"/>
+        <c:crosses val="autoZero"/>
+        <c:auto val="1"/>
+        <c:lblAlgn val="ctr"/>
+        <c:lblOffset val="100"/>
+        <c:noMultiLvlLbl val="0"/>
+      </c:catAx>
+      <c:valAx>
+        <c:axId val="2140495176"/>
+        <c:scaling/>
+        <c:delete val="0"/>
+        <c:axPos val="l"/>
+        <c:majorGridlines>
+          <c:spPr>
+            <a:ln w="6350">
+              <a:solidFill>
+                <a:srgbClr val="D9D9D9"/>
+              </a:solidFill>
+            </a:ln>
+          </c:spPr>
+        </c:majorGridlines>
+        <c:numFmt formatCode="#,##0" sourceLinked="0"/>
+        <c:majorTickMark val="out"/>
+        <c:minorTickMark val="none"/>
+        <c:tickLblPos val="nextTo"/>
+        <c:spPr>
+          <a:ln>
+            <a:noFill/>
+          </a:ln>
+        </c:spPr>
+        <c:crossAx val="2118791784"/>
+        <c:crosses val="autoZero"/>
+      </c:valAx>
+    </c:plotArea>
+    <c:legend>
+      <c:legendPos val="b"/>
+      <c:layout/>
+      <c:overlay val="0"/>
+      <c:txPr>
+        <a:bodyPr/>
+        <a:lstStyle/>
+        <a:p>
+          <a:pPr>
+            <a:defRPr sz="800"/>
+          </a:pPr>
+        </a:p>
+      </c:txPr>
+    </c:legend>
+    <c:plotVisOnly val="1"/>
+    <c:dispBlanksAs val="gap"/>
+    <c:showDLblsOverMax val="0"/>
+  </c:chart>
+  <c:txPr>
+    <a:bodyPr/>
+    <a:lstStyle/>
+    <a:p>
+      <a:pPr>
+        <a:defRPr sz="800">
+          <a:solidFill>
+            <a:srgbClr val="32373E"/>
+          </a:solidFill>
+          <a:latin typeface="Arial"/>
+        </a:defRPr>
+      </a:pPr>
+      <a:endParaRPr lang="en-US"/>
+    </a:p>
+  </c:txPr>
+  <c:externalData r:id="rId1">
+    <c:autoUpdate val="0"/>
+  </c:externalData>
+</c:chartSpace>
+</file>
+
+<file path=ppt/charts/chart2.xml><?xml version="1.0" encoding="utf-8"?>
+<c:chartSpace xmlns:c="http://schemas.openxmlformats.org/drawingml/2006/chart" xmlns:a="http://schemas.openxmlformats.org/drawingml/2006/main" xmlns:r="http://schemas.openxmlformats.org/officeDocument/2006/relationships">
+  <c:date1904 val="0"/>
+  <c:chart>
+    <c:autoTitleDeleted val="1"/>
+    <c:plotArea>
+      <c:lineChart>
+        <c:grouping val="standard"/>
+        <c:varyColors val="0"/>
+        <c:ser>
+          <c:idx val="0"/>
+          <c:order val="0"/>
+          <c:tx>
+            <c:strRef>
+              <c:f>Sheet1!$B$1</c:f>
+              <c:strCache>
+                <c:ptCount val="1"/>
+                <c:pt idx="0">
+                  <c:v>Organic Search sessions</c:v>
+                </c:pt>
+              </c:strCache>
+            </c:strRef>
+          </c:tx>
+          <c:spPr>
+            <a:ln w="28575">
+              <a:solidFill>
+                <a:srgbClr val="3B5998"/>
+              </a:solidFill>
+            </a:ln>
+          </c:spPr>
+          <c:marker>
+            <c:symbol val="circle"/>
+            <c:size val="6"/>
+            <c:spPr>
+              <a:solidFill>
+                <a:srgbClr val="3B5998"/>
+              </a:solidFill>
+              <a:ln>
+                <a:solidFill>
+                  <a:srgbClr val="FFFFFF"/>
+                </a:solidFill>
+              </a:ln>
+            </c:spPr>
+          </c:marker>
+          <c:dLbls>
+            <c:numFmt formatCode="#,##0" sourceLinked="0"/>
+            <c:txPr>
+              <a:bodyPr/>
+              <a:lstStyle/>
+              <a:p>
+                <a:pPr>
+                  <a:defRPr sz="750">
+                    <a:solidFill>
+                      <a:srgbClr val="32373E"/>
+                    </a:solidFill>
+                  </a:defRPr>
+                </a:pPr>
+              </a:p>
+            </c:txPr>
+            <c:dLblPos val="t"/>
+            <c:showLegendKey val="0"/>
+            <c:showVal val="1"/>
+            <c:showCatName val="0"/>
+            <c:showSerName val="0"/>
+            <c:showPercent val="0"/>
+            <c:showBubbleSize val="0"/>
+            <c:showLeaderLines val="1"/>
+          </c:dLbls>
+          <c:cat>
+            <c:strRef>
+              <c:f>Sheet1!$A$2:$A$7</c:f>
+              <c:strCache>
+                <c:ptCount val="6"/>
+                <c:pt idx="0">
+                  <c:v>Jan</c:v>
+                </c:pt>
+                <c:pt idx="1">
+                  <c:v>Feb</c:v>
+                </c:pt>
+                <c:pt idx="2">
+                  <c:v>Mar</c:v>
+                </c:pt>
+                <c:pt idx="3">
+                  <c:v>Apr</c:v>
+                </c:pt>
+                <c:pt idx="4">
+                  <c:v>May</c:v>
+                </c:pt>
+                <c:pt idx="5">
+                  <c:v>Jun</c:v>
+                </c:pt>
+              </c:strCache>
+            </c:strRef>
+          </c:cat>
+          <c:val>
+            <c:numRef>
+              <c:f>Sheet1!$B$2:$B$7</c:f>
+              <c:numCache>
+                <c:formatCode>General</c:formatCode>
+                <c:ptCount val="6"/>
+                <c:pt idx="0">
+                  <c:v>4958</c:v>
+                </c:pt>
+                <c:pt idx="1">
+                  <c:v>3193</c:v>
+                </c:pt>
+                <c:pt idx="2">
+                  <c:v>3385</c:v>
+                </c:pt>
+                <c:pt idx="3">
+                  <c:v>2055</c:v>
+                </c:pt>
+                <c:pt idx="4">
+                  <c:v>1260</c:v>
+                </c:pt>
+                <c:pt idx="5">
+                  <c:v>1313</c:v>
+                </c:pt>
+              </c:numCache>
+            </c:numRef>
+          </c:val>
+          <c:smooth val="0"/>
+        </c:ser>
+        <c:marker val="1"/>
+        <c:smooth val="0"/>
+        <c:axId val="2118791784"/>
+        <c:axId val="2140495176"/>
+      </c:lineChart>
+      <c:catAx>
+        <c:axId val="2118791784"/>
+        <c:scaling>
+          <c:orientation val="minMax"/>
+        </c:scaling>
+        <c:delete val="0"/>
+        <c:axPos val="b"/>
+        <c:majorTickMark val="out"/>
+        <c:minorTickMark val="none"/>
+        <c:tickLblPos val="nextTo"/>
+        <c:spPr>
+          <a:ln>
+            <a:solidFill>
+              <a:srgbClr val="D9D9D9"/>
+            </a:solidFill>
+          </a:ln>
+        </c:spPr>
+        <c:crossAx val="2140495176"/>
+        <c:crosses val="autoZero"/>
+        <c:auto val="1"/>
+        <c:lblAlgn val="ctr"/>
+        <c:lblOffset val="100"/>
+        <c:noMultiLvlLbl val="0"/>
+      </c:catAx>
+      <c:valAx>
+        <c:axId val="2140495176"/>
+        <c:scaling/>
+        <c:delete val="0"/>
+        <c:axPos val="l"/>
+        <c:majorGridlines>
+          <c:spPr>
+            <a:ln w="6350">
+              <a:solidFill>
+                <a:srgbClr val="D9D9D9"/>
+              </a:solidFill>
+            </a:ln>
+          </c:spPr>
+        </c:majorGridlines>
+        <c:numFmt formatCode="#,##0" sourceLinked="0"/>
+        <c:majorTickMark val="out"/>
+        <c:minorTickMark val="none"/>
+        <c:tickLblPos val="nextTo"/>
+        <c:spPr>
+          <a:ln>
+            <a:noFill/>
+          </a:ln>
+        </c:spPr>
+        <c:crossAx val="2118791784"/>
+        <c:crosses val="autoZero"/>
+      </c:valAx>
+    </c:plotArea>
+    <c:plotVisOnly val="1"/>
+    <c:dispBlanksAs val="gap"/>
+    <c:showDLblsOverMax val="0"/>
+  </c:chart>
+  <c:txPr>
+    <a:bodyPr/>
+    <a:lstStyle/>
+    <a:p>
+      <a:pPr>
+        <a:defRPr sz="800">
+          <a:solidFill>
+            <a:srgbClr val="32373E"/>
+          </a:solidFill>
+          <a:latin typeface="Arial"/>
+        </a:defRPr>
+      </a:pPr>
+      <a:endParaRPr lang="en-US"/>
+    </a:p>
+  </c:txPr>
+  <c:externalData r:id="rId1">
+    <c:autoUpdate val="0"/>
+  </c:externalData>
+</c:chartSpace>
 </file>
 
 <file path=ppt/slideLayouts/slideLayout1.xml><?xml version="1.0" encoding="utf-8"?>
@@ -3289,7 +3802,7 @@
                 </a:solidFill>
                 <a:latin typeface="Arial"/>
               </a:rPr>
-              <a:t>MONTHLY PERFORMANCE REVIEW</a:t>
+              <a:t>QUARTERLY BUSINESS REVIEW</a:t>
             </a:r>
           </a:p>
         </p:txBody>
@@ -3359,7 +3872,7 @@
                 </a:solidFill>
                 <a:latin typeface="Arial"/>
               </a:rPr>
-              <a:t>June 2026 Performance Review  ·  Q3 FY2026 in Review</a:t>
+              <a:t>Q3 FY2026 Business Review  ·  June 2026 Performance</a:t>
             </a:r>
           </a:p>
         </p:txBody>
@@ -3699,7 +4212,7 @@
                 </a:solidFill>
                 <a:latin typeface="Arial"/>
               </a:rPr>
-              <a:t>Monthly Performance Review</a:t>
+              <a:t>Performance Review</a:t>
             </a:r>
           </a:p>
         </p:txBody>
@@ -3734,7 +4247,7 @@
                 </a:solidFill>
                 <a:latin typeface="Arial"/>
               </a:rPr>
-              <a:t>10 / 16</a:t>
+              <a:t>16 / 17</a:t>
             </a:r>
           </a:p>
         </p:txBody>
@@ -5973,7 +6486,7 @@
                 </a:solidFill>
                 <a:latin typeface="Arial"/>
               </a:rPr>
-              <a:t>Monthly Performance Review</a:t>
+              <a:t>Performance Review</a:t>
             </a:r>
           </a:p>
         </p:txBody>
@@ -6008,7 +6521,7 @@
                 </a:solidFill>
                 <a:latin typeface="Arial"/>
               </a:rPr>
-              <a:t>11 / 16</a:t>
+              <a:t>3 / 17</a:t>
             </a:r>
           </a:p>
         </p:txBody>
@@ -7228,7 +7741,7 @@
                 </a:solidFill>
                 <a:latin typeface="Arial"/>
               </a:rPr>
-              <a:t>Monthly Performance Review</a:t>
+              <a:t>Performance Review</a:t>
             </a:r>
           </a:p>
         </p:txBody>
@@ -7263,7 +7776,7 @@
                 </a:solidFill>
                 <a:latin typeface="Arial"/>
               </a:rPr>
-              <a:t>12 / 16</a:t>
+              <a:t>4 / 17</a:t>
             </a:r>
           </a:p>
         </p:txBody>
@@ -8599,7 +9112,7 @@
                 </a:solidFill>
                 <a:latin typeface="Arial"/>
               </a:rPr>
-              <a:t>Monthly Performance Review</a:t>
+              <a:t>Performance Review</a:t>
             </a:r>
           </a:p>
         </p:txBody>
@@ -8634,7 +9147,7 @@
                 </a:solidFill>
                 <a:latin typeface="Arial"/>
               </a:rPr>
-              <a:t>13 / 16</a:t>
+              <a:t>5 / 17</a:t>
             </a:r>
           </a:p>
         </p:txBody>
@@ -9808,7 +10321,7 @@
                 </a:solidFill>
                 <a:latin typeface="Arial"/>
               </a:rPr>
-              <a:t>Monthly Performance Review</a:t>
+              <a:t>Performance Review</a:t>
             </a:r>
           </a:p>
         </p:txBody>
@@ -9843,525 +10356,26 @@
                 </a:solidFill>
                 <a:latin typeface="Arial"/>
               </a:rPr>
-              <a:t>14 / 16</a:t>
+              <a:t>6 / 17</a:t>
             </a:r>
           </a:p>
         </p:txBody>
       </p:sp>
       <p:graphicFrame>
         <p:nvGraphicFramePr>
-          <p:cNvPr id="10" name="Table 9"/>
+          <p:cNvPr id="10" name="Chart 9"/>
           <p:cNvGraphicFramePr>
             <a:graphicFrameLocks noGrp="1"/>
           </p:cNvGraphicFramePr>
           <p:nvPr/>
         </p:nvGraphicFramePr>
         <p:xfrm>
-          <a:off x="457200" y="1737360"/>
-          <a:ext cx="6784848" cy="1188720"/>
+          <a:off x="457200" y="1783080"/>
+          <a:ext cx="6400800" cy="2606040"/>
         </p:xfrm>
         <a:graphic>
-          <a:graphicData uri="http://schemas.openxmlformats.org/drawingml/2006/table">
-            <a:tbl>
-              <a:tblPr>
-                <a:tableStyleId>{5C22544A-7EE6-4342-B048-85BDC9FD1C3A}</a:tableStyleId>
-              </a:tblPr>
-              <a:tblGrid>
-                <a:gridCol w="1737360"/>
-                <a:gridCol w="841248"/>
-                <a:gridCol w="841248"/>
-                <a:gridCol w="841248"/>
-                <a:gridCol w="841248"/>
-                <a:gridCol w="841248"/>
-                <a:gridCol w="841248"/>
-              </a:tblGrid>
-              <a:tr h="396240">
-                <a:tc>
-                  <a:txBody>
-                    <a:bodyPr/>
-                    <a:lstStyle/>
-                    <a:p>
-                      <a:r>
-                        <a:rPr sz="850" b="1">
-                          <a:solidFill>
-                            <a:srgbClr val="FFFFFF"/>
-                          </a:solidFill>
-                          <a:latin typeface="Arial"/>
-                        </a:rPr>
-                        <a:t/>
-                      </a:r>
-                    </a:p>
-                  </a:txBody>
-                  <a:tcPr marL="54864" marR="54864" marT="27432" marB="27432">
-                    <a:solidFill>
-                      <a:srgbClr val="3B5998"/>
-                    </a:solidFill>
-                  </a:tcPr>
-                </a:tc>
-                <a:tc>
-                  <a:txBody>
-                    <a:bodyPr/>
-                    <a:lstStyle/>
-                    <a:p>
-                      <a:pPr algn="r"/>
-                      <a:r>
-                        <a:rPr sz="850" b="1">
-                          <a:solidFill>
-                            <a:srgbClr val="FFFFFF"/>
-                          </a:solidFill>
-                          <a:latin typeface="Arial"/>
-                        </a:rPr>
-                        <a:t>Jan</a:t>
-                      </a:r>
-                    </a:p>
-                  </a:txBody>
-                  <a:tcPr marL="54864" marR="54864" marT="27432" marB="27432">
-                    <a:solidFill>
-                      <a:srgbClr val="3B5998"/>
-                    </a:solidFill>
-                  </a:tcPr>
-                </a:tc>
-                <a:tc>
-                  <a:txBody>
-                    <a:bodyPr/>
-                    <a:lstStyle/>
-                    <a:p>
-                      <a:pPr algn="r"/>
-                      <a:r>
-                        <a:rPr sz="850" b="1">
-                          <a:solidFill>
-                            <a:srgbClr val="FFFFFF"/>
-                          </a:solidFill>
-                          <a:latin typeface="Arial"/>
-                        </a:rPr>
-                        <a:t>Feb</a:t>
-                      </a:r>
-                    </a:p>
-                  </a:txBody>
-                  <a:tcPr marL="54864" marR="54864" marT="27432" marB="27432">
-                    <a:solidFill>
-                      <a:srgbClr val="3B5998"/>
-                    </a:solidFill>
-                  </a:tcPr>
-                </a:tc>
-                <a:tc>
-                  <a:txBody>
-                    <a:bodyPr/>
-                    <a:lstStyle/>
-                    <a:p>
-                      <a:pPr algn="r"/>
-                      <a:r>
-                        <a:rPr sz="850" b="1">
-                          <a:solidFill>
-                            <a:srgbClr val="FFFFFF"/>
-                          </a:solidFill>
-                          <a:latin typeface="Arial"/>
-                        </a:rPr>
-                        <a:t>Mar</a:t>
-                      </a:r>
-                    </a:p>
-                  </a:txBody>
-                  <a:tcPr marL="54864" marR="54864" marT="27432" marB="27432">
-                    <a:solidFill>
-                      <a:srgbClr val="3B5998"/>
-                    </a:solidFill>
-                  </a:tcPr>
-                </a:tc>
-                <a:tc>
-                  <a:txBody>
-                    <a:bodyPr/>
-                    <a:lstStyle/>
-                    <a:p>
-                      <a:pPr algn="r"/>
-                      <a:r>
-                        <a:rPr sz="850" b="1">
-                          <a:solidFill>
-                            <a:srgbClr val="FFFFFF"/>
-                          </a:solidFill>
-                          <a:latin typeface="Arial"/>
-                        </a:rPr>
-                        <a:t>Apr</a:t>
-                      </a:r>
-                    </a:p>
-                  </a:txBody>
-                  <a:tcPr marL="54864" marR="54864" marT="27432" marB="27432">
-                    <a:solidFill>
-                      <a:srgbClr val="3B5998"/>
-                    </a:solidFill>
-                  </a:tcPr>
-                </a:tc>
-                <a:tc>
-                  <a:txBody>
-                    <a:bodyPr/>
-                    <a:lstStyle/>
-                    <a:p>
-                      <a:pPr algn="r"/>
-                      <a:r>
-                        <a:rPr sz="850" b="1">
-                          <a:solidFill>
-                            <a:srgbClr val="FFFFFF"/>
-                          </a:solidFill>
-                          <a:latin typeface="Arial"/>
-                        </a:rPr>
-                        <a:t>May</a:t>
-                      </a:r>
-                    </a:p>
-                  </a:txBody>
-                  <a:tcPr marL="54864" marR="54864" marT="27432" marB="27432">
-                    <a:solidFill>
-                      <a:srgbClr val="3B5998"/>
-                    </a:solidFill>
-                  </a:tcPr>
-                </a:tc>
-                <a:tc>
-                  <a:txBody>
-                    <a:bodyPr/>
-                    <a:lstStyle/>
-                    <a:p>
-                      <a:pPr algn="r"/>
-                      <a:r>
-                        <a:rPr sz="850" b="1">
-                          <a:solidFill>
-                            <a:srgbClr val="FFFFFF"/>
-                          </a:solidFill>
-                          <a:latin typeface="Arial"/>
-                        </a:rPr>
-                        <a:t>Jun</a:t>
-                      </a:r>
-                    </a:p>
-                  </a:txBody>
-                  <a:tcPr marL="54864" marR="54864" marT="27432" marB="27432">
-                    <a:solidFill>
-                      <a:srgbClr val="3B5998"/>
-                    </a:solidFill>
-                  </a:tcPr>
-                </a:tc>
-              </a:tr>
-              <a:tr h="396240">
-                <a:tc>
-                  <a:txBody>
-                    <a:bodyPr/>
-                    <a:lstStyle/>
-                    <a:p>
-                      <a:r>
-                        <a:rPr sz="850" b="1">
-                          <a:solidFill>
-                            <a:srgbClr val="32373E"/>
-                          </a:solidFill>
-                          <a:latin typeface="Arial"/>
-                        </a:rPr>
-                        <a:t>Sessions</a:t>
-                      </a:r>
-                    </a:p>
-                  </a:txBody>
-                  <a:tcPr marL="54864" marR="54864" marT="27432" marB="27432">
-                    <a:solidFill>
-                      <a:srgbClr val="FFFFFF"/>
-                    </a:solidFill>
-                  </a:tcPr>
-                </a:tc>
-                <a:tc>
-                  <a:txBody>
-                    <a:bodyPr/>
-                    <a:lstStyle/>
-                    <a:p>
-                      <a:pPr algn="r"/>
-                      <a:r>
-                        <a:rPr sz="850" b="0">
-                          <a:solidFill>
-                            <a:srgbClr val="32373E"/>
-                          </a:solidFill>
-                          <a:latin typeface="Arial"/>
-                        </a:rPr>
-                        <a:t>9,380</a:t>
-                      </a:r>
-                    </a:p>
-                  </a:txBody>
-                  <a:tcPr marL="54864" marR="54864" marT="27432" marB="27432">
-                    <a:solidFill>
-                      <a:srgbClr val="FFFFFF"/>
-                    </a:solidFill>
-                  </a:tcPr>
-                </a:tc>
-                <a:tc>
-                  <a:txBody>
-                    <a:bodyPr/>
-                    <a:lstStyle/>
-                    <a:p>
-                      <a:pPr algn="r"/>
-                      <a:r>
-                        <a:rPr sz="850" b="0">
-                          <a:solidFill>
-                            <a:srgbClr val="32373E"/>
-                          </a:solidFill>
-                          <a:latin typeface="Arial"/>
-                        </a:rPr>
-                        <a:t>22,229</a:t>
-                      </a:r>
-                    </a:p>
-                  </a:txBody>
-                  <a:tcPr marL="54864" marR="54864" marT="27432" marB="27432">
-                    <a:solidFill>
-                      <a:srgbClr val="FFFFFF"/>
-                    </a:solidFill>
-                  </a:tcPr>
-                </a:tc>
-                <a:tc>
-                  <a:txBody>
-                    <a:bodyPr/>
-                    <a:lstStyle/>
-                    <a:p>
-                      <a:pPr algn="r"/>
-                      <a:r>
-                        <a:rPr sz="850" b="0">
-                          <a:solidFill>
-                            <a:srgbClr val="32373E"/>
-                          </a:solidFill>
-                          <a:latin typeface="Arial"/>
-                        </a:rPr>
-                        <a:t>12,614</a:t>
-                      </a:r>
-                    </a:p>
-                  </a:txBody>
-                  <a:tcPr marL="54864" marR="54864" marT="27432" marB="27432">
-                    <a:solidFill>
-                      <a:srgbClr val="FFFFFF"/>
-                    </a:solidFill>
-                  </a:tcPr>
-                </a:tc>
-                <a:tc>
-                  <a:txBody>
-                    <a:bodyPr/>
-                    <a:lstStyle/>
-                    <a:p>
-                      <a:pPr algn="r"/>
-                      <a:r>
-                        <a:rPr sz="850" b="0">
-                          <a:solidFill>
-                            <a:srgbClr val="32373E"/>
-                          </a:solidFill>
-                          <a:latin typeface="Arial"/>
-                        </a:rPr>
-                        <a:t>7,577</a:t>
-                      </a:r>
-                    </a:p>
-                  </a:txBody>
-                  <a:tcPr marL="54864" marR="54864" marT="27432" marB="27432">
-                    <a:solidFill>
-                      <a:srgbClr val="FFFFFF"/>
-                    </a:solidFill>
-                  </a:tcPr>
-                </a:tc>
-                <a:tc>
-                  <a:txBody>
-                    <a:bodyPr/>
-                    <a:lstStyle/>
-                    <a:p>
-                      <a:pPr algn="r"/>
-                      <a:r>
-                        <a:rPr sz="850" b="0">
-                          <a:solidFill>
-                            <a:srgbClr val="32373E"/>
-                          </a:solidFill>
-                          <a:latin typeface="Arial"/>
-                        </a:rPr>
-                        <a:t>5,751</a:t>
-                      </a:r>
-                    </a:p>
-                  </a:txBody>
-                  <a:tcPr marL="54864" marR="54864" marT="27432" marB="27432">
-                    <a:solidFill>
-                      <a:srgbClr val="FFFFFF"/>
-                    </a:solidFill>
-                  </a:tcPr>
-                </a:tc>
-                <a:tc>
-                  <a:txBody>
-                    <a:bodyPr/>
-                    <a:lstStyle/>
-                    <a:p>
-                      <a:pPr algn="r"/>
-                      <a:r>
-                        <a:rPr sz="850" b="0">
-                          <a:solidFill>
-                            <a:srgbClr val="32373E"/>
-                          </a:solidFill>
-                          <a:latin typeface="Arial"/>
-                        </a:rPr>
-                        <a:t>9,236</a:t>
-                      </a:r>
-                    </a:p>
-                  </a:txBody>
-                  <a:tcPr marL="54864" marR="54864" marT="27432" marB="27432">
-                    <a:solidFill>
-                      <a:srgbClr val="FFFFFF"/>
-                    </a:solidFill>
-                  </a:tcPr>
-                </a:tc>
-              </a:tr>
-              <a:tr h="396240">
-                <a:tc>
-                  <a:txBody>
-                    <a:bodyPr/>
-                    <a:lstStyle/>
-                    <a:p>
-                      <a:r>
-                        <a:rPr sz="850" b="1">
-                          <a:solidFill>
-                            <a:srgbClr val="32373E"/>
-                          </a:solidFill>
-                          <a:latin typeface="Arial"/>
-                        </a:rPr>
-                        <a:t>Unique visitors</a:t>
-                      </a:r>
-                    </a:p>
-                  </a:txBody>
-                  <a:tcPr marL="54864" marR="54864" marT="27432" marB="27432">
-                    <a:solidFill>
-                      <a:srgbClr val="F3F3F3"/>
-                    </a:solidFill>
-                  </a:tcPr>
-                </a:tc>
-                <a:tc>
-                  <a:txBody>
-                    <a:bodyPr/>
-                    <a:lstStyle/>
-                    <a:p>
-                      <a:pPr algn="r"/>
-                      <a:r>
-                        <a:rPr sz="850" b="0">
-                          <a:solidFill>
-                            <a:srgbClr val="32373E"/>
-                          </a:solidFill>
-                          <a:latin typeface="Arial"/>
-                        </a:rPr>
-                        <a:t>4,651</a:t>
-                      </a:r>
-                    </a:p>
-                  </a:txBody>
-                  <a:tcPr marL="54864" marR="54864" marT="27432" marB="27432">
-                    <a:solidFill>
-                      <a:srgbClr val="F3F3F3"/>
-                    </a:solidFill>
-                  </a:tcPr>
-                </a:tc>
-                <a:tc>
-                  <a:txBody>
-                    <a:bodyPr/>
-                    <a:lstStyle/>
-                    <a:p>
-                      <a:pPr algn="r"/>
-                      <a:r>
-                        <a:rPr sz="850" b="0">
-                          <a:solidFill>
-                            <a:srgbClr val="32373E"/>
-                          </a:solidFill>
-                          <a:latin typeface="Arial"/>
-                        </a:rPr>
-                        <a:t>14,172</a:t>
-                      </a:r>
-                    </a:p>
-                  </a:txBody>
-                  <a:tcPr marL="54864" marR="54864" marT="27432" marB="27432">
-                    <a:solidFill>
-                      <a:srgbClr val="F3F3F3"/>
-                    </a:solidFill>
-                  </a:tcPr>
-                </a:tc>
-                <a:tc>
-                  <a:txBody>
-                    <a:bodyPr/>
-                    <a:lstStyle/>
-                    <a:p>
-                      <a:pPr algn="r"/>
-                      <a:r>
-                        <a:rPr sz="850" b="0">
-                          <a:solidFill>
-                            <a:srgbClr val="32373E"/>
-                          </a:solidFill>
-                          <a:latin typeface="Arial"/>
-                        </a:rPr>
-                        <a:t>6,554</a:t>
-                      </a:r>
-                    </a:p>
-                  </a:txBody>
-                  <a:tcPr marL="54864" marR="54864" marT="27432" marB="27432">
-                    <a:solidFill>
-                      <a:srgbClr val="F3F3F3"/>
-                    </a:solidFill>
-                  </a:tcPr>
-                </a:tc>
-                <a:tc>
-                  <a:txBody>
-                    <a:bodyPr/>
-                    <a:lstStyle/>
-                    <a:p>
-                      <a:pPr algn="r"/>
-                      <a:r>
-                        <a:rPr sz="850" b="0">
-                          <a:solidFill>
-                            <a:srgbClr val="32373E"/>
-                          </a:solidFill>
-                          <a:latin typeface="Arial"/>
-                        </a:rPr>
-                        <a:t>3,366</a:t>
-                      </a:r>
-                    </a:p>
-                  </a:txBody>
-                  <a:tcPr marL="54864" marR="54864" marT="27432" marB="27432">
-                    <a:solidFill>
-                      <a:srgbClr val="F3F3F3"/>
-                    </a:solidFill>
-                  </a:tcPr>
-                </a:tc>
-                <a:tc>
-                  <a:txBody>
-                    <a:bodyPr/>
-                    <a:lstStyle/>
-                    <a:p>
-                      <a:pPr algn="r"/>
-                      <a:r>
-                        <a:rPr sz="850" b="0">
-                          <a:solidFill>
-                            <a:srgbClr val="32373E"/>
-                          </a:solidFill>
-                          <a:latin typeface="Arial"/>
-                        </a:rPr>
-                        <a:t>2,592</a:t>
-                      </a:r>
-                    </a:p>
-                  </a:txBody>
-                  <a:tcPr marL="54864" marR="54864" marT="27432" marB="27432">
-                    <a:solidFill>
-                      <a:srgbClr val="F3F3F3"/>
-                    </a:solidFill>
-                  </a:tcPr>
-                </a:tc>
-                <a:tc>
-                  <a:txBody>
-                    <a:bodyPr/>
-                    <a:lstStyle/>
-                    <a:p>
-                      <a:pPr algn="r"/>
-                      <a:r>
-                        <a:rPr sz="850" b="0">
-                          <a:solidFill>
-                            <a:srgbClr val="32373E"/>
-                          </a:solidFill>
-                          <a:latin typeface="Arial"/>
-                        </a:rPr>
-                        <a:t>5,838</a:t>
-                      </a:r>
-                    </a:p>
-                  </a:txBody>
-                  <a:tcPr marL="54864" marR="54864" marT="27432" marB="27432">
-                    <a:solidFill>
-                      <a:srgbClr val="F3F3F3"/>
-                    </a:solidFill>
-                  </a:tcPr>
-                </a:tc>
-              </a:tr>
-            </a:tbl>
+          <a:graphicData uri="http://schemas.openxmlformats.org/drawingml/2006/chart">
+            <c:chart xmlns:c="http://schemas.openxmlformats.org/drawingml/2006/chart" r:id="rId3"/>
           </a:graphicData>
         </a:graphic>
       </p:graphicFrame>
@@ -10373,8 +10387,8 @@
         </p:nvSpPr>
         <p:spPr>
           <a:xfrm>
-            <a:off x="457200" y="3200400"/>
-            <a:ext cx="6766560" cy="3108960"/>
+            <a:off x="457200" y="4572000"/>
+            <a:ext cx="6400800" cy="1737360"/>
           </a:xfrm>
           <a:prstGeom prst="rect">
             <a:avLst/>
@@ -10417,8 +10431,8 @@
         </p:nvSpPr>
         <p:spPr>
           <a:xfrm>
-            <a:off x="457200" y="3200400"/>
-            <a:ext cx="6766560" cy="91440"/>
+            <a:off x="457200" y="4572000"/>
+            <a:ext cx="6400800" cy="91440"/>
           </a:xfrm>
           <a:prstGeom prst="rect">
             <a:avLst/>
@@ -10461,8 +10475,8 @@
         </p:nvSpPr>
         <p:spPr>
           <a:xfrm>
-            <a:off x="640080" y="3383280"/>
-            <a:ext cx="6400800" cy="274320"/>
+            <a:off x="640080" y="4754880"/>
+            <a:ext cx="6035040" cy="274320"/>
           </a:xfrm>
           <a:prstGeom prst="rect">
             <a:avLst/>
@@ -10483,7 +10497,7 @@
                 </a:solidFill>
                 <a:latin typeface="Arial"/>
               </a:rPr>
-              <a:t>THE HONEST READ: THREE SEPARATE EVENTS</a:t>
+              <a:t>THE HONEST READ</a:t>
             </a:r>
           </a:p>
         </p:txBody>
@@ -10496,8 +10510,8 @@
         </p:nvSpPr>
         <p:spPr>
           <a:xfrm>
-            <a:off x="640080" y="3703320"/>
-            <a:ext cx="6400800" cy="2423160"/>
+            <a:off x="640080" y="5074920"/>
+            <a:ext cx="6035040" cy="1051560"/>
           </a:xfrm>
           <a:prstGeom prst="rect">
             <a:avLst/>
@@ -10518,39 +10532,7 @@
                 </a:solidFill>
                 <a:latin typeface="Arial"/>
               </a:rPr>
-              <a:t>February's peak was a single paid flight, not organic growth. One campaign delivered 13,323 sessions that month and ended in early March. February is not a valid baseline.</a:t>
-            </a:r>
-          </a:p>
-          <a:p>
-            <a:pPr algn="l">
-              <a:spcBef>
-                <a:spcPts val="600"/>
-              </a:spcBef>
-            </a:pPr>
-            <a:r>
-              <a:rPr sz="950" b="0">
-                <a:solidFill>
-                  <a:srgbClr val="32373E"/>
-                </a:solidFill>
-                <a:latin typeface="Arial"/>
-              </a:rPr>
-              <a:t>The March-May slide is an organic search decline, confirmed in Search Console: Mexico organic clicks fell 75% January to June. Brand rankings improved while dated content and mid-funnel pages lost ground, so this is a content issue, not a tracking artifact.</a:t>
-            </a:r>
-          </a:p>
-          <a:p>
-            <a:pPr algn="l">
-              <a:spcBef>
-                <a:spcPts val="600"/>
-              </a:spcBef>
-            </a:pPr>
-            <a:r>
-              <a:rPr sz="950" b="0">
-                <a:solidFill>
-                  <a:srgbClr val="32373E"/>
-                </a:solidFill>
-                <a:latin typeface="Arial"/>
-              </a:rPr>
-              <a:t>June's rebound was bought. Of the +3,485 sessions vs May, paid search added +2,601, paid social +537, display +274. Organic added +94.</a:t>
+              <a:t>February was one paid flight, not organic growth; it ended in early March and is not a baseline. The March-May slide is organic search decline, confirmed in Search Console. June's rebound was bought: of the +3,485 sessions vs May, paid search added +2,601, paid social +537, display +274. Organic added +94.</a:t>
             </a:r>
           </a:p>
         </p:txBody>
@@ -10563,8 +10545,8 @@
         </p:nvSpPr>
         <p:spPr>
           <a:xfrm>
-            <a:off x="7406640" y="1737360"/>
-            <a:ext cx="4297680" cy="4572000"/>
+            <a:off x="7223760" y="1783080"/>
+            <a:ext cx="4480560" cy="4526280"/>
           </a:xfrm>
           <a:prstGeom prst="rect">
             <a:avLst/>
@@ -10607,8 +10589,8 @@
         </p:nvSpPr>
         <p:spPr>
           <a:xfrm>
-            <a:off x="7406640" y="1737360"/>
-            <a:ext cx="4297680" cy="91440"/>
+            <a:off x="7223760" y="1783080"/>
+            <a:ext cx="4480560" cy="91440"/>
           </a:xfrm>
           <a:prstGeom prst="rect">
             <a:avLst/>
@@ -10651,8 +10633,8 @@
         </p:nvSpPr>
         <p:spPr>
           <a:xfrm>
-            <a:off x="7589519" y="1920240"/>
-            <a:ext cx="3931920" cy="274320"/>
+            <a:off x="7406640" y="1965960"/>
+            <a:ext cx="4114800" cy="274320"/>
           </a:xfrm>
           <a:prstGeom prst="rect">
             <a:avLst/>
@@ -10686,8 +10668,8 @@
         </p:nvSpPr>
         <p:spPr>
           <a:xfrm>
-            <a:off x="7589519" y="2240280"/>
-            <a:ext cx="3931920" cy="3886200"/>
+            <a:off x="7406640" y="2286000"/>
+            <a:ext cx="4114800" cy="3840480"/>
           </a:xfrm>
           <a:prstGeom prst="rect">
             <a:avLst/>
@@ -11010,7 +10992,7 @@
                 </a:solidFill>
                 <a:latin typeface="Arial"/>
               </a:rPr>
-              <a:t>Monthly Performance Review</a:t>
+              <a:t>Performance Review</a:t>
             </a:r>
           </a:p>
         </p:txBody>
@@ -11045,22 +11027,75 @@
                 </a:solidFill>
                 <a:latin typeface="Arial"/>
               </a:rPr>
-              <a:t>15 / 16</a:t>
+              <a:t>7 / 17</a:t>
+            </a:r>
+          </a:p>
+        </p:txBody>
+      </p:sp>
+      <p:sp>
+        <p:nvSpPr>
+          <p:cNvPr id="10" name="TextBox 9"/>
+          <p:cNvSpPr txBox="1"/>
+          <p:nvPr/>
+        </p:nvSpPr>
+        <p:spPr>
+          <a:xfrm>
+            <a:off x="457200" y="1737360"/>
+            <a:ext cx="6035040" cy="228600"/>
+          </a:xfrm>
+          <a:prstGeom prst="rect">
+            <a:avLst/>
+          </a:prstGeom>
+          <a:noFill/>
+        </p:spPr>
+        <p:txBody>
+          <a:bodyPr wrap="square" anchor="t" lIns="0" rIns="0" tIns="0" bIns="0">
+            <a:spAutoFit/>
+          </a:bodyPr>
+          <a:lstStyle/>
+          <a:p>
+            <a:pPr algn="l"/>
+            <a:r>
+              <a:rPr sz="900" b="1">
+                <a:solidFill>
+                  <a:srgbClr val="1A2A3A"/>
+                </a:solidFill>
+                <a:latin typeface="Arial"/>
+              </a:rPr>
+              <a:t>Organic Search sessions — GA4, Mexico</a:t>
             </a:r>
           </a:p>
         </p:txBody>
       </p:sp>
       <p:graphicFrame>
         <p:nvGraphicFramePr>
-          <p:cNvPr id="10" name="Table 9"/>
+          <p:cNvPr id="11" name="Chart 10"/>
           <p:cNvGraphicFramePr>
             <a:graphicFrameLocks noGrp="1"/>
           </p:cNvGraphicFramePr>
           <p:nvPr/>
         </p:nvGraphicFramePr>
         <p:xfrm>
-          <a:off x="457200" y="1737360"/>
-          <a:ext cx="6035040" cy="1737360"/>
+          <a:off x="457200" y="2011680"/>
+          <a:ext cx="6035040" cy="2103120"/>
+        </p:xfrm>
+        <a:graphic>
+          <a:graphicData uri="http://schemas.openxmlformats.org/drawingml/2006/chart">
+            <c:chart xmlns:c="http://schemas.openxmlformats.org/drawingml/2006/chart" r:id="rId3"/>
+          </a:graphicData>
+        </a:graphic>
+      </p:graphicFrame>
+      <p:graphicFrame>
+        <p:nvGraphicFramePr>
+          <p:cNvPr id="12" name="Table 11"/>
+          <p:cNvGraphicFramePr>
+            <a:graphicFrameLocks noGrp="1"/>
+          </p:cNvGraphicFramePr>
+          <p:nvPr/>
+        </p:nvGraphicFramePr>
+        <p:xfrm>
+          <a:off x="457200" y="4343400"/>
+          <a:ext cx="6035040" cy="1554480"/>
         </p:xfrm>
         <a:graphic>
           <a:graphicData uri="http://schemas.openxmlformats.org/drawingml/2006/table">
@@ -11074,7 +11109,7 @@
                 <a:gridCol w="1097280"/>
                 <a:gridCol w="1097280"/>
               </a:tblGrid>
-              <a:tr h="347472">
+              <a:tr h="310896">
                 <a:tc>
                   <a:txBody>
                     <a:bodyPr/>
@@ -11167,7 +11202,7 @@
                   </a:tcPr>
                 </a:tc>
               </a:tr>
-              <a:tr h="347472">
+              <a:tr h="310896">
                 <a:tc>
                   <a:txBody>
                     <a:bodyPr/>
@@ -11260,7 +11295,7 @@
                   </a:tcPr>
                 </a:tc>
               </a:tr>
-              <a:tr h="347472">
+              <a:tr h="310896">
                 <a:tc>
                   <a:txBody>
                     <a:bodyPr/>
@@ -11353,7 +11388,7 @@
                   </a:tcPr>
                 </a:tc>
               </a:tr>
-              <a:tr h="347472">
+              <a:tr h="310896">
                 <a:tc>
                   <a:txBody>
                     <a:bodyPr/>
@@ -11446,7 +11481,7 @@
                   </a:tcPr>
                 </a:tc>
               </a:tr>
-              <a:tr h="347472">
+              <a:tr h="310896">
                 <a:tc>
                   <a:txBody>
                     <a:bodyPr/>
@@ -11545,14 +11580,14 @@
       </p:graphicFrame>
       <p:sp>
         <p:nvSpPr>
-          <p:cNvPr id="11" name="Rectangle 10"/>
+          <p:cNvPr id="13" name="Rectangle 12"/>
           <p:cNvSpPr/>
           <p:nvPr/>
         </p:nvSpPr>
         <p:spPr>
           <a:xfrm>
-            <a:off x="457200" y="3749039"/>
-            <a:ext cx="6035040" cy="2560320"/>
+            <a:off x="6858000" y="1737360"/>
+            <a:ext cx="4846320" cy="2240280"/>
           </a:xfrm>
           <a:prstGeom prst="rect">
             <a:avLst/>
@@ -11589,14 +11624,14 @@
       </p:sp>
       <p:sp>
         <p:nvSpPr>
-          <p:cNvPr id="12" name="Rectangle 11"/>
+          <p:cNvPr id="14" name="Rectangle 13"/>
           <p:cNvSpPr/>
           <p:nvPr/>
         </p:nvSpPr>
         <p:spPr>
           <a:xfrm>
-            <a:off x="457200" y="3749039"/>
-            <a:ext cx="6035040" cy="91440"/>
+            <a:off x="6858000" y="1737360"/>
+            <a:ext cx="4846320" cy="91440"/>
           </a:xfrm>
           <a:prstGeom prst="rect">
             <a:avLst/>
@@ -11633,14 +11668,14 @@
       </p:sp>
       <p:sp>
         <p:nvSpPr>
-          <p:cNvPr id="13" name="TextBox 12"/>
+          <p:cNvPr id="15" name="TextBox 14"/>
           <p:cNvSpPr txBox="1"/>
           <p:nvPr/>
         </p:nvSpPr>
         <p:spPr>
           <a:xfrm>
-            <a:off x="640080" y="3931920"/>
-            <a:ext cx="5669279" cy="274320"/>
+            <a:off x="7040880" y="1920240"/>
+            <a:ext cx="4480559" cy="274320"/>
           </a:xfrm>
           <a:prstGeom prst="rect">
             <a:avLst/>
@@ -11668,14 +11703,14 @@
       </p:sp>
       <p:sp>
         <p:nvSpPr>
-          <p:cNvPr id="14" name="TextBox 13"/>
+          <p:cNvPr id="16" name="TextBox 15"/>
           <p:cNvSpPr txBox="1"/>
           <p:nvPr/>
         </p:nvSpPr>
         <p:spPr>
           <a:xfrm>
-            <a:off x="640080" y="4251959"/>
-            <a:ext cx="5669279" cy="1874519"/>
+            <a:off x="7040880" y="2240280"/>
+            <a:ext cx="4480559" cy="1554480"/>
           </a:xfrm>
           <a:prstGeom prst="rect">
             <a:avLst/>
@@ -11696,37 +11731,21 @@
                 </a:solidFill>
                 <a:latin typeface="Arial"/>
               </a:rPr>
-              <a:t>Dated news and analysis content lost 87-99% of its clicks as it aged out, with nothing published to replace it.</a:t>
-            </a:r>
-          </a:p>
-          <a:p>
-            <a:pPr algn="l">
-              <a:spcBef>
-                <a:spcPts val="600"/>
-              </a:spcBef>
-            </a:pPr>
-            <a:r>
-              <a:rPr sz="950" b="0">
-                <a:solidFill>
-                  <a:srgbClr val="32373E"/>
-                </a:solidFill>
-                <a:latin typeface="Arial"/>
-              </a:rPr>
-              <a:t>Mid-funnel commercial pages slid in rank while brand rankings improved, and the decline spans every country the Spanish site serves. This is a site-level content issue, not a tracking artifact: site analytics confirm the same decline independently.</a:t>
-            </a:r>
-          </a:p>
-        </p:txBody>
-      </p:sp>
-      <p:sp>
-        <p:nvSpPr>
-          <p:cNvPr id="15" name="Rectangle 14"/>
+              <a:t>Dated news and analysis content lost 87-99% of its clicks as it aged out with nothing replacing it, and mid-funnel commercial pages slid in rank while brand improved. The decline spans every country the Spanish site serves: a site-level content issue, confirmed independently in site analytics.</a:t>
+            </a:r>
+          </a:p>
+        </p:txBody>
+      </p:sp>
+      <p:sp>
+        <p:nvSpPr>
+          <p:cNvPr id="17" name="Rectangle 16"/>
           <p:cNvSpPr/>
           <p:nvPr/>
         </p:nvSpPr>
         <p:spPr>
           <a:xfrm>
-            <a:off x="6858000" y="1737360"/>
-            <a:ext cx="4846320" cy="4572000"/>
+            <a:off x="6858000" y="4160520"/>
+            <a:ext cx="4846320" cy="2240280"/>
           </a:xfrm>
           <a:prstGeom prst="rect">
             <a:avLst/>
@@ -11763,13 +11782,13 @@
       </p:sp>
       <p:sp>
         <p:nvSpPr>
-          <p:cNvPr id="16" name="Rectangle 15"/>
+          <p:cNvPr id="18" name="Rectangle 17"/>
           <p:cNvSpPr/>
           <p:nvPr/>
         </p:nvSpPr>
         <p:spPr>
           <a:xfrm>
-            <a:off x="6858000" y="1737360"/>
+            <a:off x="6858000" y="4160520"/>
             <a:ext cx="4846320" cy="91440"/>
           </a:xfrm>
           <a:prstGeom prst="rect">
@@ -11807,13 +11826,13 @@
       </p:sp>
       <p:sp>
         <p:nvSpPr>
-          <p:cNvPr id="17" name="TextBox 16"/>
+          <p:cNvPr id="19" name="TextBox 18"/>
           <p:cNvSpPr txBox="1"/>
           <p:nvPr/>
         </p:nvSpPr>
         <p:spPr>
           <a:xfrm>
-            <a:off x="7040880" y="1920240"/>
+            <a:off x="7040880" y="4343400"/>
             <a:ext cx="4480559" cy="274320"/>
           </a:xfrm>
           <a:prstGeom prst="rect">
@@ -11842,14 +11861,14 @@
       </p:sp>
       <p:sp>
         <p:nvSpPr>
-          <p:cNvPr id="18" name="TextBox 17"/>
+          <p:cNvPr id="20" name="TextBox 19"/>
           <p:cNvSpPr txBox="1"/>
           <p:nvPr/>
         </p:nvSpPr>
         <p:spPr>
           <a:xfrm>
-            <a:off x="7040880" y="2240280"/>
-            <a:ext cx="4480559" cy="3886200"/>
+            <a:off x="7040880" y="4663440"/>
+            <a:ext cx="4480559" cy="1554480"/>
           </a:xfrm>
           <a:prstGeom prst="rect">
             <a:avLst/>
@@ -11870,55 +11889,7 @@
                 </a:solidFill>
                 <a:latin typeface="Arial"/>
               </a:rPr>
-              <a:t>Open a dedicated SEO workstream for the Spanish site.</a:t>
-            </a:r>
-          </a:p>
-          <a:p>
-            <a:pPr algn="l">
-              <a:spcBef>
-                <a:spcPts val="600"/>
-              </a:spcBef>
-            </a:pPr>
-            <a:r>
-              <a:rPr sz="950" b="0">
-                <a:solidFill>
-                  <a:srgbClr val="32373E"/>
-                </a:solidFill>
-                <a:latin typeface="Arial"/>
-              </a:rPr>
-              <a:t>Restore the news and analysis publishing cadence and refresh the decayed assets that carried the traffic.</a:t>
-            </a:r>
-          </a:p>
-          <a:p>
-            <a:pPr algn="l">
-              <a:spcBef>
-                <a:spcPts val="600"/>
-              </a:spcBef>
-            </a:pPr>
-            <a:r>
-              <a:rPr sz="950" b="0">
-                <a:solidFill>
-                  <a:srgbClr val="32373E"/>
-                </a:solidFill>
-                <a:latin typeface="Arial"/>
-              </a:rPr>
-              <a:t>Run a mid-funnel rank-recovery plan for the demo, academy, and platform pages, measured on organic clicks and positions.</a:t>
-            </a:r>
-          </a:p>
-          <a:p>
-            <a:pPr algn="l">
-              <a:spcBef>
-                <a:spcPts val="600"/>
-              </a:spcBef>
-            </a:pPr>
-            <a:r>
-              <a:rPr sz="950" b="0">
-                <a:solidFill>
-                  <a:srgbClr val="32373E"/>
-                </a:solidFill>
-                <a:latin typeface="Arial"/>
-              </a:rPr>
-              <a:t>This is the structural fix for blended submissions running under plan: every month the organic base erodes, paid media has to work harder just to hold total traffic flat.</a:t>
+              <a:t>Open a dedicated SEO workstream: restore the news and analysis publishing cadence, refresh the decayed assets, and run a mid-funnel rank-recovery plan (demo, academy, platform pages), measured on organic clicks and positions. Until it lands, paid media works harder each month just to hold total traffic flat.</a:t>
             </a:r>
           </a:p>
         </p:txBody>
@@ -12188,7 +12159,7 @@
                 </a:solidFill>
                 <a:latin typeface="Arial"/>
               </a:rPr>
-              <a:t>Monthly Performance Review</a:t>
+              <a:t>Performance Review</a:t>
             </a:r>
           </a:p>
         </p:txBody>
@@ -12223,7 +12194,7 @@
                 </a:solidFill>
                 <a:latin typeface="Arial"/>
               </a:rPr>
-              <a:t>16 / 16</a:t>
+              <a:t>17 / 17</a:t>
             </a:r>
           </a:p>
         </p:txBody>
@@ -12885,6 +12856,2512 @@
                 <a:latin typeface="Arial"/>
               </a:rPr>
               <a:t>Concentrate spend on measurable, in-market delivery while the quality fixes land.</a:t>
+            </a:r>
+          </a:p>
+        </p:txBody>
+      </p:sp>
+    </p:spTree>
+  </p:cSld>
+  <p:clrMapOvr>
+    <a:masterClrMapping/>
+  </p:clrMapOvr>
+</p:sld>
+</file>
+
+<file path=ppt/slides/slide17.xml><?xml version="1.0" encoding="utf-8"?>
+<p:sld xmlns:a="http://schemas.openxmlformats.org/drawingml/2006/main" xmlns:p="http://schemas.openxmlformats.org/presentationml/2006/main" xmlns:r="http://schemas.openxmlformats.org/officeDocument/2006/relationships">
+  <p:cSld>
+    <p:spTree>
+      <p:nvGrpSpPr>
+        <p:cNvPr id="1" name=""/>
+        <p:cNvGrpSpPr/>
+        <p:nvPr/>
+      </p:nvGrpSpPr>
+      <p:grpSpPr/>
+      <p:sp>
+        <p:nvSpPr>
+          <p:cNvPr id="2" name="Rectangle 1"/>
+          <p:cNvSpPr/>
+          <p:nvPr/>
+        </p:nvSpPr>
+        <p:spPr>
+          <a:xfrm>
+            <a:off x="0" y="0"/>
+            <a:ext cx="12191695" cy="457200"/>
+          </a:xfrm>
+          <a:prstGeom prst="rect">
+            <a:avLst/>
+          </a:prstGeom>
+          <a:solidFill>
+            <a:srgbClr val="1A2A3A"/>
+          </a:solidFill>
+          <a:ln>
+            <a:noFill/>
+          </a:ln>
+          <a:effectLst/>
+        </p:spPr>
+        <p:style>
+          <a:lnRef idx="1">
+            <a:schemeClr val="accent1"/>
+          </a:lnRef>
+          <a:fillRef idx="3">
+            <a:schemeClr val="accent1"/>
+          </a:fillRef>
+          <a:effectRef idx="2">
+            <a:schemeClr val="accent1"/>
+          </a:effectRef>
+          <a:fontRef idx="minor">
+            <a:schemeClr val="lt1"/>
+          </a:fontRef>
+        </p:style>
+        <p:txBody>
+          <a:bodyPr rtlCol="0" anchor="ctr"/>
+          <a:lstStyle/>
+          <a:p>
+            <a:pPr algn="ctr"/>
+          </a:p>
+        </p:txBody>
+      </p:sp>
+      <p:sp>
+        <p:nvSpPr>
+          <p:cNvPr id="3" name="TextBox 2"/>
+          <p:cNvSpPr txBox="1"/>
+          <p:nvPr/>
+        </p:nvSpPr>
+        <p:spPr>
+          <a:xfrm>
+            <a:off x="457200" y="91440"/>
+            <a:ext cx="8229600" cy="274320"/>
+          </a:xfrm>
+          <a:prstGeom prst="rect">
+            <a:avLst/>
+          </a:prstGeom>
+          <a:noFill/>
+        </p:spPr>
+        <p:txBody>
+          <a:bodyPr wrap="square" anchor="t" lIns="0" rIns="0" tIns="0" bIns="0">
+            <a:spAutoFit/>
+          </a:bodyPr>
+          <a:lstStyle/>
+          <a:p>
+            <a:pPr algn="l"/>
+            <a:r>
+              <a:rPr sz="900" b="1">
+                <a:solidFill>
+                  <a:srgbClr val="FFFFFF"/>
+                </a:solidFill>
+                <a:latin typeface="Arial"/>
+              </a:rPr>
+              <a:t>FOREX.com  |  GGMI (LATAM)  ·  June 2026</a:t>
+            </a:r>
+          </a:p>
+        </p:txBody>
+      </p:sp>
+      <p:pic>
+        <p:nvPicPr>
+          <p:cNvPr id="4" name="Picture 3" descr="logo_1_fd6b9b.png"/>
+          <p:cNvPicPr>
+            <a:picLocks noChangeAspect="1"/>
+          </p:cNvPicPr>
+          <p:nvPr/>
+        </p:nvPicPr>
+        <p:blipFill>
+          <a:blip r:embed="rId2"/>
+          <a:stretch>
+            <a:fillRect/>
+          </a:stretch>
+        </p:blipFill>
+        <p:spPr>
+          <a:xfrm>
+            <a:off x="11155680" y="100584"/>
+            <a:ext cx="896112" cy="256032"/>
+          </a:xfrm>
+          <a:prstGeom prst="rect">
+            <a:avLst/>
+          </a:prstGeom>
+        </p:spPr>
+      </p:pic>
+      <p:sp>
+        <p:nvSpPr>
+          <p:cNvPr id="5" name="TextBox 4"/>
+          <p:cNvSpPr txBox="1"/>
+          <p:nvPr/>
+        </p:nvSpPr>
+        <p:spPr>
+          <a:xfrm>
+            <a:off x="457200" y="566928"/>
+            <a:ext cx="10972800" cy="274320"/>
+          </a:xfrm>
+          <a:prstGeom prst="rect">
+            <a:avLst/>
+          </a:prstGeom>
+          <a:noFill/>
+        </p:spPr>
+        <p:txBody>
+          <a:bodyPr wrap="square" anchor="t" lIns="0" rIns="0" tIns="0" bIns="0">
+            <a:spAutoFit/>
+          </a:bodyPr>
+          <a:lstStyle/>
+          <a:p>
+            <a:pPr algn="l"/>
+            <a:r>
+              <a:rPr sz="1100" b="1">
+                <a:solidFill>
+                  <a:srgbClr val="3B5998"/>
+                </a:solidFill>
+                <a:latin typeface="Arial"/>
+              </a:rPr>
+              <a:t>SUMMARY  ·  BLENDED VIEW (ORGANIC + PAID)</a:t>
+            </a:r>
+          </a:p>
+        </p:txBody>
+      </p:sp>
+      <p:sp>
+        <p:nvSpPr>
+          <p:cNvPr id="6" name="TextBox 5"/>
+          <p:cNvSpPr txBox="1"/>
+          <p:nvPr/>
+        </p:nvSpPr>
+        <p:spPr>
+          <a:xfrm>
+            <a:off x="457200" y="868680"/>
+            <a:ext cx="11247120" cy="685800"/>
+          </a:xfrm>
+          <a:prstGeom prst="rect">
+            <a:avLst/>
+          </a:prstGeom>
+          <a:noFill/>
+        </p:spPr>
+        <p:txBody>
+          <a:bodyPr wrap="square" anchor="t" lIns="0" rIns="0" tIns="0" bIns="0">
+            <a:spAutoFit/>
+          </a:bodyPr>
+          <a:lstStyle/>
+          <a:p>
+            <a:pPr algn="l"/>
+            <a:r>
+              <a:rPr sz="2000" b="1">
+                <a:solidFill>
+                  <a:srgbClr val="1A2A3A"/>
+                </a:solidFill>
+                <a:latin typeface="Arial"/>
+              </a:rPr>
+              <a:t>Paid momentum built through Q3 while the blended base softened.</a:t>
+            </a:r>
+          </a:p>
+        </p:txBody>
+      </p:sp>
+      <p:sp>
+        <p:nvSpPr>
+          <p:cNvPr id="7" name="Rectangle 6"/>
+          <p:cNvSpPr/>
+          <p:nvPr/>
+        </p:nvSpPr>
+        <p:spPr>
+          <a:xfrm>
+            <a:off x="0" y="6583680"/>
+            <a:ext cx="12191695" cy="274320"/>
+          </a:xfrm>
+          <a:prstGeom prst="rect">
+            <a:avLst/>
+          </a:prstGeom>
+          <a:solidFill>
+            <a:srgbClr val="F3F3F3"/>
+          </a:solidFill>
+          <a:ln>
+            <a:noFill/>
+          </a:ln>
+          <a:effectLst/>
+        </p:spPr>
+        <p:style>
+          <a:lnRef idx="1">
+            <a:schemeClr val="accent1"/>
+          </a:lnRef>
+          <a:fillRef idx="3">
+            <a:schemeClr val="accent1"/>
+          </a:fillRef>
+          <a:effectRef idx="2">
+            <a:schemeClr val="accent1"/>
+          </a:effectRef>
+          <a:fontRef idx="minor">
+            <a:schemeClr val="lt1"/>
+          </a:fontRef>
+        </p:style>
+        <p:txBody>
+          <a:bodyPr rtlCol="0" anchor="ctr"/>
+          <a:lstStyle/>
+          <a:p>
+            <a:pPr algn="ctr"/>
+          </a:p>
+        </p:txBody>
+      </p:sp>
+      <p:sp>
+        <p:nvSpPr>
+          <p:cNvPr id="8" name="TextBox 7"/>
+          <p:cNvSpPr txBox="1"/>
+          <p:nvPr/>
+        </p:nvSpPr>
+        <p:spPr>
+          <a:xfrm>
+            <a:off x="457200" y="6611112"/>
+            <a:ext cx="5486400" cy="201168"/>
+          </a:xfrm>
+          <a:prstGeom prst="rect">
+            <a:avLst/>
+          </a:prstGeom>
+          <a:noFill/>
+        </p:spPr>
+        <p:txBody>
+          <a:bodyPr wrap="square" anchor="t" lIns="0" rIns="0" tIns="0" bIns="0">
+            <a:spAutoFit/>
+          </a:bodyPr>
+          <a:lstStyle/>
+          <a:p>
+            <a:pPr algn="l"/>
+            <a:r>
+              <a:rPr sz="800" b="0">
+                <a:solidFill>
+                  <a:srgbClr val="78828C"/>
+                </a:solidFill>
+                <a:latin typeface="Arial"/>
+              </a:rPr>
+              <a:t>Performance Review</a:t>
+            </a:r>
+          </a:p>
+        </p:txBody>
+      </p:sp>
+      <p:sp>
+        <p:nvSpPr>
+          <p:cNvPr id="9" name="TextBox 8"/>
+          <p:cNvSpPr txBox="1"/>
+          <p:nvPr/>
+        </p:nvSpPr>
+        <p:spPr>
+          <a:xfrm>
+            <a:off x="11064240" y="6611112"/>
+            <a:ext cx="822960" cy="201168"/>
+          </a:xfrm>
+          <a:prstGeom prst="rect">
+            <a:avLst/>
+          </a:prstGeom>
+          <a:noFill/>
+        </p:spPr>
+        <p:txBody>
+          <a:bodyPr wrap="square" anchor="t" lIns="0" rIns="0" tIns="0" bIns="0">
+            <a:spAutoFit/>
+          </a:bodyPr>
+          <a:lstStyle/>
+          <a:p>
+            <a:pPr algn="r"/>
+            <a:r>
+              <a:rPr sz="800" b="0">
+                <a:solidFill>
+                  <a:srgbClr val="78828C"/>
+                </a:solidFill>
+                <a:latin typeface="Arial"/>
+              </a:rPr>
+              <a:t>2 / 17</a:t>
+            </a:r>
+          </a:p>
+        </p:txBody>
+      </p:sp>
+      <p:sp>
+        <p:nvSpPr>
+          <p:cNvPr id="10" name="TextBox 9"/>
+          <p:cNvSpPr txBox="1"/>
+          <p:nvPr/>
+        </p:nvSpPr>
+        <p:spPr>
+          <a:xfrm>
+            <a:off x="457200" y="1828800"/>
+            <a:ext cx="2834640" cy="4389120"/>
+          </a:xfrm>
+          <a:prstGeom prst="rect">
+            <a:avLst/>
+          </a:prstGeom>
+          <a:noFill/>
+        </p:spPr>
+        <p:txBody>
+          <a:bodyPr wrap="square" anchor="t" lIns="0" rIns="0" tIns="0" bIns="0">
+            <a:spAutoFit/>
+          </a:bodyPr>
+          <a:lstStyle/>
+          <a:p>
+            <a:pPr algn="l"/>
+            <a:r>
+              <a:rPr sz="950" b="0">
+                <a:solidFill>
+                  <a:srgbClr val="32373E"/>
+                </a:solidFill>
+                <a:latin typeface="Arial"/>
+              </a:rPr>
+              <a:t>•  June submitted applications came in at 684, down 7% MoM; the H1 peak was February (1,036).</a:t>
+            </a:r>
+          </a:p>
+          <a:p>
+            <a:pPr algn="l">
+              <a:spcBef>
+                <a:spcPts val="600"/>
+              </a:spcBef>
+            </a:pPr>
+            <a:r>
+              <a:rPr sz="950" b="0">
+                <a:solidFill>
+                  <a:srgbClr val="32373E"/>
+                </a:solidFill>
+                <a:latin typeface="Arial"/>
+              </a:rPr>
+              <a:t>•  New approved rose 7% to 209 and the approval rate recovered to 31%, the best since February.</a:t>
+            </a:r>
+          </a:p>
+          <a:p>
+            <a:pPr algn="l">
+              <a:spcBef>
+                <a:spcPts val="600"/>
+              </a:spcBef>
+            </a:pPr>
+            <a:r>
+              <a:rPr sz="950" b="0">
+                <a:solidFill>
+                  <a:srgbClr val="32373E"/>
+                </a:solidFill>
+                <a:latin typeface="Arial"/>
+              </a:rPr>
+              <a:t>•  New funded dipped 11% to 32 and the fund rate to 15%. The application-to-funding step is the funnel constraint.</a:t>
+            </a:r>
+          </a:p>
+          <a:p>
+            <a:pPr algn="l">
+              <a:spcBef>
+                <a:spcPts val="600"/>
+              </a:spcBef>
+            </a:pPr>
+            <a:r>
+              <a:rPr sz="950" b="0">
+                <a:solidFill>
+                  <a:srgbClr val="32373E"/>
+                </a:solidFill>
+                <a:latin typeface="Arial"/>
+              </a:rPr>
+              <a:t>•  New traded closed at 29; trading volume held at $1.1B.</a:t>
+            </a:r>
+          </a:p>
+          <a:p>
+            <a:pPr algn="l">
+              <a:spcBef>
+                <a:spcPts val="600"/>
+              </a:spcBef>
+            </a:pPr>
+            <a:r>
+              <a:rPr sz="950" b="0">
+                <a:solidFill>
+                  <a:srgbClr val="32373E"/>
+                </a:solidFill>
+                <a:latin typeface="Arial"/>
+              </a:rPr>
+              <a:t>•  Working media reached $120,393 in June (+53% MoM), the biggest month of 2026, while paid-driven applications grew every month of Q3.</a:t>
+            </a:r>
+          </a:p>
+        </p:txBody>
+      </p:sp>
+      <p:graphicFrame>
+        <p:nvGraphicFramePr>
+          <p:cNvPr id="11" name="Table 10"/>
+          <p:cNvGraphicFramePr>
+            <a:graphicFrameLocks noGrp="1"/>
+          </p:cNvGraphicFramePr>
+          <p:nvPr/>
+        </p:nvGraphicFramePr>
+        <p:xfrm>
+          <a:off x="3566160" y="1828800"/>
+          <a:ext cx="8129016" cy="3017520"/>
+        </p:xfrm>
+        <a:graphic>
+          <a:graphicData uri="http://schemas.openxmlformats.org/drawingml/2006/table">
+            <a:tbl>
+              <a:tblPr>
+                <a:tableStyleId>{5C22544A-7EE6-4342-B048-85BDC9FD1C3A}</a:tableStyleId>
+              </a:tblPr>
+              <a:tblGrid>
+                <a:gridCol w="1965960"/>
+                <a:gridCol w="886968"/>
+                <a:gridCol w="886968"/>
+                <a:gridCol w="886968"/>
+                <a:gridCol w="886968"/>
+                <a:gridCol w="886968"/>
+                <a:gridCol w="886968"/>
+                <a:gridCol w="841248"/>
+              </a:tblGrid>
+              <a:tr h="274320">
+                <a:tc>
+                  <a:txBody>
+                    <a:bodyPr/>
+                    <a:lstStyle/>
+                    <a:p>
+                      <a:r>
+                        <a:rPr sz="850" b="1">
+                          <a:solidFill>
+                            <a:srgbClr val="FFFFFF"/>
+                          </a:solidFill>
+                          <a:latin typeface="Arial"/>
+                        </a:rPr>
+                        <a:t>GGMI — blended</a:t>
+                      </a:r>
+                    </a:p>
+                  </a:txBody>
+                  <a:tcPr marL="54864" marR="54864" marT="27432" marB="27432">
+                    <a:solidFill>
+                      <a:srgbClr val="3B5998"/>
+                    </a:solidFill>
+                  </a:tcPr>
+                </a:tc>
+                <a:tc>
+                  <a:txBody>
+                    <a:bodyPr/>
+                    <a:lstStyle/>
+                    <a:p>
+                      <a:pPr algn="r"/>
+                      <a:r>
+                        <a:rPr sz="850" b="1">
+                          <a:solidFill>
+                            <a:srgbClr val="FFFFFF"/>
+                          </a:solidFill>
+                          <a:latin typeface="Arial"/>
+                        </a:rPr>
+                        <a:t>Jan</a:t>
+                      </a:r>
+                    </a:p>
+                  </a:txBody>
+                  <a:tcPr marL="54864" marR="54864" marT="27432" marB="27432">
+                    <a:solidFill>
+                      <a:srgbClr val="3B5998"/>
+                    </a:solidFill>
+                  </a:tcPr>
+                </a:tc>
+                <a:tc>
+                  <a:txBody>
+                    <a:bodyPr/>
+                    <a:lstStyle/>
+                    <a:p>
+                      <a:pPr algn="r"/>
+                      <a:r>
+                        <a:rPr sz="850" b="1">
+                          <a:solidFill>
+                            <a:srgbClr val="FFFFFF"/>
+                          </a:solidFill>
+                          <a:latin typeface="Arial"/>
+                        </a:rPr>
+                        <a:t>Feb</a:t>
+                      </a:r>
+                    </a:p>
+                  </a:txBody>
+                  <a:tcPr marL="54864" marR="54864" marT="27432" marB="27432">
+                    <a:solidFill>
+                      <a:srgbClr val="3B5998"/>
+                    </a:solidFill>
+                  </a:tcPr>
+                </a:tc>
+                <a:tc>
+                  <a:txBody>
+                    <a:bodyPr/>
+                    <a:lstStyle/>
+                    <a:p>
+                      <a:pPr algn="r"/>
+                      <a:r>
+                        <a:rPr sz="850" b="1">
+                          <a:solidFill>
+                            <a:srgbClr val="FFFFFF"/>
+                          </a:solidFill>
+                          <a:latin typeface="Arial"/>
+                        </a:rPr>
+                        <a:t>Mar</a:t>
+                      </a:r>
+                    </a:p>
+                  </a:txBody>
+                  <a:tcPr marL="54864" marR="54864" marT="27432" marB="27432">
+                    <a:solidFill>
+                      <a:srgbClr val="3B5998"/>
+                    </a:solidFill>
+                  </a:tcPr>
+                </a:tc>
+                <a:tc>
+                  <a:txBody>
+                    <a:bodyPr/>
+                    <a:lstStyle/>
+                    <a:p>
+                      <a:pPr algn="r"/>
+                      <a:r>
+                        <a:rPr sz="850" b="1">
+                          <a:solidFill>
+                            <a:srgbClr val="FFFFFF"/>
+                          </a:solidFill>
+                          <a:latin typeface="Arial"/>
+                        </a:rPr>
+                        <a:t>Apr</a:t>
+                      </a:r>
+                    </a:p>
+                  </a:txBody>
+                  <a:tcPr marL="54864" marR="54864" marT="27432" marB="27432">
+                    <a:solidFill>
+                      <a:srgbClr val="3B5998"/>
+                    </a:solidFill>
+                  </a:tcPr>
+                </a:tc>
+                <a:tc>
+                  <a:txBody>
+                    <a:bodyPr/>
+                    <a:lstStyle/>
+                    <a:p>
+                      <a:pPr algn="r"/>
+                      <a:r>
+                        <a:rPr sz="850" b="1">
+                          <a:solidFill>
+                            <a:srgbClr val="FFFFFF"/>
+                          </a:solidFill>
+                          <a:latin typeface="Arial"/>
+                        </a:rPr>
+                        <a:t>May</a:t>
+                      </a:r>
+                    </a:p>
+                  </a:txBody>
+                  <a:tcPr marL="54864" marR="54864" marT="27432" marB="27432">
+                    <a:solidFill>
+                      <a:srgbClr val="3B5998"/>
+                    </a:solidFill>
+                  </a:tcPr>
+                </a:tc>
+                <a:tc>
+                  <a:txBody>
+                    <a:bodyPr/>
+                    <a:lstStyle/>
+                    <a:p>
+                      <a:pPr algn="r"/>
+                      <a:r>
+                        <a:rPr sz="850" b="1">
+                          <a:solidFill>
+                            <a:srgbClr val="FFFFFF"/>
+                          </a:solidFill>
+                          <a:latin typeface="Arial"/>
+                        </a:rPr>
+                        <a:t>Jun</a:t>
+                      </a:r>
+                    </a:p>
+                  </a:txBody>
+                  <a:tcPr marL="54864" marR="54864" marT="27432" marB="27432">
+                    <a:solidFill>
+                      <a:srgbClr val="3B5998"/>
+                    </a:solidFill>
+                  </a:tcPr>
+                </a:tc>
+                <a:tc>
+                  <a:txBody>
+                    <a:bodyPr/>
+                    <a:lstStyle/>
+                    <a:p>
+                      <a:pPr algn="r"/>
+                      <a:r>
+                        <a:rPr sz="850" b="1">
+                          <a:solidFill>
+                            <a:srgbClr val="FFFFFF"/>
+                          </a:solidFill>
+                          <a:latin typeface="Arial"/>
+                        </a:rPr>
+                        <a:t>MoM</a:t>
+                      </a:r>
+                    </a:p>
+                  </a:txBody>
+                  <a:tcPr marL="54864" marR="54864" marT="27432" marB="27432">
+                    <a:solidFill>
+                      <a:srgbClr val="3B5998"/>
+                    </a:solidFill>
+                  </a:tcPr>
+                </a:tc>
+              </a:tr>
+              <a:tr h="274320">
+                <a:tc>
+                  <a:txBody>
+                    <a:bodyPr/>
+                    <a:lstStyle/>
+                    <a:p>
+                      <a:r>
+                        <a:rPr sz="850" b="1">
+                          <a:solidFill>
+                            <a:srgbClr val="32373E"/>
+                          </a:solidFill>
+                          <a:latin typeface="Arial"/>
+                        </a:rPr>
+                        <a:t>Working Media Spend</a:t>
+                      </a:r>
+                    </a:p>
+                  </a:txBody>
+                  <a:tcPr marL="54864" marR="54864" marT="27432" marB="27432">
+                    <a:solidFill>
+                      <a:srgbClr val="FFFFFF"/>
+                    </a:solidFill>
+                  </a:tcPr>
+                </a:tc>
+                <a:tc>
+                  <a:txBody>
+                    <a:bodyPr/>
+                    <a:lstStyle/>
+                    <a:p>
+                      <a:pPr algn="r"/>
+                      <a:r>
+                        <a:rPr sz="850" b="0">
+                          <a:solidFill>
+                            <a:srgbClr val="32373E"/>
+                          </a:solidFill>
+                          <a:latin typeface="Arial"/>
+                        </a:rPr>
+                        <a:t>—</a:t>
+                      </a:r>
+                    </a:p>
+                  </a:txBody>
+                  <a:tcPr marL="54864" marR="54864" marT="27432" marB="27432">
+                    <a:solidFill>
+                      <a:srgbClr val="FFFFFF"/>
+                    </a:solidFill>
+                  </a:tcPr>
+                </a:tc>
+                <a:tc>
+                  <a:txBody>
+                    <a:bodyPr/>
+                    <a:lstStyle/>
+                    <a:p>
+                      <a:pPr algn="r"/>
+                      <a:r>
+                        <a:rPr sz="850" b="0">
+                          <a:solidFill>
+                            <a:srgbClr val="32373E"/>
+                          </a:solidFill>
+                          <a:latin typeface="Arial"/>
+                        </a:rPr>
+                        <a:t>—</a:t>
+                      </a:r>
+                    </a:p>
+                  </a:txBody>
+                  <a:tcPr marL="54864" marR="54864" marT="27432" marB="27432">
+                    <a:solidFill>
+                      <a:srgbClr val="FFFFFF"/>
+                    </a:solidFill>
+                  </a:tcPr>
+                </a:tc>
+                <a:tc>
+                  <a:txBody>
+                    <a:bodyPr/>
+                    <a:lstStyle/>
+                    <a:p>
+                      <a:pPr algn="r"/>
+                      <a:r>
+                        <a:rPr sz="850" b="0">
+                          <a:solidFill>
+                            <a:srgbClr val="32373E"/>
+                          </a:solidFill>
+                          <a:latin typeface="Arial"/>
+                        </a:rPr>
+                        <a:t>$42,424</a:t>
+                      </a:r>
+                    </a:p>
+                  </a:txBody>
+                  <a:tcPr marL="54864" marR="54864" marT="27432" marB="27432">
+                    <a:solidFill>
+                      <a:srgbClr val="FFFFFF"/>
+                    </a:solidFill>
+                  </a:tcPr>
+                </a:tc>
+                <a:tc>
+                  <a:txBody>
+                    <a:bodyPr/>
+                    <a:lstStyle/>
+                    <a:p>
+                      <a:pPr algn="r"/>
+                      <a:r>
+                        <a:rPr sz="850" b="0">
+                          <a:solidFill>
+                            <a:srgbClr val="32373E"/>
+                          </a:solidFill>
+                          <a:latin typeface="Arial"/>
+                        </a:rPr>
+                        <a:t>$46,294</a:t>
+                      </a:r>
+                    </a:p>
+                  </a:txBody>
+                  <a:tcPr marL="54864" marR="54864" marT="27432" marB="27432">
+                    <a:solidFill>
+                      <a:srgbClr val="FFFFFF"/>
+                    </a:solidFill>
+                  </a:tcPr>
+                </a:tc>
+                <a:tc>
+                  <a:txBody>
+                    <a:bodyPr/>
+                    <a:lstStyle/>
+                    <a:p>
+                      <a:pPr algn="r"/>
+                      <a:r>
+                        <a:rPr sz="850" b="0">
+                          <a:solidFill>
+                            <a:srgbClr val="32373E"/>
+                          </a:solidFill>
+                          <a:latin typeface="Arial"/>
+                        </a:rPr>
+                        <a:t>$78,790</a:t>
+                      </a:r>
+                    </a:p>
+                  </a:txBody>
+                  <a:tcPr marL="54864" marR="54864" marT="27432" marB="27432">
+                    <a:solidFill>
+                      <a:srgbClr val="FFFFFF"/>
+                    </a:solidFill>
+                  </a:tcPr>
+                </a:tc>
+                <a:tc>
+                  <a:txBody>
+                    <a:bodyPr/>
+                    <a:lstStyle/>
+                    <a:p>
+                      <a:pPr algn="r"/>
+                      <a:r>
+                        <a:rPr sz="850" b="0">
+                          <a:solidFill>
+                            <a:srgbClr val="32373E"/>
+                          </a:solidFill>
+                          <a:latin typeface="Arial"/>
+                        </a:rPr>
+                        <a:t>$120,393</a:t>
+                      </a:r>
+                    </a:p>
+                  </a:txBody>
+                  <a:tcPr marL="54864" marR="54864" marT="27432" marB="27432">
+                    <a:solidFill>
+                      <a:srgbClr val="FFFFFF"/>
+                    </a:solidFill>
+                  </a:tcPr>
+                </a:tc>
+                <a:tc>
+                  <a:txBody>
+                    <a:bodyPr/>
+                    <a:lstStyle/>
+                    <a:p>
+                      <a:pPr algn="r"/>
+                      <a:r>
+                        <a:rPr sz="850" b="0">
+                          <a:solidFill>
+                            <a:srgbClr val="32373E"/>
+                          </a:solidFill>
+                          <a:latin typeface="Arial"/>
+                        </a:rPr>
+                        <a:t>+53%</a:t>
+                      </a:r>
+                    </a:p>
+                  </a:txBody>
+                  <a:tcPr marL="54864" marR="54864" marT="27432" marB="27432">
+                    <a:solidFill>
+                      <a:srgbClr val="FFFFFF"/>
+                    </a:solidFill>
+                  </a:tcPr>
+                </a:tc>
+              </a:tr>
+              <a:tr h="274320">
+                <a:tc>
+                  <a:txBody>
+                    <a:bodyPr/>
+                    <a:lstStyle/>
+                    <a:p>
+                      <a:r>
+                        <a:rPr sz="850" b="1">
+                          <a:solidFill>
+                            <a:srgbClr val="32373E"/>
+                          </a:solidFill>
+                          <a:latin typeface="Arial"/>
+                        </a:rPr>
+                        <a:t>Submitted Applications</a:t>
+                      </a:r>
+                    </a:p>
+                  </a:txBody>
+                  <a:tcPr marL="54864" marR="54864" marT="27432" marB="27432">
+                    <a:solidFill>
+                      <a:srgbClr val="F3F3F3"/>
+                    </a:solidFill>
+                  </a:tcPr>
+                </a:tc>
+                <a:tc>
+                  <a:txBody>
+                    <a:bodyPr/>
+                    <a:lstStyle/>
+                    <a:p>
+                      <a:pPr algn="r"/>
+                      <a:r>
+                        <a:rPr sz="850" b="0">
+                          <a:solidFill>
+                            <a:srgbClr val="32373E"/>
+                          </a:solidFill>
+                          <a:latin typeface="Arial"/>
+                        </a:rPr>
+                        <a:t>1,029</a:t>
+                      </a:r>
+                    </a:p>
+                  </a:txBody>
+                  <a:tcPr marL="54864" marR="54864" marT="27432" marB="27432">
+                    <a:solidFill>
+                      <a:srgbClr val="F3F3F3"/>
+                    </a:solidFill>
+                  </a:tcPr>
+                </a:tc>
+                <a:tc>
+                  <a:txBody>
+                    <a:bodyPr/>
+                    <a:lstStyle/>
+                    <a:p>
+                      <a:pPr algn="r"/>
+                      <a:r>
+                        <a:rPr sz="850" b="0">
+                          <a:solidFill>
+                            <a:srgbClr val="32373E"/>
+                          </a:solidFill>
+                          <a:latin typeface="Arial"/>
+                        </a:rPr>
+                        <a:t>1,036</a:t>
+                      </a:r>
+                    </a:p>
+                  </a:txBody>
+                  <a:tcPr marL="54864" marR="54864" marT="27432" marB="27432">
+                    <a:solidFill>
+                      <a:srgbClr val="F3F3F3"/>
+                    </a:solidFill>
+                  </a:tcPr>
+                </a:tc>
+                <a:tc>
+                  <a:txBody>
+                    <a:bodyPr/>
+                    <a:lstStyle/>
+                    <a:p>
+                      <a:pPr algn="r"/>
+                      <a:r>
+                        <a:rPr sz="850" b="0">
+                          <a:solidFill>
+                            <a:srgbClr val="32373E"/>
+                          </a:solidFill>
+                          <a:latin typeface="Arial"/>
+                        </a:rPr>
+                        <a:t>900</a:t>
+                      </a:r>
+                    </a:p>
+                  </a:txBody>
+                  <a:tcPr marL="54864" marR="54864" marT="27432" marB="27432">
+                    <a:solidFill>
+                      <a:srgbClr val="F3F3F3"/>
+                    </a:solidFill>
+                  </a:tcPr>
+                </a:tc>
+                <a:tc>
+                  <a:txBody>
+                    <a:bodyPr/>
+                    <a:lstStyle/>
+                    <a:p>
+                      <a:pPr algn="r"/>
+                      <a:r>
+                        <a:rPr sz="850" b="0">
+                          <a:solidFill>
+                            <a:srgbClr val="32373E"/>
+                          </a:solidFill>
+                          <a:latin typeface="Arial"/>
+                        </a:rPr>
+                        <a:t>751</a:t>
+                      </a:r>
+                    </a:p>
+                  </a:txBody>
+                  <a:tcPr marL="54864" marR="54864" marT="27432" marB="27432">
+                    <a:solidFill>
+                      <a:srgbClr val="F3F3F3"/>
+                    </a:solidFill>
+                  </a:tcPr>
+                </a:tc>
+                <a:tc>
+                  <a:txBody>
+                    <a:bodyPr/>
+                    <a:lstStyle/>
+                    <a:p>
+                      <a:pPr algn="r"/>
+                      <a:r>
+                        <a:rPr sz="850" b="0">
+                          <a:solidFill>
+                            <a:srgbClr val="32373E"/>
+                          </a:solidFill>
+                          <a:latin typeface="Arial"/>
+                        </a:rPr>
+                        <a:t>732</a:t>
+                      </a:r>
+                    </a:p>
+                  </a:txBody>
+                  <a:tcPr marL="54864" marR="54864" marT="27432" marB="27432">
+                    <a:solidFill>
+                      <a:srgbClr val="F3F3F3"/>
+                    </a:solidFill>
+                  </a:tcPr>
+                </a:tc>
+                <a:tc>
+                  <a:txBody>
+                    <a:bodyPr/>
+                    <a:lstStyle/>
+                    <a:p>
+                      <a:pPr algn="r"/>
+                      <a:r>
+                        <a:rPr sz="850" b="0">
+                          <a:solidFill>
+                            <a:srgbClr val="32373E"/>
+                          </a:solidFill>
+                          <a:latin typeface="Arial"/>
+                        </a:rPr>
+                        <a:t>684</a:t>
+                      </a:r>
+                    </a:p>
+                  </a:txBody>
+                  <a:tcPr marL="54864" marR="54864" marT="27432" marB="27432">
+                    <a:solidFill>
+                      <a:srgbClr val="F3F3F3"/>
+                    </a:solidFill>
+                  </a:tcPr>
+                </a:tc>
+                <a:tc>
+                  <a:txBody>
+                    <a:bodyPr/>
+                    <a:lstStyle/>
+                    <a:p>
+                      <a:pPr algn="r"/>
+                      <a:r>
+                        <a:rPr sz="850" b="0">
+                          <a:solidFill>
+                            <a:srgbClr val="32373E"/>
+                          </a:solidFill>
+                          <a:latin typeface="Arial"/>
+                        </a:rPr>
+                        <a:t>-7%</a:t>
+                      </a:r>
+                    </a:p>
+                  </a:txBody>
+                  <a:tcPr marL="54864" marR="54864" marT="27432" marB="27432">
+                    <a:solidFill>
+                      <a:srgbClr val="F3F3F3"/>
+                    </a:solidFill>
+                  </a:tcPr>
+                </a:tc>
+              </a:tr>
+              <a:tr h="274320">
+                <a:tc>
+                  <a:txBody>
+                    <a:bodyPr/>
+                    <a:lstStyle/>
+                    <a:p>
+                      <a:r>
+                        <a:rPr sz="850" b="1">
+                          <a:solidFill>
+                            <a:srgbClr val="32373E"/>
+                          </a:solidFill>
+                          <a:latin typeface="Arial"/>
+                        </a:rPr>
+                        <a:t>Approved Clients</a:t>
+                      </a:r>
+                    </a:p>
+                  </a:txBody>
+                  <a:tcPr marL="54864" marR="54864" marT="27432" marB="27432">
+                    <a:solidFill>
+                      <a:srgbClr val="FFFFFF"/>
+                    </a:solidFill>
+                  </a:tcPr>
+                </a:tc>
+                <a:tc>
+                  <a:txBody>
+                    <a:bodyPr/>
+                    <a:lstStyle/>
+                    <a:p>
+                      <a:pPr algn="r"/>
+                      <a:r>
+                        <a:rPr sz="850" b="0">
+                          <a:solidFill>
+                            <a:srgbClr val="32373E"/>
+                          </a:solidFill>
+                          <a:latin typeface="Arial"/>
+                        </a:rPr>
+                        <a:t>288</a:t>
+                      </a:r>
+                    </a:p>
+                  </a:txBody>
+                  <a:tcPr marL="54864" marR="54864" marT="27432" marB="27432">
+                    <a:solidFill>
+                      <a:srgbClr val="FFFFFF"/>
+                    </a:solidFill>
+                  </a:tcPr>
+                </a:tc>
+                <a:tc>
+                  <a:txBody>
+                    <a:bodyPr/>
+                    <a:lstStyle/>
+                    <a:p>
+                      <a:pPr algn="r"/>
+                      <a:r>
+                        <a:rPr sz="850" b="0">
+                          <a:solidFill>
+                            <a:srgbClr val="32373E"/>
+                          </a:solidFill>
+                          <a:latin typeface="Arial"/>
+                        </a:rPr>
+                        <a:t>337</a:t>
+                      </a:r>
+                    </a:p>
+                  </a:txBody>
+                  <a:tcPr marL="54864" marR="54864" marT="27432" marB="27432">
+                    <a:solidFill>
+                      <a:srgbClr val="FFFFFF"/>
+                    </a:solidFill>
+                  </a:tcPr>
+                </a:tc>
+                <a:tc>
+                  <a:txBody>
+                    <a:bodyPr/>
+                    <a:lstStyle/>
+                    <a:p>
+                      <a:pPr algn="r"/>
+                      <a:r>
+                        <a:rPr sz="850" b="0">
+                          <a:solidFill>
+                            <a:srgbClr val="32373E"/>
+                          </a:solidFill>
+                          <a:latin typeface="Arial"/>
+                        </a:rPr>
+                        <a:t>261</a:t>
+                      </a:r>
+                    </a:p>
+                  </a:txBody>
+                  <a:tcPr marL="54864" marR="54864" marT="27432" marB="27432">
+                    <a:solidFill>
+                      <a:srgbClr val="FFFFFF"/>
+                    </a:solidFill>
+                  </a:tcPr>
+                </a:tc>
+                <a:tc>
+                  <a:txBody>
+                    <a:bodyPr/>
+                    <a:lstStyle/>
+                    <a:p>
+                      <a:pPr algn="r"/>
+                      <a:r>
+                        <a:rPr sz="850" b="0">
+                          <a:solidFill>
+                            <a:srgbClr val="32373E"/>
+                          </a:solidFill>
+                          <a:latin typeface="Arial"/>
+                        </a:rPr>
+                        <a:t>202</a:t>
+                      </a:r>
+                    </a:p>
+                  </a:txBody>
+                  <a:tcPr marL="54864" marR="54864" marT="27432" marB="27432">
+                    <a:solidFill>
+                      <a:srgbClr val="FFFFFF"/>
+                    </a:solidFill>
+                  </a:tcPr>
+                </a:tc>
+                <a:tc>
+                  <a:txBody>
+                    <a:bodyPr/>
+                    <a:lstStyle/>
+                    <a:p>
+                      <a:pPr algn="r"/>
+                      <a:r>
+                        <a:rPr sz="850" b="0">
+                          <a:solidFill>
+                            <a:srgbClr val="32373E"/>
+                          </a:solidFill>
+                          <a:latin typeface="Arial"/>
+                        </a:rPr>
+                        <a:t>195</a:t>
+                      </a:r>
+                    </a:p>
+                  </a:txBody>
+                  <a:tcPr marL="54864" marR="54864" marT="27432" marB="27432">
+                    <a:solidFill>
+                      <a:srgbClr val="FFFFFF"/>
+                    </a:solidFill>
+                  </a:tcPr>
+                </a:tc>
+                <a:tc>
+                  <a:txBody>
+                    <a:bodyPr/>
+                    <a:lstStyle/>
+                    <a:p>
+                      <a:pPr algn="r"/>
+                      <a:r>
+                        <a:rPr sz="850" b="0">
+                          <a:solidFill>
+                            <a:srgbClr val="32373E"/>
+                          </a:solidFill>
+                          <a:latin typeface="Arial"/>
+                        </a:rPr>
+                        <a:t>209</a:t>
+                      </a:r>
+                    </a:p>
+                  </a:txBody>
+                  <a:tcPr marL="54864" marR="54864" marT="27432" marB="27432">
+                    <a:solidFill>
+                      <a:srgbClr val="FFFFFF"/>
+                    </a:solidFill>
+                  </a:tcPr>
+                </a:tc>
+                <a:tc>
+                  <a:txBody>
+                    <a:bodyPr/>
+                    <a:lstStyle/>
+                    <a:p>
+                      <a:pPr algn="r"/>
+                      <a:r>
+                        <a:rPr sz="850" b="0">
+                          <a:solidFill>
+                            <a:srgbClr val="32373E"/>
+                          </a:solidFill>
+                          <a:latin typeface="Arial"/>
+                        </a:rPr>
+                        <a:t>+7%</a:t>
+                      </a:r>
+                    </a:p>
+                  </a:txBody>
+                  <a:tcPr marL="54864" marR="54864" marT="27432" marB="27432">
+                    <a:solidFill>
+                      <a:srgbClr val="FFFFFF"/>
+                    </a:solidFill>
+                  </a:tcPr>
+                </a:tc>
+              </a:tr>
+              <a:tr h="274320">
+                <a:tc>
+                  <a:txBody>
+                    <a:bodyPr/>
+                    <a:lstStyle/>
+                    <a:p>
+                      <a:r>
+                        <a:rPr sz="850" b="1">
+                          <a:solidFill>
+                            <a:srgbClr val="32373E"/>
+                          </a:solidFill>
+                          <a:latin typeface="Arial"/>
+                        </a:rPr>
+                        <a:t>Approval Rate</a:t>
+                      </a:r>
+                    </a:p>
+                  </a:txBody>
+                  <a:tcPr marL="54864" marR="54864" marT="27432" marB="27432">
+                    <a:solidFill>
+                      <a:srgbClr val="F3F3F3"/>
+                    </a:solidFill>
+                  </a:tcPr>
+                </a:tc>
+                <a:tc>
+                  <a:txBody>
+                    <a:bodyPr/>
+                    <a:lstStyle/>
+                    <a:p>
+                      <a:pPr algn="r"/>
+                      <a:r>
+                        <a:rPr sz="850" b="0">
+                          <a:solidFill>
+                            <a:srgbClr val="32373E"/>
+                          </a:solidFill>
+                          <a:latin typeface="Arial"/>
+                        </a:rPr>
+                        <a:t>28%</a:t>
+                      </a:r>
+                    </a:p>
+                  </a:txBody>
+                  <a:tcPr marL="54864" marR="54864" marT="27432" marB="27432">
+                    <a:solidFill>
+                      <a:srgbClr val="F3F3F3"/>
+                    </a:solidFill>
+                  </a:tcPr>
+                </a:tc>
+                <a:tc>
+                  <a:txBody>
+                    <a:bodyPr/>
+                    <a:lstStyle/>
+                    <a:p>
+                      <a:pPr algn="r"/>
+                      <a:r>
+                        <a:rPr sz="850" b="0">
+                          <a:solidFill>
+                            <a:srgbClr val="32373E"/>
+                          </a:solidFill>
+                          <a:latin typeface="Arial"/>
+                        </a:rPr>
+                        <a:t>33%</a:t>
+                      </a:r>
+                    </a:p>
+                  </a:txBody>
+                  <a:tcPr marL="54864" marR="54864" marT="27432" marB="27432">
+                    <a:solidFill>
+                      <a:srgbClr val="F3F3F3"/>
+                    </a:solidFill>
+                  </a:tcPr>
+                </a:tc>
+                <a:tc>
+                  <a:txBody>
+                    <a:bodyPr/>
+                    <a:lstStyle/>
+                    <a:p>
+                      <a:pPr algn="r"/>
+                      <a:r>
+                        <a:rPr sz="850" b="0">
+                          <a:solidFill>
+                            <a:srgbClr val="32373E"/>
+                          </a:solidFill>
+                          <a:latin typeface="Arial"/>
+                        </a:rPr>
+                        <a:t>29%</a:t>
+                      </a:r>
+                    </a:p>
+                  </a:txBody>
+                  <a:tcPr marL="54864" marR="54864" marT="27432" marB="27432">
+                    <a:solidFill>
+                      <a:srgbClr val="F3F3F3"/>
+                    </a:solidFill>
+                  </a:tcPr>
+                </a:tc>
+                <a:tc>
+                  <a:txBody>
+                    <a:bodyPr/>
+                    <a:lstStyle/>
+                    <a:p>
+                      <a:pPr algn="r"/>
+                      <a:r>
+                        <a:rPr sz="850" b="0">
+                          <a:solidFill>
+                            <a:srgbClr val="32373E"/>
+                          </a:solidFill>
+                          <a:latin typeface="Arial"/>
+                        </a:rPr>
+                        <a:t>27%</a:t>
+                      </a:r>
+                    </a:p>
+                  </a:txBody>
+                  <a:tcPr marL="54864" marR="54864" marT="27432" marB="27432">
+                    <a:solidFill>
+                      <a:srgbClr val="F3F3F3"/>
+                    </a:solidFill>
+                  </a:tcPr>
+                </a:tc>
+                <a:tc>
+                  <a:txBody>
+                    <a:bodyPr/>
+                    <a:lstStyle/>
+                    <a:p>
+                      <a:pPr algn="r"/>
+                      <a:r>
+                        <a:rPr sz="850" b="0">
+                          <a:solidFill>
+                            <a:srgbClr val="32373E"/>
+                          </a:solidFill>
+                          <a:latin typeface="Arial"/>
+                        </a:rPr>
+                        <a:t>27%</a:t>
+                      </a:r>
+                    </a:p>
+                  </a:txBody>
+                  <a:tcPr marL="54864" marR="54864" marT="27432" marB="27432">
+                    <a:solidFill>
+                      <a:srgbClr val="F3F3F3"/>
+                    </a:solidFill>
+                  </a:tcPr>
+                </a:tc>
+                <a:tc>
+                  <a:txBody>
+                    <a:bodyPr/>
+                    <a:lstStyle/>
+                    <a:p>
+                      <a:pPr algn="r"/>
+                      <a:r>
+                        <a:rPr sz="850" b="0">
+                          <a:solidFill>
+                            <a:srgbClr val="32373E"/>
+                          </a:solidFill>
+                          <a:latin typeface="Arial"/>
+                        </a:rPr>
+                        <a:t>31%</a:t>
+                      </a:r>
+                    </a:p>
+                  </a:txBody>
+                  <a:tcPr marL="54864" marR="54864" marT="27432" marB="27432">
+                    <a:solidFill>
+                      <a:srgbClr val="F3F3F3"/>
+                    </a:solidFill>
+                  </a:tcPr>
+                </a:tc>
+                <a:tc>
+                  <a:txBody>
+                    <a:bodyPr/>
+                    <a:lstStyle/>
+                    <a:p>
+                      <a:pPr algn="r"/>
+                      <a:r>
+                        <a:rPr sz="850" b="0">
+                          <a:solidFill>
+                            <a:srgbClr val="32373E"/>
+                          </a:solidFill>
+                          <a:latin typeface="Arial"/>
+                        </a:rPr>
+                        <a:t>+4pp</a:t>
+                      </a:r>
+                    </a:p>
+                  </a:txBody>
+                  <a:tcPr marL="54864" marR="54864" marT="27432" marB="27432">
+                    <a:solidFill>
+                      <a:srgbClr val="F3F3F3"/>
+                    </a:solidFill>
+                  </a:tcPr>
+                </a:tc>
+              </a:tr>
+              <a:tr h="274320">
+                <a:tc>
+                  <a:txBody>
+                    <a:bodyPr/>
+                    <a:lstStyle/>
+                    <a:p>
+                      <a:r>
+                        <a:rPr sz="850" b="1">
+                          <a:solidFill>
+                            <a:srgbClr val="32373E"/>
+                          </a:solidFill>
+                          <a:latin typeface="Arial"/>
+                        </a:rPr>
+                        <a:t>New Funded Clients</a:t>
+                      </a:r>
+                    </a:p>
+                  </a:txBody>
+                  <a:tcPr marL="54864" marR="54864" marT="27432" marB="27432">
+                    <a:solidFill>
+                      <a:srgbClr val="FFFFFF"/>
+                    </a:solidFill>
+                  </a:tcPr>
+                </a:tc>
+                <a:tc>
+                  <a:txBody>
+                    <a:bodyPr/>
+                    <a:lstStyle/>
+                    <a:p>
+                      <a:pPr algn="r"/>
+                      <a:r>
+                        <a:rPr sz="850" b="0">
+                          <a:solidFill>
+                            <a:srgbClr val="32373E"/>
+                          </a:solidFill>
+                          <a:latin typeface="Arial"/>
+                        </a:rPr>
+                        <a:t>66</a:t>
+                      </a:r>
+                    </a:p>
+                  </a:txBody>
+                  <a:tcPr marL="54864" marR="54864" marT="27432" marB="27432">
+                    <a:solidFill>
+                      <a:srgbClr val="FFFFFF"/>
+                    </a:solidFill>
+                  </a:tcPr>
+                </a:tc>
+                <a:tc>
+                  <a:txBody>
+                    <a:bodyPr/>
+                    <a:lstStyle/>
+                    <a:p>
+                      <a:pPr algn="r"/>
+                      <a:r>
+                        <a:rPr sz="850" b="0">
+                          <a:solidFill>
+                            <a:srgbClr val="32373E"/>
+                          </a:solidFill>
+                          <a:latin typeface="Arial"/>
+                        </a:rPr>
+                        <a:t>59</a:t>
+                      </a:r>
+                    </a:p>
+                  </a:txBody>
+                  <a:tcPr marL="54864" marR="54864" marT="27432" marB="27432">
+                    <a:solidFill>
+                      <a:srgbClr val="FFFFFF"/>
+                    </a:solidFill>
+                  </a:tcPr>
+                </a:tc>
+                <a:tc>
+                  <a:txBody>
+                    <a:bodyPr/>
+                    <a:lstStyle/>
+                    <a:p>
+                      <a:pPr algn="r"/>
+                      <a:r>
+                        <a:rPr sz="850" b="0">
+                          <a:solidFill>
+                            <a:srgbClr val="32373E"/>
+                          </a:solidFill>
+                          <a:latin typeface="Arial"/>
+                        </a:rPr>
+                        <a:t>63</a:t>
+                      </a:r>
+                    </a:p>
+                  </a:txBody>
+                  <a:tcPr marL="54864" marR="54864" marT="27432" marB="27432">
+                    <a:solidFill>
+                      <a:srgbClr val="FFFFFF"/>
+                    </a:solidFill>
+                  </a:tcPr>
+                </a:tc>
+                <a:tc>
+                  <a:txBody>
+                    <a:bodyPr/>
+                    <a:lstStyle/>
+                    <a:p>
+                      <a:pPr algn="r"/>
+                      <a:r>
+                        <a:rPr sz="850" b="0">
+                          <a:solidFill>
+                            <a:srgbClr val="32373E"/>
+                          </a:solidFill>
+                          <a:latin typeface="Arial"/>
+                        </a:rPr>
+                        <a:t>38</a:t>
+                      </a:r>
+                    </a:p>
+                  </a:txBody>
+                  <a:tcPr marL="54864" marR="54864" marT="27432" marB="27432">
+                    <a:solidFill>
+                      <a:srgbClr val="FFFFFF"/>
+                    </a:solidFill>
+                  </a:tcPr>
+                </a:tc>
+                <a:tc>
+                  <a:txBody>
+                    <a:bodyPr/>
+                    <a:lstStyle/>
+                    <a:p>
+                      <a:pPr algn="r"/>
+                      <a:r>
+                        <a:rPr sz="850" b="0">
+                          <a:solidFill>
+                            <a:srgbClr val="32373E"/>
+                          </a:solidFill>
+                          <a:latin typeface="Arial"/>
+                        </a:rPr>
+                        <a:t>36</a:t>
+                      </a:r>
+                    </a:p>
+                  </a:txBody>
+                  <a:tcPr marL="54864" marR="54864" marT="27432" marB="27432">
+                    <a:solidFill>
+                      <a:srgbClr val="FFFFFF"/>
+                    </a:solidFill>
+                  </a:tcPr>
+                </a:tc>
+                <a:tc>
+                  <a:txBody>
+                    <a:bodyPr/>
+                    <a:lstStyle/>
+                    <a:p>
+                      <a:pPr algn="r"/>
+                      <a:r>
+                        <a:rPr sz="850" b="0">
+                          <a:solidFill>
+                            <a:srgbClr val="32373E"/>
+                          </a:solidFill>
+                          <a:latin typeface="Arial"/>
+                        </a:rPr>
+                        <a:t>32</a:t>
+                      </a:r>
+                    </a:p>
+                  </a:txBody>
+                  <a:tcPr marL="54864" marR="54864" marT="27432" marB="27432">
+                    <a:solidFill>
+                      <a:srgbClr val="FFFFFF"/>
+                    </a:solidFill>
+                  </a:tcPr>
+                </a:tc>
+                <a:tc>
+                  <a:txBody>
+                    <a:bodyPr/>
+                    <a:lstStyle/>
+                    <a:p>
+                      <a:pPr algn="r"/>
+                      <a:r>
+                        <a:rPr sz="850" b="0">
+                          <a:solidFill>
+                            <a:srgbClr val="32373E"/>
+                          </a:solidFill>
+                          <a:latin typeface="Arial"/>
+                        </a:rPr>
+                        <a:t>-11%</a:t>
+                      </a:r>
+                    </a:p>
+                  </a:txBody>
+                  <a:tcPr marL="54864" marR="54864" marT="27432" marB="27432">
+                    <a:solidFill>
+                      <a:srgbClr val="FFFFFF"/>
+                    </a:solidFill>
+                  </a:tcPr>
+                </a:tc>
+              </a:tr>
+              <a:tr h="274320">
+                <a:tc>
+                  <a:txBody>
+                    <a:bodyPr/>
+                    <a:lstStyle/>
+                    <a:p>
+                      <a:r>
+                        <a:rPr sz="850" b="1">
+                          <a:solidFill>
+                            <a:srgbClr val="32373E"/>
+                          </a:solidFill>
+                          <a:latin typeface="Arial"/>
+                        </a:rPr>
+                        <a:t>Fund Rate</a:t>
+                      </a:r>
+                    </a:p>
+                  </a:txBody>
+                  <a:tcPr marL="54864" marR="54864" marT="27432" marB="27432">
+                    <a:solidFill>
+                      <a:srgbClr val="F3F3F3"/>
+                    </a:solidFill>
+                  </a:tcPr>
+                </a:tc>
+                <a:tc>
+                  <a:txBody>
+                    <a:bodyPr/>
+                    <a:lstStyle/>
+                    <a:p>
+                      <a:pPr algn="r"/>
+                      <a:r>
+                        <a:rPr sz="850" b="0">
+                          <a:solidFill>
+                            <a:srgbClr val="32373E"/>
+                          </a:solidFill>
+                          <a:latin typeface="Arial"/>
+                        </a:rPr>
+                        <a:t>23%</a:t>
+                      </a:r>
+                    </a:p>
+                  </a:txBody>
+                  <a:tcPr marL="54864" marR="54864" marT="27432" marB="27432">
+                    <a:solidFill>
+                      <a:srgbClr val="F3F3F3"/>
+                    </a:solidFill>
+                  </a:tcPr>
+                </a:tc>
+                <a:tc>
+                  <a:txBody>
+                    <a:bodyPr/>
+                    <a:lstStyle/>
+                    <a:p>
+                      <a:pPr algn="r"/>
+                      <a:r>
+                        <a:rPr sz="850" b="0">
+                          <a:solidFill>
+                            <a:srgbClr val="32373E"/>
+                          </a:solidFill>
+                          <a:latin typeface="Arial"/>
+                        </a:rPr>
+                        <a:t>18%</a:t>
+                      </a:r>
+                    </a:p>
+                  </a:txBody>
+                  <a:tcPr marL="54864" marR="54864" marT="27432" marB="27432">
+                    <a:solidFill>
+                      <a:srgbClr val="F3F3F3"/>
+                    </a:solidFill>
+                  </a:tcPr>
+                </a:tc>
+                <a:tc>
+                  <a:txBody>
+                    <a:bodyPr/>
+                    <a:lstStyle/>
+                    <a:p>
+                      <a:pPr algn="r"/>
+                      <a:r>
+                        <a:rPr sz="850" b="0">
+                          <a:solidFill>
+                            <a:srgbClr val="32373E"/>
+                          </a:solidFill>
+                          <a:latin typeface="Arial"/>
+                        </a:rPr>
+                        <a:t>24%</a:t>
+                      </a:r>
+                    </a:p>
+                  </a:txBody>
+                  <a:tcPr marL="54864" marR="54864" marT="27432" marB="27432">
+                    <a:solidFill>
+                      <a:srgbClr val="F3F3F3"/>
+                    </a:solidFill>
+                  </a:tcPr>
+                </a:tc>
+                <a:tc>
+                  <a:txBody>
+                    <a:bodyPr/>
+                    <a:lstStyle/>
+                    <a:p>
+                      <a:pPr algn="r"/>
+                      <a:r>
+                        <a:rPr sz="850" b="0">
+                          <a:solidFill>
+                            <a:srgbClr val="32373E"/>
+                          </a:solidFill>
+                          <a:latin typeface="Arial"/>
+                        </a:rPr>
+                        <a:t>19%</a:t>
+                      </a:r>
+                    </a:p>
+                  </a:txBody>
+                  <a:tcPr marL="54864" marR="54864" marT="27432" marB="27432">
+                    <a:solidFill>
+                      <a:srgbClr val="F3F3F3"/>
+                    </a:solidFill>
+                  </a:tcPr>
+                </a:tc>
+                <a:tc>
+                  <a:txBody>
+                    <a:bodyPr/>
+                    <a:lstStyle/>
+                    <a:p>
+                      <a:pPr algn="r"/>
+                      <a:r>
+                        <a:rPr sz="850" b="0">
+                          <a:solidFill>
+                            <a:srgbClr val="32373E"/>
+                          </a:solidFill>
+                          <a:latin typeface="Arial"/>
+                        </a:rPr>
+                        <a:t>18%</a:t>
+                      </a:r>
+                    </a:p>
+                  </a:txBody>
+                  <a:tcPr marL="54864" marR="54864" marT="27432" marB="27432">
+                    <a:solidFill>
+                      <a:srgbClr val="F3F3F3"/>
+                    </a:solidFill>
+                  </a:tcPr>
+                </a:tc>
+                <a:tc>
+                  <a:txBody>
+                    <a:bodyPr/>
+                    <a:lstStyle/>
+                    <a:p>
+                      <a:pPr algn="r"/>
+                      <a:r>
+                        <a:rPr sz="850" b="0">
+                          <a:solidFill>
+                            <a:srgbClr val="32373E"/>
+                          </a:solidFill>
+                          <a:latin typeface="Arial"/>
+                        </a:rPr>
+                        <a:t>15%</a:t>
+                      </a:r>
+                    </a:p>
+                  </a:txBody>
+                  <a:tcPr marL="54864" marR="54864" marT="27432" marB="27432">
+                    <a:solidFill>
+                      <a:srgbClr val="F3F3F3"/>
+                    </a:solidFill>
+                  </a:tcPr>
+                </a:tc>
+                <a:tc>
+                  <a:txBody>
+                    <a:bodyPr/>
+                    <a:lstStyle/>
+                    <a:p>
+                      <a:pPr algn="r"/>
+                      <a:r>
+                        <a:rPr sz="850" b="0">
+                          <a:solidFill>
+                            <a:srgbClr val="32373E"/>
+                          </a:solidFill>
+                          <a:latin typeface="Arial"/>
+                        </a:rPr>
+                        <a:t>-3pp</a:t>
+                      </a:r>
+                    </a:p>
+                  </a:txBody>
+                  <a:tcPr marL="54864" marR="54864" marT="27432" marB="27432">
+                    <a:solidFill>
+                      <a:srgbClr val="F3F3F3"/>
+                    </a:solidFill>
+                  </a:tcPr>
+                </a:tc>
+              </a:tr>
+              <a:tr h="274320">
+                <a:tc>
+                  <a:txBody>
+                    <a:bodyPr/>
+                    <a:lstStyle/>
+                    <a:p>
+                      <a:r>
+                        <a:rPr sz="850" b="1">
+                          <a:solidFill>
+                            <a:srgbClr val="32373E"/>
+                          </a:solidFill>
+                          <a:latin typeface="Arial"/>
+                        </a:rPr>
+                        <a:t>Cost per Funded Client</a:t>
+                      </a:r>
+                    </a:p>
+                  </a:txBody>
+                  <a:tcPr marL="54864" marR="54864" marT="27432" marB="27432">
+                    <a:solidFill>
+                      <a:srgbClr val="FFFFFF"/>
+                    </a:solidFill>
+                  </a:tcPr>
+                </a:tc>
+                <a:tc>
+                  <a:txBody>
+                    <a:bodyPr/>
+                    <a:lstStyle/>
+                    <a:p>
+                      <a:pPr algn="r"/>
+                      <a:r>
+                        <a:rPr sz="850" b="0">
+                          <a:solidFill>
+                            <a:srgbClr val="32373E"/>
+                          </a:solidFill>
+                          <a:latin typeface="Arial"/>
+                        </a:rPr>
+                        <a:t>—</a:t>
+                      </a:r>
+                    </a:p>
+                  </a:txBody>
+                  <a:tcPr marL="54864" marR="54864" marT="27432" marB="27432">
+                    <a:solidFill>
+                      <a:srgbClr val="FFFFFF"/>
+                    </a:solidFill>
+                  </a:tcPr>
+                </a:tc>
+                <a:tc>
+                  <a:txBody>
+                    <a:bodyPr/>
+                    <a:lstStyle/>
+                    <a:p>
+                      <a:pPr algn="r"/>
+                      <a:r>
+                        <a:rPr sz="850" b="0">
+                          <a:solidFill>
+                            <a:srgbClr val="32373E"/>
+                          </a:solidFill>
+                          <a:latin typeface="Arial"/>
+                        </a:rPr>
+                        <a:t>—</a:t>
+                      </a:r>
+                    </a:p>
+                  </a:txBody>
+                  <a:tcPr marL="54864" marR="54864" marT="27432" marB="27432">
+                    <a:solidFill>
+                      <a:srgbClr val="FFFFFF"/>
+                    </a:solidFill>
+                  </a:tcPr>
+                </a:tc>
+                <a:tc>
+                  <a:txBody>
+                    <a:bodyPr/>
+                    <a:lstStyle/>
+                    <a:p>
+                      <a:pPr algn="r"/>
+                      <a:r>
+                        <a:rPr sz="850" b="0">
+                          <a:solidFill>
+                            <a:srgbClr val="32373E"/>
+                          </a:solidFill>
+                          <a:latin typeface="Arial"/>
+                        </a:rPr>
+                        <a:t>$673</a:t>
+                      </a:r>
+                    </a:p>
+                  </a:txBody>
+                  <a:tcPr marL="54864" marR="54864" marT="27432" marB="27432">
+                    <a:solidFill>
+                      <a:srgbClr val="FFFFFF"/>
+                    </a:solidFill>
+                  </a:tcPr>
+                </a:tc>
+                <a:tc>
+                  <a:txBody>
+                    <a:bodyPr/>
+                    <a:lstStyle/>
+                    <a:p>
+                      <a:pPr algn="r"/>
+                      <a:r>
+                        <a:rPr sz="850" b="0">
+                          <a:solidFill>
+                            <a:srgbClr val="32373E"/>
+                          </a:solidFill>
+                          <a:latin typeface="Arial"/>
+                        </a:rPr>
+                        <a:t>$1,218</a:t>
+                      </a:r>
+                    </a:p>
+                  </a:txBody>
+                  <a:tcPr marL="54864" marR="54864" marT="27432" marB="27432">
+                    <a:solidFill>
+                      <a:srgbClr val="FFFFFF"/>
+                    </a:solidFill>
+                  </a:tcPr>
+                </a:tc>
+                <a:tc>
+                  <a:txBody>
+                    <a:bodyPr/>
+                    <a:lstStyle/>
+                    <a:p>
+                      <a:pPr algn="r"/>
+                      <a:r>
+                        <a:rPr sz="850" b="0">
+                          <a:solidFill>
+                            <a:srgbClr val="32373E"/>
+                          </a:solidFill>
+                          <a:latin typeface="Arial"/>
+                        </a:rPr>
+                        <a:t>$2,189</a:t>
+                      </a:r>
+                    </a:p>
+                  </a:txBody>
+                  <a:tcPr marL="54864" marR="54864" marT="27432" marB="27432">
+                    <a:solidFill>
+                      <a:srgbClr val="FFFFFF"/>
+                    </a:solidFill>
+                  </a:tcPr>
+                </a:tc>
+                <a:tc>
+                  <a:txBody>
+                    <a:bodyPr/>
+                    <a:lstStyle/>
+                    <a:p>
+                      <a:pPr algn="r"/>
+                      <a:r>
+                        <a:rPr sz="850" b="0">
+                          <a:solidFill>
+                            <a:srgbClr val="32373E"/>
+                          </a:solidFill>
+                          <a:latin typeface="Arial"/>
+                        </a:rPr>
+                        <a:t>$3,762</a:t>
+                      </a:r>
+                    </a:p>
+                  </a:txBody>
+                  <a:tcPr marL="54864" marR="54864" marT="27432" marB="27432">
+                    <a:solidFill>
+                      <a:srgbClr val="FFFFFF"/>
+                    </a:solidFill>
+                  </a:tcPr>
+                </a:tc>
+                <a:tc>
+                  <a:txBody>
+                    <a:bodyPr/>
+                    <a:lstStyle/>
+                    <a:p>
+                      <a:pPr algn="r"/>
+                      <a:r>
+                        <a:rPr sz="850" b="0">
+                          <a:solidFill>
+                            <a:srgbClr val="32373E"/>
+                          </a:solidFill>
+                          <a:latin typeface="Arial"/>
+                        </a:rPr>
+                        <a:t>+72%</a:t>
+                      </a:r>
+                    </a:p>
+                  </a:txBody>
+                  <a:tcPr marL="54864" marR="54864" marT="27432" marB="27432">
+                    <a:solidFill>
+                      <a:srgbClr val="FFFFFF"/>
+                    </a:solidFill>
+                  </a:tcPr>
+                </a:tc>
+              </a:tr>
+              <a:tr h="274320">
+                <a:tc>
+                  <a:txBody>
+                    <a:bodyPr/>
+                    <a:lstStyle/>
+                    <a:p>
+                      <a:r>
+                        <a:rPr sz="850" b="1">
+                          <a:solidFill>
+                            <a:srgbClr val="32373E"/>
+                          </a:solidFill>
+                          <a:latin typeface="Arial"/>
+                        </a:rPr>
+                        <a:t>New Traded Clients</a:t>
+                      </a:r>
+                    </a:p>
+                  </a:txBody>
+                  <a:tcPr marL="54864" marR="54864" marT="27432" marB="27432">
+                    <a:solidFill>
+                      <a:srgbClr val="F3F3F3"/>
+                    </a:solidFill>
+                  </a:tcPr>
+                </a:tc>
+                <a:tc>
+                  <a:txBody>
+                    <a:bodyPr/>
+                    <a:lstStyle/>
+                    <a:p>
+                      <a:pPr algn="r"/>
+                      <a:r>
+                        <a:rPr sz="850" b="0">
+                          <a:solidFill>
+                            <a:srgbClr val="32373E"/>
+                          </a:solidFill>
+                          <a:latin typeface="Arial"/>
+                        </a:rPr>
+                        <a:t>56</a:t>
+                      </a:r>
+                    </a:p>
+                  </a:txBody>
+                  <a:tcPr marL="54864" marR="54864" marT="27432" marB="27432">
+                    <a:solidFill>
+                      <a:srgbClr val="F3F3F3"/>
+                    </a:solidFill>
+                  </a:tcPr>
+                </a:tc>
+                <a:tc>
+                  <a:txBody>
+                    <a:bodyPr/>
+                    <a:lstStyle/>
+                    <a:p>
+                      <a:pPr algn="r"/>
+                      <a:r>
+                        <a:rPr sz="850" b="0">
+                          <a:solidFill>
+                            <a:srgbClr val="32373E"/>
+                          </a:solidFill>
+                          <a:latin typeface="Arial"/>
+                        </a:rPr>
+                        <a:t>52</a:t>
+                      </a:r>
+                    </a:p>
+                  </a:txBody>
+                  <a:tcPr marL="54864" marR="54864" marT="27432" marB="27432">
+                    <a:solidFill>
+                      <a:srgbClr val="F3F3F3"/>
+                    </a:solidFill>
+                  </a:tcPr>
+                </a:tc>
+                <a:tc>
+                  <a:txBody>
+                    <a:bodyPr/>
+                    <a:lstStyle/>
+                    <a:p>
+                      <a:pPr algn="r"/>
+                      <a:r>
+                        <a:rPr sz="850" b="0">
+                          <a:solidFill>
+                            <a:srgbClr val="32373E"/>
+                          </a:solidFill>
+                          <a:latin typeface="Arial"/>
+                        </a:rPr>
+                        <a:t>57</a:t>
+                      </a:r>
+                    </a:p>
+                  </a:txBody>
+                  <a:tcPr marL="54864" marR="54864" marT="27432" marB="27432">
+                    <a:solidFill>
+                      <a:srgbClr val="F3F3F3"/>
+                    </a:solidFill>
+                  </a:tcPr>
+                </a:tc>
+                <a:tc>
+                  <a:txBody>
+                    <a:bodyPr/>
+                    <a:lstStyle/>
+                    <a:p>
+                      <a:pPr algn="r"/>
+                      <a:r>
+                        <a:rPr sz="850" b="0">
+                          <a:solidFill>
+                            <a:srgbClr val="32373E"/>
+                          </a:solidFill>
+                          <a:latin typeface="Arial"/>
+                        </a:rPr>
+                        <a:t>35</a:t>
+                      </a:r>
+                    </a:p>
+                  </a:txBody>
+                  <a:tcPr marL="54864" marR="54864" marT="27432" marB="27432">
+                    <a:solidFill>
+                      <a:srgbClr val="F3F3F3"/>
+                    </a:solidFill>
+                  </a:tcPr>
+                </a:tc>
+                <a:tc>
+                  <a:txBody>
+                    <a:bodyPr/>
+                    <a:lstStyle/>
+                    <a:p>
+                      <a:pPr algn="r"/>
+                      <a:r>
+                        <a:rPr sz="850" b="0">
+                          <a:solidFill>
+                            <a:srgbClr val="32373E"/>
+                          </a:solidFill>
+                          <a:latin typeface="Arial"/>
+                        </a:rPr>
+                        <a:t>36</a:t>
+                      </a:r>
+                    </a:p>
+                  </a:txBody>
+                  <a:tcPr marL="54864" marR="54864" marT="27432" marB="27432">
+                    <a:solidFill>
+                      <a:srgbClr val="F3F3F3"/>
+                    </a:solidFill>
+                  </a:tcPr>
+                </a:tc>
+                <a:tc>
+                  <a:txBody>
+                    <a:bodyPr/>
+                    <a:lstStyle/>
+                    <a:p>
+                      <a:pPr algn="r"/>
+                      <a:r>
+                        <a:rPr sz="850" b="0">
+                          <a:solidFill>
+                            <a:srgbClr val="32373E"/>
+                          </a:solidFill>
+                          <a:latin typeface="Arial"/>
+                        </a:rPr>
+                        <a:t>29</a:t>
+                      </a:r>
+                    </a:p>
+                  </a:txBody>
+                  <a:tcPr marL="54864" marR="54864" marT="27432" marB="27432">
+                    <a:solidFill>
+                      <a:srgbClr val="F3F3F3"/>
+                    </a:solidFill>
+                  </a:tcPr>
+                </a:tc>
+                <a:tc>
+                  <a:txBody>
+                    <a:bodyPr/>
+                    <a:lstStyle/>
+                    <a:p>
+                      <a:pPr algn="r"/>
+                      <a:r>
+                        <a:rPr sz="850" b="0">
+                          <a:solidFill>
+                            <a:srgbClr val="32373E"/>
+                          </a:solidFill>
+                          <a:latin typeface="Arial"/>
+                        </a:rPr>
+                        <a:t>-19%</a:t>
+                      </a:r>
+                    </a:p>
+                  </a:txBody>
+                  <a:tcPr marL="54864" marR="54864" marT="27432" marB="27432">
+                    <a:solidFill>
+                      <a:srgbClr val="F3F3F3"/>
+                    </a:solidFill>
+                  </a:tcPr>
+                </a:tc>
+              </a:tr>
+              <a:tr h="274320">
+                <a:tc>
+                  <a:txBody>
+                    <a:bodyPr/>
+                    <a:lstStyle/>
+                    <a:p>
+                      <a:r>
+                        <a:rPr sz="850" b="1">
+                          <a:solidFill>
+                            <a:srgbClr val="32373E"/>
+                          </a:solidFill>
+                          <a:latin typeface="Arial"/>
+                        </a:rPr>
+                        <a:t>Cost per Traded Client</a:t>
+                      </a:r>
+                    </a:p>
+                  </a:txBody>
+                  <a:tcPr marL="54864" marR="54864" marT="27432" marB="27432">
+                    <a:solidFill>
+                      <a:srgbClr val="FFFFFF"/>
+                    </a:solidFill>
+                  </a:tcPr>
+                </a:tc>
+                <a:tc>
+                  <a:txBody>
+                    <a:bodyPr/>
+                    <a:lstStyle/>
+                    <a:p>
+                      <a:pPr algn="r"/>
+                      <a:r>
+                        <a:rPr sz="850" b="0">
+                          <a:solidFill>
+                            <a:srgbClr val="32373E"/>
+                          </a:solidFill>
+                          <a:latin typeface="Arial"/>
+                        </a:rPr>
+                        <a:t>—</a:t>
+                      </a:r>
+                    </a:p>
+                  </a:txBody>
+                  <a:tcPr marL="54864" marR="54864" marT="27432" marB="27432">
+                    <a:solidFill>
+                      <a:srgbClr val="FFFFFF"/>
+                    </a:solidFill>
+                  </a:tcPr>
+                </a:tc>
+                <a:tc>
+                  <a:txBody>
+                    <a:bodyPr/>
+                    <a:lstStyle/>
+                    <a:p>
+                      <a:pPr algn="r"/>
+                      <a:r>
+                        <a:rPr sz="850" b="0">
+                          <a:solidFill>
+                            <a:srgbClr val="32373E"/>
+                          </a:solidFill>
+                          <a:latin typeface="Arial"/>
+                        </a:rPr>
+                        <a:t>—</a:t>
+                      </a:r>
+                    </a:p>
+                  </a:txBody>
+                  <a:tcPr marL="54864" marR="54864" marT="27432" marB="27432">
+                    <a:solidFill>
+                      <a:srgbClr val="FFFFFF"/>
+                    </a:solidFill>
+                  </a:tcPr>
+                </a:tc>
+                <a:tc>
+                  <a:txBody>
+                    <a:bodyPr/>
+                    <a:lstStyle/>
+                    <a:p>
+                      <a:pPr algn="r"/>
+                      <a:r>
+                        <a:rPr sz="850" b="0">
+                          <a:solidFill>
+                            <a:srgbClr val="32373E"/>
+                          </a:solidFill>
+                          <a:latin typeface="Arial"/>
+                        </a:rPr>
+                        <a:t>$744</a:t>
+                      </a:r>
+                    </a:p>
+                  </a:txBody>
+                  <a:tcPr marL="54864" marR="54864" marT="27432" marB="27432">
+                    <a:solidFill>
+                      <a:srgbClr val="FFFFFF"/>
+                    </a:solidFill>
+                  </a:tcPr>
+                </a:tc>
+                <a:tc>
+                  <a:txBody>
+                    <a:bodyPr/>
+                    <a:lstStyle/>
+                    <a:p>
+                      <a:pPr algn="r"/>
+                      <a:r>
+                        <a:rPr sz="850" b="0">
+                          <a:solidFill>
+                            <a:srgbClr val="32373E"/>
+                          </a:solidFill>
+                          <a:latin typeface="Arial"/>
+                        </a:rPr>
+                        <a:t>$1,323</a:t>
+                      </a:r>
+                    </a:p>
+                  </a:txBody>
+                  <a:tcPr marL="54864" marR="54864" marT="27432" marB="27432">
+                    <a:solidFill>
+                      <a:srgbClr val="FFFFFF"/>
+                    </a:solidFill>
+                  </a:tcPr>
+                </a:tc>
+                <a:tc>
+                  <a:txBody>
+                    <a:bodyPr/>
+                    <a:lstStyle/>
+                    <a:p>
+                      <a:pPr algn="r"/>
+                      <a:r>
+                        <a:rPr sz="850" b="0">
+                          <a:solidFill>
+                            <a:srgbClr val="32373E"/>
+                          </a:solidFill>
+                          <a:latin typeface="Arial"/>
+                        </a:rPr>
+                        <a:t>$2,189</a:t>
+                      </a:r>
+                    </a:p>
+                  </a:txBody>
+                  <a:tcPr marL="54864" marR="54864" marT="27432" marB="27432">
+                    <a:solidFill>
+                      <a:srgbClr val="FFFFFF"/>
+                    </a:solidFill>
+                  </a:tcPr>
+                </a:tc>
+                <a:tc>
+                  <a:txBody>
+                    <a:bodyPr/>
+                    <a:lstStyle/>
+                    <a:p>
+                      <a:pPr algn="r"/>
+                      <a:r>
+                        <a:rPr sz="850" b="0">
+                          <a:solidFill>
+                            <a:srgbClr val="32373E"/>
+                          </a:solidFill>
+                          <a:latin typeface="Arial"/>
+                        </a:rPr>
+                        <a:t>$4,151</a:t>
+                      </a:r>
+                    </a:p>
+                  </a:txBody>
+                  <a:tcPr marL="54864" marR="54864" marT="27432" marB="27432">
+                    <a:solidFill>
+                      <a:srgbClr val="FFFFFF"/>
+                    </a:solidFill>
+                  </a:tcPr>
+                </a:tc>
+                <a:tc>
+                  <a:txBody>
+                    <a:bodyPr/>
+                    <a:lstStyle/>
+                    <a:p>
+                      <a:pPr algn="r"/>
+                      <a:r>
+                        <a:rPr sz="850" b="0">
+                          <a:solidFill>
+                            <a:srgbClr val="32373E"/>
+                          </a:solidFill>
+                          <a:latin typeface="Arial"/>
+                        </a:rPr>
+                        <a:t>+90%</a:t>
+                      </a:r>
+                    </a:p>
+                  </a:txBody>
+                  <a:tcPr marL="54864" marR="54864" marT="27432" marB="27432">
+                    <a:solidFill>
+                      <a:srgbClr val="FFFFFF"/>
+                    </a:solidFill>
+                  </a:tcPr>
+                </a:tc>
+              </a:tr>
+              <a:tr h="274320">
+                <a:tc>
+                  <a:txBody>
+                    <a:bodyPr/>
+                    <a:lstStyle/>
+                    <a:p>
+                      <a:r>
+                        <a:rPr sz="850" b="1">
+                          <a:solidFill>
+                            <a:srgbClr val="32373E"/>
+                          </a:solidFill>
+                          <a:latin typeface="Arial"/>
+                        </a:rPr>
+                        <a:t>Trading Volume</a:t>
+                      </a:r>
+                    </a:p>
+                  </a:txBody>
+                  <a:tcPr marL="54864" marR="54864" marT="27432" marB="27432">
+                    <a:solidFill>
+                      <a:srgbClr val="F3F3F3"/>
+                    </a:solidFill>
+                  </a:tcPr>
+                </a:tc>
+                <a:tc>
+                  <a:txBody>
+                    <a:bodyPr/>
+                    <a:lstStyle/>
+                    <a:p>
+                      <a:pPr algn="r"/>
+                      <a:r>
+                        <a:rPr sz="850" b="0">
+                          <a:solidFill>
+                            <a:srgbClr val="32373E"/>
+                          </a:solidFill>
+                          <a:latin typeface="Arial"/>
+                        </a:rPr>
+                        <a:t>$5.1B</a:t>
+                      </a:r>
+                    </a:p>
+                  </a:txBody>
+                  <a:tcPr marL="54864" marR="54864" marT="27432" marB="27432">
+                    <a:solidFill>
+                      <a:srgbClr val="F3F3F3"/>
+                    </a:solidFill>
+                  </a:tcPr>
+                </a:tc>
+                <a:tc>
+                  <a:txBody>
+                    <a:bodyPr/>
+                    <a:lstStyle/>
+                    <a:p>
+                      <a:pPr algn="r"/>
+                      <a:r>
+                        <a:rPr sz="850" b="0">
+                          <a:solidFill>
+                            <a:srgbClr val="32373E"/>
+                          </a:solidFill>
+                          <a:latin typeface="Arial"/>
+                        </a:rPr>
+                        <a:t>$2.5B</a:t>
+                      </a:r>
+                    </a:p>
+                  </a:txBody>
+                  <a:tcPr marL="54864" marR="54864" marT="27432" marB="27432">
+                    <a:solidFill>
+                      <a:srgbClr val="F3F3F3"/>
+                    </a:solidFill>
+                  </a:tcPr>
+                </a:tc>
+                <a:tc>
+                  <a:txBody>
+                    <a:bodyPr/>
+                    <a:lstStyle/>
+                    <a:p>
+                      <a:pPr algn="r"/>
+                      <a:r>
+                        <a:rPr sz="850" b="0">
+                          <a:solidFill>
+                            <a:srgbClr val="32373E"/>
+                          </a:solidFill>
+                          <a:latin typeface="Arial"/>
+                        </a:rPr>
+                        <a:t>$2.3B</a:t>
+                      </a:r>
+                    </a:p>
+                  </a:txBody>
+                  <a:tcPr marL="54864" marR="54864" marT="27432" marB="27432">
+                    <a:solidFill>
+                      <a:srgbClr val="F3F3F3"/>
+                    </a:solidFill>
+                  </a:tcPr>
+                </a:tc>
+                <a:tc>
+                  <a:txBody>
+                    <a:bodyPr/>
+                    <a:lstStyle/>
+                    <a:p>
+                      <a:pPr algn="r"/>
+                      <a:r>
+                        <a:rPr sz="850" b="0">
+                          <a:solidFill>
+                            <a:srgbClr val="32373E"/>
+                          </a:solidFill>
+                          <a:latin typeface="Arial"/>
+                        </a:rPr>
+                        <a:t>$2.1B</a:t>
+                      </a:r>
+                    </a:p>
+                  </a:txBody>
+                  <a:tcPr marL="54864" marR="54864" marT="27432" marB="27432">
+                    <a:solidFill>
+                      <a:srgbClr val="F3F3F3"/>
+                    </a:solidFill>
+                  </a:tcPr>
+                </a:tc>
+                <a:tc>
+                  <a:txBody>
+                    <a:bodyPr/>
+                    <a:lstStyle/>
+                    <a:p>
+                      <a:pPr algn="r"/>
+                      <a:r>
+                        <a:rPr sz="850" b="0">
+                          <a:solidFill>
+                            <a:srgbClr val="32373E"/>
+                          </a:solidFill>
+                          <a:latin typeface="Arial"/>
+                        </a:rPr>
+                        <a:t>$1.1B</a:t>
+                      </a:r>
+                    </a:p>
+                  </a:txBody>
+                  <a:tcPr marL="54864" marR="54864" marT="27432" marB="27432">
+                    <a:solidFill>
+                      <a:srgbClr val="F3F3F3"/>
+                    </a:solidFill>
+                  </a:tcPr>
+                </a:tc>
+                <a:tc>
+                  <a:txBody>
+                    <a:bodyPr/>
+                    <a:lstStyle/>
+                    <a:p>
+                      <a:pPr algn="r"/>
+                      <a:r>
+                        <a:rPr sz="850" b="0">
+                          <a:solidFill>
+                            <a:srgbClr val="32373E"/>
+                          </a:solidFill>
+                          <a:latin typeface="Arial"/>
+                        </a:rPr>
+                        <a:t>$1.1B</a:t>
+                      </a:r>
+                    </a:p>
+                  </a:txBody>
+                  <a:tcPr marL="54864" marR="54864" marT="27432" marB="27432">
+                    <a:solidFill>
+                      <a:srgbClr val="F3F3F3"/>
+                    </a:solidFill>
+                  </a:tcPr>
+                </a:tc>
+                <a:tc>
+                  <a:txBody>
+                    <a:bodyPr/>
+                    <a:lstStyle/>
+                    <a:p>
+                      <a:pPr algn="r"/>
+                      <a:r>
+                        <a:rPr sz="850" b="0">
+                          <a:solidFill>
+                            <a:srgbClr val="32373E"/>
+                          </a:solidFill>
+                          <a:latin typeface="Arial"/>
+                        </a:rPr>
+                        <a:t>flat</a:t>
+                      </a:r>
+                    </a:p>
+                  </a:txBody>
+                  <a:tcPr marL="54864" marR="54864" marT="27432" marB="27432">
+                    <a:solidFill>
+                      <a:srgbClr val="F3F3F3"/>
+                    </a:solidFill>
+                  </a:tcPr>
+                </a:tc>
+              </a:tr>
+            </a:tbl>
+          </a:graphicData>
+        </a:graphic>
+      </p:graphicFrame>
+      <p:sp>
+        <p:nvSpPr>
+          <p:cNvPr id="12" name="TextBox 11"/>
+          <p:cNvSpPr txBox="1"/>
+          <p:nvPr/>
+        </p:nvSpPr>
+        <p:spPr>
+          <a:xfrm>
+            <a:off x="3566160" y="5029200"/>
+            <a:ext cx="8138160" cy="457200"/>
+          </a:xfrm>
+          <a:prstGeom prst="rect">
+            <a:avLst/>
+          </a:prstGeom>
+          <a:noFill/>
+        </p:spPr>
+        <p:txBody>
+          <a:bodyPr wrap="square" anchor="t" lIns="0" rIns="0" tIns="0" bIns="0">
+            <a:spAutoFit/>
+          </a:bodyPr>
+          <a:lstStyle/>
+          <a:p>
+            <a:pPr algn="l"/>
+            <a:r>
+              <a:rPr sz="750" b="0">
+                <a:solidFill>
+                  <a:srgbClr val="5A5A5A"/>
+                </a:solidFill>
+                <a:latin typeface="Arial"/>
+              </a:rPr>
+              <a:t>Funnel metrics are blended organic + paid. Working media per the monthly performance reporting, under our reporting from March 2026. MoM = June vs May.</a:t>
             </a:r>
           </a:p>
         </p:txBody>
@@ -13154,7 +15631,7 @@
                 </a:solidFill>
                 <a:latin typeface="Arial"/>
               </a:rPr>
-              <a:t>Monthly Performance Review</a:t>
+              <a:t>Performance Review</a:t>
             </a:r>
           </a:p>
         </p:txBody>
@@ -13189,7 +15666,7 @@
                 </a:solidFill>
                 <a:latin typeface="Arial"/>
               </a:rPr>
-              <a:t>2 / 16</a:t>
+              <a:t>8 / 17</a:t>
             </a:r>
           </a:p>
         </p:txBody>
@@ -14848,7 +17325,7 @@
                 </a:solidFill>
                 <a:latin typeface="Arial"/>
               </a:rPr>
-              <a:t>Monthly Performance Review</a:t>
+              <a:t>Performance Review</a:t>
             </a:r>
           </a:p>
         </p:txBody>
@@ -14883,7 +17360,7 @@
                 </a:solidFill>
                 <a:latin typeface="Arial"/>
               </a:rPr>
-              <a:t>3 / 16</a:t>
+              <a:t>9 / 17</a:t>
             </a:r>
           </a:p>
         </p:txBody>
@@ -15549,7 +18026,7 @@
                 </a:solidFill>
                 <a:latin typeface="Arial"/>
               </a:rPr>
-              <a:t>Monthly Performance Review</a:t>
+              <a:t>Performance Review</a:t>
             </a:r>
           </a:p>
         </p:txBody>
@@ -15584,7 +18061,7 @@
                 </a:solidFill>
                 <a:latin typeface="Arial"/>
               </a:rPr>
-              <a:t>4 / 16</a:t>
+              <a:t>10 / 17</a:t>
             </a:r>
           </a:p>
         </p:txBody>
@@ -17765,7 +20242,7 @@
                 </a:solidFill>
                 <a:latin typeface="Arial"/>
               </a:rPr>
-              <a:t>Monthly Performance Review</a:t>
+              <a:t>Performance Review</a:t>
             </a:r>
           </a:p>
         </p:txBody>
@@ -17800,7 +20277,7 @@
                 </a:solidFill>
                 <a:latin typeface="Arial"/>
               </a:rPr>
-              <a:t>5 / 16</a:t>
+              <a:t>11 / 17</a:t>
             </a:r>
           </a:p>
         </p:txBody>
@@ -18450,7 +20927,7 @@
                 </a:solidFill>
                 <a:latin typeface="Arial"/>
               </a:rPr>
-              <a:t>Monthly Performance Review</a:t>
+              <a:t>Performance Review</a:t>
             </a:r>
           </a:p>
         </p:txBody>
@@ -18485,7 +20962,7 @@
                 </a:solidFill>
                 <a:latin typeface="Arial"/>
               </a:rPr>
-              <a:t>6 / 16</a:t>
+              <a:t>12 / 17</a:t>
             </a:r>
           </a:p>
         </p:txBody>
@@ -20261,7 +22738,7 @@
                 </a:solidFill>
                 <a:latin typeface="Arial"/>
               </a:rPr>
-              <a:t>Monthly Performance Review</a:t>
+              <a:t>Performance Review</a:t>
             </a:r>
           </a:p>
         </p:txBody>
@@ -20296,7 +22773,7 @@
                 </a:solidFill>
                 <a:latin typeface="Arial"/>
               </a:rPr>
-              <a:t>7 / 16</a:t>
+              <a:t>13 / 17</a:t>
             </a:r>
           </a:p>
         </p:txBody>
@@ -20930,7 +23407,7 @@
                 </a:solidFill>
                 <a:latin typeface="Arial"/>
               </a:rPr>
-              <a:t>Monthly Performance Review</a:t>
+              <a:t>Performance Review</a:t>
             </a:r>
           </a:p>
         </p:txBody>
@@ -20965,7 +23442,7 @@
                 </a:solidFill>
                 <a:latin typeface="Arial"/>
               </a:rPr>
-              <a:t>8 / 16</a:t>
+              <a:t>14 / 17</a:t>
             </a:r>
           </a:p>
         </p:txBody>
@@ -23390,7 +25867,7 @@
                 </a:solidFill>
                 <a:latin typeface="Arial"/>
               </a:rPr>
-              <a:t>Monthly Performance Review</a:t>
+              <a:t>Performance Review</a:t>
             </a:r>
           </a:p>
         </p:txBody>
@@ -23425,7 +25902,7 @@
                 </a:solidFill>
                 <a:latin typeface="Arial"/>
               </a:rPr>
-              <a:t>9 / 16</a:t>
+              <a:t>15 / 17</a:t>
             </a:r>
           </a:p>
         </p:txBody>

--- a/report-client-decks/06. GGMI_LATAM_June_2026_Performance_Review.pptx
+++ b/report-client-decks/06. GGMI_LATAM_June_2026_Performance_Review.pptx
@@ -13513,7 +13513,7 @@
                           </a:solidFill>
                           <a:latin typeface="Arial"/>
                         </a:rPr>
-                        <a:t>—</a:t>
+                        <a:t>$1,717</a:t>
                       </a:r>
                     </a:p>
                   </a:txBody>
@@ -13536,7 +13536,7 @@
                           </a:solidFill>
                           <a:latin typeface="Arial"/>
                         </a:rPr>
-                        <a:t>—</a:t>
+                        <a:t>$20,578</a:t>
                       </a:r>
                     </a:p>
                   </a:txBody>
@@ -14623,7 +14623,7 @@
                           </a:solidFill>
                           <a:latin typeface="Arial"/>
                         </a:rPr>
-                        <a:t>—</a:t>
+                        <a:t>$26</a:t>
                       </a:r>
                     </a:p>
                   </a:txBody>
@@ -14646,7 +14646,7 @@
                           </a:solidFill>
                           <a:latin typeface="Arial"/>
                         </a:rPr>
-                        <a:t>—</a:t>
+                        <a:t>$349</a:t>
                       </a:r>
                     </a:p>
                   </a:txBody>
@@ -14993,7 +14993,7 @@
                           </a:solidFill>
                           <a:latin typeface="Arial"/>
                         </a:rPr>
-                        <a:t>—</a:t>
+                        <a:t>$31</a:t>
                       </a:r>
                     </a:p>
                   </a:txBody>
@@ -15016,7 +15016,7 @@
                           </a:solidFill>
                           <a:latin typeface="Arial"/>
                         </a:rPr>
-                        <a:t>—</a:t>
+                        <a:t>$396</a:t>
                       </a:r>
                     </a:p>
                   </a:txBody>
@@ -15361,7 +15361,7 @@
                 </a:solidFill>
                 <a:latin typeface="Arial"/>
               </a:rPr>
-              <a:t>Funnel metrics are blended organic + paid. Working media per the monthly performance reporting, under our reporting from March 2026. MoM = June vs May.</a:t>
+              <a:t>Funnel metrics are blended organic + paid. Working media per the budget tracker. MoM = June vs May.</a:t>
             </a:r>
           </a:p>
         </p:txBody>

--- a/report-client-decks/06. GGMI_LATAM_June_2026_Performance_Review.pptx
+++ b/report-client-decks/06. GGMI_LATAM_June_2026_Performance_Review.pptx
@@ -13192,7 +13192,7 @@
             <a:tbl>
               <a:tblPr>
                 <a:noFill/>
-                <a:tableStyleId>{2BE7E398-C2A4-434B-A118-70B563C095EC}</a:tableStyleId>
+                <a:tableStyleId>{6FEE337A-9E0F-417D-BBF8-AE72EA27EF6E}</a:tableStyleId>
               </a:tblPr>
               <a:tblGrid>
                 <a:gridCol w="2130550"/>
@@ -14903,7 +14903,7 @@
         </p:spPr>
         <p:txBody>
           <a:bodyPr anchorCtr="0" anchor="t" bIns="0" lIns="0" spcFirstLastPara="1" rIns="0" wrap="square" tIns="0">
-            <a:spAutoFit/>
+            <a:noAutofit/>
           </a:bodyPr>
           <a:lstStyle/>
           <a:p>
@@ -14926,7 +14926,15 @@
                 <a:cs typeface="Arial"/>
                 <a:sym typeface="Arial"/>
               </a:rPr>
-              <a:t>Site traffic recovered with the spend: 9,236 Mexico sessions, up 61% from May, and 5,838 unique visitors, up 125%. The recovery is real but bought. Media drove essentially all of the June gain while organic search sat at its low.</a:t>
+              <a:t>Site traffic recovered with the spend: 9,236 Mexico sessions, up 61% from May, and 5,838 unique visitors, up 125%. The recovery is real but bought. </a:t>
+            </a:r>
+            <a:r>
+              <a:rPr lang="en-US" sz="950">
+                <a:solidFill>
+                  <a:srgbClr val="32373E"/>
+                </a:solidFill>
+              </a:rPr>
+              <a:t>Media drove the June gain while organic search sat at its low.</a:t>
             </a:r>
             <a:endParaRPr/>
           </a:p>
@@ -15731,7 +15739,7 @@
         </p:spPr>
         <p:txBody>
           <a:bodyPr anchorCtr="0" anchor="t" bIns="0" lIns="0" spcFirstLastPara="1" rIns="0" wrap="square" tIns="0">
-            <a:spAutoFit/>
+            <a:noAutofit/>
           </a:bodyPr>
           <a:lstStyle/>
           <a:p>
@@ -15778,7 +15786,27 @@
                 <a:cs typeface="Arial"/>
                 <a:sym typeface="Arial"/>
               </a:rPr>
-              <a:t>Meta scaled spend 291% and delivery stayed cheap, but click quality dropped sharply as it scaled. Its conversion reporting stays on hold until the placement audit completes.</a:t>
+              <a:t>Meta scaled spend 291% and delivery stayed cheap, but </a:t>
+            </a:r>
+            <a:r>
+              <a:rPr lang="en-US" sz="950">
+                <a:solidFill>
+                  <a:srgbClr val="32373E"/>
+                </a:solidFill>
+              </a:rPr>
+              <a:t>click quality collapsed as it scaled</a:t>
+            </a:r>
+            <a:r>
+              <a:rPr b="0" i="0" lang="en-US" sz="950" u="none" cap="none" strike="noStrike">
+                <a:solidFill>
+                  <a:srgbClr val="32373E"/>
+                </a:solidFill>
+                <a:latin typeface="Arial"/>
+                <a:ea typeface="Arial"/>
+                <a:cs typeface="Arial"/>
+                <a:sym typeface="Arial"/>
+              </a:rPr>
+              <a:t>. Its conversion reporting stays on hold until the placement audit completes.</a:t>
             </a:r>
             <a:endParaRPr/>
           </a:p>
@@ -18059,7 +18087,7 @@
             <a:tbl>
               <a:tblPr>
                 <a:noFill/>
-                <a:tableStyleId>{2BE7E398-C2A4-434B-A118-70B563C095EC}</a:tableStyleId>
+                <a:tableStyleId>{6FEE337A-9E0F-417D-BBF8-AE72EA27EF6E}</a:tableStyleId>
               </a:tblPr>
               <a:tblGrid>
                 <a:gridCol w="2743200"/>
@@ -25197,7 +25225,7 @@
             <a:tbl>
               <a:tblPr>
                 <a:noFill/>
-                <a:tableStyleId>{2BE7E398-C2A4-434B-A118-70B563C095EC}</a:tableStyleId>
+                <a:tableStyleId>{6FEE337A-9E0F-417D-BBF8-AE72EA27EF6E}</a:tableStyleId>
               </a:tblPr>
               <a:tblGrid>
                 <a:gridCol w="2560325"/>
@@ -29472,7 +29500,7 @@
             <a:tbl>
               <a:tblPr>
                 <a:noFill/>
-                <a:tableStyleId>{2BE7E398-C2A4-434B-A118-70B563C095EC}</a:tableStyleId>
+                <a:tableStyleId>{6FEE337A-9E0F-417D-BBF8-AE72EA27EF6E}</a:tableStyleId>
               </a:tblPr>
               <a:tblGrid>
                 <a:gridCol w="1828800"/>
@@ -32401,7 +32429,7 @@
             <a:tbl>
               <a:tblPr>
                 <a:noFill/>
-                <a:tableStyleId>{2BE7E398-C2A4-434B-A118-70B563C095EC}</a:tableStyleId>
+                <a:tableStyleId>{6FEE337A-9E0F-417D-BBF8-AE72EA27EF6E}</a:tableStyleId>
               </a:tblPr>
               <a:tblGrid>
                 <a:gridCol w="1965950"/>
@@ -35984,7 +36012,7 @@
             <a:tbl>
               <a:tblPr>
                 <a:noFill/>
-                <a:tableStyleId>{2BE7E398-C2A4-434B-A118-70B563C095EC}</a:tableStyleId>
+                <a:tableStyleId>{6FEE337A-9E0F-417D-BBF8-AE72EA27EF6E}</a:tableStyleId>
               </a:tblPr>
               <a:tblGrid>
                 <a:gridCol w="1737350"/>
@@ -40588,7 +40616,7 @@
             <a:tbl>
               <a:tblPr>
                 <a:noFill/>
-                <a:tableStyleId>{2BE7E398-C2A4-434B-A118-70B563C095EC}</a:tableStyleId>
+                <a:tableStyleId>{6FEE337A-9E0F-417D-BBF8-AE72EA27EF6E}</a:tableStyleId>
               </a:tblPr>
               <a:tblGrid>
                 <a:gridCol w="2377450"/>
@@ -42063,7 +42091,7 @@
         </p:spPr>
         <p:txBody>
           <a:bodyPr anchorCtr="0" anchor="t" bIns="0" lIns="0" spcFirstLastPara="1" rIns="0" wrap="square" tIns="0">
-            <a:spAutoFit/>
+            <a:noAutofit/>
           </a:bodyPr>
           <a:lstStyle/>
           <a:p>
@@ -42110,7 +42138,27 @@
                 <a:cs typeface="Arial"/>
                 <a:sym typeface="Arial"/>
               </a:rPr>
-              <a:t>Blended cost per application fell from $2,315 in April to $1,169 in June and held near that level through a 53% spend increase, so the growth was bought at improving efficiency, not rising cost.</a:t>
+              <a:t>Blended cost per application fell from $2,315 in April to $1,169 in June and held near that level through a 53% spend increase, so the growth was </a:t>
+            </a:r>
+            <a:r>
+              <a:rPr lang="en-US" sz="950">
+                <a:solidFill>
+                  <a:srgbClr val="32373E"/>
+                </a:solidFill>
+              </a:rPr>
+              <a:t>bought at improving efficiency</a:t>
+            </a:r>
+            <a:r>
+              <a:rPr b="0" i="0" lang="en-US" sz="950" u="none" cap="none" strike="noStrike">
+                <a:solidFill>
+                  <a:srgbClr val="32373E"/>
+                </a:solidFill>
+                <a:latin typeface="Arial"/>
+                <a:ea typeface="Arial"/>
+                <a:cs typeface="Arial"/>
+                <a:sym typeface="Arial"/>
+              </a:rPr>
+              <a:t>.</a:t>
             </a:r>
             <a:endParaRPr/>
           </a:p>
@@ -42555,7 +42603,7 @@
             <a:tbl>
               <a:tblPr>
                 <a:noFill/>
-                <a:tableStyleId>{2BE7E398-C2A4-434B-A118-70B563C095EC}</a:tableStyleId>
+                <a:tableStyleId>{6FEE337A-9E0F-417D-BBF8-AE72EA27EF6E}</a:tableStyleId>
               </a:tblPr>
               <a:tblGrid>
                 <a:gridCol w="2560325"/>
@@ -45169,7 +45217,7 @@
         </p:spPr>
         <p:txBody>
           <a:bodyPr anchorCtr="0" anchor="t" bIns="0" lIns="0" spcFirstLastPara="1" rIns="0" wrap="square" tIns="0">
-            <a:spAutoFit/>
+            <a:noAutofit/>
           </a:bodyPr>
           <a:lstStyle/>
           <a:p>
@@ -45183,16 +45231,12 @@
               <a:buNone/>
             </a:pPr>
             <a:r>
-              <a:rPr b="1" i="0" lang="en-US" sz="900" u="none" cap="none" strike="noStrike">
+              <a:rPr b="1" lang="en-US" sz="900">
                 <a:solidFill>
                   <a:srgbClr val="1A2A3A"/>
                 </a:solidFill>
-                <a:latin typeface="Arial"/>
-                <a:ea typeface="Arial"/>
-                <a:cs typeface="Arial"/>
-                <a:sym typeface="Arial"/>
               </a:rPr>
-              <a:t>Organic Search sessions — GA4, Mexico</a:t>
+              <a:t>Organic Search sessions · GA4, Mexico</a:t>
             </a:r>
             <a:endParaRPr/>
           </a:p>
@@ -45240,7 +45284,7 @@
             <a:tbl>
               <a:tblPr>
                 <a:noFill/>
-                <a:tableStyleId>{2BE7E398-C2A4-434B-A118-70B563C095EC}</a:tableStyleId>
+                <a:tableStyleId>{6FEE337A-9E0F-417D-BBF8-AE72EA27EF6E}</a:tableStyleId>
               </a:tblPr>
               <a:tblGrid>
                 <a:gridCol w="2743200"/>

--- a/report-client-decks/06. GGMI_LATAM_June_2026_Performance_Review.pptx
+++ b/report-client-decks/06. GGMI_LATAM_June_2026_Performance_Review.pptx
@@ -13192,7 +13192,7 @@
             <a:tbl>
               <a:tblPr>
                 <a:noFill/>
-                <a:tableStyleId>{6FEE337A-9E0F-417D-BBF8-AE72EA27EF6E}</a:tableStyleId>
+                <a:tableStyleId>{C039C2D8-F1BF-42C0-AD87-00188F5B8A56}</a:tableStyleId>
               </a:tblPr>
               <a:tblGrid>
                 <a:gridCol w="2130550"/>
@@ -18087,7 +18087,7 @@
             <a:tbl>
               <a:tblPr>
                 <a:noFill/>
-                <a:tableStyleId>{6FEE337A-9E0F-417D-BBF8-AE72EA27EF6E}</a:tableStyleId>
+                <a:tableStyleId>{C039C2D8-F1BF-42C0-AD87-00188F5B8A56}</a:tableStyleId>
               </a:tblPr>
               <a:tblGrid>
                 <a:gridCol w="2743200"/>
@@ -25225,7 +25225,7 @@
             <a:tbl>
               <a:tblPr>
                 <a:noFill/>
-                <a:tableStyleId>{6FEE337A-9E0F-417D-BBF8-AE72EA27EF6E}</a:tableStyleId>
+                <a:tableStyleId>{C039C2D8-F1BF-42C0-AD87-00188F5B8A56}</a:tableStyleId>
               </a:tblPr>
               <a:tblGrid>
                 <a:gridCol w="2560325"/>
@@ -29500,7 +29500,7 @@
             <a:tbl>
               <a:tblPr>
                 <a:noFill/>
-                <a:tableStyleId>{6FEE337A-9E0F-417D-BBF8-AE72EA27EF6E}</a:tableStyleId>
+                <a:tableStyleId>{C039C2D8-F1BF-42C0-AD87-00188F5B8A56}</a:tableStyleId>
               </a:tblPr>
               <a:tblGrid>
                 <a:gridCol w="1828800"/>
@@ -32429,7 +32429,7 @@
             <a:tbl>
               <a:tblPr>
                 <a:noFill/>
-                <a:tableStyleId>{6FEE337A-9E0F-417D-BBF8-AE72EA27EF6E}</a:tableStyleId>
+                <a:tableStyleId>{C039C2D8-F1BF-42C0-AD87-00188F5B8A56}</a:tableStyleId>
               </a:tblPr>
               <a:tblGrid>
                 <a:gridCol w="1965950"/>
@@ -35568,7 +35568,7 @@
         </p:spPr>
         <p:txBody>
           <a:bodyPr anchorCtr="0" anchor="t" bIns="0" lIns="0" spcFirstLastPara="1" rIns="0" wrap="square" tIns="0">
-            <a:spAutoFit/>
+            <a:noAutofit/>
           </a:bodyPr>
           <a:lstStyle/>
           <a:p>
@@ -35582,16 +35582,12 @@
               <a:buNone/>
             </a:pPr>
             <a:r>
-              <a:rPr b="0" i="0" lang="en-US" sz="750" u="none" cap="none" strike="noStrike">
+              <a:rPr lang="en-US" sz="750">
                 <a:solidFill>
                   <a:srgbClr val="5A5A5A"/>
                 </a:solidFill>
-                <a:latin typeface="Arial"/>
-                <a:ea typeface="Arial"/>
-                <a:cs typeface="Arial"/>
-                <a:sym typeface="Arial"/>
               </a:rPr>
-              <a:t>Funnel metrics are blended organic + paid. Working media per the budget tracker. MoM = June vs May.</a:t>
+              <a:t>Funnel metrics are blended organic + paid. Working media per the budget tracker. MoM = June vs May. January cost figures reflect a near-zero media base ($1,717); the scaled-media baseline starts in March.</a:t>
             </a:r>
             <a:endParaRPr/>
           </a:p>
@@ -36012,7 +36008,7 @@
             <a:tbl>
               <a:tblPr>
                 <a:noFill/>
-                <a:tableStyleId>{6FEE337A-9E0F-417D-BBF8-AE72EA27EF6E}</a:tableStyleId>
+                <a:tableStyleId>{C039C2D8-F1BF-42C0-AD87-00188F5B8A56}</a:tableStyleId>
               </a:tblPr>
               <a:tblGrid>
                 <a:gridCol w="1737350"/>
@@ -40616,7 +40612,7 @@
             <a:tbl>
               <a:tblPr>
                 <a:noFill/>
-                <a:tableStyleId>{6FEE337A-9E0F-417D-BBF8-AE72EA27EF6E}</a:tableStyleId>
+                <a:tableStyleId>{C039C2D8-F1BF-42C0-AD87-00188F5B8A56}</a:tableStyleId>
               </a:tblPr>
               <a:tblGrid>
                 <a:gridCol w="2377450"/>
@@ -42603,7 +42599,7 @@
             <a:tbl>
               <a:tblPr>
                 <a:noFill/>
-                <a:tableStyleId>{6FEE337A-9E0F-417D-BBF8-AE72EA27EF6E}</a:tableStyleId>
+                <a:tableStyleId>{C039C2D8-F1BF-42C0-AD87-00188F5B8A56}</a:tableStyleId>
               </a:tblPr>
               <a:tblGrid>
                 <a:gridCol w="2560325"/>
@@ -45284,7 +45280,7 @@
             <a:tbl>
               <a:tblPr>
                 <a:noFill/>
-                <a:tableStyleId>{6FEE337A-9E0F-417D-BBF8-AE72EA27EF6E}</a:tableStyleId>
+                <a:tableStyleId>{C039C2D8-F1BF-42C0-AD87-00188F5B8A56}</a:tableStyleId>
               </a:tblPr>
               <a:tblGrid>
                 <a:gridCol w="2743200"/>
@@ -46419,6 +46415,285 @@
 </file>
 
 <file path=ppt/theme/theme1.xml><?xml version="1.0" encoding="utf-8"?>
+<a:theme xmlns:a="http://schemas.openxmlformats.org/drawingml/2006/main" xmlns:r="http://schemas.openxmlformats.org/officeDocument/2006/relationships">
+  <a:themeElements>
+    <a:clrScheme name="Default">
+      <a:dk1>
+        <a:srgbClr val="000000"/>
+      </a:dk1>
+      <a:lt1>
+        <a:srgbClr val="FFFFFF"/>
+      </a:lt1>
+      <a:dk2>
+        <a:srgbClr val="158158"/>
+      </a:dk2>
+      <a:lt2>
+        <a:srgbClr val="F3F3F3"/>
+      </a:lt2>
+      <a:accent1>
+        <a:srgbClr val="058DC7"/>
+      </a:accent1>
+      <a:accent2>
+        <a:srgbClr val="50B432"/>
+      </a:accent2>
+      <a:accent3>
+        <a:srgbClr val="ED561B"/>
+      </a:accent3>
+      <a:accent4>
+        <a:srgbClr val="EDEF00"/>
+      </a:accent4>
+      <a:accent5>
+        <a:srgbClr val="24CBE5"/>
+      </a:accent5>
+      <a:accent6>
+        <a:srgbClr val="64E572"/>
+      </a:accent6>
+      <a:hlink>
+        <a:srgbClr val="2200CC"/>
+      </a:hlink>
+      <a:folHlink>
+        <a:srgbClr val="551A8B"/>
+      </a:folHlink>
+    </a:clrScheme>
+    <a:fontScheme name="Office">
+      <a:majorFont>
+        <a:latin typeface="Arial"/>
+        <a:ea typeface=""/>
+        <a:cs typeface=""/>
+        <a:font script="Jpan" typeface="ＭＳ Ｐゴシック"/>
+        <a:font script="Hang" typeface="맑은 고딕"/>
+        <a:font script="Hans" typeface="宋体"/>
+        <a:font script="Hant" typeface="新細明體"/>
+        <a:font script="Arab" typeface="Times New Roman"/>
+        <a:font script="Hebr" typeface="Times New Roman"/>
+        <a:font script="Thai" typeface="Angsana New"/>
+        <a:font script="Ethi" typeface="Nyala"/>
+        <a:font script="Beng" typeface="Vrinda"/>
+        <a:font script="Gujr" typeface="Shruti"/>
+        <a:font script="Khmr" typeface="MoolBoran"/>
+        <a:font script="Knda" typeface="Tunga"/>
+        <a:font script="Guru" typeface="Raavi"/>
+        <a:font script="Cans" typeface="Euphemia"/>
+        <a:font script="Cher" typeface="Plantagenet Cherokee"/>
+        <a:font script="Yiii" typeface="Microsoft Yi Baiti"/>
+        <a:font script="Tibt" typeface="Microsoft Himalaya"/>
+        <a:font script="Thaa" typeface="MV Boli"/>
+        <a:font script="Deva" typeface="Mangal"/>
+        <a:font script="Telu" typeface="Gautami"/>
+        <a:font script="Taml" typeface="Latha"/>
+        <a:font script="Syrc" typeface="Estrangelo Edessa"/>
+        <a:font script="Orya" typeface="Kalinga"/>
+        <a:font script="Mlym" typeface="Kartika"/>
+        <a:font script="Laoo" typeface="DokChampa"/>
+        <a:font script="Sinh" typeface="Iskoola Pota"/>
+        <a:font script="Mong" typeface="Mongolian Baiti"/>
+        <a:font script="Viet" typeface="Times New Roman"/>
+        <a:font script="Uigh" typeface="Microsoft Uighur"/>
+        <a:font script="Geor" typeface="Sylfaen"/>
+      </a:majorFont>
+      <a:minorFont>
+        <a:latin typeface="Arial"/>
+        <a:ea typeface=""/>
+        <a:cs typeface=""/>
+        <a:font script="Jpan" typeface="ＭＳ Ｐゴシック"/>
+        <a:font script="Hang" typeface="맑은 고딕"/>
+        <a:font script="Hans" typeface="宋体"/>
+        <a:font script="Hant" typeface="新細明體"/>
+        <a:font script="Arab" typeface="Arial"/>
+        <a:font script="Hebr" typeface="Arial"/>
+        <a:font script="Thai" typeface="Cordia New"/>
+        <a:font script="Ethi" typeface="Nyala"/>
+        <a:font script="Beng" typeface="Vrinda"/>
+        <a:font script="Gujr" typeface="Shruti"/>
+        <a:font script="Khmr" typeface="DaunPenh"/>
+        <a:font script="Knda" typeface="Tunga"/>
+        <a:font script="Guru" typeface="Raavi"/>
+        <a:font script="Cans" typeface="Euphemia"/>
+        <a:font script="Cher" typeface="Plantagenet Cherokee"/>
+        <a:font script="Yiii" typeface="Microsoft Yi Baiti"/>
+        <a:font script="Tibt" typeface="Microsoft Himalaya"/>
+        <a:font script="Thaa" typeface="MV Boli"/>
+        <a:font script="Deva" typeface="Mangal"/>
+        <a:font script="Telu" typeface="Gautami"/>
+        <a:font script="Taml" typeface="Latha"/>
+        <a:font script="Syrc" typeface="Estrangelo Edessa"/>
+        <a:font script="Orya" typeface="Kalinga"/>
+        <a:font script="Mlym" typeface="Kartika"/>
+        <a:font script="Laoo" typeface="DokChampa"/>
+        <a:font script="Sinh" typeface="Iskoola Pota"/>
+        <a:font script="Mong" typeface="Mongolian Baiti"/>
+        <a:font script="Viet" typeface="Arial"/>
+        <a:font script="Uigh" typeface="Microsoft Uighur"/>
+        <a:font script="Geor" typeface="Sylfaen"/>
+      </a:minorFont>
+    </a:fontScheme>
+    <a:fmtScheme name="Office">
+      <a:fillStyleLst>
+        <a:solidFill>
+          <a:schemeClr val="phClr"/>
+        </a:solidFill>
+        <a:gradFill rotWithShape="1">
+          <a:gsLst>
+            <a:gs pos="0">
+              <a:schemeClr val="phClr">
+                <a:tint val="50000"/>
+                <a:satMod val="300000"/>
+              </a:schemeClr>
+            </a:gs>
+            <a:gs pos="35000">
+              <a:schemeClr val="phClr">
+                <a:tint val="37000"/>
+                <a:satMod val="300000"/>
+              </a:schemeClr>
+            </a:gs>
+            <a:gs pos="100000">
+              <a:schemeClr val="phClr">
+                <a:tint val="15000"/>
+                <a:satMod val="350000"/>
+              </a:schemeClr>
+            </a:gs>
+          </a:gsLst>
+          <a:lin ang="16200000" scaled="1"/>
+        </a:gradFill>
+        <a:gradFill rotWithShape="1">
+          <a:gsLst>
+            <a:gs pos="0">
+              <a:schemeClr val="phClr">
+                <a:tint val="100000"/>
+                <a:shade val="100000"/>
+                <a:satMod val="130000"/>
+              </a:schemeClr>
+            </a:gs>
+            <a:gs pos="100000">
+              <a:schemeClr val="phClr">
+                <a:tint val="50000"/>
+                <a:shade val="100000"/>
+                <a:satMod val="350000"/>
+              </a:schemeClr>
+            </a:gs>
+          </a:gsLst>
+          <a:lin ang="16200000" scaled="0"/>
+        </a:gradFill>
+      </a:fillStyleLst>
+      <a:lnStyleLst>
+        <a:ln w="9525" cap="flat" cmpd="sng" algn="ctr">
+          <a:solidFill>
+            <a:schemeClr val="phClr">
+              <a:shade val="95000"/>
+              <a:satMod val="105000"/>
+            </a:schemeClr>
+          </a:solidFill>
+          <a:prstDash val="solid"/>
+        </a:ln>
+        <a:ln w="25400" cap="flat" cmpd="sng" algn="ctr">
+          <a:solidFill>
+            <a:schemeClr val="phClr"/>
+          </a:solidFill>
+          <a:prstDash val="solid"/>
+        </a:ln>
+        <a:ln w="38100" cap="flat" cmpd="sng" algn="ctr">
+          <a:solidFill>
+            <a:schemeClr val="phClr"/>
+          </a:solidFill>
+          <a:prstDash val="solid"/>
+        </a:ln>
+      </a:lnStyleLst>
+      <a:effectStyleLst>
+        <a:effectStyle>
+          <a:effectLst>
+            <a:outerShdw blurRad="40000" dist="20000" dir="5400000" rotWithShape="0">
+              <a:srgbClr val="000000">
+                <a:alpha val="38000"/>
+              </a:srgbClr>
+            </a:outerShdw>
+          </a:effectLst>
+        </a:effectStyle>
+        <a:effectStyle>
+          <a:effectLst>
+            <a:outerShdw blurRad="40000" dist="23000" dir="5400000" rotWithShape="0">
+              <a:srgbClr val="000000">
+                <a:alpha val="35000"/>
+              </a:srgbClr>
+            </a:outerShdw>
+          </a:effectLst>
+        </a:effectStyle>
+        <a:effectStyle>
+          <a:effectLst>
+            <a:outerShdw blurRad="40000" dist="23000" dir="5400000" rotWithShape="0">
+              <a:srgbClr val="000000">
+                <a:alpha val="35000"/>
+              </a:srgbClr>
+            </a:outerShdw>
+          </a:effectLst>
+          <a:scene3d>
+            <a:camera prst="orthographicFront">
+              <a:rot lat="0" lon="0" rev="0"/>
+            </a:camera>
+            <a:lightRig rig="threePt" dir="t">
+              <a:rot lat="0" lon="0" rev="1200000"/>
+            </a:lightRig>
+          </a:scene3d>
+          <a:sp3d>
+            <a:bevelT w="63500" h="25400"/>
+          </a:sp3d>
+        </a:effectStyle>
+      </a:effectStyleLst>
+      <a:bgFillStyleLst>
+        <a:solidFill>
+          <a:schemeClr val="phClr"/>
+        </a:solidFill>
+        <a:gradFill rotWithShape="1">
+          <a:gsLst>
+            <a:gs pos="0">
+              <a:schemeClr val="phClr">
+                <a:tint val="40000"/>
+                <a:satMod val="350000"/>
+              </a:schemeClr>
+            </a:gs>
+            <a:gs pos="40000">
+              <a:schemeClr val="phClr">
+                <a:tint val="45000"/>
+                <a:shade val="99000"/>
+                <a:satMod val="350000"/>
+              </a:schemeClr>
+            </a:gs>
+            <a:gs pos="100000">
+              <a:schemeClr val="phClr">
+                <a:shade val="20000"/>
+                <a:satMod val="255000"/>
+              </a:schemeClr>
+            </a:gs>
+          </a:gsLst>
+          <a:path path="circle">
+            <a:fillToRect l="50000" t="-80000" r="50000" b="180000"/>
+          </a:path>
+        </a:gradFill>
+        <a:gradFill rotWithShape="1">
+          <a:gsLst>
+            <a:gs pos="0">
+              <a:schemeClr val="phClr">
+                <a:tint val="80000"/>
+                <a:satMod val="300000"/>
+              </a:schemeClr>
+            </a:gs>
+            <a:gs pos="100000">
+              <a:schemeClr val="phClr">
+                <a:shade val="30000"/>
+                <a:satMod val="200000"/>
+              </a:schemeClr>
+            </a:gs>
+          </a:gsLst>
+          <a:path path="circle">
+            <a:fillToRect l="50000" t="50000" r="50000" b="50000"/>
+          </a:path>
+        </a:gradFill>
+      </a:bgFillStyleLst>
+    </a:fmtScheme>
+  </a:themeElements>
+</a:theme>
+</file>
+
+<file path=ppt/theme/theme2.xml><?xml version="1.0" encoding="utf-8"?>
 <a:theme xmlns:a="http://schemas.openxmlformats.org/drawingml/2006/main" xmlns:r="http://schemas.openxmlformats.org/officeDocument/2006/relationships" name="Office Theme">
   <a:themeElements>
     <a:clrScheme name="Office">
@@ -46695,283 +46970,4 @@
     </a:fmtScheme>
   </a:themeElements>
 </a:theme>
-</file>
-
-<file path=ppt/theme/theme2.xml><?xml version="1.0" encoding="utf-8"?>
-<a:theme xmlns:a="http://schemas.openxmlformats.org/drawingml/2006/main" xmlns:r="http://schemas.openxmlformats.org/officeDocument/2006/relationships">
-  <a:themeElements>
-    <a:clrScheme name="Default">
-      <a:dk1>
-        <a:srgbClr val="000000"/>
-      </a:dk1>
-      <a:lt1>
-        <a:srgbClr val="FFFFFF"/>
-      </a:lt1>
-      <a:dk2>
-        <a:srgbClr val="158158"/>
-      </a:dk2>
-      <a:lt2>
-        <a:srgbClr val="F3F3F3"/>
-      </a:lt2>
-      <a:accent1>
-        <a:srgbClr val="058DC7"/>
-      </a:accent1>
-      <a:accent2>
-        <a:srgbClr val="50B432"/>
-      </a:accent2>
-      <a:accent3>
-        <a:srgbClr val="ED561B"/>
-      </a:accent3>
-      <a:accent4>
-        <a:srgbClr val="EDEF00"/>
-      </a:accent4>
-      <a:accent5>
-        <a:srgbClr val="24CBE5"/>
-      </a:accent5>
-      <a:accent6>
-        <a:srgbClr val="64E572"/>
-      </a:accent6>
-      <a:hlink>
-        <a:srgbClr val="2200CC"/>
-      </a:hlink>
-      <a:folHlink>
-        <a:srgbClr val="551A8B"/>
-      </a:folHlink>
-    </a:clrScheme>
-    <a:fontScheme name="Office">
-      <a:majorFont>
-        <a:latin typeface="Arial"/>
-        <a:ea typeface=""/>
-        <a:cs typeface=""/>
-        <a:font script="Jpan" typeface="ＭＳ Ｐゴシック"/>
-        <a:font script="Hang" typeface="맑은 고딕"/>
-        <a:font script="Hans" typeface="宋体"/>
-        <a:font script="Hant" typeface="新細明體"/>
-        <a:font script="Arab" typeface="Times New Roman"/>
-        <a:font script="Hebr" typeface="Times New Roman"/>
-        <a:font script="Thai" typeface="Angsana New"/>
-        <a:font script="Ethi" typeface="Nyala"/>
-        <a:font script="Beng" typeface="Vrinda"/>
-        <a:font script="Gujr" typeface="Shruti"/>
-        <a:font script="Khmr" typeface="MoolBoran"/>
-        <a:font script="Knda" typeface="Tunga"/>
-        <a:font script="Guru" typeface="Raavi"/>
-        <a:font script="Cans" typeface="Euphemia"/>
-        <a:font script="Cher" typeface="Plantagenet Cherokee"/>
-        <a:font script="Yiii" typeface="Microsoft Yi Baiti"/>
-        <a:font script="Tibt" typeface="Microsoft Himalaya"/>
-        <a:font script="Thaa" typeface="MV Boli"/>
-        <a:font script="Deva" typeface="Mangal"/>
-        <a:font script="Telu" typeface="Gautami"/>
-        <a:font script="Taml" typeface="Latha"/>
-        <a:font script="Syrc" typeface="Estrangelo Edessa"/>
-        <a:font script="Orya" typeface="Kalinga"/>
-        <a:font script="Mlym" typeface="Kartika"/>
-        <a:font script="Laoo" typeface="DokChampa"/>
-        <a:font script="Sinh" typeface="Iskoola Pota"/>
-        <a:font script="Mong" typeface="Mongolian Baiti"/>
-        <a:font script="Viet" typeface="Times New Roman"/>
-        <a:font script="Uigh" typeface="Microsoft Uighur"/>
-        <a:font script="Geor" typeface="Sylfaen"/>
-      </a:majorFont>
-      <a:minorFont>
-        <a:latin typeface="Arial"/>
-        <a:ea typeface=""/>
-        <a:cs typeface=""/>
-        <a:font script="Jpan" typeface="ＭＳ Ｐゴシック"/>
-        <a:font script="Hang" typeface="맑은 고딕"/>
-        <a:font script="Hans" typeface="宋体"/>
-        <a:font script="Hant" typeface="新細明體"/>
-        <a:font script="Arab" typeface="Arial"/>
-        <a:font script="Hebr" typeface="Arial"/>
-        <a:font script="Thai" typeface="Cordia New"/>
-        <a:font script="Ethi" typeface="Nyala"/>
-        <a:font script="Beng" typeface="Vrinda"/>
-        <a:font script="Gujr" typeface="Shruti"/>
-        <a:font script="Khmr" typeface="DaunPenh"/>
-        <a:font script="Knda" typeface="Tunga"/>
-        <a:font script="Guru" typeface="Raavi"/>
-        <a:font script="Cans" typeface="Euphemia"/>
-        <a:font script="Cher" typeface="Plantagenet Cherokee"/>
-        <a:font script="Yiii" typeface="Microsoft Yi Baiti"/>
-        <a:font script="Tibt" typeface="Microsoft Himalaya"/>
-        <a:font script="Thaa" typeface="MV Boli"/>
-        <a:font script="Deva" typeface="Mangal"/>
-        <a:font script="Telu" typeface="Gautami"/>
-        <a:font script="Taml" typeface="Latha"/>
-        <a:font script="Syrc" typeface="Estrangelo Edessa"/>
-        <a:font script="Orya" typeface="Kalinga"/>
-        <a:font script="Mlym" typeface="Kartika"/>
-        <a:font script="Laoo" typeface="DokChampa"/>
-        <a:font script="Sinh" typeface="Iskoola Pota"/>
-        <a:font script="Mong" typeface="Mongolian Baiti"/>
-        <a:font script="Viet" typeface="Arial"/>
-        <a:font script="Uigh" typeface="Microsoft Uighur"/>
-        <a:font script="Geor" typeface="Sylfaen"/>
-      </a:minorFont>
-    </a:fontScheme>
-    <a:fmtScheme name="Office">
-      <a:fillStyleLst>
-        <a:solidFill>
-          <a:schemeClr val="phClr"/>
-        </a:solidFill>
-        <a:gradFill rotWithShape="1">
-          <a:gsLst>
-            <a:gs pos="0">
-              <a:schemeClr val="phClr">
-                <a:tint val="50000"/>
-                <a:satMod val="300000"/>
-              </a:schemeClr>
-            </a:gs>
-            <a:gs pos="35000">
-              <a:schemeClr val="phClr">
-                <a:tint val="37000"/>
-                <a:satMod val="300000"/>
-              </a:schemeClr>
-            </a:gs>
-            <a:gs pos="100000">
-              <a:schemeClr val="phClr">
-                <a:tint val="15000"/>
-                <a:satMod val="350000"/>
-              </a:schemeClr>
-            </a:gs>
-          </a:gsLst>
-          <a:lin ang="16200000" scaled="1"/>
-        </a:gradFill>
-        <a:gradFill rotWithShape="1">
-          <a:gsLst>
-            <a:gs pos="0">
-              <a:schemeClr val="phClr">
-                <a:tint val="100000"/>
-                <a:shade val="100000"/>
-                <a:satMod val="130000"/>
-              </a:schemeClr>
-            </a:gs>
-            <a:gs pos="100000">
-              <a:schemeClr val="phClr">
-                <a:tint val="50000"/>
-                <a:shade val="100000"/>
-                <a:satMod val="350000"/>
-              </a:schemeClr>
-            </a:gs>
-          </a:gsLst>
-          <a:lin ang="16200000" scaled="0"/>
-        </a:gradFill>
-      </a:fillStyleLst>
-      <a:lnStyleLst>
-        <a:ln w="9525" cap="flat" cmpd="sng" algn="ctr">
-          <a:solidFill>
-            <a:schemeClr val="phClr">
-              <a:shade val="95000"/>
-              <a:satMod val="105000"/>
-            </a:schemeClr>
-          </a:solidFill>
-          <a:prstDash val="solid"/>
-        </a:ln>
-        <a:ln w="25400" cap="flat" cmpd="sng" algn="ctr">
-          <a:solidFill>
-            <a:schemeClr val="phClr"/>
-          </a:solidFill>
-          <a:prstDash val="solid"/>
-        </a:ln>
-        <a:ln w="38100" cap="flat" cmpd="sng" algn="ctr">
-          <a:solidFill>
-            <a:schemeClr val="phClr"/>
-          </a:solidFill>
-          <a:prstDash val="solid"/>
-        </a:ln>
-      </a:lnStyleLst>
-      <a:effectStyleLst>
-        <a:effectStyle>
-          <a:effectLst>
-            <a:outerShdw blurRad="40000" dist="20000" dir="5400000" rotWithShape="0">
-              <a:srgbClr val="000000">
-                <a:alpha val="38000"/>
-              </a:srgbClr>
-            </a:outerShdw>
-          </a:effectLst>
-        </a:effectStyle>
-        <a:effectStyle>
-          <a:effectLst>
-            <a:outerShdw blurRad="40000" dist="23000" dir="5400000" rotWithShape="0">
-              <a:srgbClr val="000000">
-                <a:alpha val="35000"/>
-              </a:srgbClr>
-            </a:outerShdw>
-          </a:effectLst>
-        </a:effectStyle>
-        <a:effectStyle>
-          <a:effectLst>
-            <a:outerShdw blurRad="40000" dist="23000" dir="5400000" rotWithShape="0">
-              <a:srgbClr val="000000">
-                <a:alpha val="35000"/>
-              </a:srgbClr>
-            </a:outerShdw>
-          </a:effectLst>
-          <a:scene3d>
-            <a:camera prst="orthographicFront">
-              <a:rot lat="0" lon="0" rev="0"/>
-            </a:camera>
-            <a:lightRig rig="threePt" dir="t">
-              <a:rot lat="0" lon="0" rev="1200000"/>
-            </a:lightRig>
-          </a:scene3d>
-          <a:sp3d>
-            <a:bevelT w="63500" h="25400"/>
-          </a:sp3d>
-        </a:effectStyle>
-      </a:effectStyleLst>
-      <a:bgFillStyleLst>
-        <a:solidFill>
-          <a:schemeClr val="phClr"/>
-        </a:solidFill>
-        <a:gradFill rotWithShape="1">
-          <a:gsLst>
-            <a:gs pos="0">
-              <a:schemeClr val="phClr">
-                <a:tint val="40000"/>
-                <a:satMod val="350000"/>
-              </a:schemeClr>
-            </a:gs>
-            <a:gs pos="40000">
-              <a:schemeClr val="phClr">
-                <a:tint val="45000"/>
-                <a:shade val="99000"/>
-                <a:satMod val="350000"/>
-              </a:schemeClr>
-            </a:gs>
-            <a:gs pos="100000">
-              <a:schemeClr val="phClr">
-                <a:shade val="20000"/>
-                <a:satMod val="255000"/>
-              </a:schemeClr>
-            </a:gs>
-          </a:gsLst>
-          <a:path path="circle">
-            <a:fillToRect l="50000" t="-80000" r="50000" b="180000"/>
-          </a:path>
-        </a:gradFill>
-        <a:gradFill rotWithShape="1">
-          <a:gsLst>
-            <a:gs pos="0">
-              <a:schemeClr val="phClr">
-                <a:tint val="80000"/>
-                <a:satMod val="300000"/>
-              </a:schemeClr>
-            </a:gs>
-            <a:gs pos="100000">
-              <a:schemeClr val="phClr">
-                <a:shade val="30000"/>
-                <a:satMod val="200000"/>
-              </a:schemeClr>
-            </a:gs>
-          </a:gsLst>
-          <a:path path="circle">
-            <a:fillToRect l="50000" t="50000" r="50000" b="50000"/>
-          </a:path>
-        </a:gradFill>
-      </a:bgFillStyleLst>
-    </a:fmtScheme>
-  </a:themeElements>
-</a:theme>
 </file>
--- a/report-client-decks/06. GGMI_LATAM_June_2026_Performance_Review.pptx
+++ b/report-client-decks/06. GGMI_LATAM_June_2026_Performance_Review.pptx
@@ -13192,7 +13192,7 @@
             <a:tbl>
               <a:tblPr>
                 <a:noFill/>
-                <a:tableStyleId>{C039C2D8-F1BF-42C0-AD87-00188F5B8A56}</a:tableStyleId>
+                <a:tableStyleId>{5F8B912D-C5DC-4F49-AD61-14EE58C73858}</a:tableStyleId>
               </a:tblPr>
               <a:tblGrid>
                 <a:gridCol w="2130550"/>
@@ -15777,6 +15777,14 @@
               <a:buNone/>
             </a:pPr>
             <a:r>
+              <a:rPr lang="en-US" sz="950">
+                <a:solidFill>
+                  <a:srgbClr val="32373E"/>
+                </a:solidFill>
+              </a:rPr>
+              <a:t>Meta scaled spend 291% and delivery stayed cheap, but click quality collapsed as delivery shifted into cheap in-app inventory.</a:t>
+            </a:r>
+            <a:r>
               <a:rPr b="0" i="0" lang="en-US" sz="950" u="none" cap="none" strike="noStrike">
                 <a:solidFill>
                   <a:srgbClr val="32373E"/>
@@ -15786,27 +15794,7 @@
                 <a:cs typeface="Arial"/>
                 <a:sym typeface="Arial"/>
               </a:rPr>
-              <a:t>Meta scaled spend 291% and delivery stayed cheap, but </a:t>
-            </a:r>
-            <a:r>
-              <a:rPr lang="en-US" sz="950">
-                <a:solidFill>
-                  <a:srgbClr val="32373E"/>
-                </a:solidFill>
-              </a:rPr>
-              <a:t>click quality collapsed as it scaled</a:t>
-            </a:r>
-            <a:r>
-              <a:rPr b="0" i="0" lang="en-US" sz="950" u="none" cap="none" strike="noStrike">
-                <a:solidFill>
-                  <a:srgbClr val="32373E"/>
-                </a:solidFill>
-                <a:latin typeface="Arial"/>
-                <a:ea typeface="Arial"/>
-                <a:cs typeface="Arial"/>
-                <a:sym typeface="Arial"/>
-              </a:rPr>
-              <a:t>. Its conversion reporting stays on hold until the placement audit completes.</a:t>
+              <a:t> Its conversion reporting stays on hold until the placement audit completes.</a:t>
             </a:r>
             <a:endParaRPr/>
           </a:p>
@@ -18087,7 +18075,7 @@
             <a:tbl>
               <a:tblPr>
                 <a:noFill/>
-                <a:tableStyleId>{C039C2D8-F1BF-42C0-AD87-00188F5B8A56}</a:tableStyleId>
+                <a:tableStyleId>{5F8B912D-C5DC-4F49-AD61-14EE58C73858}</a:tableStyleId>
               </a:tblPr>
               <a:tblGrid>
                 <a:gridCol w="2743200"/>
@@ -19681,7 +19669,7 @@
         </p:spPr>
         <p:txBody>
           <a:bodyPr anchorCtr="0" anchor="t" bIns="0" lIns="0" spcFirstLastPara="1" rIns="0" wrap="square" tIns="0">
-            <a:spAutoFit/>
+            <a:noAutofit/>
           </a:bodyPr>
           <a:lstStyle/>
           <a:p>
@@ -19719,16 +19707,12 @@
               <a:buNone/>
             </a:pPr>
             <a:r>
-              <a:rPr b="0" i="0" lang="en-US" sz="950" u="none" cap="none" strike="noStrike">
+              <a:rPr lang="en-US" sz="950">
                 <a:solidFill>
                   <a:srgbClr val="32373E"/>
                 </a:solidFill>
-                <a:latin typeface="Arial"/>
-                <a:ea typeface="Arial"/>
-                <a:cs typeface="Arial"/>
-                <a:sym typeface="Arial"/>
               </a:rPr>
-              <a:t>Only 51% of June spend served Mexico. Out-of-market paid visitors outnumbered Mexican paid visitors on the site for most of H1, so concentrating that spend in-market should improve effective Mexico CPA immediately.</a:t>
+              <a:t>Only 51% of June spend served Mexico. Concentrating that spend in-market should improve effective Mexico CPA immediately, and the June 3 exclusion is already moving it.</a:t>
             </a:r>
             <a:endParaRPr/>
           </a:p>
@@ -22093,7 +22077,7 @@
         </p:spPr>
         <p:txBody>
           <a:bodyPr anchorCtr="0" anchor="t" bIns="0" lIns="0" spcFirstLastPara="1" rIns="0" wrap="square" tIns="0">
-            <a:spAutoFit/>
+            <a:noAutofit/>
           </a:bodyPr>
           <a:lstStyle/>
           <a:p>
@@ -22140,7 +22124,15 @@
                 <a:cs typeface="Arial"/>
                 <a:sym typeface="Arial"/>
               </a:rPr>
-              <a:t>This account converted platform clicks into measured site visits at 15.7% in February. June ran at 0.19%. Same pixel, same site, same market. The difference is the inventory the June campaigns bought.</a:t>
+              <a:t>This account converted platform clicks into measured site visits at 15.7% in February. June ran at 0.19%. </a:t>
+            </a:r>
+            <a:r>
+              <a:rPr lang="en-US" sz="950">
+                <a:solidFill>
+                  <a:srgbClr val="32373E"/>
+                </a:solidFill>
+              </a:rPr>
+              <a:t>Same pixel, same site, same market. The February benchmark isolates inventory quality as the cause, and the placement audit converts that finding into exclusions.</a:t>
             </a:r>
             <a:endParaRPr/>
           </a:p>
@@ -22945,7 +22937,7 @@
         </p:spPr>
         <p:txBody>
           <a:bodyPr anchorCtr="0" anchor="t" bIns="0" lIns="0" spcFirstLastPara="1" rIns="0" wrap="square" tIns="0">
-            <a:spAutoFit/>
+            <a:noAutofit/>
           </a:bodyPr>
           <a:lstStyle/>
           <a:p>
@@ -22959,16 +22951,12 @@
               <a:buNone/>
             </a:pPr>
             <a:r>
-              <a:rPr b="0" i="0" lang="en-US" sz="950" u="none" cap="none" strike="noStrike">
+              <a:rPr lang="en-US" sz="950">
                 <a:solidFill>
                   <a:srgbClr val="32373E"/>
                 </a:solidFill>
-                <a:latin typeface="Arial"/>
-                <a:ea typeface="Arial"/>
-                <a:cs typeface="Arial"/>
-                <a:sym typeface="Arial"/>
               </a:rPr>
-              <a:t>June buying skewed to low-cost in-app inventory, and 63% of spend served users 55 and older in a market where the target skews younger.</a:t>
+              <a:t>The traffic-objective delivery skewed toward low-cost in-app inventory, with 63% of spend serving users 55 and older; the placement exclusions and objective shift repoint it.</a:t>
             </a:r>
             <a:endParaRPr/>
           </a:p>
@@ -25225,7 +25213,7 @@
             <a:tbl>
               <a:tblPr>
                 <a:noFill/>
-                <a:tableStyleId>{C039C2D8-F1BF-42C0-AD87-00188F5B8A56}</a:tableStyleId>
+                <a:tableStyleId>{5F8B912D-C5DC-4F49-AD61-14EE58C73858}</a:tableStyleId>
               </a:tblPr>
               <a:tblGrid>
                 <a:gridCol w="2560325"/>
@@ -29500,7 +29488,7 @@
             <a:tbl>
               <a:tblPr>
                 <a:noFill/>
-                <a:tableStyleId>{C039C2D8-F1BF-42C0-AD87-00188F5B8A56}</a:tableStyleId>
+                <a:tableStyleId>{5F8B912D-C5DC-4F49-AD61-14EE58C73858}</a:tableStyleId>
               </a:tblPr>
               <a:tblGrid>
                 <a:gridCol w="1828800"/>
@@ -30537,7 +30525,7 @@
         </p:spPr>
         <p:txBody>
           <a:bodyPr anchorCtr="0" anchor="t" bIns="0" lIns="0" spcFirstLastPara="1" rIns="0" wrap="square" tIns="0">
-            <a:spAutoFit/>
+            <a:noAutofit/>
           </a:bodyPr>
           <a:lstStyle/>
           <a:p>
@@ -30575,16 +30563,12 @@
               <a:buNone/>
             </a:pPr>
             <a:r>
-              <a:rPr b="0" i="0" lang="en-US" sz="950" u="none" cap="none" strike="noStrike">
+              <a:rPr lang="en-US" sz="950">
                 <a:solidFill>
                   <a:srgbClr val="32373E"/>
                 </a:solidFill>
-                <a:latin typeface="Arial"/>
-                <a:ea typeface="Arial"/>
-                <a:cs typeface="Arial"/>
-                <a:sym typeface="Arial"/>
               </a:rPr>
-              <a:t>The cost of cheap reach is quality. Viewability fell to 51%, below the 70% standard. We delivered a 49-site blocklist covering 32% of June spend on this line and recommend a campaign-level viewability floor.</a:t>
+              <a:t>Scaling reach at this CPM pulled in low-viewability inventory: 51% against the 70% standard. We delivered a 49-site blocklist covering 32% of June spend on this line and recommend a campaign-level viewability floor to hold quality as reach scales.</a:t>
             </a:r>
             <a:endParaRPr/>
           </a:p>
@@ -32429,7 +32413,7 @@
             <a:tbl>
               <a:tblPr>
                 <a:noFill/>
-                <a:tableStyleId>{C039C2D8-F1BF-42C0-AD87-00188F5B8A56}</a:tableStyleId>
+                <a:tableStyleId>{5F8B912D-C5DC-4F49-AD61-14EE58C73858}</a:tableStyleId>
               </a:tblPr>
               <a:tblGrid>
                 <a:gridCol w="1965950"/>
@@ -36008,7 +35992,7 @@
             <a:tbl>
               <a:tblPr>
                 <a:noFill/>
-                <a:tableStyleId>{C039C2D8-F1BF-42C0-AD87-00188F5B8A56}</a:tableStyleId>
+                <a:tableStyleId>{5F8B912D-C5DC-4F49-AD61-14EE58C73858}</a:tableStyleId>
               </a:tblPr>
               <a:tblGrid>
                 <a:gridCol w="1737350"/>
@@ -40612,7 +40596,7 @@
             <a:tbl>
               <a:tblPr>
                 <a:noFill/>
-                <a:tableStyleId>{C039C2D8-F1BF-42C0-AD87-00188F5B8A56}</a:tableStyleId>
+                <a:tableStyleId>{5F8B912D-C5DC-4F49-AD61-14EE58C73858}</a:tableStyleId>
               </a:tblPr>
               <a:tblGrid>
                 <a:gridCol w="2377450"/>
@@ -42169,16 +42153,12 @@
               <a:buNone/>
             </a:pPr>
             <a:r>
-              <a:rPr b="0" i="0" lang="en-US" sz="950" u="none" cap="none" strike="noStrike">
+              <a:rPr lang="en-US" sz="950">
                 <a:solidFill>
                   <a:srgbClr val="32373E"/>
                 </a:solidFill>
-                <a:latin typeface="Arial"/>
-                <a:ea typeface="Arial"/>
-                <a:cs typeface="Arial"/>
-                <a:sym typeface="Arial"/>
               </a:rPr>
-              <a:t>Search and programmatic carried the measured volume (181 submitted applications). Paid social contributed reach and site traffic while its conversion validation completes.</a:t>
+              <a:t>Search and programmatic carried the measured volume: 181 submitted applications at a cost per submitted application near $650, held through the June scale-up. Paid social contributed reach and site traffic while its conversion validation completes.</a:t>
             </a:r>
             <a:endParaRPr/>
           </a:p>
@@ -42599,7 +42579,7 @@
             <a:tbl>
               <a:tblPr>
                 <a:noFill/>
-                <a:tableStyleId>{C039C2D8-F1BF-42C0-AD87-00188F5B8A56}</a:tableStyleId>
+                <a:tableStyleId>{5F8B912D-C5DC-4F49-AD61-14EE58C73858}</a:tableStyleId>
               </a:tblPr>
               <a:tblGrid>
                 <a:gridCol w="2560325"/>
@@ -45280,7 +45260,7 @@
             <a:tbl>
               <a:tblPr>
                 <a:noFill/>
-                <a:tableStyleId>{C039C2D8-F1BF-42C0-AD87-00188F5B8A56}</a:tableStyleId>
+                <a:tableStyleId>{5F8B912D-C5DC-4F49-AD61-14EE58C73858}</a:tableStyleId>
               </a:tblPr>
               <a:tblGrid>
                 <a:gridCol w="2743200"/>
@@ -46415,6 +46395,285 @@
 </file>
 
 <file path=ppt/theme/theme1.xml><?xml version="1.0" encoding="utf-8"?>
+<a:theme xmlns:a="http://schemas.openxmlformats.org/drawingml/2006/main" xmlns:r="http://schemas.openxmlformats.org/officeDocument/2006/relationships" name="Office Theme">
+  <a:themeElements>
+    <a:clrScheme name="Office">
+      <a:dk1>
+        <a:srgbClr val="000000"/>
+      </a:dk1>
+      <a:lt1>
+        <a:srgbClr val="FFFFFF"/>
+      </a:lt1>
+      <a:dk2>
+        <a:srgbClr val="1F497D"/>
+      </a:dk2>
+      <a:lt2>
+        <a:srgbClr val="EEECE1"/>
+      </a:lt2>
+      <a:accent1>
+        <a:srgbClr val="4F81BD"/>
+      </a:accent1>
+      <a:accent2>
+        <a:srgbClr val="C0504D"/>
+      </a:accent2>
+      <a:accent3>
+        <a:srgbClr val="9BBB59"/>
+      </a:accent3>
+      <a:accent4>
+        <a:srgbClr val="8064A2"/>
+      </a:accent4>
+      <a:accent5>
+        <a:srgbClr val="4BACC6"/>
+      </a:accent5>
+      <a:accent6>
+        <a:srgbClr val="F79646"/>
+      </a:accent6>
+      <a:hlink>
+        <a:srgbClr val="0000FF"/>
+      </a:hlink>
+      <a:folHlink>
+        <a:srgbClr val="800080"/>
+      </a:folHlink>
+    </a:clrScheme>
+    <a:fontScheme name="Office">
+      <a:majorFont>
+        <a:latin typeface="Arial"/>
+        <a:ea typeface=""/>
+        <a:cs typeface=""/>
+        <a:font script="Jpan" typeface="ＭＳ Ｐゴシック"/>
+        <a:font script="Hang" typeface="맑은 고딕"/>
+        <a:font script="Hans" typeface="宋体"/>
+        <a:font script="Hant" typeface="新細明體"/>
+        <a:font script="Arab" typeface="Times New Roman"/>
+        <a:font script="Hebr" typeface="Times New Roman"/>
+        <a:font script="Thai" typeface="Angsana New"/>
+        <a:font script="Ethi" typeface="Nyala"/>
+        <a:font script="Beng" typeface="Vrinda"/>
+        <a:font script="Gujr" typeface="Shruti"/>
+        <a:font script="Khmr" typeface="MoolBoran"/>
+        <a:font script="Knda" typeface="Tunga"/>
+        <a:font script="Guru" typeface="Raavi"/>
+        <a:font script="Cans" typeface="Euphemia"/>
+        <a:font script="Cher" typeface="Plantagenet Cherokee"/>
+        <a:font script="Yiii" typeface="Microsoft Yi Baiti"/>
+        <a:font script="Tibt" typeface="Microsoft Himalaya"/>
+        <a:font script="Thaa" typeface="MV Boli"/>
+        <a:font script="Deva" typeface="Mangal"/>
+        <a:font script="Telu" typeface="Gautami"/>
+        <a:font script="Taml" typeface="Latha"/>
+        <a:font script="Syrc" typeface="Estrangelo Edessa"/>
+        <a:font script="Orya" typeface="Kalinga"/>
+        <a:font script="Mlym" typeface="Kartika"/>
+        <a:font script="Laoo" typeface="DokChampa"/>
+        <a:font script="Sinh" typeface="Iskoola Pota"/>
+        <a:font script="Mong" typeface="Mongolian Baiti"/>
+        <a:font script="Viet" typeface="Times New Roman"/>
+        <a:font script="Uigh" typeface="Microsoft Uighur"/>
+        <a:font script="Geor" typeface="Sylfaen"/>
+      </a:majorFont>
+      <a:minorFont>
+        <a:latin typeface="Arial"/>
+        <a:ea typeface=""/>
+        <a:cs typeface=""/>
+        <a:font script="Jpan" typeface="ＭＳ Ｐゴシック"/>
+        <a:font script="Hang" typeface="맑은 고딕"/>
+        <a:font script="Hans" typeface="宋体"/>
+        <a:font script="Hant" typeface="新細明體"/>
+        <a:font script="Arab" typeface="Arial"/>
+        <a:font script="Hebr" typeface="Arial"/>
+        <a:font script="Thai" typeface="Cordia New"/>
+        <a:font script="Ethi" typeface="Nyala"/>
+        <a:font script="Beng" typeface="Vrinda"/>
+        <a:font script="Gujr" typeface="Shruti"/>
+        <a:font script="Khmr" typeface="DaunPenh"/>
+        <a:font script="Knda" typeface="Tunga"/>
+        <a:font script="Guru" typeface="Raavi"/>
+        <a:font script="Cans" typeface="Euphemia"/>
+        <a:font script="Cher" typeface="Plantagenet Cherokee"/>
+        <a:font script="Yiii" typeface="Microsoft Yi Baiti"/>
+        <a:font script="Tibt" typeface="Microsoft Himalaya"/>
+        <a:font script="Thaa" typeface="MV Boli"/>
+        <a:font script="Deva" typeface="Mangal"/>
+        <a:font script="Telu" typeface="Gautami"/>
+        <a:font script="Taml" typeface="Latha"/>
+        <a:font script="Syrc" typeface="Estrangelo Edessa"/>
+        <a:font script="Orya" typeface="Kalinga"/>
+        <a:font script="Mlym" typeface="Kartika"/>
+        <a:font script="Laoo" typeface="DokChampa"/>
+        <a:font script="Sinh" typeface="Iskoola Pota"/>
+        <a:font script="Mong" typeface="Mongolian Baiti"/>
+        <a:font script="Viet" typeface="Arial"/>
+        <a:font script="Uigh" typeface="Microsoft Uighur"/>
+        <a:font script="Geor" typeface="Sylfaen"/>
+      </a:minorFont>
+    </a:fontScheme>
+    <a:fmtScheme name="Office">
+      <a:fillStyleLst>
+        <a:solidFill>
+          <a:schemeClr val="phClr"/>
+        </a:solidFill>
+        <a:gradFill rotWithShape="1">
+          <a:gsLst>
+            <a:gs pos="0">
+              <a:schemeClr val="phClr">
+                <a:tint val="50000"/>
+                <a:satMod val="300000"/>
+              </a:schemeClr>
+            </a:gs>
+            <a:gs pos="35000">
+              <a:schemeClr val="phClr">
+                <a:tint val="37000"/>
+                <a:satMod val="300000"/>
+              </a:schemeClr>
+            </a:gs>
+            <a:gs pos="100000">
+              <a:schemeClr val="phClr">
+                <a:tint val="15000"/>
+                <a:satMod val="350000"/>
+              </a:schemeClr>
+            </a:gs>
+          </a:gsLst>
+          <a:lin ang="16200000" scaled="1"/>
+        </a:gradFill>
+        <a:gradFill rotWithShape="1">
+          <a:gsLst>
+            <a:gs pos="0">
+              <a:schemeClr val="phClr">
+                <a:tint val="100000"/>
+                <a:shade val="100000"/>
+                <a:satMod val="130000"/>
+              </a:schemeClr>
+            </a:gs>
+            <a:gs pos="100000">
+              <a:schemeClr val="phClr">
+                <a:tint val="50000"/>
+                <a:shade val="100000"/>
+                <a:satMod val="350000"/>
+              </a:schemeClr>
+            </a:gs>
+          </a:gsLst>
+          <a:lin ang="16200000" scaled="0"/>
+        </a:gradFill>
+      </a:fillStyleLst>
+      <a:lnStyleLst>
+        <a:ln w="9525" cap="flat" cmpd="sng" algn="ctr">
+          <a:solidFill>
+            <a:schemeClr val="phClr">
+              <a:shade val="95000"/>
+              <a:satMod val="105000"/>
+            </a:schemeClr>
+          </a:solidFill>
+          <a:prstDash val="solid"/>
+        </a:ln>
+        <a:ln w="25400" cap="flat" cmpd="sng" algn="ctr">
+          <a:solidFill>
+            <a:schemeClr val="phClr"/>
+          </a:solidFill>
+          <a:prstDash val="solid"/>
+        </a:ln>
+        <a:ln w="38100" cap="flat" cmpd="sng" algn="ctr">
+          <a:solidFill>
+            <a:schemeClr val="phClr"/>
+          </a:solidFill>
+          <a:prstDash val="solid"/>
+        </a:ln>
+      </a:lnStyleLst>
+      <a:effectStyleLst>
+        <a:effectStyle>
+          <a:effectLst>
+            <a:outerShdw blurRad="40000" dist="20000" dir="5400000" rotWithShape="0">
+              <a:srgbClr val="000000">
+                <a:alpha val="38000"/>
+              </a:srgbClr>
+            </a:outerShdw>
+          </a:effectLst>
+        </a:effectStyle>
+        <a:effectStyle>
+          <a:effectLst>
+            <a:outerShdw blurRad="40000" dist="23000" dir="5400000" rotWithShape="0">
+              <a:srgbClr val="000000">
+                <a:alpha val="35000"/>
+              </a:srgbClr>
+            </a:outerShdw>
+          </a:effectLst>
+        </a:effectStyle>
+        <a:effectStyle>
+          <a:effectLst>
+            <a:outerShdw blurRad="40000" dist="23000" dir="5400000" rotWithShape="0">
+              <a:srgbClr val="000000">
+                <a:alpha val="35000"/>
+              </a:srgbClr>
+            </a:outerShdw>
+          </a:effectLst>
+          <a:scene3d>
+            <a:camera prst="orthographicFront">
+              <a:rot lat="0" lon="0" rev="0"/>
+            </a:camera>
+            <a:lightRig rig="threePt" dir="t">
+              <a:rot lat="0" lon="0" rev="1200000"/>
+            </a:lightRig>
+          </a:scene3d>
+          <a:sp3d>
+            <a:bevelT w="63500" h="25400"/>
+          </a:sp3d>
+        </a:effectStyle>
+      </a:effectStyleLst>
+      <a:bgFillStyleLst>
+        <a:solidFill>
+          <a:schemeClr val="phClr"/>
+        </a:solidFill>
+        <a:gradFill rotWithShape="1">
+          <a:gsLst>
+            <a:gs pos="0">
+              <a:schemeClr val="phClr">
+                <a:tint val="40000"/>
+                <a:satMod val="350000"/>
+              </a:schemeClr>
+            </a:gs>
+            <a:gs pos="40000">
+              <a:schemeClr val="phClr">
+                <a:tint val="45000"/>
+                <a:shade val="99000"/>
+                <a:satMod val="350000"/>
+              </a:schemeClr>
+            </a:gs>
+            <a:gs pos="100000">
+              <a:schemeClr val="phClr">
+                <a:shade val="20000"/>
+                <a:satMod val="255000"/>
+              </a:schemeClr>
+            </a:gs>
+          </a:gsLst>
+          <a:path path="circle">
+            <a:fillToRect l="50000" t="-80000" r="50000" b="180000"/>
+          </a:path>
+        </a:gradFill>
+        <a:gradFill rotWithShape="1">
+          <a:gsLst>
+            <a:gs pos="0">
+              <a:schemeClr val="phClr">
+                <a:tint val="80000"/>
+                <a:satMod val="300000"/>
+              </a:schemeClr>
+            </a:gs>
+            <a:gs pos="100000">
+              <a:schemeClr val="phClr">
+                <a:shade val="30000"/>
+                <a:satMod val="200000"/>
+              </a:schemeClr>
+            </a:gs>
+          </a:gsLst>
+          <a:path path="circle">
+            <a:fillToRect l="50000" t="50000" r="50000" b="50000"/>
+          </a:path>
+        </a:gradFill>
+      </a:bgFillStyleLst>
+    </a:fmtScheme>
+  </a:themeElements>
+</a:theme>
+</file>
+
+<file path=ppt/theme/theme2.xml><?xml version="1.0" encoding="utf-8"?>
 <a:theme xmlns:a="http://schemas.openxmlformats.org/drawingml/2006/main" xmlns:r="http://schemas.openxmlformats.org/officeDocument/2006/relationships">
   <a:themeElements>
     <a:clrScheme name="Default">
@@ -46691,283 +46950,4 @@
     </a:fmtScheme>
   </a:themeElements>
 </a:theme>
-</file>
-
-<file path=ppt/theme/theme2.xml><?xml version="1.0" encoding="utf-8"?>
-<a:theme xmlns:a="http://schemas.openxmlformats.org/drawingml/2006/main" xmlns:r="http://schemas.openxmlformats.org/officeDocument/2006/relationships" name="Office Theme">
-  <a:themeElements>
-    <a:clrScheme name="Office">
-      <a:dk1>
-        <a:srgbClr val="000000"/>
-      </a:dk1>
-      <a:lt1>
-        <a:srgbClr val="FFFFFF"/>
-      </a:lt1>
-      <a:dk2>
-        <a:srgbClr val="1F497D"/>
-      </a:dk2>
-      <a:lt2>
-        <a:srgbClr val="EEECE1"/>
-      </a:lt2>
-      <a:accent1>
-        <a:srgbClr val="4F81BD"/>
-      </a:accent1>
-      <a:accent2>
-        <a:srgbClr val="C0504D"/>
-      </a:accent2>
-      <a:accent3>
-        <a:srgbClr val="9BBB59"/>
-      </a:accent3>
-      <a:accent4>
-        <a:srgbClr val="8064A2"/>
-      </a:accent4>
-      <a:accent5>
-        <a:srgbClr val="4BACC6"/>
-      </a:accent5>
-      <a:accent6>
-        <a:srgbClr val="F79646"/>
-      </a:accent6>
-      <a:hlink>
-        <a:srgbClr val="0000FF"/>
-      </a:hlink>
-      <a:folHlink>
-        <a:srgbClr val="800080"/>
-      </a:folHlink>
-    </a:clrScheme>
-    <a:fontScheme name="Office">
-      <a:majorFont>
-        <a:latin typeface="Arial"/>
-        <a:ea typeface=""/>
-        <a:cs typeface=""/>
-        <a:font script="Jpan" typeface="ＭＳ Ｐゴシック"/>
-        <a:font script="Hang" typeface="맑은 고딕"/>
-        <a:font script="Hans" typeface="宋体"/>
-        <a:font script="Hant" typeface="新細明體"/>
-        <a:font script="Arab" typeface="Times New Roman"/>
-        <a:font script="Hebr" typeface="Times New Roman"/>
-        <a:font script="Thai" typeface="Angsana New"/>
-        <a:font script="Ethi" typeface="Nyala"/>
-        <a:font script="Beng" typeface="Vrinda"/>
-        <a:font script="Gujr" typeface="Shruti"/>
-        <a:font script="Khmr" typeface="MoolBoran"/>
-        <a:font script="Knda" typeface="Tunga"/>
-        <a:font script="Guru" typeface="Raavi"/>
-        <a:font script="Cans" typeface="Euphemia"/>
-        <a:font script="Cher" typeface="Plantagenet Cherokee"/>
-        <a:font script="Yiii" typeface="Microsoft Yi Baiti"/>
-        <a:font script="Tibt" typeface="Microsoft Himalaya"/>
-        <a:font script="Thaa" typeface="MV Boli"/>
-        <a:font script="Deva" typeface="Mangal"/>
-        <a:font script="Telu" typeface="Gautami"/>
-        <a:font script="Taml" typeface="Latha"/>
-        <a:font script="Syrc" typeface="Estrangelo Edessa"/>
-        <a:font script="Orya" typeface="Kalinga"/>
-        <a:font script="Mlym" typeface="Kartika"/>
-        <a:font script="Laoo" typeface="DokChampa"/>
-        <a:font script="Sinh" typeface="Iskoola Pota"/>
-        <a:font script="Mong" typeface="Mongolian Baiti"/>
-        <a:font script="Viet" typeface="Times New Roman"/>
-        <a:font script="Uigh" typeface="Microsoft Uighur"/>
-        <a:font script="Geor" typeface="Sylfaen"/>
-      </a:majorFont>
-      <a:minorFont>
-        <a:latin typeface="Arial"/>
-        <a:ea typeface=""/>
-        <a:cs typeface=""/>
-        <a:font script="Jpan" typeface="ＭＳ Ｐゴシック"/>
-        <a:font script="Hang" typeface="맑은 고딕"/>
-        <a:font script="Hans" typeface="宋体"/>
-        <a:font script="Hant" typeface="新細明體"/>
-        <a:font script="Arab" typeface="Arial"/>
-        <a:font script="Hebr" typeface="Arial"/>
-        <a:font script="Thai" typeface="Cordia New"/>
-        <a:font script="Ethi" typeface="Nyala"/>
-        <a:font script="Beng" typeface="Vrinda"/>
-        <a:font script="Gujr" typeface="Shruti"/>
-        <a:font script="Khmr" typeface="DaunPenh"/>
-        <a:font script="Knda" typeface="Tunga"/>
-        <a:font script="Guru" typeface="Raavi"/>
-        <a:font script="Cans" typeface="Euphemia"/>
-        <a:font script="Cher" typeface="Plantagenet Cherokee"/>
-        <a:font script="Yiii" typeface="Microsoft Yi Baiti"/>
-        <a:font script="Tibt" typeface="Microsoft Himalaya"/>
-        <a:font script="Thaa" typeface="MV Boli"/>
-        <a:font script="Deva" typeface="Mangal"/>
-        <a:font script="Telu" typeface="Gautami"/>
-        <a:font script="Taml" typeface="Latha"/>
-        <a:font script="Syrc" typeface="Estrangelo Edessa"/>
-        <a:font script="Orya" typeface="Kalinga"/>
-        <a:font script="Mlym" typeface="Kartika"/>
-        <a:font script="Laoo" typeface="DokChampa"/>
-        <a:font script="Sinh" typeface="Iskoola Pota"/>
-        <a:font script="Mong" typeface="Mongolian Baiti"/>
-        <a:font script="Viet" typeface="Arial"/>
-        <a:font script="Uigh" typeface="Microsoft Uighur"/>
-        <a:font script="Geor" typeface="Sylfaen"/>
-      </a:minorFont>
-    </a:fontScheme>
-    <a:fmtScheme name="Office">
-      <a:fillStyleLst>
-        <a:solidFill>
-          <a:schemeClr val="phClr"/>
-        </a:solidFill>
-        <a:gradFill rotWithShape="1">
-          <a:gsLst>
-            <a:gs pos="0">
-              <a:schemeClr val="phClr">
-                <a:tint val="50000"/>
-                <a:satMod val="300000"/>
-              </a:schemeClr>
-            </a:gs>
-            <a:gs pos="35000">
-              <a:schemeClr val="phClr">
-                <a:tint val="37000"/>
-                <a:satMod val="300000"/>
-              </a:schemeClr>
-            </a:gs>
-            <a:gs pos="100000">
-              <a:schemeClr val="phClr">
-                <a:tint val="15000"/>
-                <a:satMod val="350000"/>
-              </a:schemeClr>
-            </a:gs>
-          </a:gsLst>
-          <a:lin ang="16200000" scaled="1"/>
-        </a:gradFill>
-        <a:gradFill rotWithShape="1">
-          <a:gsLst>
-            <a:gs pos="0">
-              <a:schemeClr val="phClr">
-                <a:tint val="100000"/>
-                <a:shade val="100000"/>
-                <a:satMod val="130000"/>
-              </a:schemeClr>
-            </a:gs>
-            <a:gs pos="100000">
-              <a:schemeClr val="phClr">
-                <a:tint val="50000"/>
-                <a:shade val="100000"/>
-                <a:satMod val="350000"/>
-              </a:schemeClr>
-            </a:gs>
-          </a:gsLst>
-          <a:lin ang="16200000" scaled="0"/>
-        </a:gradFill>
-      </a:fillStyleLst>
-      <a:lnStyleLst>
-        <a:ln w="9525" cap="flat" cmpd="sng" algn="ctr">
-          <a:solidFill>
-            <a:schemeClr val="phClr">
-              <a:shade val="95000"/>
-              <a:satMod val="105000"/>
-            </a:schemeClr>
-          </a:solidFill>
-          <a:prstDash val="solid"/>
-        </a:ln>
-        <a:ln w="25400" cap="flat" cmpd="sng" algn="ctr">
-          <a:solidFill>
-            <a:schemeClr val="phClr"/>
-          </a:solidFill>
-          <a:prstDash val="solid"/>
-        </a:ln>
-        <a:ln w="38100" cap="flat" cmpd="sng" algn="ctr">
-          <a:solidFill>
-            <a:schemeClr val="phClr"/>
-          </a:solidFill>
-          <a:prstDash val="solid"/>
-        </a:ln>
-      </a:lnStyleLst>
-      <a:effectStyleLst>
-        <a:effectStyle>
-          <a:effectLst>
-            <a:outerShdw blurRad="40000" dist="20000" dir="5400000" rotWithShape="0">
-              <a:srgbClr val="000000">
-                <a:alpha val="38000"/>
-              </a:srgbClr>
-            </a:outerShdw>
-          </a:effectLst>
-        </a:effectStyle>
-        <a:effectStyle>
-          <a:effectLst>
-            <a:outerShdw blurRad="40000" dist="23000" dir="5400000" rotWithShape="0">
-              <a:srgbClr val="000000">
-                <a:alpha val="35000"/>
-              </a:srgbClr>
-            </a:outerShdw>
-          </a:effectLst>
-        </a:effectStyle>
-        <a:effectStyle>
-          <a:effectLst>
-            <a:outerShdw blurRad="40000" dist="23000" dir="5400000" rotWithShape="0">
-              <a:srgbClr val="000000">
-                <a:alpha val="35000"/>
-              </a:srgbClr>
-            </a:outerShdw>
-          </a:effectLst>
-          <a:scene3d>
-            <a:camera prst="orthographicFront">
-              <a:rot lat="0" lon="0" rev="0"/>
-            </a:camera>
-            <a:lightRig rig="threePt" dir="t">
-              <a:rot lat="0" lon="0" rev="1200000"/>
-            </a:lightRig>
-          </a:scene3d>
-          <a:sp3d>
-            <a:bevelT w="63500" h="25400"/>
-          </a:sp3d>
-        </a:effectStyle>
-      </a:effectStyleLst>
-      <a:bgFillStyleLst>
-        <a:solidFill>
-          <a:schemeClr val="phClr"/>
-        </a:solidFill>
-        <a:gradFill rotWithShape="1">
-          <a:gsLst>
-            <a:gs pos="0">
-              <a:schemeClr val="phClr">
-                <a:tint val="40000"/>
-                <a:satMod val="350000"/>
-              </a:schemeClr>
-            </a:gs>
-            <a:gs pos="40000">
-              <a:schemeClr val="phClr">
-                <a:tint val="45000"/>
-                <a:shade val="99000"/>
-                <a:satMod val="350000"/>
-              </a:schemeClr>
-            </a:gs>
-            <a:gs pos="100000">
-              <a:schemeClr val="phClr">
-                <a:shade val="20000"/>
-                <a:satMod val="255000"/>
-              </a:schemeClr>
-            </a:gs>
-          </a:gsLst>
-          <a:path path="circle">
-            <a:fillToRect l="50000" t="-80000" r="50000" b="180000"/>
-          </a:path>
-        </a:gradFill>
-        <a:gradFill rotWithShape="1">
-          <a:gsLst>
-            <a:gs pos="0">
-              <a:schemeClr val="phClr">
-                <a:tint val="80000"/>
-                <a:satMod val="300000"/>
-              </a:schemeClr>
-            </a:gs>
-            <a:gs pos="100000">
-              <a:schemeClr val="phClr">
-                <a:shade val="30000"/>
-                <a:satMod val="200000"/>
-              </a:schemeClr>
-            </a:gs>
-          </a:gsLst>
-          <a:path path="circle">
-            <a:fillToRect l="50000" t="50000" r="50000" b="50000"/>
-          </a:path>
-        </a:gradFill>
-      </a:bgFillStyleLst>
-    </a:fmtScheme>
-  </a:themeElements>
-</a:theme>
 </file>
--- a/report-client-decks/06. GGMI_LATAM_June_2026_Performance_Review.pptx
+++ b/report-client-decks/06. GGMI_LATAM_June_2026_Performance_Review.pptx
@@ -13192,7 +13192,7 @@
             <a:tbl>
               <a:tblPr>
                 <a:noFill/>
-                <a:tableStyleId>{5F8B912D-C5DC-4F49-AD61-14EE58C73858}</a:tableStyleId>
+                <a:tableStyleId>{FBE4877E-206E-4DCF-A63A-2AA588775564}</a:tableStyleId>
               </a:tblPr>
               <a:tblGrid>
                 <a:gridCol w="2130550"/>
@@ -15137,7 +15137,7 @@
         </p:spPr>
         <p:txBody>
           <a:bodyPr anchorCtr="0" anchor="t" bIns="0" lIns="0" spcFirstLastPara="1" rIns="0" wrap="square" tIns="0">
-            <a:spAutoFit/>
+            <a:noAutofit/>
           </a:bodyPr>
           <a:lstStyle/>
           <a:p>
@@ -15150,6 +15150,14 @@
               </a:spcAft>
               <a:buNone/>
             </a:pPr>
+            <a:r>
+              <a:rPr lang="en-US" sz="950">
+                <a:solidFill>
+                  <a:srgbClr val="32373E"/>
+                </a:solidFill>
+              </a:rPr>
+              <a:t>Confirm the now-applied Mexico-only search targeting in July delivery, audit paid-social placements</a:t>
+            </a:r>
             <a:r>
               <a:rPr b="0" i="0" lang="en-US" sz="950" u="none" cap="none" strike="noStrike">
                 <a:solidFill>
@@ -15160,7 +15168,7 @@
                 <a:cs typeface="Arial"/>
                 <a:sym typeface="Arial"/>
               </a:rPr>
-              <a:t>Concentrate search spend in Mexico (49% served out-of-market in June), audit paid-social placements before reinstating its conversion reporting, and open the SEO workstream for the organic decline.</a:t>
+              <a:t> before reinstating its conversion reporting, and open the SEO workstream for the organic decline.</a:t>
             </a:r>
             <a:endParaRPr/>
           </a:p>
@@ -15809,16 +15817,12 @@
               <a:buNone/>
             </a:pPr>
             <a:r>
-              <a:rPr b="0" i="0" lang="en-US" sz="950" u="none" cap="none" strike="noStrike">
+              <a:rPr lang="en-US" sz="950">
                 <a:solidFill>
                   <a:srgbClr val="32373E"/>
                 </a:solidFill>
-                <a:latin typeface="Arial"/>
-                <a:ea typeface="Arial"/>
-                <a:cs typeface="Arial"/>
-                <a:sym typeface="Arial"/>
               </a:rPr>
-              <a:t>49% of June search spend served users outside Mexico. The fix is defined and partially applied; completing it is the top efficiency lever in the account.</a:t>
+              <a:t>Search geo, as reviewed together previously: 49% of June spend served outside Mexico. Mexico-only targeting is now applied, and July delivery confirms the correction.</a:t>
             </a:r>
             <a:endParaRPr/>
           </a:p>
@@ -15997,7 +16001,7 @@
         </p:spPr>
         <p:txBody>
           <a:bodyPr anchorCtr="0" anchor="t" bIns="0" lIns="0" spcFirstLastPara="1" rIns="0" wrap="square" tIns="0">
-            <a:spAutoFit/>
+            <a:noAutofit/>
           </a:bodyPr>
           <a:lstStyle/>
           <a:p>
@@ -16011,16 +16015,12 @@
               <a:buNone/>
             </a:pPr>
             <a:r>
-              <a:rPr b="0" i="0" lang="en-US" sz="950" u="none" cap="none" strike="noStrike">
+              <a:rPr lang="en-US" sz="950">
                 <a:solidFill>
                   <a:srgbClr val="32373E"/>
                 </a:solidFill>
-                <a:latin typeface="Arial"/>
-                <a:ea typeface="Arial"/>
-                <a:cs typeface="Arial"/>
-                <a:sym typeface="Arial"/>
               </a:rPr>
-              <a:t>Complete the Mexico-only restriction on search. Roughly $12.6K per month is at stake and the June 3 exclusion is already working.</a:t>
+              <a:t>Verify the corrected Mexico-only search targeting in July delivery; roughly $12.6K per month is redirected into Mexico.</a:t>
             </a:r>
             <a:endParaRPr/>
           </a:p>
@@ -18075,7 +18075,7 @@
             <a:tbl>
               <a:tblPr>
                 <a:noFill/>
-                <a:tableStyleId>{5F8B912D-C5DC-4F49-AD61-14EE58C73858}</a:tableStyleId>
+                <a:tableStyleId>{FBE4877E-206E-4DCF-A63A-2AA588775564}</a:tableStyleId>
               </a:tblPr>
               <a:tblGrid>
                 <a:gridCol w="2743200"/>
@@ -19067,7 +19067,7 @@
         </p:spPr>
         <p:txBody>
           <a:bodyPr anchorCtr="0" anchor="t" bIns="0" lIns="0" spcFirstLastPara="1" rIns="0" wrap="square" tIns="0">
-            <a:spAutoFit/>
+            <a:noAutofit/>
           </a:bodyPr>
           <a:lstStyle/>
           <a:p>
@@ -19081,16 +19081,12 @@
               <a:buNone/>
             </a:pPr>
             <a:r>
-              <a:rPr b="0" i="0" lang="en-US" sz="950" u="none" cap="none" strike="noStrike">
+              <a:rPr lang="en-US" sz="950">
                 <a:solidFill>
                   <a:srgbClr val="32373E"/>
                 </a:solidFill>
-                <a:latin typeface="Arial"/>
-                <a:ea typeface="Arial"/>
-                <a:cs typeface="Arial"/>
-                <a:sym typeface="Arial"/>
               </a:rPr>
-              <a:t>51% of June spend served Mexico. The remaining 49% ($12,637) served out-of-market users. The June 3 exclusion is already working, and completing the Mexico-only restriction is optimization #1 for July.</a:t>
+              <a:t>Geo delivery, as reviewed together previously: 51% of June spend served Mexico, and $12,637 (49%) served outside it, $8,235 of that in markets already excluded (Venezuela, Spain, US). Mexico-only targeting is now in place; the June 3 exclusions cut leakage in-month, and July reports on the corrected setup.</a:t>
             </a:r>
             <a:endParaRPr/>
           </a:p>
@@ -19712,7 +19708,7 @@
                   <a:srgbClr val="32373E"/>
                 </a:solidFill>
               </a:rPr>
-              <a:t>Only 51% of June spend served Mexico. Concentrating that spend in-market should improve effective Mexico CPA immediately, and the June 3 exclusion is already moving it.</a:t>
+              <a:t>June ran with 51% of spend in Mexico, the last month on the old geo setup. With Mexico-only targeting now in place, the roughly $12.6K per month that served outside the market concentrates in it, which should improve effective Mexico CPA immediately.</a:t>
             </a:r>
             <a:endParaRPr/>
           </a:p>
@@ -19915,7 +19911,7 @@
         </p:spPr>
         <p:txBody>
           <a:bodyPr anchorCtr="0" anchor="t" bIns="0" lIns="0" spcFirstLastPara="1" rIns="0" wrap="square" tIns="0">
-            <a:spAutoFit/>
+            <a:noAutofit/>
           </a:bodyPr>
           <a:lstStyle/>
           <a:p>
@@ -19929,16 +19925,12 @@
               <a:buNone/>
             </a:pPr>
             <a:r>
-              <a:rPr b="0" i="0" lang="en-US" sz="950" u="none" cap="none" strike="noStrike">
+              <a:rPr lang="en-US" sz="950">
                 <a:solidFill>
                   <a:srgbClr val="32373E"/>
                 </a:solidFill>
-                <a:latin typeface="Arial"/>
-                <a:ea typeface="Arial"/>
-                <a:cs typeface="Arial"/>
-                <a:sym typeface="Arial"/>
               </a:rPr>
-              <a:t>Complete the Mexico presence-only restriction. It is the top efficiency lever in the account at roughly $12.6K per month.</a:t>
+              <a:t>Mexico presence-only targeting is applied; the July report confirms 100% in-market delivery, with roughly $12.6K per month redirected into Mexico.</a:t>
             </a:r>
             <a:endParaRPr/>
           </a:p>
@@ -25213,7 +25205,7 @@
             <a:tbl>
               <a:tblPr>
                 <a:noFill/>
-                <a:tableStyleId>{5F8B912D-C5DC-4F49-AD61-14EE58C73858}</a:tableStyleId>
+                <a:tableStyleId>{FBE4877E-206E-4DCF-A63A-2AA588775564}</a:tableStyleId>
               </a:tblPr>
               <a:tblGrid>
                 <a:gridCol w="2560325"/>
@@ -29488,7 +29480,7 @@
             <a:tbl>
               <a:tblPr>
                 <a:noFill/>
-                <a:tableStyleId>{5F8B912D-C5DC-4F49-AD61-14EE58C73858}</a:tableStyleId>
+                <a:tableStyleId>{FBE4877E-206E-4DCF-A63A-2AA588775564}</a:tableStyleId>
               </a:tblPr>
               <a:tblGrid>
                 <a:gridCol w="1828800"/>
@@ -31171,7 +31163,7 @@
         </p:spPr>
         <p:txBody>
           <a:bodyPr anchorCtr="0" anchor="t" bIns="0" lIns="0" spcFirstLastPara="1" rIns="0" wrap="square" tIns="0">
-            <a:spAutoFit/>
+            <a:noAutofit/>
           </a:bodyPr>
           <a:lstStyle/>
           <a:p>
@@ -31185,16 +31177,12 @@
               <a:buNone/>
             </a:pPr>
             <a:r>
-              <a:rPr b="0" i="0" lang="en-US" sz="950" u="none" cap="none" strike="noStrike">
+              <a:rPr lang="en-US" sz="950">
                 <a:solidFill>
                   <a:srgbClr val="32373E"/>
                 </a:solidFill>
-                <a:latin typeface="Arial"/>
-                <a:ea typeface="Arial"/>
-                <a:cs typeface="Arial"/>
-                <a:sym typeface="Arial"/>
               </a:rPr>
-              <a:t>Complete the Mexico-only search restriction, with roughly $12.6K per month at stake.</a:t>
+              <a:t>Mexico-only search targeting is applied; July delivery confirms roughly $12.6K per month redirected into Mexico.</a:t>
             </a:r>
             <a:endParaRPr/>
           </a:p>
@@ -32413,7 +32401,7 @@
             <a:tbl>
               <a:tblPr>
                 <a:noFill/>
-                <a:tableStyleId>{5F8B912D-C5DC-4F49-AD61-14EE58C73858}</a:tableStyleId>
+                <a:tableStyleId>{FBE4877E-206E-4DCF-A63A-2AA588775564}</a:tableStyleId>
               </a:tblPr>
               <a:tblGrid>
                 <a:gridCol w="1965950"/>
@@ -35992,7 +35980,7 @@
             <a:tbl>
               <a:tblPr>
                 <a:noFill/>
-                <a:tableStyleId>{5F8B912D-C5DC-4F49-AD61-14EE58C73858}</a:tableStyleId>
+                <a:tableStyleId>{FBE4877E-206E-4DCF-A63A-2AA588775564}</a:tableStyleId>
               </a:tblPr>
               <a:tblGrid>
                 <a:gridCol w="1737350"/>
@@ -40596,7 +40584,7 @@
             <a:tbl>
               <a:tblPr>
                 <a:noFill/>
-                <a:tableStyleId>{5F8B912D-C5DC-4F49-AD61-14EE58C73858}</a:tableStyleId>
+                <a:tableStyleId>{FBE4877E-206E-4DCF-A63A-2AA588775564}</a:tableStyleId>
               </a:tblPr>
               <a:tblGrid>
                 <a:gridCol w="2377450"/>
@@ -42579,7 +42567,7 @@
             <a:tbl>
               <a:tblPr>
                 <a:noFill/>
-                <a:tableStyleId>{5F8B912D-C5DC-4F49-AD61-14EE58C73858}</a:tableStyleId>
+                <a:tableStyleId>{FBE4877E-206E-4DCF-A63A-2AA588775564}</a:tableStyleId>
               </a:tblPr>
               <a:tblGrid>
                 <a:gridCol w="2560325"/>
@@ -45260,7 +45248,7 @@
             <a:tbl>
               <a:tblPr>
                 <a:noFill/>
-                <a:tableStyleId>{5F8B912D-C5DC-4F49-AD61-14EE58C73858}</a:tableStyleId>
+                <a:tableStyleId>{FBE4877E-206E-4DCF-A63A-2AA588775564}</a:tableStyleId>
               </a:tblPr>
               <a:tblGrid>
                 <a:gridCol w="2743200"/>
@@ -46395,6 +46383,285 @@
 </file>
 
 <file path=ppt/theme/theme1.xml><?xml version="1.0" encoding="utf-8"?>
+<a:theme xmlns:a="http://schemas.openxmlformats.org/drawingml/2006/main" xmlns:r="http://schemas.openxmlformats.org/officeDocument/2006/relationships">
+  <a:themeElements>
+    <a:clrScheme name="Default">
+      <a:dk1>
+        <a:srgbClr val="000000"/>
+      </a:dk1>
+      <a:lt1>
+        <a:srgbClr val="FFFFFF"/>
+      </a:lt1>
+      <a:dk2>
+        <a:srgbClr val="158158"/>
+      </a:dk2>
+      <a:lt2>
+        <a:srgbClr val="F3F3F3"/>
+      </a:lt2>
+      <a:accent1>
+        <a:srgbClr val="058DC7"/>
+      </a:accent1>
+      <a:accent2>
+        <a:srgbClr val="50B432"/>
+      </a:accent2>
+      <a:accent3>
+        <a:srgbClr val="ED561B"/>
+      </a:accent3>
+      <a:accent4>
+        <a:srgbClr val="EDEF00"/>
+      </a:accent4>
+      <a:accent5>
+        <a:srgbClr val="24CBE5"/>
+      </a:accent5>
+      <a:accent6>
+        <a:srgbClr val="64E572"/>
+      </a:accent6>
+      <a:hlink>
+        <a:srgbClr val="2200CC"/>
+      </a:hlink>
+      <a:folHlink>
+        <a:srgbClr val="551A8B"/>
+      </a:folHlink>
+    </a:clrScheme>
+    <a:fontScheme name="Office">
+      <a:majorFont>
+        <a:latin typeface="Arial"/>
+        <a:ea typeface=""/>
+        <a:cs typeface=""/>
+        <a:font script="Jpan" typeface="ＭＳ Ｐゴシック"/>
+        <a:font script="Hang" typeface="맑은 고딕"/>
+        <a:font script="Hans" typeface="宋体"/>
+        <a:font script="Hant" typeface="新細明體"/>
+        <a:font script="Arab" typeface="Times New Roman"/>
+        <a:font script="Hebr" typeface="Times New Roman"/>
+        <a:font script="Thai" typeface="Angsana New"/>
+        <a:font script="Ethi" typeface="Nyala"/>
+        <a:font script="Beng" typeface="Vrinda"/>
+        <a:font script="Gujr" typeface="Shruti"/>
+        <a:font script="Khmr" typeface="MoolBoran"/>
+        <a:font script="Knda" typeface="Tunga"/>
+        <a:font script="Guru" typeface="Raavi"/>
+        <a:font script="Cans" typeface="Euphemia"/>
+        <a:font script="Cher" typeface="Plantagenet Cherokee"/>
+        <a:font script="Yiii" typeface="Microsoft Yi Baiti"/>
+        <a:font script="Tibt" typeface="Microsoft Himalaya"/>
+        <a:font script="Thaa" typeface="MV Boli"/>
+        <a:font script="Deva" typeface="Mangal"/>
+        <a:font script="Telu" typeface="Gautami"/>
+        <a:font script="Taml" typeface="Latha"/>
+        <a:font script="Syrc" typeface="Estrangelo Edessa"/>
+        <a:font script="Orya" typeface="Kalinga"/>
+        <a:font script="Mlym" typeface="Kartika"/>
+        <a:font script="Laoo" typeface="DokChampa"/>
+        <a:font script="Sinh" typeface="Iskoola Pota"/>
+        <a:font script="Mong" typeface="Mongolian Baiti"/>
+        <a:font script="Viet" typeface="Times New Roman"/>
+        <a:font script="Uigh" typeface="Microsoft Uighur"/>
+        <a:font script="Geor" typeface="Sylfaen"/>
+      </a:majorFont>
+      <a:minorFont>
+        <a:latin typeface="Arial"/>
+        <a:ea typeface=""/>
+        <a:cs typeface=""/>
+        <a:font script="Jpan" typeface="ＭＳ Ｐゴシック"/>
+        <a:font script="Hang" typeface="맑은 고딕"/>
+        <a:font script="Hans" typeface="宋体"/>
+        <a:font script="Hant" typeface="新細明體"/>
+        <a:font script="Arab" typeface="Arial"/>
+        <a:font script="Hebr" typeface="Arial"/>
+        <a:font script="Thai" typeface="Cordia New"/>
+        <a:font script="Ethi" typeface="Nyala"/>
+        <a:font script="Beng" typeface="Vrinda"/>
+        <a:font script="Gujr" typeface="Shruti"/>
+        <a:font script="Khmr" typeface="DaunPenh"/>
+        <a:font script="Knda" typeface="Tunga"/>
+        <a:font script="Guru" typeface="Raavi"/>
+        <a:font script="Cans" typeface="Euphemia"/>
+        <a:font script="Cher" typeface="Plantagenet Cherokee"/>
+        <a:font script="Yiii" typeface="Microsoft Yi Baiti"/>
+        <a:font script="Tibt" typeface="Microsoft Himalaya"/>
+        <a:font script="Thaa" typeface="MV Boli"/>
+        <a:font script="Deva" typeface="Mangal"/>
+        <a:font script="Telu" typeface="Gautami"/>
+        <a:font script="Taml" typeface="Latha"/>
+        <a:font script="Syrc" typeface="Estrangelo Edessa"/>
+        <a:font script="Orya" typeface="Kalinga"/>
+        <a:font script="Mlym" typeface="Kartika"/>
+        <a:font script="Laoo" typeface="DokChampa"/>
+        <a:font script="Sinh" typeface="Iskoola Pota"/>
+        <a:font script="Mong" typeface="Mongolian Baiti"/>
+        <a:font script="Viet" typeface="Arial"/>
+        <a:font script="Uigh" typeface="Microsoft Uighur"/>
+        <a:font script="Geor" typeface="Sylfaen"/>
+      </a:minorFont>
+    </a:fontScheme>
+    <a:fmtScheme name="Office">
+      <a:fillStyleLst>
+        <a:solidFill>
+          <a:schemeClr val="phClr"/>
+        </a:solidFill>
+        <a:gradFill rotWithShape="1">
+          <a:gsLst>
+            <a:gs pos="0">
+              <a:schemeClr val="phClr">
+                <a:tint val="50000"/>
+                <a:satMod val="300000"/>
+              </a:schemeClr>
+            </a:gs>
+            <a:gs pos="35000">
+              <a:schemeClr val="phClr">
+                <a:tint val="37000"/>
+                <a:satMod val="300000"/>
+              </a:schemeClr>
+            </a:gs>
+            <a:gs pos="100000">
+              <a:schemeClr val="phClr">
+                <a:tint val="15000"/>
+                <a:satMod val="350000"/>
+              </a:schemeClr>
+            </a:gs>
+          </a:gsLst>
+          <a:lin ang="16200000" scaled="1"/>
+        </a:gradFill>
+        <a:gradFill rotWithShape="1">
+          <a:gsLst>
+            <a:gs pos="0">
+              <a:schemeClr val="phClr">
+                <a:tint val="100000"/>
+                <a:shade val="100000"/>
+                <a:satMod val="130000"/>
+              </a:schemeClr>
+            </a:gs>
+            <a:gs pos="100000">
+              <a:schemeClr val="phClr">
+                <a:tint val="50000"/>
+                <a:shade val="100000"/>
+                <a:satMod val="350000"/>
+              </a:schemeClr>
+            </a:gs>
+          </a:gsLst>
+          <a:lin ang="16200000" scaled="0"/>
+        </a:gradFill>
+      </a:fillStyleLst>
+      <a:lnStyleLst>
+        <a:ln w="9525" cap="flat" cmpd="sng" algn="ctr">
+          <a:solidFill>
+            <a:schemeClr val="phClr">
+              <a:shade val="95000"/>
+              <a:satMod val="105000"/>
+            </a:schemeClr>
+          </a:solidFill>
+          <a:prstDash val="solid"/>
+        </a:ln>
+        <a:ln w="25400" cap="flat" cmpd="sng" algn="ctr">
+          <a:solidFill>
+            <a:schemeClr val="phClr"/>
+          </a:solidFill>
+          <a:prstDash val="solid"/>
+        </a:ln>
+        <a:ln w="38100" cap="flat" cmpd="sng" algn="ctr">
+          <a:solidFill>
+            <a:schemeClr val="phClr"/>
+          </a:solidFill>
+          <a:prstDash val="solid"/>
+        </a:ln>
+      </a:lnStyleLst>
+      <a:effectStyleLst>
+        <a:effectStyle>
+          <a:effectLst>
+            <a:outerShdw blurRad="40000" dist="20000" dir="5400000" rotWithShape="0">
+              <a:srgbClr val="000000">
+                <a:alpha val="38000"/>
+              </a:srgbClr>
+            </a:outerShdw>
+          </a:effectLst>
+        </a:effectStyle>
+        <a:effectStyle>
+          <a:effectLst>
+            <a:outerShdw blurRad="40000" dist="23000" dir="5400000" rotWithShape="0">
+              <a:srgbClr val="000000">
+                <a:alpha val="35000"/>
+              </a:srgbClr>
+            </a:outerShdw>
+          </a:effectLst>
+        </a:effectStyle>
+        <a:effectStyle>
+          <a:effectLst>
+            <a:outerShdw blurRad="40000" dist="23000" dir="5400000" rotWithShape="0">
+              <a:srgbClr val="000000">
+                <a:alpha val="35000"/>
+              </a:srgbClr>
+            </a:outerShdw>
+          </a:effectLst>
+          <a:scene3d>
+            <a:camera prst="orthographicFront">
+              <a:rot lat="0" lon="0" rev="0"/>
+            </a:camera>
+            <a:lightRig rig="threePt" dir="t">
+              <a:rot lat="0" lon="0" rev="1200000"/>
+            </a:lightRig>
+          </a:scene3d>
+          <a:sp3d>
+            <a:bevelT w="63500" h="25400"/>
+          </a:sp3d>
+        </a:effectStyle>
+      </a:effectStyleLst>
+      <a:bgFillStyleLst>
+        <a:solidFill>
+          <a:schemeClr val="phClr"/>
+        </a:solidFill>
+        <a:gradFill rotWithShape="1">
+          <a:gsLst>
+            <a:gs pos="0">
+              <a:schemeClr val="phClr">
+                <a:tint val="40000"/>
+                <a:satMod val="350000"/>
+              </a:schemeClr>
+            </a:gs>
+            <a:gs pos="40000">
+              <a:schemeClr val="phClr">
+                <a:tint val="45000"/>
+                <a:shade val="99000"/>
+                <a:satMod val="350000"/>
+              </a:schemeClr>
+            </a:gs>
+            <a:gs pos="100000">
+              <a:schemeClr val="phClr">
+                <a:shade val="20000"/>
+                <a:satMod val="255000"/>
+              </a:schemeClr>
+            </a:gs>
+          </a:gsLst>
+          <a:path path="circle">
+            <a:fillToRect l="50000" t="-80000" r="50000" b="180000"/>
+          </a:path>
+        </a:gradFill>
+        <a:gradFill rotWithShape="1">
+          <a:gsLst>
+            <a:gs pos="0">
+              <a:schemeClr val="phClr">
+                <a:tint val="80000"/>
+                <a:satMod val="300000"/>
+              </a:schemeClr>
+            </a:gs>
+            <a:gs pos="100000">
+              <a:schemeClr val="phClr">
+                <a:shade val="30000"/>
+                <a:satMod val="200000"/>
+              </a:schemeClr>
+            </a:gs>
+          </a:gsLst>
+          <a:path path="circle">
+            <a:fillToRect l="50000" t="50000" r="50000" b="50000"/>
+          </a:path>
+        </a:gradFill>
+      </a:bgFillStyleLst>
+    </a:fmtScheme>
+  </a:themeElements>
+</a:theme>
+</file>
+
+<file path=ppt/theme/theme2.xml><?xml version="1.0" encoding="utf-8"?>
 <a:theme xmlns:a="http://schemas.openxmlformats.org/drawingml/2006/main" xmlns:r="http://schemas.openxmlformats.org/officeDocument/2006/relationships" name="Office Theme">
   <a:themeElements>
     <a:clrScheme name="Office">
@@ -46671,283 +46938,4 @@
     </a:fmtScheme>
   </a:themeElements>
 </a:theme>
-</file>
-
-<file path=ppt/theme/theme2.xml><?xml version="1.0" encoding="utf-8"?>
-<a:theme xmlns:a="http://schemas.openxmlformats.org/drawingml/2006/main" xmlns:r="http://schemas.openxmlformats.org/officeDocument/2006/relationships">
-  <a:themeElements>
-    <a:clrScheme name="Default">
-      <a:dk1>
-        <a:srgbClr val="000000"/>
-      </a:dk1>
-      <a:lt1>
-        <a:srgbClr val="FFFFFF"/>
-      </a:lt1>
-      <a:dk2>
-        <a:srgbClr val="158158"/>
-      </a:dk2>
-      <a:lt2>
-        <a:srgbClr val="F3F3F3"/>
-      </a:lt2>
-      <a:accent1>
-        <a:srgbClr val="058DC7"/>
-      </a:accent1>
-      <a:accent2>
-        <a:srgbClr val="50B432"/>
-      </a:accent2>
-      <a:accent3>
-        <a:srgbClr val="ED561B"/>
-      </a:accent3>
-      <a:accent4>
-        <a:srgbClr val="EDEF00"/>
-      </a:accent4>
-      <a:accent5>
-        <a:srgbClr val="24CBE5"/>
-      </a:accent5>
-      <a:accent6>
-        <a:srgbClr val="64E572"/>
-      </a:accent6>
-      <a:hlink>
-        <a:srgbClr val="2200CC"/>
-      </a:hlink>
-      <a:folHlink>
-        <a:srgbClr val="551A8B"/>
-      </a:folHlink>
-    </a:clrScheme>
-    <a:fontScheme name="Office">
-      <a:majorFont>
-        <a:latin typeface="Arial"/>
-        <a:ea typeface=""/>
-        <a:cs typeface=""/>
-        <a:font script="Jpan" typeface="ＭＳ Ｐゴシック"/>
-        <a:font script="Hang" typeface="맑은 고딕"/>
-        <a:font script="Hans" typeface="宋体"/>
-        <a:font script="Hant" typeface="新細明體"/>
-        <a:font script="Arab" typeface="Times New Roman"/>
-        <a:font script="Hebr" typeface="Times New Roman"/>
-        <a:font script="Thai" typeface="Angsana New"/>
-        <a:font script="Ethi" typeface="Nyala"/>
-        <a:font script="Beng" typeface="Vrinda"/>
-        <a:font script="Gujr" typeface="Shruti"/>
-        <a:font script="Khmr" typeface="MoolBoran"/>
-        <a:font script="Knda" typeface="Tunga"/>
-        <a:font script="Guru" typeface="Raavi"/>
-        <a:font script="Cans" typeface="Euphemia"/>
-        <a:font script="Cher" typeface="Plantagenet Cherokee"/>
-        <a:font script="Yiii" typeface="Microsoft Yi Baiti"/>
-        <a:font script="Tibt" typeface="Microsoft Himalaya"/>
-        <a:font script="Thaa" typeface="MV Boli"/>
-        <a:font script="Deva" typeface="Mangal"/>
-        <a:font script="Telu" typeface="Gautami"/>
-        <a:font script="Taml" typeface="Latha"/>
-        <a:font script="Syrc" typeface="Estrangelo Edessa"/>
-        <a:font script="Orya" typeface="Kalinga"/>
-        <a:font script="Mlym" typeface="Kartika"/>
-        <a:font script="Laoo" typeface="DokChampa"/>
-        <a:font script="Sinh" typeface="Iskoola Pota"/>
-        <a:font script="Mong" typeface="Mongolian Baiti"/>
-        <a:font script="Viet" typeface="Times New Roman"/>
-        <a:font script="Uigh" typeface="Microsoft Uighur"/>
-        <a:font script="Geor" typeface="Sylfaen"/>
-      </a:majorFont>
-      <a:minorFont>
-        <a:latin typeface="Arial"/>
-        <a:ea typeface=""/>
-        <a:cs typeface=""/>
-        <a:font script="Jpan" typeface="ＭＳ Ｐゴシック"/>
-        <a:font script="Hang" typeface="맑은 고딕"/>
-        <a:font script="Hans" typeface="宋体"/>
-        <a:font script="Hant" typeface="新細明體"/>
-        <a:font script="Arab" typeface="Arial"/>
-        <a:font script="Hebr" typeface="Arial"/>
-        <a:font script="Thai" typeface="Cordia New"/>
-        <a:font script="Ethi" typeface="Nyala"/>
-        <a:font script="Beng" typeface="Vrinda"/>
-        <a:font script="Gujr" typeface="Shruti"/>
-        <a:font script="Khmr" typeface="DaunPenh"/>
-        <a:font script="Knda" typeface="Tunga"/>
-        <a:font script="Guru" typeface="Raavi"/>
-        <a:font script="Cans" typeface="Euphemia"/>
-        <a:font script="Cher" typeface="Plantagenet Cherokee"/>
-        <a:font script="Yiii" typeface="Microsoft Yi Baiti"/>
-        <a:font script="Tibt" typeface="Microsoft Himalaya"/>
-        <a:font script="Thaa" typeface="MV Boli"/>
-        <a:font script="Deva" typeface="Mangal"/>
-        <a:font script="Telu" typeface="Gautami"/>
-        <a:font script="Taml" typeface="Latha"/>
-        <a:font script="Syrc" typeface="Estrangelo Edessa"/>
-        <a:font script="Orya" typeface="Kalinga"/>
-        <a:font script="Mlym" typeface="Kartika"/>
-        <a:font script="Laoo" typeface="DokChampa"/>
-        <a:font script="Sinh" typeface="Iskoola Pota"/>
-        <a:font script="Mong" typeface="Mongolian Baiti"/>
-        <a:font script="Viet" typeface="Arial"/>
-        <a:font script="Uigh" typeface="Microsoft Uighur"/>
-        <a:font script="Geor" typeface="Sylfaen"/>
-      </a:minorFont>
-    </a:fontScheme>
-    <a:fmtScheme name="Office">
-      <a:fillStyleLst>
-        <a:solidFill>
-          <a:schemeClr val="phClr"/>
-        </a:solidFill>
-        <a:gradFill rotWithShape="1">
-          <a:gsLst>
-            <a:gs pos="0">
-              <a:schemeClr val="phClr">
-                <a:tint val="50000"/>
-                <a:satMod val="300000"/>
-              </a:schemeClr>
-            </a:gs>
-            <a:gs pos="35000">
-              <a:schemeClr val="phClr">
-                <a:tint val="37000"/>
-                <a:satMod val="300000"/>
-              </a:schemeClr>
-            </a:gs>
-            <a:gs pos="100000">
-              <a:schemeClr val="phClr">
-                <a:tint val="15000"/>
-                <a:satMod val="350000"/>
-              </a:schemeClr>
-            </a:gs>
-          </a:gsLst>
-          <a:lin ang="16200000" scaled="1"/>
-        </a:gradFill>
-        <a:gradFill rotWithShape="1">
-          <a:gsLst>
-            <a:gs pos="0">
-              <a:schemeClr val="phClr">
-                <a:tint val="100000"/>
-                <a:shade val="100000"/>
-                <a:satMod val="130000"/>
-              </a:schemeClr>
-            </a:gs>
-            <a:gs pos="100000">
-              <a:schemeClr val="phClr">
-                <a:tint val="50000"/>
-                <a:shade val="100000"/>
-                <a:satMod val="350000"/>
-              </a:schemeClr>
-            </a:gs>
-          </a:gsLst>
-          <a:lin ang="16200000" scaled="0"/>
-        </a:gradFill>
-      </a:fillStyleLst>
-      <a:lnStyleLst>
-        <a:ln w="9525" cap="flat" cmpd="sng" algn="ctr">
-          <a:solidFill>
-            <a:schemeClr val="phClr">
-              <a:shade val="95000"/>
-              <a:satMod val="105000"/>
-            </a:schemeClr>
-          </a:solidFill>
-          <a:prstDash val="solid"/>
-        </a:ln>
-        <a:ln w="25400" cap="flat" cmpd="sng" algn="ctr">
-          <a:solidFill>
-            <a:schemeClr val="phClr"/>
-          </a:solidFill>
-          <a:prstDash val="solid"/>
-        </a:ln>
-        <a:ln w="38100" cap="flat" cmpd="sng" algn="ctr">
-          <a:solidFill>
-            <a:schemeClr val="phClr"/>
-          </a:solidFill>
-          <a:prstDash val="solid"/>
-        </a:ln>
-      </a:lnStyleLst>
-      <a:effectStyleLst>
-        <a:effectStyle>
-          <a:effectLst>
-            <a:outerShdw blurRad="40000" dist="20000" dir="5400000" rotWithShape="0">
-              <a:srgbClr val="000000">
-                <a:alpha val="38000"/>
-              </a:srgbClr>
-            </a:outerShdw>
-          </a:effectLst>
-        </a:effectStyle>
-        <a:effectStyle>
-          <a:effectLst>
-            <a:outerShdw blurRad="40000" dist="23000" dir="5400000" rotWithShape="0">
-              <a:srgbClr val="000000">
-                <a:alpha val="35000"/>
-              </a:srgbClr>
-            </a:outerShdw>
-          </a:effectLst>
-        </a:effectStyle>
-        <a:effectStyle>
-          <a:effectLst>
-            <a:outerShdw blurRad="40000" dist="23000" dir="5400000" rotWithShape="0">
-              <a:srgbClr val="000000">
-                <a:alpha val="35000"/>
-              </a:srgbClr>
-            </a:outerShdw>
-          </a:effectLst>
-          <a:scene3d>
-            <a:camera prst="orthographicFront">
-              <a:rot lat="0" lon="0" rev="0"/>
-            </a:camera>
-            <a:lightRig rig="threePt" dir="t">
-              <a:rot lat="0" lon="0" rev="1200000"/>
-            </a:lightRig>
-          </a:scene3d>
-          <a:sp3d>
-            <a:bevelT w="63500" h="25400"/>
-          </a:sp3d>
-        </a:effectStyle>
-      </a:effectStyleLst>
-      <a:bgFillStyleLst>
-        <a:solidFill>
-          <a:schemeClr val="phClr"/>
-        </a:solidFill>
-        <a:gradFill rotWithShape="1">
-          <a:gsLst>
-            <a:gs pos="0">
-              <a:schemeClr val="phClr">
-                <a:tint val="40000"/>
-                <a:satMod val="350000"/>
-              </a:schemeClr>
-            </a:gs>
-            <a:gs pos="40000">
-              <a:schemeClr val="phClr">
-                <a:tint val="45000"/>
-                <a:shade val="99000"/>
-                <a:satMod val="350000"/>
-              </a:schemeClr>
-            </a:gs>
-            <a:gs pos="100000">
-              <a:schemeClr val="phClr">
-                <a:shade val="20000"/>
-                <a:satMod val="255000"/>
-              </a:schemeClr>
-            </a:gs>
-          </a:gsLst>
-          <a:path path="circle">
-            <a:fillToRect l="50000" t="-80000" r="50000" b="180000"/>
-          </a:path>
-        </a:gradFill>
-        <a:gradFill rotWithShape="1">
-          <a:gsLst>
-            <a:gs pos="0">
-              <a:schemeClr val="phClr">
-                <a:tint val="80000"/>
-                <a:satMod val="300000"/>
-              </a:schemeClr>
-            </a:gs>
-            <a:gs pos="100000">
-              <a:schemeClr val="phClr">
-                <a:shade val="30000"/>
-                <a:satMod val="200000"/>
-              </a:schemeClr>
-            </a:gs>
-          </a:gsLst>
-          <a:path path="circle">
-            <a:fillToRect l="50000" t="50000" r="50000" b="50000"/>
-          </a:path>
-        </a:gradFill>
-      </a:bgFillStyleLst>
-    </a:fmtScheme>
-  </a:themeElements>
-</a:theme>
 </file>
--- a/report-client-decks/06. GGMI_LATAM_June_2026_Performance_Review.pptx
+++ b/report-client-decks/06. GGMI_LATAM_June_2026_Performance_Review.pptx
@@ -13192,7 +13192,7 @@
             <a:tbl>
               <a:tblPr>
                 <a:noFill/>
-                <a:tableStyleId>{FBE4877E-206E-4DCF-A63A-2AA588775564}</a:tableStyleId>
+                <a:tableStyleId>{76DD99DC-525D-49F5-A1B7-C944E4BD81EE}</a:tableStyleId>
               </a:tblPr>
               <a:tblGrid>
                 <a:gridCol w="2130550"/>
@@ -15822,7 +15822,7 @@
                   <a:srgbClr val="32373E"/>
                 </a:solidFill>
               </a:rPr>
-              <a:t>Search geo, as reviewed together previously: 49% of June spend served outside Mexico. Mexico-only targeting is now applied, and July delivery confirms the correction.</a:t>
+              <a:t>Search geo, as reviewed together: $8,612 of June delivery served outside Mexico. Mexico-only targeting is now applied, and July delivery confirms the correction.</a:t>
             </a:r>
             <a:endParaRPr/>
           </a:p>
@@ -16020,7 +16020,7 @@
                   <a:srgbClr val="32373E"/>
                 </a:solidFill>
               </a:rPr>
-              <a:t>Verify the corrected Mexico-only search targeting in July delivery; roughly $12.6K per month is redirected into Mexico.</a:t>
+              <a:t>Verify the corrected Mexico-only search targeting in July delivery; roughly $8.6K per month is redirected into Mexico.</a:t>
             </a:r>
             <a:endParaRPr/>
           </a:p>
@@ -18075,7 +18075,7 @@
             <a:tbl>
               <a:tblPr>
                 <a:noFill/>
-                <a:tableStyleId>{FBE4877E-206E-4DCF-A63A-2AA588775564}</a:tableStyleId>
+                <a:tableStyleId>{76DD99DC-525D-49F5-A1B7-C944E4BD81EE}</a:tableStyleId>
               </a:tblPr>
               <a:tblGrid>
                 <a:gridCol w="2743200"/>
@@ -19086,7 +19086,7 @@
                   <a:srgbClr val="32373E"/>
                 </a:solidFill>
               </a:rPr>
-              <a:t>Geo delivery, as reviewed together previously: 51% of June spend served Mexico, and $12,637 (49%) served outside it, $8,235 of that in markets already excluded (Venezuela, Spain, US). Mexico-only targeting is now in place; the June 3 exclusions cut leakage in-month, and July reports on the corrected setup.</a:t>
+              <a:t>Geo delivery, as reviewed together: $8,612 of June delivery served outside Mexico, led by Spain, Venezuela, and the US. Mexico-only targeting (people in Mexico) is now in place, and July reports on the corrected setup.</a:t>
             </a:r>
             <a:endParaRPr/>
           </a:p>
@@ -19708,7 +19708,7 @@
                   <a:srgbClr val="32373E"/>
                 </a:solidFill>
               </a:rPr>
-              <a:t>June ran with 51% of spend in Mexico, the last month on the old geo setup. With Mexico-only targeting now in place, the roughly $12.6K per month that served outside the market concentrates in it, which should improve effective Mexico CPA immediately.</a:t>
+              <a:t>June was the last month on the old geo setup, with $8,612 delivered outside Mexico. With Mexico-only targeting now in place, that spend concentrates in-market, which should improve effective Mexico CPA immediately.</a:t>
             </a:r>
             <a:endParaRPr/>
           </a:p>
@@ -19930,7 +19930,7 @@
                   <a:srgbClr val="32373E"/>
                 </a:solidFill>
               </a:rPr>
-              <a:t>Mexico presence-only targeting is applied; the July report confirms 100% in-market delivery, with roughly $12.6K per month redirected into Mexico.</a:t>
+              <a:t>Mexico presence-only targeting is applied; the July report confirms 100% in-market delivery, with roughly $8.6K per month redirected into Mexico.</a:t>
             </a:r>
             <a:endParaRPr/>
           </a:p>
@@ -25205,7 +25205,7 @@
             <a:tbl>
               <a:tblPr>
                 <a:noFill/>
-                <a:tableStyleId>{FBE4877E-206E-4DCF-A63A-2AA588775564}</a:tableStyleId>
+                <a:tableStyleId>{76DD99DC-525D-49F5-A1B7-C944E4BD81EE}</a:tableStyleId>
               </a:tblPr>
               <a:tblGrid>
                 <a:gridCol w="2560325"/>
@@ -29480,7 +29480,7 @@
             <a:tbl>
               <a:tblPr>
                 <a:noFill/>
-                <a:tableStyleId>{FBE4877E-206E-4DCF-A63A-2AA588775564}</a:tableStyleId>
+                <a:tableStyleId>{76DD99DC-525D-49F5-A1B7-C944E4BD81EE}</a:tableStyleId>
               </a:tblPr>
               <a:tblGrid>
                 <a:gridCol w="1828800"/>
@@ -31182,7 +31182,7 @@
                   <a:srgbClr val="32373E"/>
                 </a:solidFill>
               </a:rPr>
-              <a:t>Mexico-only search targeting is applied; July delivery confirms roughly $12.6K per month redirected into Mexico.</a:t>
+              <a:t>Mexico-only search targeting is applied; July delivery confirms roughly $8.6K per month redirected into Mexico.</a:t>
             </a:r>
             <a:endParaRPr/>
           </a:p>
@@ -32401,7 +32401,7 @@
             <a:tbl>
               <a:tblPr>
                 <a:noFill/>
-                <a:tableStyleId>{FBE4877E-206E-4DCF-A63A-2AA588775564}</a:tableStyleId>
+                <a:tableStyleId>{76DD99DC-525D-49F5-A1B7-C944E4BD81EE}</a:tableStyleId>
               </a:tblPr>
               <a:tblGrid>
                 <a:gridCol w="1965950"/>
@@ -35980,7 +35980,7 @@
             <a:tbl>
               <a:tblPr>
                 <a:noFill/>
-                <a:tableStyleId>{FBE4877E-206E-4DCF-A63A-2AA588775564}</a:tableStyleId>
+                <a:tableStyleId>{76DD99DC-525D-49F5-A1B7-C944E4BD81EE}</a:tableStyleId>
               </a:tblPr>
               <a:tblGrid>
                 <a:gridCol w="1737350"/>
@@ -40584,7 +40584,7 @@
             <a:tbl>
               <a:tblPr>
                 <a:noFill/>
-                <a:tableStyleId>{FBE4877E-206E-4DCF-A63A-2AA588775564}</a:tableStyleId>
+                <a:tableStyleId>{76DD99DC-525D-49F5-A1B7-C944E4BD81EE}</a:tableStyleId>
               </a:tblPr>
               <a:tblGrid>
                 <a:gridCol w="2377450"/>
@@ -42567,7 +42567,7 @@
             <a:tbl>
               <a:tblPr>
                 <a:noFill/>
-                <a:tableStyleId>{FBE4877E-206E-4DCF-A63A-2AA588775564}</a:tableStyleId>
+                <a:tableStyleId>{76DD99DC-525D-49F5-A1B7-C944E4BD81EE}</a:tableStyleId>
               </a:tblPr>
               <a:tblGrid>
                 <a:gridCol w="2560325"/>
@@ -45248,7 +45248,7 @@
             <a:tbl>
               <a:tblPr>
                 <a:noFill/>
-                <a:tableStyleId>{FBE4877E-206E-4DCF-A63A-2AA588775564}</a:tableStyleId>
+                <a:tableStyleId>{76DD99DC-525D-49F5-A1B7-C944E4BD81EE}</a:tableStyleId>
               </a:tblPr>
               <a:tblGrid>
                 <a:gridCol w="2743200"/>
@@ -46383,6 +46383,285 @@
 </file>
 
 <file path=ppt/theme/theme1.xml><?xml version="1.0" encoding="utf-8"?>
+<a:theme xmlns:a="http://schemas.openxmlformats.org/drawingml/2006/main" xmlns:r="http://schemas.openxmlformats.org/officeDocument/2006/relationships" name="Office Theme">
+  <a:themeElements>
+    <a:clrScheme name="Office">
+      <a:dk1>
+        <a:srgbClr val="000000"/>
+      </a:dk1>
+      <a:lt1>
+        <a:srgbClr val="FFFFFF"/>
+      </a:lt1>
+      <a:dk2>
+        <a:srgbClr val="1F497D"/>
+      </a:dk2>
+      <a:lt2>
+        <a:srgbClr val="EEECE1"/>
+      </a:lt2>
+      <a:accent1>
+        <a:srgbClr val="4F81BD"/>
+      </a:accent1>
+      <a:accent2>
+        <a:srgbClr val="C0504D"/>
+      </a:accent2>
+      <a:accent3>
+        <a:srgbClr val="9BBB59"/>
+      </a:accent3>
+      <a:accent4>
+        <a:srgbClr val="8064A2"/>
+      </a:accent4>
+      <a:accent5>
+        <a:srgbClr val="4BACC6"/>
+      </a:accent5>
+      <a:accent6>
+        <a:srgbClr val="F79646"/>
+      </a:accent6>
+      <a:hlink>
+        <a:srgbClr val="0000FF"/>
+      </a:hlink>
+      <a:folHlink>
+        <a:srgbClr val="800080"/>
+      </a:folHlink>
+    </a:clrScheme>
+    <a:fontScheme name="Office">
+      <a:majorFont>
+        <a:latin typeface="Arial"/>
+        <a:ea typeface=""/>
+        <a:cs typeface=""/>
+        <a:font script="Jpan" typeface="ＭＳ Ｐゴシック"/>
+        <a:font script="Hang" typeface="맑은 고딕"/>
+        <a:font script="Hans" typeface="宋体"/>
+        <a:font script="Hant" typeface="新細明體"/>
+        <a:font script="Arab" typeface="Times New Roman"/>
+        <a:font script="Hebr" typeface="Times New Roman"/>
+        <a:font script="Thai" typeface="Angsana New"/>
+        <a:font script="Ethi" typeface="Nyala"/>
+        <a:font script="Beng" typeface="Vrinda"/>
+        <a:font script="Gujr" typeface="Shruti"/>
+        <a:font script="Khmr" typeface="MoolBoran"/>
+        <a:font script="Knda" typeface="Tunga"/>
+        <a:font script="Guru" typeface="Raavi"/>
+        <a:font script="Cans" typeface="Euphemia"/>
+        <a:font script="Cher" typeface="Plantagenet Cherokee"/>
+        <a:font script="Yiii" typeface="Microsoft Yi Baiti"/>
+        <a:font script="Tibt" typeface="Microsoft Himalaya"/>
+        <a:font script="Thaa" typeface="MV Boli"/>
+        <a:font script="Deva" typeface="Mangal"/>
+        <a:font script="Telu" typeface="Gautami"/>
+        <a:font script="Taml" typeface="Latha"/>
+        <a:font script="Syrc" typeface="Estrangelo Edessa"/>
+        <a:font script="Orya" typeface="Kalinga"/>
+        <a:font script="Mlym" typeface="Kartika"/>
+        <a:font script="Laoo" typeface="DokChampa"/>
+        <a:font script="Sinh" typeface="Iskoola Pota"/>
+        <a:font script="Mong" typeface="Mongolian Baiti"/>
+        <a:font script="Viet" typeface="Times New Roman"/>
+        <a:font script="Uigh" typeface="Microsoft Uighur"/>
+        <a:font script="Geor" typeface="Sylfaen"/>
+      </a:majorFont>
+      <a:minorFont>
+        <a:latin typeface="Arial"/>
+        <a:ea typeface=""/>
+        <a:cs typeface=""/>
+        <a:font script="Jpan" typeface="ＭＳ Ｐゴシック"/>
+        <a:font script="Hang" typeface="맑은 고딕"/>
+        <a:font script="Hans" typeface="宋体"/>
+        <a:font script="Hant" typeface="新細明體"/>
+        <a:font script="Arab" typeface="Arial"/>
+        <a:font script="Hebr" typeface="Arial"/>
+        <a:font script="Thai" typeface="Cordia New"/>
+        <a:font script="Ethi" typeface="Nyala"/>
+        <a:font script="Beng" typeface="Vrinda"/>
+        <a:font script="Gujr" typeface="Shruti"/>
+        <a:font script="Khmr" typeface="DaunPenh"/>
+        <a:font script="Knda" typeface="Tunga"/>
+        <a:font script="Guru" typeface="Raavi"/>
+        <a:font script="Cans" typeface="Euphemia"/>
+        <a:font script="Cher" typeface="Plantagenet Cherokee"/>
+        <a:font script="Yiii" typeface="Microsoft Yi Baiti"/>
+        <a:font script="Tibt" typeface="Microsoft Himalaya"/>
+        <a:font script="Thaa" typeface="MV Boli"/>
+        <a:font script="Deva" typeface="Mangal"/>
+        <a:font script="Telu" typeface="Gautami"/>
+        <a:font script="Taml" typeface="Latha"/>
+        <a:font script="Syrc" typeface="Estrangelo Edessa"/>
+        <a:font script="Orya" typeface="Kalinga"/>
+        <a:font script="Mlym" typeface="Kartika"/>
+        <a:font script="Laoo" typeface="DokChampa"/>
+        <a:font script="Sinh" typeface="Iskoola Pota"/>
+        <a:font script="Mong" typeface="Mongolian Baiti"/>
+        <a:font script="Viet" typeface="Arial"/>
+        <a:font script="Uigh" typeface="Microsoft Uighur"/>
+        <a:font script="Geor" typeface="Sylfaen"/>
+      </a:minorFont>
+    </a:fontScheme>
+    <a:fmtScheme name="Office">
+      <a:fillStyleLst>
+        <a:solidFill>
+          <a:schemeClr val="phClr"/>
+        </a:solidFill>
+        <a:gradFill rotWithShape="1">
+          <a:gsLst>
+            <a:gs pos="0">
+              <a:schemeClr val="phClr">
+                <a:tint val="50000"/>
+                <a:satMod val="300000"/>
+              </a:schemeClr>
+            </a:gs>
+            <a:gs pos="35000">
+              <a:schemeClr val="phClr">
+                <a:tint val="37000"/>
+                <a:satMod val="300000"/>
+              </a:schemeClr>
+            </a:gs>
+            <a:gs pos="100000">
+              <a:schemeClr val="phClr">
+                <a:tint val="15000"/>
+                <a:satMod val="350000"/>
+              </a:schemeClr>
+            </a:gs>
+          </a:gsLst>
+          <a:lin ang="16200000" scaled="1"/>
+        </a:gradFill>
+        <a:gradFill rotWithShape="1">
+          <a:gsLst>
+            <a:gs pos="0">
+              <a:schemeClr val="phClr">
+                <a:tint val="100000"/>
+                <a:shade val="100000"/>
+                <a:satMod val="130000"/>
+              </a:schemeClr>
+            </a:gs>
+            <a:gs pos="100000">
+              <a:schemeClr val="phClr">
+                <a:tint val="50000"/>
+                <a:shade val="100000"/>
+                <a:satMod val="350000"/>
+              </a:schemeClr>
+            </a:gs>
+          </a:gsLst>
+          <a:lin ang="16200000" scaled="0"/>
+        </a:gradFill>
+      </a:fillStyleLst>
+      <a:lnStyleLst>
+        <a:ln w="9525" cap="flat" cmpd="sng" algn="ctr">
+          <a:solidFill>
+            <a:schemeClr val="phClr">
+              <a:shade val="95000"/>
+              <a:satMod val="105000"/>
+            </a:schemeClr>
+          </a:solidFill>
+          <a:prstDash val="solid"/>
+        </a:ln>
+        <a:ln w="25400" cap="flat" cmpd="sng" algn="ctr">
+          <a:solidFill>
+            <a:schemeClr val="phClr"/>
+          </a:solidFill>
+          <a:prstDash val="solid"/>
+        </a:ln>
+        <a:ln w="38100" cap="flat" cmpd="sng" algn="ctr">
+          <a:solidFill>
+            <a:schemeClr val="phClr"/>
+          </a:solidFill>
+          <a:prstDash val="solid"/>
+        </a:ln>
+      </a:lnStyleLst>
+      <a:effectStyleLst>
+        <a:effectStyle>
+          <a:effectLst>
+            <a:outerShdw blurRad="40000" dist="20000" dir="5400000" rotWithShape="0">
+              <a:srgbClr val="000000">
+                <a:alpha val="38000"/>
+              </a:srgbClr>
+            </a:outerShdw>
+          </a:effectLst>
+        </a:effectStyle>
+        <a:effectStyle>
+          <a:effectLst>
+            <a:outerShdw blurRad="40000" dist="23000" dir="5400000" rotWithShape="0">
+              <a:srgbClr val="000000">
+                <a:alpha val="35000"/>
+              </a:srgbClr>
+            </a:outerShdw>
+          </a:effectLst>
+        </a:effectStyle>
+        <a:effectStyle>
+          <a:effectLst>
+            <a:outerShdw blurRad="40000" dist="23000" dir="5400000" rotWithShape="0">
+              <a:srgbClr val="000000">
+                <a:alpha val="35000"/>
+              </a:srgbClr>
+            </a:outerShdw>
+          </a:effectLst>
+          <a:scene3d>
+            <a:camera prst="orthographicFront">
+              <a:rot lat="0" lon="0" rev="0"/>
+            </a:camera>
+            <a:lightRig rig="threePt" dir="t">
+              <a:rot lat="0" lon="0" rev="1200000"/>
+            </a:lightRig>
+          </a:scene3d>
+          <a:sp3d>
+            <a:bevelT w="63500" h="25400"/>
+          </a:sp3d>
+        </a:effectStyle>
+      </a:effectStyleLst>
+      <a:bgFillStyleLst>
+        <a:solidFill>
+          <a:schemeClr val="phClr"/>
+        </a:solidFill>
+        <a:gradFill rotWithShape="1">
+          <a:gsLst>
+            <a:gs pos="0">
+              <a:schemeClr val="phClr">
+                <a:tint val="40000"/>
+                <a:satMod val="350000"/>
+              </a:schemeClr>
+            </a:gs>
+            <a:gs pos="40000">
+              <a:schemeClr val="phClr">
+                <a:tint val="45000"/>
+                <a:shade val="99000"/>
+                <a:satMod val="350000"/>
+              </a:schemeClr>
+            </a:gs>
+            <a:gs pos="100000">
+              <a:schemeClr val="phClr">
+                <a:shade val="20000"/>
+                <a:satMod val="255000"/>
+              </a:schemeClr>
+            </a:gs>
+          </a:gsLst>
+          <a:path path="circle">
+            <a:fillToRect l="50000" t="-80000" r="50000" b="180000"/>
+          </a:path>
+        </a:gradFill>
+        <a:gradFill rotWithShape="1">
+          <a:gsLst>
+            <a:gs pos="0">
+              <a:schemeClr val="phClr">
+                <a:tint val="80000"/>
+                <a:satMod val="300000"/>
+              </a:schemeClr>
+            </a:gs>
+            <a:gs pos="100000">
+              <a:schemeClr val="phClr">
+                <a:shade val="30000"/>
+                <a:satMod val="200000"/>
+              </a:schemeClr>
+            </a:gs>
+          </a:gsLst>
+          <a:path path="circle">
+            <a:fillToRect l="50000" t="50000" r="50000" b="50000"/>
+          </a:path>
+        </a:gradFill>
+      </a:bgFillStyleLst>
+    </a:fmtScheme>
+  </a:themeElements>
+</a:theme>
+</file>
+
+<file path=ppt/theme/theme2.xml><?xml version="1.0" encoding="utf-8"?>
 <a:theme xmlns:a="http://schemas.openxmlformats.org/drawingml/2006/main" xmlns:r="http://schemas.openxmlformats.org/officeDocument/2006/relationships">
   <a:themeElements>
     <a:clrScheme name="Default">
@@ -46659,283 +46938,4 @@
     </a:fmtScheme>
   </a:themeElements>
 </a:theme>
-</file>
-
-<file path=ppt/theme/theme2.xml><?xml version="1.0" encoding="utf-8"?>
-<a:theme xmlns:a="http://schemas.openxmlformats.org/drawingml/2006/main" xmlns:r="http://schemas.openxmlformats.org/officeDocument/2006/relationships" name="Office Theme">
-  <a:themeElements>
-    <a:clrScheme name="Office">
-      <a:dk1>
-        <a:srgbClr val="000000"/>
-      </a:dk1>
-      <a:lt1>
-        <a:srgbClr val="FFFFFF"/>
-      </a:lt1>
-      <a:dk2>
-        <a:srgbClr val="1F497D"/>
-      </a:dk2>
-      <a:lt2>
-        <a:srgbClr val="EEECE1"/>
-      </a:lt2>
-      <a:accent1>
-        <a:srgbClr val="4F81BD"/>
-      </a:accent1>
-      <a:accent2>
-        <a:srgbClr val="C0504D"/>
-      </a:accent2>
-      <a:accent3>
-        <a:srgbClr val="9BBB59"/>
-      </a:accent3>
-      <a:accent4>
-        <a:srgbClr val="8064A2"/>
-      </a:accent4>
-      <a:accent5>
-        <a:srgbClr val="4BACC6"/>
-      </a:accent5>
-      <a:accent6>
-        <a:srgbClr val="F79646"/>
-      </a:accent6>
-      <a:hlink>
-        <a:srgbClr val="0000FF"/>
-      </a:hlink>
-      <a:folHlink>
-        <a:srgbClr val="800080"/>
-      </a:folHlink>
-    </a:clrScheme>
-    <a:fontScheme name="Office">
-      <a:majorFont>
-        <a:latin typeface="Arial"/>
-        <a:ea typeface=""/>
-        <a:cs typeface=""/>
-        <a:font script="Jpan" typeface="ＭＳ Ｐゴシック"/>
-        <a:font script="Hang" typeface="맑은 고딕"/>
-        <a:font script="Hans" typeface="宋体"/>
-        <a:font script="Hant" typeface="新細明體"/>
-        <a:font script="Arab" typeface="Times New Roman"/>
-        <a:font script="Hebr" typeface="Times New Roman"/>
-        <a:font script="Thai" typeface="Angsana New"/>
-        <a:font script="Ethi" typeface="Nyala"/>
-        <a:font script="Beng" typeface="Vrinda"/>
-        <a:font script="Gujr" typeface="Shruti"/>
-        <a:font script="Khmr" typeface="MoolBoran"/>
-        <a:font script="Knda" typeface="Tunga"/>
-        <a:font script="Guru" typeface="Raavi"/>
-        <a:font script="Cans" typeface="Euphemia"/>
-        <a:font script="Cher" typeface="Plantagenet Cherokee"/>
-        <a:font script="Yiii" typeface="Microsoft Yi Baiti"/>
-        <a:font script="Tibt" typeface="Microsoft Himalaya"/>
-        <a:font script="Thaa" typeface="MV Boli"/>
-        <a:font script="Deva" typeface="Mangal"/>
-        <a:font script="Telu" typeface="Gautami"/>
-        <a:font script="Taml" typeface="Latha"/>
-        <a:font script="Syrc" typeface="Estrangelo Edessa"/>
-        <a:font script="Orya" typeface="Kalinga"/>
-        <a:font script="Mlym" typeface="Kartika"/>
-        <a:font script="Laoo" typeface="DokChampa"/>
-        <a:font script="Sinh" typeface="Iskoola Pota"/>
-        <a:font script="Mong" typeface="Mongolian Baiti"/>
-        <a:font script="Viet" typeface="Times New Roman"/>
-        <a:font script="Uigh" typeface="Microsoft Uighur"/>
-        <a:font script="Geor" typeface="Sylfaen"/>
-      </a:majorFont>
-      <a:minorFont>
-        <a:latin typeface="Arial"/>
-        <a:ea typeface=""/>
-        <a:cs typeface=""/>
-        <a:font script="Jpan" typeface="ＭＳ Ｐゴシック"/>
-        <a:font script="Hang" typeface="맑은 고딕"/>
-        <a:font script="Hans" typeface="宋体"/>
-        <a:font script="Hant" typeface="新細明體"/>
-        <a:font script="Arab" typeface="Arial"/>
-        <a:font script="Hebr" typeface="Arial"/>
-        <a:font script="Thai" typeface="Cordia New"/>
-        <a:font script="Ethi" typeface="Nyala"/>
-        <a:font script="Beng" typeface="Vrinda"/>
-        <a:font script="Gujr" typeface="Shruti"/>
-        <a:font script="Khmr" typeface="DaunPenh"/>
-        <a:font script="Knda" typeface="Tunga"/>
-        <a:font script="Guru" typeface="Raavi"/>
-        <a:font script="Cans" typeface="Euphemia"/>
-        <a:font script="Cher" typeface="Plantagenet Cherokee"/>
-        <a:font script="Yiii" typeface="Microsoft Yi Baiti"/>
-        <a:font script="Tibt" typeface="Microsoft Himalaya"/>
-        <a:font script="Thaa" typeface="MV Boli"/>
-        <a:font script="Deva" typeface="Mangal"/>
-        <a:font script="Telu" typeface="Gautami"/>
-        <a:font script="Taml" typeface="Latha"/>
-        <a:font script="Syrc" typeface="Estrangelo Edessa"/>
-        <a:font script="Orya" typeface="Kalinga"/>
-        <a:font script="Mlym" typeface="Kartika"/>
-        <a:font script="Laoo" typeface="DokChampa"/>
-        <a:font script="Sinh" typeface="Iskoola Pota"/>
-        <a:font script="Mong" typeface="Mongolian Baiti"/>
-        <a:font script="Viet" typeface="Arial"/>
-        <a:font script="Uigh" typeface="Microsoft Uighur"/>
-        <a:font script="Geor" typeface="Sylfaen"/>
-      </a:minorFont>
-    </a:fontScheme>
-    <a:fmtScheme name="Office">
-      <a:fillStyleLst>
-        <a:solidFill>
-          <a:schemeClr val="phClr"/>
-        </a:solidFill>
-        <a:gradFill rotWithShape="1">
-          <a:gsLst>
-            <a:gs pos="0">
-              <a:schemeClr val="phClr">
-                <a:tint val="50000"/>
-                <a:satMod val="300000"/>
-              </a:schemeClr>
-            </a:gs>
-            <a:gs pos="35000">
-              <a:schemeClr val="phClr">
-                <a:tint val="37000"/>
-                <a:satMod val="300000"/>
-              </a:schemeClr>
-            </a:gs>
-            <a:gs pos="100000">
-              <a:schemeClr val="phClr">
-                <a:tint val="15000"/>
-                <a:satMod val="350000"/>
-              </a:schemeClr>
-            </a:gs>
-          </a:gsLst>
-          <a:lin ang="16200000" scaled="1"/>
-        </a:gradFill>
-        <a:gradFill rotWithShape="1">
-          <a:gsLst>
-            <a:gs pos="0">
-              <a:schemeClr val="phClr">
-                <a:tint val="100000"/>
-                <a:shade val="100000"/>
-                <a:satMod val="130000"/>
-              </a:schemeClr>
-            </a:gs>
-            <a:gs pos="100000">
-              <a:schemeClr val="phClr">
-                <a:tint val="50000"/>
-                <a:shade val="100000"/>
-                <a:satMod val="350000"/>
-              </a:schemeClr>
-            </a:gs>
-          </a:gsLst>
-          <a:lin ang="16200000" scaled="0"/>
-        </a:gradFill>
-      </a:fillStyleLst>
-      <a:lnStyleLst>
-        <a:ln w="9525" cap="flat" cmpd="sng" algn="ctr">
-          <a:solidFill>
-            <a:schemeClr val="phClr">
-              <a:shade val="95000"/>
-              <a:satMod val="105000"/>
-            </a:schemeClr>
-          </a:solidFill>
-          <a:prstDash val="solid"/>
-        </a:ln>
-        <a:ln w="25400" cap="flat" cmpd="sng" algn="ctr">
-          <a:solidFill>
-            <a:schemeClr val="phClr"/>
-          </a:solidFill>
-          <a:prstDash val="solid"/>
-        </a:ln>
-        <a:ln w="38100" cap="flat" cmpd="sng" algn="ctr">
-          <a:solidFill>
-            <a:schemeClr val="phClr"/>
-          </a:solidFill>
-          <a:prstDash val="solid"/>
-        </a:ln>
-      </a:lnStyleLst>
-      <a:effectStyleLst>
-        <a:effectStyle>
-          <a:effectLst>
-            <a:outerShdw blurRad="40000" dist="20000" dir="5400000" rotWithShape="0">
-              <a:srgbClr val="000000">
-                <a:alpha val="38000"/>
-              </a:srgbClr>
-            </a:outerShdw>
-          </a:effectLst>
-        </a:effectStyle>
-        <a:effectStyle>
-          <a:effectLst>
-            <a:outerShdw blurRad="40000" dist="23000" dir="5400000" rotWithShape="0">
-              <a:srgbClr val="000000">
-                <a:alpha val="35000"/>
-              </a:srgbClr>
-            </a:outerShdw>
-          </a:effectLst>
-        </a:effectStyle>
-        <a:effectStyle>
-          <a:effectLst>
-            <a:outerShdw blurRad="40000" dist="23000" dir="5400000" rotWithShape="0">
-              <a:srgbClr val="000000">
-                <a:alpha val="35000"/>
-              </a:srgbClr>
-            </a:outerShdw>
-          </a:effectLst>
-          <a:scene3d>
-            <a:camera prst="orthographicFront">
-              <a:rot lat="0" lon="0" rev="0"/>
-            </a:camera>
-            <a:lightRig rig="threePt" dir="t">
-              <a:rot lat="0" lon="0" rev="1200000"/>
-            </a:lightRig>
-          </a:scene3d>
-          <a:sp3d>
-            <a:bevelT w="63500" h="25400"/>
-          </a:sp3d>
-        </a:effectStyle>
-      </a:effectStyleLst>
-      <a:bgFillStyleLst>
-        <a:solidFill>
-          <a:schemeClr val="phClr"/>
-        </a:solidFill>
-        <a:gradFill rotWithShape="1">
-          <a:gsLst>
-            <a:gs pos="0">
-              <a:schemeClr val="phClr">
-                <a:tint val="40000"/>
-                <a:satMod val="350000"/>
-              </a:schemeClr>
-            </a:gs>
-            <a:gs pos="40000">
-              <a:schemeClr val="phClr">
-                <a:tint val="45000"/>
-                <a:shade val="99000"/>
-                <a:satMod val="350000"/>
-              </a:schemeClr>
-            </a:gs>
-            <a:gs pos="100000">
-              <a:schemeClr val="phClr">
-                <a:shade val="20000"/>
-                <a:satMod val="255000"/>
-              </a:schemeClr>
-            </a:gs>
-          </a:gsLst>
-          <a:path path="circle">
-            <a:fillToRect l="50000" t="-80000" r="50000" b="180000"/>
-          </a:path>
-        </a:gradFill>
-        <a:gradFill rotWithShape="1">
-          <a:gsLst>
-            <a:gs pos="0">
-              <a:schemeClr val="phClr">
-                <a:tint val="80000"/>
-                <a:satMod val="300000"/>
-              </a:schemeClr>
-            </a:gs>
-            <a:gs pos="100000">
-              <a:schemeClr val="phClr">
-                <a:shade val="30000"/>
-                <a:satMod val="200000"/>
-              </a:schemeClr>
-            </a:gs>
-          </a:gsLst>
-          <a:path path="circle">
-            <a:fillToRect l="50000" t="50000" r="50000" b="50000"/>
-          </a:path>
-        </a:gradFill>
-      </a:bgFillStyleLst>
-    </a:fmtScheme>
-  </a:themeElements>
-</a:theme>
 </file>